--- a/startup-theory-lecture/창업이론_강의자료.pptx
+++ b/startup-theory-lecture/창업이론_강의자료.pptx
@@ -126,20 +126,20 @@
   <p:extLst>
     <p:ext uri="{521415D9-36F7-43E2-AB2F-B90AF26B5E84}">
       <p14:sectionLst xmlns:p14="http://schemas.microsoft.com/office/powerpoint/2010/main">
-        <p14:section name="01 창업 실패 이유 설문" id="{e0a9a943-362f-7e87-e1d6-0f5490dcf892}">
+        <p14:section name="01 창업 실패 이유 설문" id="{05fb7ae9-f4d8-d855-6c97-bb68f648a80a}">
           <p14:sldIdLst>
             <p14:sldId id="256"/>
             <p14:sldId id="257"/>
           </p14:sldIdLst>
         </p14:section>
-        <p14:section name="02 실패의 진짜 원인" id="{2136b90a-0ad1-c477-f4a0-26c1e7978b3b}">
+        <p14:section name="02 실패의 진짜 원인" id="{755f0a94-03e6-7b61-e96c-39e30a3b19a7}">
           <p14:sldIdLst>
             <p14:sldId id="258"/>
             <p14:sldId id="259"/>
             <p14:sldId id="260"/>
           </p14:sldIdLst>
         </p14:section>
-        <p14:section name="03 창업 이론의 진화" id="{11931368-1701-2aa3-1ac8-51c4b472b392}">
+        <p14:section name="03 창업 이론의 진화" id="{b052796b-7794-1751-0dc0-59536db9fe3f}">
           <p14:sldIdLst>
             <p14:sldId id="261"/>
             <p14:sldId id="262"/>
@@ -148,32 +148,32 @@
             <p14:sldId id="265"/>
           </p14:sldIdLst>
         </p14:section>
-        <p14:section name="04 졸리 모델" id="{25ff2ab2-80e3-a7cd-9445-8f7c2cf211e0}">
+        <p14:section name="04 졸리 모델" id="{4f9cc936-6927-3648-b7d5-cd68f6d68e41}">
           <p14:sldIdLst>
             <p14:sldId id="266"/>
             <p14:sldId id="267"/>
           </p14:sldIdLst>
         </p14:section>
-        <p14:section name="05 디자인 씽킹" id="{1f14ac09-3581-af06-71d8-b2c1db05be15}">
+        <p14:section name="05 디자인 씽킹" id="{2d9552ad-a401-844e-7de3-351c6f946562}">
           <p14:sldIdLst>
             <p14:sldId id="268"/>
             <p14:sldId id="269"/>
           </p14:sldIdLst>
         </p14:section>
-        <p14:section name="06 BMC vs 린 캔버스" id="{949fa42f-dd9e-fa6b-456a-09e0d10a1c36}">
+        <p14:section name="06 BMC vs 린 캔버스" id="{0ca25f35-c0ac-f171-acb9-8af70acdd75c}">
           <p14:sldIdLst>
             <p14:sldId id="270"/>
             <p14:sldId id="271"/>
             <p14:sldId id="272"/>
           </p14:sldIdLst>
         </p14:section>
-        <p14:section name="07 스타트업 오너스 매뉴얼" id="{0f6cb23a-be2d-fbbe-65b8-b71e84de8988}">
+        <p14:section name="07 스타트업 오너스 매뉴얼" id="{be38fea3-50e2-66a1-194b-2691ade958e0}">
           <p14:sldIdLst>
             <p14:sldId id="273"/>
             <p14:sldId id="274"/>
           </p14:sldIdLst>
         </p14:section>
-        <p14:section name="08 종합" id="{7ba69a4c-3026-54d5-090c-8c62b6d2d8ba}">
+        <p14:section name="08 종합" id="{bff00ba9-e45f-c1e9-ceba-d774662e3cfb}">
           <p14:sldIdLst>
             <p14:sldId id="275"/>
           </p14:sldIdLst>
@@ -3571,14 +3571,65 @@
       </p:sp>
       <p:sp>
         <p:nvSpPr>
-          <p:cNvPr id="11" name="Text 8"/>
+          <p:cNvPr id="11" name="img-frame-juicero"/>
+          <p:cNvSpPr/>
+          <p:nvPr/>
+        </p:nvSpPr>
+        <p:spPr>
+          <a:xfrm>
+            <a:off x="8119872" y="2834640"/>
+            <a:ext cx="566928" cy="566928"/>
+          </a:xfrm>
+          <a:prstGeom prst="roundRect">
+            <a:avLst>
+              <a:gd name="adj" fmla="val 9677"/>
+            </a:avLst>
+          </a:prstGeom>
+          <a:solidFill>
+            <a:schemeClr val="bg1"/>
+          </a:solidFill>
+          <a:ln w="9525">
+            <a:solidFill>
+              <a:schemeClr val="bg2"/>
+            </a:solidFill>
+            <a:prstDash val="solid"/>
+          </a:ln>
+        </p:spPr>
+      </p:sp>
+      <p:pic>
+        <p:nvPicPr>
+          <p:cNvPr id="12" name="img-juicero" descr="juicero">    </p:cNvPr>
+          <p:cNvPicPr>
+            <a:picLocks noChangeAspect="1"/>
+          </p:cNvPicPr>
+          <p:nvPr/>
+        </p:nvPicPr>
+        <p:blipFill>
+          <a:blip r:embed="rId2"/>
+          <a:stretch>
+            <a:fillRect/>
+          </a:stretch>
+        </p:blipFill>
+        <p:spPr>
+          <a:xfrm>
+            <a:off x="8193573" y="2908341"/>
+            <a:ext cx="419527" cy="419527"/>
+          </a:xfrm>
+          <a:prstGeom prst="rect">
+            <a:avLst/>
+          </a:prstGeom>
+        </p:spPr>
+      </p:pic>
+      <p:sp>
+        <p:nvSpPr>
+          <p:cNvPr id="13" name="Text 9"/>
           <p:cNvSpPr txBox="1"/>
           <p:nvPr/>
         </p:nvSpPr>
         <p:spPr>
           <a:xfrm>
             <a:off x="6510528" y="2807208"/>
-            <a:ext cx="2176272" cy="292608"/>
+            <a:ext cx="1499616" cy="292608"/>
           </a:xfrm>
           <a:prstGeom prst="rect">
             <a:avLst/>
@@ -3599,7 +3650,7 @@
                   <a:schemeClr val="accent2"/>
                 </a:solidFill>
               </a:rPr>
-              <a:t>주서로(Juicero), 2017</a:t>
+              <a:t>주서로 (2017)</a:t>
             </a:r>
             <a:endParaRPr lang="en-US" sz="1200" dirty="0"/>
           </a:p>
@@ -3607,14 +3658,14 @@
       </p:sp>
       <p:sp>
         <p:nvSpPr>
-          <p:cNvPr id="12" name="Text 9"/>
+          <p:cNvPr id="14" name="Text 10"/>
           <p:cNvSpPr txBox="1"/>
           <p:nvPr/>
         </p:nvSpPr>
         <p:spPr>
           <a:xfrm>
             <a:off x="5870448" y="3127248"/>
-            <a:ext cx="2798064" cy="1591056"/>
+            <a:ext cx="2121408" cy="1591056"/>
           </a:xfrm>
           <a:prstGeom prst="rect">
             <a:avLst/>
@@ -3683,7 +3734,7 @@
       </p:sp>
       <p:sp>
         <p:nvSpPr>
-          <p:cNvPr id="13" name="Text 10"/>
+          <p:cNvPr id="15" name="Text 11"/>
           <p:cNvSpPr txBox="1"/>
           <p:nvPr/>
         </p:nvSpPr>
@@ -4073,7 +4124,58 @@
       </p:sp>
       <p:sp>
         <p:nvSpPr>
-          <p:cNvPr id="11" name="Text 9"/>
+          <p:cNvPr id="11" name="img-frame-m3"/>
+          <p:cNvSpPr/>
+          <p:nvPr/>
+        </p:nvSpPr>
+        <p:spPr>
+          <a:xfrm>
+            <a:off x="1481328" y="3291840"/>
+            <a:ext cx="402336" cy="402336"/>
+          </a:xfrm>
+          <a:prstGeom prst="roundRect">
+            <a:avLst>
+              <a:gd name="adj" fmla="val 13636"/>
+            </a:avLst>
+          </a:prstGeom>
+          <a:solidFill>
+            <a:schemeClr val="bg1"/>
+          </a:solidFill>
+          <a:ln w="9525">
+            <a:solidFill>
+              <a:schemeClr val="bg2"/>
+            </a:solidFill>
+            <a:prstDash val="solid"/>
+          </a:ln>
+        </p:spPr>
+      </p:sp>
+      <p:pic>
+        <p:nvPicPr>
+          <p:cNvPr id="12" name="img-m3" descr="m3">    </p:cNvPr>
+          <p:cNvPicPr>
+            <a:picLocks noChangeAspect="1"/>
+          </p:cNvPicPr>
+          <p:nvPr/>
+        </p:nvPicPr>
+        <p:blipFill>
+          <a:blip r:embed="rId1"/>
+          <a:stretch>
+            <a:fillRect/>
+          </a:stretch>
+        </p:blipFill>
+        <p:spPr>
+          <a:xfrm>
+            <a:off x="1533632" y="3344144"/>
+            <a:ext cx="297729" cy="297729"/>
+          </a:xfrm>
+          <a:prstGeom prst="rect">
+            <a:avLst/>
+          </a:prstGeom>
+        </p:spPr>
+      </p:pic>
+      <p:sp>
+        <p:nvSpPr>
+          <p:cNvPr id="13" name="Text 10"/>
           <p:cNvSpPr txBox="1"/>
           <p:nvPr/>
         </p:nvSpPr>
@@ -4123,7 +4225,7 @@
       </p:sp>
       <p:sp>
         <p:nvSpPr>
-          <p:cNvPr id="12" name="road-1"/>
+          <p:cNvPr id="14" name="road-1"/>
           <p:cNvSpPr/>
           <p:nvPr/>
         </p:nvSpPr>
@@ -4145,7 +4247,7 @@
       </p:sp>
       <p:sp>
         <p:nvSpPr>
-          <p:cNvPr id="13" name="road-dot-1"/>
+          <p:cNvPr id="15" name="road-dot-1"/>
           <p:cNvSpPr/>
           <p:nvPr/>
         </p:nvSpPr>
@@ -4165,7 +4267,7 @@
       </p:sp>
       <p:sp>
         <p:nvSpPr>
-          <p:cNvPr id="14" name="Text 12"/>
+          <p:cNvPr id="16" name="Text 13"/>
           <p:cNvSpPr txBox="1"/>
           <p:nvPr/>
         </p:nvSpPr>
@@ -4201,7 +4303,7 @@
       </p:sp>
       <p:sp>
         <p:nvSpPr>
-          <p:cNvPr id="15" name="Text 13"/>
+          <p:cNvPr id="17" name="Text 14"/>
           <p:cNvSpPr txBox="1"/>
           <p:nvPr/>
         </p:nvSpPr>
@@ -4237,7 +4339,7 @@
       </p:sp>
       <p:sp>
         <p:nvSpPr>
-          <p:cNvPr id="16" name="Text 14"/>
+          <p:cNvPr id="18" name="Text 15"/>
           <p:cNvSpPr txBox="1"/>
           <p:nvPr/>
         </p:nvSpPr>
@@ -4273,7 +4375,7 @@
       </p:sp>
       <p:sp>
         <p:nvSpPr>
-          <p:cNvPr id="17" name="Text 15"/>
+          <p:cNvPr id="19" name="Text 16"/>
           <p:cNvSpPr txBox="1"/>
           <p:nvPr/>
         </p:nvSpPr>
@@ -4309,7 +4411,7 @@
       </p:sp>
       <p:sp>
         <p:nvSpPr>
-          <p:cNvPr id="18" name="road-case-1"/>
+          <p:cNvPr id="20" name="road-case-1"/>
           <p:cNvSpPr/>
           <p:nvPr/>
         </p:nvSpPr>
@@ -4331,7 +4433,109 @@
       </p:sp>
       <p:sp>
         <p:nvSpPr>
-          <p:cNvPr id="19" name="Text 17"/>
+          <p:cNvPr id="21" name="img-frame-ge"/>
+          <p:cNvSpPr/>
+          <p:nvPr/>
+        </p:nvSpPr>
+        <p:spPr>
+          <a:xfrm>
+            <a:off x="4315968" y="3291840"/>
+            <a:ext cx="402336" cy="402336"/>
+          </a:xfrm>
+          <a:prstGeom prst="roundRect">
+            <a:avLst>
+              <a:gd name="adj" fmla="val 13636"/>
+            </a:avLst>
+          </a:prstGeom>
+          <a:solidFill>
+            <a:schemeClr val="bg1"/>
+          </a:solidFill>
+          <a:ln w="9525">
+            <a:solidFill>
+              <a:schemeClr val="bg2"/>
+            </a:solidFill>
+            <a:prstDash val="solid"/>
+          </a:ln>
+        </p:spPr>
+      </p:sp>
+      <p:pic>
+        <p:nvPicPr>
+          <p:cNvPr id="22" name="img-ge" descr="ge">    </p:cNvPr>
+          <p:cNvPicPr>
+            <a:picLocks noChangeAspect="1"/>
+          </p:cNvPicPr>
+          <p:nvPr/>
+        </p:nvPicPr>
+        <p:blipFill>
+          <a:blip r:embed="rId2"/>
+          <a:stretch>
+            <a:fillRect/>
+          </a:stretch>
+        </p:blipFill>
+        <p:spPr>
+          <a:xfrm>
+            <a:off x="4368272" y="3344144"/>
+            <a:ext cx="297729" cy="297729"/>
+          </a:xfrm>
+          <a:prstGeom prst="rect">
+            <a:avLst/>
+          </a:prstGeom>
+        </p:spPr>
+      </p:pic>
+      <p:sp>
+        <p:nvSpPr>
+          <p:cNvPr id="23" name="img-frame-airbnb"/>
+          <p:cNvSpPr/>
+          <p:nvPr/>
+        </p:nvSpPr>
+        <p:spPr>
+          <a:xfrm>
+            <a:off x="4754880" y="3291840"/>
+            <a:ext cx="402336" cy="402336"/>
+          </a:xfrm>
+          <a:prstGeom prst="roundRect">
+            <a:avLst>
+              <a:gd name="adj" fmla="val 13636"/>
+            </a:avLst>
+          </a:prstGeom>
+          <a:solidFill>
+            <a:schemeClr val="bg1"/>
+          </a:solidFill>
+          <a:ln w="9525">
+            <a:solidFill>
+              <a:schemeClr val="bg2"/>
+            </a:solidFill>
+            <a:prstDash val="solid"/>
+          </a:ln>
+        </p:spPr>
+      </p:sp>
+      <p:pic>
+        <p:nvPicPr>
+          <p:cNvPr id="24" name="img-airbnb" descr="airbnb">    </p:cNvPr>
+          <p:cNvPicPr>
+            <a:picLocks noChangeAspect="1"/>
+          </p:cNvPicPr>
+          <p:nvPr/>
+        </p:nvPicPr>
+        <p:blipFill>
+          <a:blip r:embed="rId3"/>
+          <a:stretch>
+            <a:fillRect/>
+          </a:stretch>
+        </p:blipFill>
+        <p:spPr>
+          <a:xfrm>
+            <a:off x="4807184" y="3344144"/>
+            <a:ext cx="297729" cy="297729"/>
+          </a:xfrm>
+          <a:prstGeom prst="rect">
+            <a:avLst/>
+          </a:prstGeom>
+        </p:spPr>
+      </p:pic>
+      <p:sp>
+        <p:nvSpPr>
+          <p:cNvPr id="25" name="Text 20"/>
           <p:cNvSpPr txBox="1"/>
           <p:nvPr/>
         </p:nvSpPr>
@@ -4381,7 +4585,7 @@
       </p:sp>
       <p:sp>
         <p:nvSpPr>
-          <p:cNvPr id="20" name="road-2"/>
+          <p:cNvPr id="26" name="road-2"/>
           <p:cNvSpPr/>
           <p:nvPr/>
         </p:nvSpPr>
@@ -4403,7 +4607,7 @@
       </p:sp>
       <p:sp>
         <p:nvSpPr>
-          <p:cNvPr id="21" name="road-dot-2"/>
+          <p:cNvPr id="27" name="road-dot-2"/>
           <p:cNvSpPr/>
           <p:nvPr/>
         </p:nvSpPr>
@@ -4423,7 +4627,7 @@
       </p:sp>
       <p:sp>
         <p:nvSpPr>
-          <p:cNvPr id="22" name="Text 20"/>
+          <p:cNvPr id="28" name="Text 23"/>
           <p:cNvSpPr txBox="1"/>
           <p:nvPr/>
         </p:nvSpPr>
@@ -4459,7 +4663,7 @@
       </p:sp>
       <p:sp>
         <p:nvSpPr>
-          <p:cNvPr id="23" name="Text 21"/>
+          <p:cNvPr id="29" name="Text 24"/>
           <p:cNvSpPr txBox="1"/>
           <p:nvPr/>
         </p:nvSpPr>
@@ -4495,7 +4699,7 @@
       </p:sp>
       <p:sp>
         <p:nvSpPr>
-          <p:cNvPr id="24" name="Text 22"/>
+          <p:cNvPr id="30" name="Text 25"/>
           <p:cNvSpPr txBox="1"/>
           <p:nvPr/>
         </p:nvSpPr>
@@ -4545,7 +4749,7 @@
       </p:sp>
       <p:sp>
         <p:nvSpPr>
-          <p:cNvPr id="25" name="Text 23"/>
+          <p:cNvPr id="31" name="Text 26"/>
           <p:cNvSpPr txBox="1"/>
           <p:nvPr/>
         </p:nvSpPr>
@@ -4581,7 +4785,7 @@
       </p:sp>
       <p:sp>
         <p:nvSpPr>
-          <p:cNvPr id="26" name="road-case-2"/>
+          <p:cNvPr id="32" name="road-case-2"/>
           <p:cNvSpPr/>
           <p:nvPr/>
         </p:nvSpPr>
@@ -4603,7 +4807,160 @@
       </p:sp>
       <p:sp>
         <p:nvSpPr>
-          <p:cNvPr id="27" name="Text 25"/>
+          <p:cNvPr id="33" name="img-frame-nespresso"/>
+          <p:cNvSpPr/>
+          <p:nvPr/>
+        </p:nvSpPr>
+        <p:spPr>
+          <a:xfrm>
+            <a:off x="7150608" y="3291840"/>
+            <a:ext cx="402336" cy="402336"/>
+          </a:xfrm>
+          <a:prstGeom prst="roundRect">
+            <a:avLst>
+              <a:gd name="adj" fmla="val 13636"/>
+            </a:avLst>
+          </a:prstGeom>
+          <a:solidFill>
+            <a:schemeClr val="bg1"/>
+          </a:solidFill>
+          <a:ln w="9525">
+            <a:solidFill>
+              <a:schemeClr val="bg2"/>
+            </a:solidFill>
+            <a:prstDash val="solid"/>
+          </a:ln>
+        </p:spPr>
+      </p:sp>
+      <p:pic>
+        <p:nvPicPr>
+          <p:cNvPr id="34" name="img-nespresso" descr="nespresso">    </p:cNvPr>
+          <p:cNvPicPr>
+            <a:picLocks noChangeAspect="1"/>
+          </p:cNvPicPr>
+          <p:nvPr/>
+        </p:nvPicPr>
+        <p:blipFill>
+          <a:blip r:embed="rId4"/>
+          <a:stretch>
+            <a:fillRect/>
+          </a:stretch>
+        </p:blipFill>
+        <p:spPr>
+          <a:xfrm>
+            <a:off x="7202912" y="3344144"/>
+            <a:ext cx="297729" cy="297729"/>
+          </a:xfrm>
+          <a:prstGeom prst="rect">
+            <a:avLst/>
+          </a:prstGeom>
+        </p:spPr>
+      </p:pic>
+      <p:sp>
+        <p:nvSpPr>
+          <p:cNvPr id="35" name="img-frame-uber"/>
+          <p:cNvSpPr/>
+          <p:nvPr/>
+        </p:nvSpPr>
+        <p:spPr>
+          <a:xfrm>
+            <a:off x="7589520" y="3291840"/>
+            <a:ext cx="402336" cy="402336"/>
+          </a:xfrm>
+          <a:prstGeom prst="roundRect">
+            <a:avLst>
+              <a:gd name="adj" fmla="val 13636"/>
+            </a:avLst>
+          </a:prstGeom>
+          <a:solidFill>
+            <a:schemeClr val="bg1"/>
+          </a:solidFill>
+          <a:ln w="9525">
+            <a:solidFill>
+              <a:schemeClr val="bg2"/>
+            </a:solidFill>
+            <a:prstDash val="solid"/>
+          </a:ln>
+        </p:spPr>
+      </p:sp>
+      <p:pic>
+        <p:nvPicPr>
+          <p:cNvPr id="36" name="img-uber" descr="uber">    </p:cNvPr>
+          <p:cNvPicPr>
+            <a:picLocks noChangeAspect="1"/>
+          </p:cNvPicPr>
+          <p:nvPr/>
+        </p:nvPicPr>
+        <p:blipFill>
+          <a:blip r:embed="rId5"/>
+          <a:stretch>
+            <a:fillRect/>
+          </a:stretch>
+        </p:blipFill>
+        <p:spPr>
+          <a:xfrm>
+            <a:off x="7641824" y="3344144"/>
+            <a:ext cx="297729" cy="297729"/>
+          </a:xfrm>
+          <a:prstGeom prst="rect">
+            <a:avLst/>
+          </a:prstGeom>
+        </p:spPr>
+      </p:pic>
+      <p:sp>
+        <p:nvSpPr>
+          <p:cNvPr id="37" name="img-frame-baemin"/>
+          <p:cNvSpPr/>
+          <p:nvPr/>
+        </p:nvSpPr>
+        <p:spPr>
+          <a:xfrm>
+            <a:off x="8028432" y="3291840"/>
+            <a:ext cx="402336" cy="402336"/>
+          </a:xfrm>
+          <a:prstGeom prst="roundRect">
+            <a:avLst>
+              <a:gd name="adj" fmla="val 13636"/>
+            </a:avLst>
+          </a:prstGeom>
+          <a:solidFill>
+            <a:schemeClr val="bg1"/>
+          </a:solidFill>
+          <a:ln w="9525">
+            <a:solidFill>
+              <a:schemeClr val="bg2"/>
+            </a:solidFill>
+            <a:prstDash val="solid"/>
+          </a:ln>
+        </p:spPr>
+      </p:sp>
+      <p:pic>
+        <p:nvPicPr>
+          <p:cNvPr id="38" name="img-baemin" descr="baemin">    </p:cNvPr>
+          <p:cNvPicPr>
+            <a:picLocks noChangeAspect="1"/>
+          </p:cNvPicPr>
+          <p:nvPr/>
+        </p:nvPicPr>
+        <p:blipFill>
+          <a:blip r:embed="rId6"/>
+          <a:stretch>
+            <a:fillRect/>
+          </a:stretch>
+        </p:blipFill>
+        <p:spPr>
+          <a:xfrm>
+            <a:off x="8080736" y="3344144"/>
+            <a:ext cx="297729" cy="297729"/>
+          </a:xfrm>
+          <a:prstGeom prst="rect">
+            <a:avLst/>
+          </a:prstGeom>
+        </p:spPr>
+      </p:pic>
+      <p:sp>
+        <p:nvSpPr>
+          <p:cNvPr id="39" name="Text 31"/>
           <p:cNvSpPr txBox="1"/>
           <p:nvPr/>
         </p:nvSpPr>
@@ -4653,7 +5010,7 @@
       </p:sp>
       <p:sp>
         <p:nvSpPr>
-          <p:cNvPr id="28" name="Text 26"/>
+          <p:cNvPr id="40" name="Text 32"/>
           <p:cNvSpPr txBox="1"/>
           <p:nvPr/>
         </p:nvSpPr>
@@ -5785,14 +6142,65 @@
       </p:sp>
       <p:sp>
         <p:nvSpPr>
-          <p:cNvPr id="31" name="Text 29"/>
+          <p:cNvPr id="31" name="img-frame-factory"/>
+          <p:cNvSpPr/>
+          <p:nvPr/>
+        </p:nvSpPr>
+        <p:spPr>
+          <a:xfrm>
+            <a:off x="8119872" y="4023360"/>
+            <a:ext cx="566928" cy="566928"/>
+          </a:xfrm>
+          <a:prstGeom prst="roundRect">
+            <a:avLst>
+              <a:gd name="adj" fmla="val 9677"/>
+            </a:avLst>
+          </a:prstGeom>
+          <a:solidFill>
+            <a:schemeClr val="bg1"/>
+          </a:solidFill>
+          <a:ln w="9525">
+            <a:solidFill>
+              <a:schemeClr val="bg2"/>
+            </a:solidFill>
+            <a:prstDash val="solid"/>
+          </a:ln>
+        </p:spPr>
+      </p:sp>
+      <p:pic>
+        <p:nvPicPr>
+          <p:cNvPr id="32" name="img-factory" descr="factory">    </p:cNvPr>
+          <p:cNvPicPr>
+            <a:picLocks noChangeAspect="1"/>
+          </p:cNvPicPr>
+          <p:nvPr/>
+        </p:nvPicPr>
+        <p:blipFill>
+          <a:blip r:embed="rId1"/>
+          <a:stretch>
+            <a:fillRect/>
+          </a:stretch>
+        </p:blipFill>
+        <p:spPr>
+          <a:xfrm>
+            <a:off x="8193573" y="4097061"/>
+            <a:ext cx="419527" cy="419527"/>
+          </a:xfrm>
+          <a:prstGeom prst="rect">
+            <a:avLst/>
+          </a:prstGeom>
+        </p:spPr>
+      </p:pic>
+      <p:sp>
+        <p:nvSpPr>
+          <p:cNvPr id="33" name="Text 30"/>
           <p:cNvSpPr txBox="1"/>
           <p:nvPr/>
         </p:nvSpPr>
         <p:spPr>
           <a:xfrm>
             <a:off x="1115568" y="3995928"/>
-            <a:ext cx="7571232" cy="292608"/>
+            <a:ext cx="6894576" cy="292608"/>
           </a:xfrm>
           <a:prstGeom prst="rect">
             <a:avLst/>
@@ -5821,14 +6229,14 @@
       </p:sp>
       <p:sp>
         <p:nvSpPr>
-          <p:cNvPr id="32" name="Text 30"/>
+          <p:cNvPr id="34" name="Text 31"/>
           <p:cNvSpPr txBox="1"/>
           <p:nvPr/>
         </p:nvSpPr>
         <p:spPr>
           <a:xfrm>
             <a:off x="475488" y="4315968"/>
-            <a:ext cx="8193024" cy="402336"/>
+            <a:ext cx="7516368" cy="402336"/>
           </a:xfrm>
           <a:prstGeom prst="rect">
             <a:avLst/>
@@ -5860,7 +6268,7 @@
       </p:sp>
       <p:sp>
         <p:nvSpPr>
-          <p:cNvPr id="33" name="Text 31"/>
+          <p:cNvPr id="35" name="Text 32"/>
           <p:cNvSpPr txBox="1"/>
           <p:nvPr/>
         </p:nvSpPr>
@@ -6917,14 +7325,65 @@
       </p:sp>
       <p:sp>
         <p:nvSpPr>
-          <p:cNvPr id="33" name="Text 31"/>
+          <p:cNvPr id="33" name="img-frame-postit"/>
+          <p:cNvSpPr/>
+          <p:nvPr/>
+        </p:nvSpPr>
+        <p:spPr>
+          <a:xfrm>
+            <a:off x="8119872" y="3657600"/>
+            <a:ext cx="566928" cy="566928"/>
+          </a:xfrm>
+          <a:prstGeom prst="roundRect">
+            <a:avLst>
+              <a:gd name="adj" fmla="val 9677"/>
+            </a:avLst>
+          </a:prstGeom>
+          <a:solidFill>
+            <a:schemeClr val="bg1"/>
+          </a:solidFill>
+          <a:ln w="9525">
+            <a:solidFill>
+              <a:schemeClr val="bg2"/>
+            </a:solidFill>
+            <a:prstDash val="solid"/>
+          </a:ln>
+        </p:spPr>
+      </p:sp>
+      <p:pic>
+        <p:nvPicPr>
+          <p:cNvPr id="34" name="img-postit" descr="postit">    </p:cNvPr>
+          <p:cNvPicPr>
+            <a:picLocks noChangeAspect="1"/>
+          </p:cNvPicPr>
+          <p:nvPr/>
+        </p:nvPicPr>
+        <p:blipFill>
+          <a:blip r:embed="rId1"/>
+          <a:stretch>
+            <a:fillRect/>
+          </a:stretch>
+        </p:blipFill>
+        <p:spPr>
+          <a:xfrm>
+            <a:off x="8193573" y="3731301"/>
+            <a:ext cx="419527" cy="419527"/>
+          </a:xfrm>
+          <a:prstGeom prst="rect">
+            <a:avLst/>
+          </a:prstGeom>
+        </p:spPr>
+      </p:pic>
+      <p:sp>
+        <p:nvSpPr>
+          <p:cNvPr id="35" name="Text 32"/>
           <p:cNvSpPr txBox="1"/>
           <p:nvPr/>
         </p:nvSpPr>
         <p:spPr>
           <a:xfrm>
             <a:off x="1115568" y="3630168"/>
-            <a:ext cx="7571232" cy="292608"/>
+            <a:ext cx="6894576" cy="292608"/>
           </a:xfrm>
           <a:prstGeom prst="rect">
             <a:avLst/>
@@ -6953,14 +7412,14 @@
       </p:sp>
       <p:sp>
         <p:nvSpPr>
-          <p:cNvPr id="34" name="Text 32"/>
+          <p:cNvPr id="36" name="Text 33"/>
           <p:cNvSpPr txBox="1"/>
           <p:nvPr/>
         </p:nvSpPr>
         <p:spPr>
           <a:xfrm>
             <a:off x="475488" y="3950208"/>
-            <a:ext cx="8193024" cy="768096"/>
+            <a:ext cx="7516368" cy="768096"/>
           </a:xfrm>
           <a:prstGeom prst="rect">
             <a:avLst/>
@@ -7029,7 +7488,7 @@
       </p:sp>
       <p:sp>
         <p:nvSpPr>
-          <p:cNvPr id="35" name="Text 33"/>
+          <p:cNvPr id="37" name="Text 34"/>
           <p:cNvSpPr txBox="1"/>
           <p:nvPr/>
         </p:nvSpPr>
@@ -8037,14 +8496,65 @@
       </p:sp>
       <p:sp>
         <p:nvSpPr>
-          <p:cNvPr id="28" name="Text 26"/>
+          <p:cNvPr id="28" name="img-frame-ge"/>
+          <p:cNvSpPr/>
+          <p:nvPr/>
+        </p:nvSpPr>
+        <p:spPr>
+          <a:xfrm>
+            <a:off x="8119872" y="3474720"/>
+            <a:ext cx="566928" cy="566928"/>
+          </a:xfrm>
+          <a:prstGeom prst="roundRect">
+            <a:avLst>
+              <a:gd name="adj" fmla="val 9677"/>
+            </a:avLst>
+          </a:prstGeom>
+          <a:solidFill>
+            <a:schemeClr val="bg1"/>
+          </a:solidFill>
+          <a:ln w="9525">
+            <a:solidFill>
+              <a:schemeClr val="bg2"/>
+            </a:solidFill>
+            <a:prstDash val="solid"/>
+          </a:ln>
+        </p:spPr>
+      </p:sp>
+      <p:pic>
+        <p:nvPicPr>
+          <p:cNvPr id="29" name="img-ge" descr="ge">    </p:cNvPr>
+          <p:cNvPicPr>
+            <a:picLocks noChangeAspect="1"/>
+          </p:cNvPicPr>
+          <p:nvPr/>
+        </p:nvPicPr>
+        <p:blipFill>
+          <a:blip r:embed="rId1"/>
+          <a:stretch>
+            <a:fillRect/>
+          </a:stretch>
+        </p:blipFill>
+        <p:spPr>
+          <a:xfrm>
+            <a:off x="8193573" y="3548421"/>
+            <a:ext cx="419527" cy="419527"/>
+          </a:xfrm>
+          <a:prstGeom prst="rect">
+            <a:avLst/>
+          </a:prstGeom>
+        </p:spPr>
+      </p:pic>
+      <p:sp>
+        <p:nvSpPr>
+          <p:cNvPr id="30" name="Text 27"/>
           <p:cNvSpPr txBox="1"/>
           <p:nvPr/>
         </p:nvSpPr>
         <p:spPr>
           <a:xfrm>
             <a:off x="1115568" y="3447288"/>
-            <a:ext cx="7571232" cy="292608"/>
+            <a:ext cx="6894576" cy="292608"/>
           </a:xfrm>
           <a:prstGeom prst="rect">
             <a:avLst/>
@@ -8073,14 +8583,14 @@
       </p:sp>
       <p:sp>
         <p:nvSpPr>
-          <p:cNvPr id="29" name="Text 27"/>
+          <p:cNvPr id="31" name="Text 28"/>
           <p:cNvSpPr txBox="1"/>
           <p:nvPr/>
         </p:nvSpPr>
         <p:spPr>
           <a:xfrm>
             <a:off x="475488" y="3767328"/>
-            <a:ext cx="8193024" cy="950976"/>
+            <a:ext cx="7516368" cy="950976"/>
           </a:xfrm>
           <a:prstGeom prst="rect">
             <a:avLst/>
@@ -8149,7 +8659,7 @@
       </p:sp>
       <p:sp>
         <p:nvSpPr>
-          <p:cNvPr id="30" name="Text 28"/>
+          <p:cNvPr id="32" name="Text 29"/>
           <p:cNvSpPr txBox="1"/>
           <p:nvPr/>
         </p:nvSpPr>
@@ -9017,14 +9527,65 @@
       </p:sp>
       <p:sp>
         <p:nvSpPr>
-          <p:cNvPr id="28" name="Text 26"/>
+          <p:cNvPr id="28" name="img-frame-airbnb"/>
+          <p:cNvSpPr/>
+          <p:nvPr/>
+        </p:nvSpPr>
+        <p:spPr>
+          <a:xfrm>
+            <a:off x="8119872" y="1645920"/>
+            <a:ext cx="566928" cy="566928"/>
+          </a:xfrm>
+          <a:prstGeom prst="roundRect">
+            <a:avLst>
+              <a:gd name="adj" fmla="val 9677"/>
+            </a:avLst>
+          </a:prstGeom>
+          <a:solidFill>
+            <a:schemeClr val="bg1"/>
+          </a:solidFill>
+          <a:ln w="9525">
+            <a:solidFill>
+              <a:schemeClr val="bg2"/>
+            </a:solidFill>
+            <a:prstDash val="solid"/>
+          </a:ln>
+        </p:spPr>
+      </p:sp>
+      <p:pic>
+        <p:nvPicPr>
+          <p:cNvPr id="29" name="img-airbnb" descr="airbnb">    </p:cNvPr>
+          <p:cNvPicPr>
+            <a:picLocks noChangeAspect="1"/>
+          </p:cNvPicPr>
+          <p:nvPr/>
+        </p:nvPicPr>
+        <p:blipFill>
+          <a:blip r:embed="rId1"/>
+          <a:stretch>
+            <a:fillRect/>
+          </a:stretch>
+        </p:blipFill>
+        <p:spPr>
+          <a:xfrm>
+            <a:off x="8193573" y="1719621"/>
+            <a:ext cx="419527" cy="419527"/>
+          </a:xfrm>
+          <a:prstGeom prst="rect">
+            <a:avLst/>
+          </a:prstGeom>
+        </p:spPr>
+      </p:pic>
+      <p:sp>
+        <p:nvSpPr>
+          <p:cNvPr id="30" name="Text 27"/>
           <p:cNvSpPr txBox="1"/>
           <p:nvPr/>
         </p:nvSpPr>
         <p:spPr>
           <a:xfrm>
             <a:off x="7059168" y="1618488"/>
-            <a:ext cx="1627632" cy="292608"/>
+            <a:ext cx="950976" cy="292608"/>
           </a:xfrm>
           <a:prstGeom prst="rect">
             <a:avLst/>
@@ -9053,14 +9614,14 @@
       </p:sp>
       <p:sp>
         <p:nvSpPr>
-          <p:cNvPr id="29" name="Text 27"/>
+          <p:cNvPr id="31" name="Text 28"/>
           <p:cNvSpPr txBox="1"/>
           <p:nvPr/>
         </p:nvSpPr>
         <p:spPr>
           <a:xfrm>
             <a:off x="6419088" y="1938528"/>
-            <a:ext cx="2249424" cy="2139696"/>
+            <a:ext cx="1572768" cy="2139696"/>
           </a:xfrm>
           <a:prstGeom prst="rect">
             <a:avLst/>
@@ -9143,7 +9704,7 @@
       </p:sp>
       <p:sp>
         <p:nvSpPr>
-          <p:cNvPr id="30" name="Text 28"/>
+          <p:cNvPr id="32" name="Text 29"/>
           <p:cNvSpPr txBox="1"/>
           <p:nvPr/>
         </p:nvSpPr>
@@ -9179,7 +9740,7 @@
       </p:sp>
       <p:sp>
         <p:nvSpPr>
-          <p:cNvPr id="31" name="Text 29"/>
+          <p:cNvPr id="33" name="Text 30"/>
           <p:cNvSpPr txBox="1"/>
           <p:nvPr/>
         </p:nvSpPr>
@@ -10036,7 +10597,58 @@
       </p:sp>
       <p:sp>
         <p:nvSpPr>
-          <p:cNvPr id="22" name="Text 20"/>
+          <p:cNvPr id="22" name="img-frame-nespresso"/>
+          <p:cNvSpPr/>
+          <p:nvPr/>
+        </p:nvSpPr>
+        <p:spPr>
+          <a:xfrm>
+            <a:off x="4206240" y="2651760"/>
+            <a:ext cx="731520" cy="731520"/>
+          </a:xfrm>
+          <a:prstGeom prst="roundRect">
+            <a:avLst>
+              <a:gd name="adj" fmla="val 7500"/>
+            </a:avLst>
+          </a:prstGeom>
+          <a:solidFill>
+            <a:schemeClr val="bg1"/>
+          </a:solidFill>
+          <a:ln w="9525">
+            <a:solidFill>
+              <a:schemeClr val="bg2"/>
+            </a:solidFill>
+            <a:prstDash val="solid"/>
+          </a:ln>
+        </p:spPr>
+      </p:sp>
+      <p:pic>
+        <p:nvPicPr>
+          <p:cNvPr id="23" name="img-nespresso" descr="nespresso">    </p:cNvPr>
+          <p:cNvPicPr>
+            <a:picLocks noChangeAspect="1"/>
+          </p:cNvPicPr>
+          <p:nvPr/>
+        </p:nvPicPr>
+        <p:blipFill>
+          <a:blip r:embed="rId1"/>
+          <a:stretch>
+            <a:fillRect/>
+          </a:stretch>
+        </p:blipFill>
+        <p:spPr>
+          <a:xfrm>
+            <a:off x="4301338" y="2746858"/>
+            <a:ext cx="541325" cy="541325"/>
+          </a:xfrm>
+          <a:prstGeom prst="rect">
+            <a:avLst/>
+          </a:prstGeom>
+        </p:spPr>
+      </p:pic>
+      <p:sp>
+        <p:nvSpPr>
+          <p:cNvPr id="24" name="Text 21"/>
           <p:cNvSpPr txBox="1"/>
           <p:nvPr/>
         </p:nvSpPr>
@@ -10072,7 +10684,7 @@
       </p:sp>
       <p:sp>
         <p:nvSpPr>
-          <p:cNvPr id="23" name="Text 21"/>
+          <p:cNvPr id="25" name="Text 22"/>
           <p:cNvSpPr txBox="1"/>
           <p:nvPr/>
         </p:nvSpPr>
@@ -10971,7 +11583,58 @@
       </p:sp>
       <p:sp>
         <p:nvSpPr>
-          <p:cNvPr id="22" name="Text 20"/>
+          <p:cNvPr id="22" name="img-frame-uber"/>
+          <p:cNvSpPr/>
+          <p:nvPr/>
+        </p:nvSpPr>
+        <p:spPr>
+          <a:xfrm>
+            <a:off x="4206240" y="2651760"/>
+            <a:ext cx="731520" cy="731520"/>
+          </a:xfrm>
+          <a:prstGeom prst="roundRect">
+            <a:avLst>
+              <a:gd name="adj" fmla="val 7500"/>
+            </a:avLst>
+          </a:prstGeom>
+          <a:solidFill>
+            <a:schemeClr val="bg1"/>
+          </a:solidFill>
+          <a:ln w="9525">
+            <a:solidFill>
+              <a:schemeClr val="bg2"/>
+            </a:solidFill>
+            <a:prstDash val="solid"/>
+          </a:ln>
+        </p:spPr>
+      </p:sp>
+      <p:pic>
+        <p:nvPicPr>
+          <p:cNvPr id="23" name="img-uber" descr="uber">    </p:cNvPr>
+          <p:cNvPicPr>
+            <a:picLocks noChangeAspect="1"/>
+          </p:cNvPicPr>
+          <p:nvPr/>
+        </p:nvPicPr>
+        <p:blipFill>
+          <a:blip r:embed="rId1"/>
+          <a:stretch>
+            <a:fillRect/>
+          </a:stretch>
+        </p:blipFill>
+        <p:spPr>
+          <a:xfrm>
+            <a:off x="4301338" y="2746858"/>
+            <a:ext cx="541325" cy="541325"/>
+          </a:xfrm>
+          <a:prstGeom prst="rect">
+            <a:avLst/>
+          </a:prstGeom>
+        </p:spPr>
+      </p:pic>
+      <p:sp>
+        <p:nvSpPr>
+          <p:cNvPr id="24" name="Text 21"/>
           <p:cNvSpPr txBox="1"/>
           <p:nvPr/>
         </p:nvSpPr>
@@ -11007,7 +11670,7 @@
       </p:sp>
       <p:sp>
         <p:nvSpPr>
-          <p:cNvPr id="23" name="Text 21"/>
+          <p:cNvPr id="25" name="Text 22"/>
           <p:cNvSpPr txBox="1"/>
           <p:nvPr/>
         </p:nvSpPr>
@@ -12706,14 +13369,65 @@
       </p:sp>
       <p:sp>
         <p:nvSpPr>
-          <p:cNvPr id="8" name="Text 5"/>
+          <p:cNvPr id="8" name="img-frame-nespresso"/>
+          <p:cNvSpPr/>
+          <p:nvPr/>
+        </p:nvSpPr>
+        <p:spPr>
+          <a:xfrm>
+            <a:off x="3822192" y="3794760"/>
+            <a:ext cx="566928" cy="566928"/>
+          </a:xfrm>
+          <a:prstGeom prst="roundRect">
+            <a:avLst>
+              <a:gd name="adj" fmla="val 9677"/>
+            </a:avLst>
+          </a:prstGeom>
+          <a:solidFill>
+            <a:schemeClr val="bg1"/>
+          </a:solidFill>
+          <a:ln w="9525">
+            <a:solidFill>
+              <a:schemeClr val="bg2"/>
+            </a:solidFill>
+            <a:prstDash val="solid"/>
+          </a:ln>
+        </p:spPr>
+      </p:sp>
+      <p:pic>
+        <p:nvPicPr>
+          <p:cNvPr id="9" name="img-nespresso" descr="nespresso">    </p:cNvPr>
+          <p:cNvPicPr>
+            <a:picLocks noChangeAspect="1"/>
+          </p:cNvPicPr>
+          <p:nvPr/>
+        </p:nvPicPr>
+        <p:blipFill>
+          <a:blip r:embed="rId1"/>
+          <a:stretch>
+            <a:fillRect/>
+          </a:stretch>
+        </p:blipFill>
+        <p:spPr>
+          <a:xfrm>
+            <a:off x="3895893" y="3868461"/>
+            <a:ext cx="419527" cy="419527"/>
+          </a:xfrm>
+          <a:prstGeom prst="rect">
+            <a:avLst/>
+          </a:prstGeom>
+        </p:spPr>
+      </p:pic>
+      <p:sp>
+        <p:nvSpPr>
+          <p:cNvPr id="10" name="Text 6"/>
           <p:cNvSpPr txBox="1"/>
           <p:nvPr/>
         </p:nvSpPr>
         <p:spPr>
           <a:xfrm>
             <a:off x="1115568" y="3767328"/>
-            <a:ext cx="3273552" cy="292608"/>
+            <a:ext cx="2596896" cy="292608"/>
           </a:xfrm>
           <a:prstGeom prst="rect">
             <a:avLst/>
@@ -12742,14 +13456,14 @@
       </p:sp>
       <p:sp>
         <p:nvSpPr>
-          <p:cNvPr id="9" name="Text 6"/>
+          <p:cNvPr id="11" name="Text 7"/>
           <p:cNvSpPr txBox="1"/>
           <p:nvPr/>
         </p:nvSpPr>
         <p:spPr>
           <a:xfrm>
             <a:off x="475488" y="4087368"/>
-            <a:ext cx="3895344" cy="630936"/>
+            <a:ext cx="3218688" cy="630936"/>
           </a:xfrm>
           <a:prstGeom prst="rect">
             <a:avLst/>
@@ -12781,7 +13495,7 @@
       </p:sp>
       <p:sp>
         <p:nvSpPr>
-          <p:cNvPr id="10" name="case-card"/>
+          <p:cNvPr id="12" name="case-card"/>
           <p:cNvSpPr/>
           <p:nvPr/>
         </p:nvSpPr>
@@ -12803,7 +13517,7 @@
       </p:sp>
       <p:sp>
         <p:nvSpPr>
-          <p:cNvPr id="11" name="case-chip"/>
+          <p:cNvPr id="13" name="case-chip"/>
           <p:cNvSpPr/>
           <p:nvPr/>
         </p:nvSpPr>
@@ -12825,7 +13539,7 @@
       </p:sp>
       <p:sp>
         <p:nvSpPr>
-          <p:cNvPr id="12" name="Text 9"/>
+          <p:cNvPr id="14" name="Text 10"/>
           <p:cNvSpPr txBox="1"/>
           <p:nvPr/>
         </p:nvSpPr>
@@ -12861,14 +13575,65 @@
       </p:sp>
       <p:sp>
         <p:nvSpPr>
-          <p:cNvPr id="13" name="Text 10"/>
+          <p:cNvPr id="15" name="img-frame-uber"/>
+          <p:cNvSpPr/>
+          <p:nvPr/>
+        </p:nvSpPr>
+        <p:spPr>
+          <a:xfrm>
+            <a:off x="8119872" y="3794760"/>
+            <a:ext cx="566928" cy="566928"/>
+          </a:xfrm>
+          <a:prstGeom prst="roundRect">
+            <a:avLst>
+              <a:gd name="adj" fmla="val 9677"/>
+            </a:avLst>
+          </a:prstGeom>
+          <a:solidFill>
+            <a:schemeClr val="bg1"/>
+          </a:solidFill>
+          <a:ln w="9525">
+            <a:solidFill>
+              <a:schemeClr val="bg2"/>
+            </a:solidFill>
+            <a:prstDash val="solid"/>
+          </a:ln>
+        </p:spPr>
+      </p:sp>
+      <p:pic>
+        <p:nvPicPr>
+          <p:cNvPr id="16" name="img-uber" descr="uber">    </p:cNvPr>
+          <p:cNvPicPr>
+            <a:picLocks noChangeAspect="1"/>
+          </p:cNvPicPr>
+          <p:nvPr/>
+        </p:nvPicPr>
+        <p:blipFill>
+          <a:blip r:embed="rId2"/>
+          <a:stretch>
+            <a:fillRect/>
+          </a:stretch>
+        </p:blipFill>
+        <p:spPr>
+          <a:xfrm>
+            <a:off x="8193573" y="3868461"/>
+            <a:ext cx="419527" cy="419527"/>
+          </a:xfrm>
+          <a:prstGeom prst="rect">
+            <a:avLst/>
+          </a:prstGeom>
+        </p:spPr>
+      </p:pic>
+      <p:sp>
+        <p:nvSpPr>
+          <p:cNvPr id="17" name="Text 12"/>
           <p:cNvSpPr txBox="1"/>
           <p:nvPr/>
         </p:nvSpPr>
         <p:spPr>
           <a:xfrm>
             <a:off x="5413248" y="3767328"/>
-            <a:ext cx="3273552" cy="292608"/>
+            <a:ext cx="2596896" cy="292608"/>
           </a:xfrm>
           <a:prstGeom prst="rect">
             <a:avLst/>
@@ -12897,14 +13662,14 @@
       </p:sp>
       <p:sp>
         <p:nvSpPr>
-          <p:cNvPr id="14" name="Text 11"/>
+          <p:cNvPr id="18" name="Text 13"/>
           <p:cNvSpPr txBox="1"/>
           <p:nvPr/>
         </p:nvSpPr>
         <p:spPr>
           <a:xfrm>
             <a:off x="4773168" y="4087368"/>
-            <a:ext cx="3895344" cy="630936"/>
+            <a:ext cx="3218688" cy="630936"/>
           </a:xfrm>
           <a:prstGeom prst="rect">
             <a:avLst/>
@@ -12936,7 +13701,7 @@
       </p:sp>
       <p:sp>
         <p:nvSpPr>
-          <p:cNvPr id="15" name="Text 12"/>
+          <p:cNvPr id="19" name="Text 14"/>
           <p:cNvSpPr txBox="1"/>
           <p:nvPr/>
         </p:nvSpPr>
@@ -13810,14 +14575,65 @@
       </p:sp>
       <p:sp>
         <p:nvSpPr>
-          <p:cNvPr id="25" name="Text 23"/>
+          <p:cNvPr id="25" name="img-frame-webvan"/>
+          <p:cNvSpPr/>
+          <p:nvPr/>
+        </p:nvSpPr>
+        <p:spPr>
+          <a:xfrm>
+            <a:off x="8119872" y="3794760"/>
+            <a:ext cx="566928" cy="566928"/>
+          </a:xfrm>
+          <a:prstGeom prst="roundRect">
+            <a:avLst>
+              <a:gd name="adj" fmla="val 9677"/>
+            </a:avLst>
+          </a:prstGeom>
+          <a:solidFill>
+            <a:schemeClr val="bg1"/>
+          </a:solidFill>
+          <a:ln w="9525">
+            <a:solidFill>
+              <a:schemeClr val="bg2"/>
+            </a:solidFill>
+            <a:prstDash val="solid"/>
+          </a:ln>
+        </p:spPr>
+      </p:sp>
+      <p:pic>
+        <p:nvPicPr>
+          <p:cNvPr id="26" name="img-webvan" descr="webvan">    </p:cNvPr>
+          <p:cNvPicPr>
+            <a:picLocks noChangeAspect="1"/>
+          </p:cNvPicPr>
+          <p:nvPr/>
+        </p:nvPicPr>
+        <p:blipFill>
+          <a:blip r:embed="rId1"/>
+          <a:stretch>
+            <a:fillRect/>
+          </a:stretch>
+        </p:blipFill>
+        <p:spPr>
+          <a:xfrm>
+            <a:off x="8193573" y="3868461"/>
+            <a:ext cx="419527" cy="419527"/>
+          </a:xfrm>
+          <a:prstGeom prst="rect">
+            <a:avLst/>
+          </a:prstGeom>
+        </p:spPr>
+      </p:pic>
+      <p:sp>
+        <p:nvSpPr>
+          <p:cNvPr id="27" name="Text 24"/>
           <p:cNvSpPr txBox="1"/>
           <p:nvPr/>
         </p:nvSpPr>
         <p:spPr>
           <a:xfrm>
             <a:off x="1115568" y="3767328"/>
-            <a:ext cx="7571232" cy="292608"/>
+            <a:ext cx="6894576" cy="292608"/>
           </a:xfrm>
           <a:prstGeom prst="rect">
             <a:avLst/>
@@ -13846,14 +14662,14 @@
       </p:sp>
       <p:sp>
         <p:nvSpPr>
-          <p:cNvPr id="26" name="Text 24"/>
+          <p:cNvPr id="28" name="Text 25"/>
           <p:cNvSpPr txBox="1"/>
           <p:nvPr/>
         </p:nvSpPr>
         <p:spPr>
           <a:xfrm>
             <a:off x="475488" y="4087368"/>
-            <a:ext cx="8193024" cy="630936"/>
+            <a:ext cx="7516368" cy="630936"/>
           </a:xfrm>
           <a:prstGeom prst="rect">
             <a:avLst/>
@@ -13885,7 +14701,7 @@
       </p:sp>
       <p:sp>
         <p:nvSpPr>
-          <p:cNvPr id="27" name="Text 25"/>
+          <p:cNvPr id="29" name="Text 26"/>
           <p:cNvSpPr txBox="1"/>
           <p:nvPr/>
         </p:nvSpPr>
@@ -14571,14 +15387,65 @@
       </p:sp>
       <p:sp>
         <p:nvSpPr>
-          <p:cNvPr id="19" name="Text 17"/>
+          <p:cNvPr id="19" name="img-frame-baemin"/>
+          <p:cNvSpPr/>
+          <p:nvPr/>
+        </p:nvSpPr>
+        <p:spPr>
+          <a:xfrm>
+            <a:off x="8119872" y="1325880"/>
+            <a:ext cx="566928" cy="566928"/>
+          </a:xfrm>
+          <a:prstGeom prst="roundRect">
+            <a:avLst>
+              <a:gd name="adj" fmla="val 9677"/>
+            </a:avLst>
+          </a:prstGeom>
+          <a:solidFill>
+            <a:schemeClr val="bg1"/>
+          </a:solidFill>
+          <a:ln w="9525">
+            <a:solidFill>
+              <a:schemeClr val="bg2"/>
+            </a:solidFill>
+            <a:prstDash val="solid"/>
+          </a:ln>
+        </p:spPr>
+      </p:sp>
+      <p:pic>
+        <p:nvPicPr>
+          <p:cNvPr id="20" name="img-baemin" descr="baemin">    </p:cNvPr>
+          <p:cNvPicPr>
+            <a:picLocks noChangeAspect="1"/>
+          </p:cNvPicPr>
+          <p:nvPr/>
+        </p:nvPicPr>
+        <p:blipFill>
+          <a:blip r:embed="rId1"/>
+          <a:stretch>
+            <a:fillRect/>
+          </a:stretch>
+        </p:blipFill>
+        <p:spPr>
+          <a:xfrm>
+            <a:off x="8193573" y="1399581"/>
+            <a:ext cx="419527" cy="419527"/>
+          </a:xfrm>
+          <a:prstGeom prst="rect">
+            <a:avLst/>
+          </a:prstGeom>
+        </p:spPr>
+      </p:pic>
+      <p:sp>
+        <p:nvSpPr>
+          <p:cNvPr id="21" name="Text 18"/>
           <p:cNvSpPr txBox="1"/>
           <p:nvPr/>
         </p:nvSpPr>
         <p:spPr>
           <a:xfrm>
             <a:off x="5321808" y="1298448"/>
-            <a:ext cx="3364992" cy="292608"/>
+            <a:ext cx="2688336" cy="292608"/>
           </a:xfrm>
           <a:prstGeom prst="rect">
             <a:avLst/>
@@ -14607,14 +15474,14 @@
       </p:sp>
       <p:sp>
         <p:nvSpPr>
-          <p:cNvPr id="20" name="Text 18"/>
+          <p:cNvPr id="22" name="Text 19"/>
           <p:cNvSpPr txBox="1"/>
           <p:nvPr/>
         </p:nvSpPr>
         <p:spPr>
           <a:xfrm>
             <a:off x="4681728" y="1618488"/>
-            <a:ext cx="3986784" cy="3099816"/>
+            <a:ext cx="3310128" cy="3099816"/>
           </a:xfrm>
           <a:prstGeom prst="rect">
             <a:avLst/>
@@ -14804,7 +15671,7 @@
       </p:sp>
       <p:sp>
         <p:nvSpPr>
-          <p:cNvPr id="21" name="Text 19"/>
+          <p:cNvPr id="23" name="Text 20"/>
           <p:cNvSpPr txBox="1"/>
           <p:nvPr/>
         </p:nvSpPr>
@@ -14840,7 +15707,7 @@
       </p:sp>
       <p:sp>
         <p:nvSpPr>
-          <p:cNvPr id="22" name="Text 20"/>
+          <p:cNvPr id="24" name="Text 21"/>
           <p:cNvSpPr txBox="1"/>
           <p:nvPr/>
         </p:nvSpPr>
@@ -15658,14 +16525,65 @@
       </p:sp>
       <p:sp>
         <p:nvSpPr>
-          <p:cNvPr id="24" name="Text 22"/>
+          <p:cNvPr id="24" name="img-frame-tada"/>
+          <p:cNvSpPr/>
+          <p:nvPr/>
+        </p:nvSpPr>
+        <p:spPr>
+          <a:xfrm>
+            <a:off x="8119872" y="2880360"/>
+            <a:ext cx="566928" cy="566928"/>
+          </a:xfrm>
+          <a:prstGeom prst="roundRect">
+            <a:avLst>
+              <a:gd name="adj" fmla="val 9677"/>
+            </a:avLst>
+          </a:prstGeom>
+          <a:solidFill>
+            <a:schemeClr val="bg1"/>
+          </a:solidFill>
+          <a:ln w="9525">
+            <a:solidFill>
+              <a:schemeClr val="bg2"/>
+            </a:solidFill>
+            <a:prstDash val="solid"/>
+          </a:ln>
+        </p:spPr>
+      </p:sp>
+      <p:pic>
+        <p:nvPicPr>
+          <p:cNvPr id="25" name="img-tada" descr="tada">    </p:cNvPr>
+          <p:cNvPicPr>
+            <a:picLocks noChangeAspect="1"/>
+          </p:cNvPicPr>
+          <p:nvPr/>
+        </p:nvPicPr>
+        <p:blipFill>
+          <a:blip r:embed="rId1"/>
+          <a:stretch>
+            <a:fillRect/>
+          </a:stretch>
+        </p:blipFill>
+        <p:spPr>
+          <a:xfrm>
+            <a:off x="8193573" y="2954061"/>
+            <a:ext cx="419527" cy="419527"/>
+          </a:xfrm>
+          <a:prstGeom prst="rect">
+            <a:avLst/>
+          </a:prstGeom>
+        </p:spPr>
+      </p:pic>
+      <p:sp>
+        <p:nvSpPr>
+          <p:cNvPr id="26" name="Text 23"/>
           <p:cNvSpPr txBox="1"/>
           <p:nvPr/>
         </p:nvSpPr>
         <p:spPr>
           <a:xfrm>
             <a:off x="5321808" y="2852928"/>
-            <a:ext cx="3364992" cy="292608"/>
+            <a:ext cx="2688336" cy="292608"/>
           </a:xfrm>
           <a:prstGeom prst="rect">
             <a:avLst/>
@@ -15694,14 +16612,14 @@
       </p:sp>
       <p:sp>
         <p:nvSpPr>
-          <p:cNvPr id="25" name="Text 23"/>
+          <p:cNvPr id="27" name="Text 24"/>
           <p:cNvSpPr txBox="1"/>
           <p:nvPr/>
         </p:nvSpPr>
         <p:spPr>
           <a:xfrm>
             <a:off x="4681728" y="3172968"/>
-            <a:ext cx="3986784" cy="1545336"/>
+            <a:ext cx="3310128" cy="1545336"/>
           </a:xfrm>
           <a:prstGeom prst="rect">
             <a:avLst/>
@@ -15770,7 +16688,7 @@
       </p:sp>
       <p:sp>
         <p:nvSpPr>
-          <p:cNvPr id="26" name="Text 24"/>
+          <p:cNvPr id="28" name="Text 25"/>
           <p:cNvSpPr txBox="1"/>
           <p:nvPr/>
         </p:nvSpPr>
@@ -18395,14 +19313,65 @@
       </p:sp>
       <p:sp>
         <p:nvSpPr>
-          <p:cNvPr id="31" name="Text 29"/>
+          <p:cNvPr id="31" name="img-frame-quibi"/>
+          <p:cNvSpPr/>
+          <p:nvPr/>
+        </p:nvSpPr>
+        <p:spPr>
+          <a:xfrm>
+            <a:off x="8119872" y="3858768"/>
+            <a:ext cx="566928" cy="566928"/>
+          </a:xfrm>
+          <a:prstGeom prst="roundRect">
+            <a:avLst>
+              <a:gd name="adj" fmla="val 9677"/>
+            </a:avLst>
+          </a:prstGeom>
+          <a:solidFill>
+            <a:schemeClr val="bg1"/>
+          </a:solidFill>
+          <a:ln w="9525">
+            <a:solidFill>
+              <a:schemeClr val="bg2"/>
+            </a:solidFill>
+            <a:prstDash val="solid"/>
+          </a:ln>
+        </p:spPr>
+      </p:sp>
+      <p:pic>
+        <p:nvPicPr>
+          <p:cNvPr id="32" name="img-quibi" descr="quibi">    </p:cNvPr>
+          <p:cNvPicPr>
+            <a:picLocks noChangeAspect="1"/>
+          </p:cNvPicPr>
+          <p:nvPr/>
+        </p:nvPicPr>
+        <p:blipFill>
+          <a:blip r:embed="rId1"/>
+          <a:stretch>
+            <a:fillRect/>
+          </a:stretch>
+        </p:blipFill>
+        <p:spPr>
+          <a:xfrm>
+            <a:off x="8193573" y="3932469"/>
+            <a:ext cx="419527" cy="419527"/>
+          </a:xfrm>
+          <a:prstGeom prst="rect">
+            <a:avLst/>
+          </a:prstGeom>
+        </p:spPr>
+      </p:pic>
+      <p:sp>
+        <p:nvSpPr>
+          <p:cNvPr id="33" name="Text 30"/>
           <p:cNvSpPr txBox="1"/>
           <p:nvPr/>
         </p:nvSpPr>
         <p:spPr>
           <a:xfrm>
             <a:off x="5413248" y="3831336"/>
-            <a:ext cx="3273552" cy="292608"/>
+            <a:ext cx="2596896" cy="292608"/>
           </a:xfrm>
           <a:prstGeom prst="rect">
             <a:avLst/>
@@ -18431,14 +19400,14 @@
       </p:sp>
       <p:sp>
         <p:nvSpPr>
-          <p:cNvPr id="32" name="Text 30"/>
+          <p:cNvPr id="34" name="Text 31"/>
           <p:cNvSpPr txBox="1"/>
           <p:nvPr/>
         </p:nvSpPr>
         <p:spPr>
           <a:xfrm>
             <a:off x="4773168" y="4151376"/>
-            <a:ext cx="3895344" cy="566928"/>
+            <a:ext cx="3218688" cy="566928"/>
           </a:xfrm>
           <a:prstGeom prst="rect">
             <a:avLst/>
@@ -18470,7 +19439,7 @@
       </p:sp>
       <p:sp>
         <p:nvSpPr>
-          <p:cNvPr id="33" name="Text 31"/>
+          <p:cNvPr id="35" name="Text 32"/>
           <p:cNvSpPr txBox="1"/>
           <p:nvPr/>
         </p:nvSpPr>
@@ -18674,14 +19643,65 @@
       </p:sp>
       <p:sp>
         <p:nvSpPr>
-          <p:cNvPr id="5" name="Text 3"/>
+          <p:cNvPr id="5" name="img-frame-webvan"/>
+          <p:cNvSpPr/>
+          <p:nvPr/>
+        </p:nvSpPr>
+        <p:spPr>
+          <a:xfrm>
+            <a:off x="3886200" y="1325880"/>
+            <a:ext cx="475488" cy="475488"/>
+          </a:xfrm>
+          <a:prstGeom prst="roundRect">
+            <a:avLst>
+              <a:gd name="adj" fmla="val 11538"/>
+            </a:avLst>
+          </a:prstGeom>
+          <a:solidFill>
+            <a:schemeClr val="bg1"/>
+          </a:solidFill>
+          <a:ln w="9525">
+            <a:solidFill>
+              <a:schemeClr val="bg2"/>
+            </a:solidFill>
+            <a:prstDash val="solid"/>
+          </a:ln>
+        </p:spPr>
+      </p:sp>
+      <p:pic>
+        <p:nvPicPr>
+          <p:cNvPr id="6" name="img-webvan" descr="webvan">    </p:cNvPr>
+          <p:cNvPicPr>
+            <a:picLocks noChangeAspect="1"/>
+          </p:cNvPicPr>
+          <p:nvPr/>
+        </p:nvPicPr>
+        <p:blipFill>
+          <a:blip r:embed="rId1"/>
+          <a:stretch>
+            <a:fillRect/>
+          </a:stretch>
+        </p:blipFill>
+        <p:spPr>
+          <a:xfrm>
+            <a:off x="3948013" y="1387693"/>
+            <a:ext cx="351861" cy="351861"/>
+          </a:xfrm>
+          <a:prstGeom prst="rect">
+            <a:avLst/>
+          </a:prstGeom>
+        </p:spPr>
+      </p:pic>
+      <p:sp>
+        <p:nvSpPr>
+          <p:cNvPr id="7" name="Text 4"/>
           <p:cNvSpPr txBox="1"/>
           <p:nvPr/>
         </p:nvSpPr>
         <p:spPr>
           <a:xfrm>
             <a:off x="502920" y="1298448"/>
-            <a:ext cx="3840480" cy="320040"/>
+            <a:ext cx="3291840" cy="320040"/>
           </a:xfrm>
           <a:prstGeom prst="rect">
             <a:avLst/>
@@ -18710,14 +19730,14 @@
       </p:sp>
       <p:sp>
         <p:nvSpPr>
-          <p:cNvPr id="6" name="Text 4"/>
-          <p:cNvSpPr txBox="1"/>
-          <p:nvPr/>
-        </p:nvSpPr>
-        <p:spPr>
-          <a:xfrm>
-            <a:off x="502920" y="1691640"/>
-            <a:ext cx="3840480" cy="2194560"/>
+          <p:cNvPr id="8" name="Text 5"/>
+          <p:cNvSpPr txBox="1"/>
+          <p:nvPr/>
+        </p:nvSpPr>
+        <p:spPr>
+          <a:xfrm>
+            <a:off x="502920" y="1847088"/>
+            <a:ext cx="3840480" cy="2039112"/>
           </a:xfrm>
           <a:prstGeom prst="rect">
             <a:avLst/>
@@ -18804,7 +19824,7 @@
       </p:sp>
       <p:sp>
         <p:nvSpPr>
-          <p:cNvPr id="7" name="zappos"/>
+          <p:cNvPr id="9" name="zappos"/>
           <p:cNvSpPr/>
           <p:nvPr/>
         </p:nvSpPr>
@@ -18826,14 +19846,65 @@
       </p:sp>
       <p:sp>
         <p:nvSpPr>
-          <p:cNvPr id="8" name="Text 6"/>
+          <p:cNvPr id="10" name="img-frame-zappos"/>
+          <p:cNvSpPr/>
+          <p:nvPr/>
+        </p:nvSpPr>
+        <p:spPr>
+          <a:xfrm>
+            <a:off x="8183880" y="1325880"/>
+            <a:ext cx="475488" cy="475488"/>
+          </a:xfrm>
+          <a:prstGeom prst="roundRect">
+            <a:avLst>
+              <a:gd name="adj" fmla="val 11538"/>
+            </a:avLst>
+          </a:prstGeom>
+          <a:solidFill>
+            <a:schemeClr val="bg1"/>
+          </a:solidFill>
+          <a:ln w="9525">
+            <a:solidFill>
+              <a:schemeClr val="bg2"/>
+            </a:solidFill>
+            <a:prstDash val="solid"/>
+          </a:ln>
+        </p:spPr>
+      </p:sp>
+      <p:pic>
+        <p:nvPicPr>
+          <p:cNvPr id="11" name="img-zappos" descr="zappos">    </p:cNvPr>
+          <p:cNvPicPr>
+            <a:picLocks noChangeAspect="1"/>
+          </p:cNvPicPr>
+          <p:nvPr/>
+        </p:nvPicPr>
+        <p:blipFill>
+          <a:blip r:embed="rId2"/>
+          <a:stretch>
+            <a:fillRect/>
+          </a:stretch>
+        </p:blipFill>
+        <p:spPr>
+          <a:xfrm>
+            <a:off x="8245693" y="1387693"/>
+            <a:ext cx="351861" cy="351861"/>
+          </a:xfrm>
+          <a:prstGeom prst="rect">
+            <a:avLst/>
+          </a:prstGeom>
+        </p:spPr>
+      </p:pic>
+      <p:sp>
+        <p:nvSpPr>
+          <p:cNvPr id="12" name="Text 8"/>
           <p:cNvSpPr txBox="1"/>
           <p:nvPr/>
         </p:nvSpPr>
         <p:spPr>
           <a:xfrm>
             <a:off x="4800600" y="1298448"/>
-            <a:ext cx="3840480" cy="320040"/>
+            <a:ext cx="3291840" cy="320040"/>
           </a:xfrm>
           <a:prstGeom prst="rect">
             <a:avLst/>
@@ -18862,14 +19933,14 @@
       </p:sp>
       <p:sp>
         <p:nvSpPr>
-          <p:cNvPr id="9" name="Text 7"/>
-          <p:cNvSpPr txBox="1"/>
-          <p:nvPr/>
-        </p:nvSpPr>
-        <p:spPr>
-          <a:xfrm>
-            <a:off x="4800600" y="1691640"/>
-            <a:ext cx="3840480" cy="2194560"/>
+          <p:cNvPr id="13" name="Text 9"/>
+          <p:cNvSpPr txBox="1"/>
+          <p:nvPr/>
+        </p:nvSpPr>
+        <p:spPr>
+          <a:xfrm>
+            <a:off x="4800600" y="1847088"/>
+            <a:ext cx="3840480" cy="2039112"/>
           </a:xfrm>
           <a:prstGeom prst="rect">
             <a:avLst/>
@@ -18956,7 +20027,7 @@
       </p:sp>
       <p:sp>
         <p:nvSpPr>
-          <p:cNvPr id="10" name="case-card"/>
+          <p:cNvPr id="14" name="case-card"/>
           <p:cNvSpPr/>
           <p:nvPr/>
         </p:nvSpPr>
@@ -18978,7 +20049,7 @@
       </p:sp>
       <p:sp>
         <p:nvSpPr>
-          <p:cNvPr id="11" name="case-chip"/>
+          <p:cNvPr id="15" name="case-chip"/>
           <p:cNvSpPr/>
           <p:nvPr/>
         </p:nvSpPr>
@@ -19000,7 +20071,7 @@
       </p:sp>
       <p:sp>
         <p:nvSpPr>
-          <p:cNvPr id="12" name="Text 10"/>
+          <p:cNvPr id="16" name="Text 12"/>
           <p:cNvSpPr txBox="1"/>
           <p:nvPr/>
         </p:nvSpPr>
@@ -19036,14 +20107,65 @@
       </p:sp>
       <p:sp>
         <p:nvSpPr>
-          <p:cNvPr id="13" name="Text 11"/>
+          <p:cNvPr id="17" name="img-frame-dropbox"/>
+          <p:cNvSpPr/>
+          <p:nvPr/>
+        </p:nvSpPr>
+        <p:spPr>
+          <a:xfrm>
+            <a:off x="8156448" y="4160520"/>
+            <a:ext cx="530352" cy="530352"/>
+          </a:xfrm>
+          <a:prstGeom prst="roundRect">
+            <a:avLst>
+              <a:gd name="adj" fmla="val 10345"/>
+            </a:avLst>
+          </a:prstGeom>
+          <a:solidFill>
+            <a:schemeClr val="bg1"/>
+          </a:solidFill>
+          <a:ln w="9525">
+            <a:solidFill>
+              <a:schemeClr val="bg2"/>
+            </a:solidFill>
+            <a:prstDash val="solid"/>
+          </a:ln>
+        </p:spPr>
+      </p:sp>
+      <p:pic>
+        <p:nvPicPr>
+          <p:cNvPr id="18" name="img-dropbox" descr="dropbox">    </p:cNvPr>
+          <p:cNvPicPr>
+            <a:picLocks noChangeAspect="1"/>
+          </p:cNvPicPr>
+          <p:nvPr/>
+        </p:nvPicPr>
+        <p:blipFill>
+          <a:blip r:embed="rId3"/>
+          <a:stretch>
+            <a:fillRect/>
+          </a:stretch>
+        </p:blipFill>
+        <p:spPr>
+          <a:xfrm>
+            <a:off x="8225394" y="4229466"/>
+            <a:ext cx="392460" cy="392460"/>
+          </a:xfrm>
+          <a:prstGeom prst="rect">
+            <a:avLst/>
+          </a:prstGeom>
+        </p:spPr>
+      </p:pic>
+      <p:sp>
+        <p:nvSpPr>
+          <p:cNvPr id="19" name="Text 14"/>
           <p:cNvSpPr txBox="1"/>
           <p:nvPr/>
         </p:nvSpPr>
         <p:spPr>
           <a:xfrm>
             <a:off x="1115568" y="4133088"/>
-            <a:ext cx="7571232" cy="292608"/>
+            <a:ext cx="6931152" cy="292608"/>
           </a:xfrm>
           <a:prstGeom prst="rect">
             <a:avLst/>
@@ -19072,14 +20194,14 @@
       </p:sp>
       <p:sp>
         <p:nvSpPr>
-          <p:cNvPr id="14" name="Text 12"/>
+          <p:cNvPr id="20" name="Text 15"/>
           <p:cNvSpPr txBox="1"/>
           <p:nvPr/>
         </p:nvSpPr>
         <p:spPr>
           <a:xfrm>
             <a:off x="475488" y="4453128"/>
-            <a:ext cx="8193024" cy="274320"/>
+            <a:ext cx="7552944" cy="274320"/>
           </a:xfrm>
           <a:prstGeom prst="rect">
             <a:avLst/>
@@ -19111,7 +20233,7 @@
       </p:sp>
       <p:sp>
         <p:nvSpPr>
-          <p:cNvPr id="15" name="Text 13"/>
+          <p:cNvPr id="21" name="Text 16"/>
           <p:cNvSpPr txBox="1"/>
           <p:nvPr/>
         </p:nvSpPr>
@@ -19869,14 +20991,65 @@
       </p:sp>
       <p:sp>
         <p:nvSpPr>
-          <p:cNvPr id="21" name="Text 19"/>
+          <p:cNvPr id="21" name="img-frame-nsf"/>
+          <p:cNvSpPr/>
+          <p:nvPr/>
+        </p:nvSpPr>
+        <p:spPr>
+          <a:xfrm>
+            <a:off x="8119872" y="3520440"/>
+            <a:ext cx="566928" cy="566928"/>
+          </a:xfrm>
+          <a:prstGeom prst="roundRect">
+            <a:avLst>
+              <a:gd name="adj" fmla="val 9677"/>
+            </a:avLst>
+          </a:prstGeom>
+          <a:solidFill>
+            <a:schemeClr val="bg1"/>
+          </a:solidFill>
+          <a:ln w="9525">
+            <a:solidFill>
+              <a:schemeClr val="bg2"/>
+            </a:solidFill>
+            <a:prstDash val="solid"/>
+          </a:ln>
+        </p:spPr>
+      </p:sp>
+      <p:pic>
+        <p:nvPicPr>
+          <p:cNvPr id="22" name="img-nsf" descr="nsf">    </p:cNvPr>
+          <p:cNvPicPr>
+            <a:picLocks noChangeAspect="1"/>
+          </p:cNvPicPr>
+          <p:nvPr/>
+        </p:nvPicPr>
+        <p:blipFill>
+          <a:blip r:embed="rId1"/>
+          <a:stretch>
+            <a:fillRect/>
+          </a:stretch>
+        </p:blipFill>
+        <p:spPr>
+          <a:xfrm>
+            <a:off x="8193573" y="3594141"/>
+            <a:ext cx="419527" cy="419527"/>
+          </a:xfrm>
+          <a:prstGeom prst="rect">
+            <a:avLst/>
+          </a:prstGeom>
+        </p:spPr>
+      </p:pic>
+      <p:sp>
+        <p:nvSpPr>
+          <p:cNvPr id="23" name="Text 20"/>
           <p:cNvSpPr txBox="1"/>
           <p:nvPr/>
         </p:nvSpPr>
         <p:spPr>
           <a:xfrm>
             <a:off x="1115568" y="3493008"/>
-            <a:ext cx="7571232" cy="292608"/>
+            <a:ext cx="6894576" cy="292608"/>
           </a:xfrm>
           <a:prstGeom prst="rect">
             <a:avLst/>
@@ -19905,14 +21078,14 @@
       </p:sp>
       <p:sp>
         <p:nvSpPr>
-          <p:cNvPr id="22" name="Text 20"/>
+          <p:cNvPr id="24" name="Text 21"/>
           <p:cNvSpPr txBox="1"/>
           <p:nvPr/>
         </p:nvSpPr>
         <p:spPr>
           <a:xfrm>
             <a:off x="475488" y="3813048"/>
-            <a:ext cx="8193024" cy="905256"/>
+            <a:ext cx="7516368" cy="905256"/>
           </a:xfrm>
           <a:prstGeom prst="rect">
             <a:avLst/>
@@ -19963,7 +21136,7 @@
       </p:sp>
       <p:sp>
         <p:nvSpPr>
-          <p:cNvPr id="23" name="Text 21"/>
+          <p:cNvPr id="25" name="Text 22"/>
           <p:cNvSpPr txBox="1"/>
           <p:nvPr/>
         </p:nvSpPr>
@@ -20439,14 +21612,65 @@
       </p:sp>
       <p:sp>
         <p:nvSpPr>
-          <p:cNvPr id="10" name="Text 8"/>
-          <p:cNvSpPr txBox="1"/>
-          <p:nvPr/>
-        </p:nvSpPr>
-        <p:spPr>
-          <a:xfrm>
-            <a:off x="420624" y="4261104"/>
-            <a:ext cx="2130552" cy="512064"/>
+          <p:cNvPr id="10" name="img-frame-m3"/>
+          <p:cNvSpPr/>
+          <p:nvPr/>
+        </p:nvSpPr>
+        <p:spPr>
+          <a:xfrm>
+            <a:off x="420624" y="4297680"/>
+            <a:ext cx="438912" cy="438912"/>
+          </a:xfrm>
+          <a:prstGeom prst="roundRect">
+            <a:avLst>
+              <a:gd name="adj" fmla="val 12500"/>
+            </a:avLst>
+          </a:prstGeom>
+          <a:solidFill>
+            <a:schemeClr val="bg1"/>
+          </a:solidFill>
+          <a:ln w="9525">
+            <a:solidFill>
+              <a:schemeClr val="bg2"/>
+            </a:solidFill>
+            <a:prstDash val="solid"/>
+          </a:ln>
+        </p:spPr>
+      </p:sp>
+      <p:pic>
+        <p:nvPicPr>
+          <p:cNvPr id="11" name="img-m3" descr="m3">    </p:cNvPr>
+          <p:cNvPicPr>
+            <a:picLocks noChangeAspect="1"/>
+          </p:cNvPicPr>
+          <p:nvPr/>
+        </p:nvPicPr>
+        <p:blipFill>
+          <a:blip r:embed="rId1"/>
+          <a:stretch>
+            <a:fillRect/>
+          </a:stretch>
+        </p:blipFill>
+        <p:spPr>
+          <a:xfrm>
+            <a:off x="477683" y="4354739"/>
+            <a:ext cx="324795" cy="324795"/>
+          </a:xfrm>
+          <a:prstGeom prst="rect">
+            <a:avLst/>
+          </a:prstGeom>
+        </p:spPr>
+      </p:pic>
+      <p:sp>
+        <p:nvSpPr>
+          <p:cNvPr id="12" name="Text 9"/>
+          <p:cNvSpPr txBox="1"/>
+          <p:nvPr/>
+        </p:nvSpPr>
+        <p:spPr>
+          <a:xfrm>
+            <a:off x="914400" y="4261104"/>
+            <a:ext cx="1636776" cy="512064"/>
           </a:xfrm>
           <a:prstGeom prst="rect">
             <a:avLst/>
@@ -20486,7 +21710,7 @@
       </p:sp>
       <p:sp>
         <p:nvSpPr>
-          <p:cNvPr id="11" name="colhead-1"/>
+          <p:cNvPr id="13" name="colhead-1"/>
           <p:cNvSpPr/>
           <p:nvPr/>
         </p:nvSpPr>
@@ -20506,7 +21730,7 @@
       </p:sp>
       <p:sp>
         <p:nvSpPr>
-          <p:cNvPr id="12" name="Text 10"/>
+          <p:cNvPr id="14" name="Text 11"/>
           <p:cNvSpPr txBox="1"/>
           <p:nvPr/>
         </p:nvSpPr>
@@ -20556,7 +21780,7 @@
       </p:sp>
       <p:sp>
         <p:nvSpPr>
-          <p:cNvPr id="13" name="colbody-1"/>
+          <p:cNvPr id="15" name="colbody-1"/>
           <p:cNvSpPr/>
           <p:nvPr/>
         </p:nvSpPr>
@@ -20576,7 +21800,7 @@
       </p:sp>
       <p:sp>
         <p:nvSpPr>
-          <p:cNvPr id="14" name="Text 12"/>
+          <p:cNvPr id="16" name="Text 13"/>
           <p:cNvSpPr txBox="1"/>
           <p:nvPr/>
         </p:nvSpPr>
@@ -20612,7 +21836,7 @@
       </p:sp>
       <p:sp>
         <p:nvSpPr>
-          <p:cNvPr id="15" name="Text 13"/>
+          <p:cNvPr id="17" name="Text 14"/>
           <p:cNvSpPr txBox="1"/>
           <p:nvPr/>
         </p:nvSpPr>
@@ -20727,7 +21951,7 @@
       </p:sp>
       <p:sp>
         <p:nvSpPr>
-          <p:cNvPr id="16" name="colcase-1"/>
+          <p:cNvPr id="18" name="colcase-1"/>
           <p:cNvSpPr/>
           <p:nvPr/>
         </p:nvSpPr>
@@ -20749,14 +21973,65 @@
       </p:sp>
       <p:sp>
         <p:nvSpPr>
-          <p:cNvPr id="17" name="Text 15"/>
-          <p:cNvSpPr txBox="1"/>
-          <p:nvPr/>
-        </p:nvSpPr>
-        <p:spPr>
-          <a:xfrm>
-            <a:off x="2798064" y="4261104"/>
-            <a:ext cx="2130552" cy="512064"/>
+          <p:cNvPr id="19" name="img-frame-airbnb"/>
+          <p:cNvSpPr/>
+          <p:nvPr/>
+        </p:nvSpPr>
+        <p:spPr>
+          <a:xfrm>
+            <a:off x="2798064" y="4297680"/>
+            <a:ext cx="438912" cy="438912"/>
+          </a:xfrm>
+          <a:prstGeom prst="roundRect">
+            <a:avLst>
+              <a:gd name="adj" fmla="val 12500"/>
+            </a:avLst>
+          </a:prstGeom>
+          <a:solidFill>
+            <a:schemeClr val="bg1"/>
+          </a:solidFill>
+          <a:ln w="9525">
+            <a:solidFill>
+              <a:schemeClr val="bg2"/>
+            </a:solidFill>
+            <a:prstDash val="solid"/>
+          </a:ln>
+        </p:spPr>
+      </p:sp>
+      <p:pic>
+        <p:nvPicPr>
+          <p:cNvPr id="20" name="img-airbnb" descr="airbnb">    </p:cNvPr>
+          <p:cNvPicPr>
+            <a:picLocks noChangeAspect="1"/>
+          </p:cNvPicPr>
+          <p:nvPr/>
+        </p:nvPicPr>
+        <p:blipFill>
+          <a:blip r:embed="rId2"/>
+          <a:stretch>
+            <a:fillRect/>
+          </a:stretch>
+        </p:blipFill>
+        <p:spPr>
+          <a:xfrm>
+            <a:off x="2855123" y="4354739"/>
+            <a:ext cx="324795" cy="324795"/>
+          </a:xfrm>
+          <a:prstGeom prst="rect">
+            <a:avLst/>
+          </a:prstGeom>
+        </p:spPr>
+      </p:pic>
+      <p:sp>
+        <p:nvSpPr>
+          <p:cNvPr id="21" name="Text 17"/>
+          <p:cNvSpPr txBox="1"/>
+          <p:nvPr/>
+        </p:nvSpPr>
+        <p:spPr>
+          <a:xfrm>
+            <a:off x="3291840" y="4261104"/>
+            <a:ext cx="1636776" cy="512064"/>
           </a:xfrm>
           <a:prstGeom prst="rect">
             <a:avLst/>
@@ -20796,7 +22071,7 @@
       </p:sp>
       <p:sp>
         <p:nvSpPr>
-          <p:cNvPr id="18" name="colhead-2"/>
+          <p:cNvPr id="22" name="colhead-2"/>
           <p:cNvSpPr/>
           <p:nvPr/>
         </p:nvSpPr>
@@ -20816,7 +22091,7 @@
       </p:sp>
       <p:sp>
         <p:nvSpPr>
-          <p:cNvPr id="19" name="Text 17"/>
+          <p:cNvPr id="23" name="Text 19"/>
           <p:cNvSpPr txBox="1"/>
           <p:nvPr/>
         </p:nvSpPr>
@@ -20866,7 +22141,7 @@
       </p:sp>
       <p:sp>
         <p:nvSpPr>
-          <p:cNvPr id="20" name="colbody-2"/>
+          <p:cNvPr id="24" name="colbody-2"/>
           <p:cNvSpPr/>
           <p:nvPr/>
         </p:nvSpPr>
@@ -20886,7 +22161,7 @@
       </p:sp>
       <p:sp>
         <p:nvSpPr>
-          <p:cNvPr id="21" name="Text 19"/>
+          <p:cNvPr id="25" name="Text 21"/>
           <p:cNvSpPr txBox="1"/>
           <p:nvPr/>
         </p:nvSpPr>
@@ -20922,7 +22197,7 @@
       </p:sp>
       <p:sp>
         <p:nvSpPr>
-          <p:cNvPr id="22" name="Text 20"/>
+          <p:cNvPr id="26" name="Text 22"/>
           <p:cNvSpPr txBox="1"/>
           <p:nvPr/>
         </p:nvSpPr>
@@ -21192,7 +22467,7 @@
       </p:sp>
       <p:sp>
         <p:nvSpPr>
-          <p:cNvPr id="23" name="colcase-2"/>
+          <p:cNvPr id="27" name="colcase-2"/>
           <p:cNvSpPr/>
           <p:nvPr/>
         </p:nvSpPr>
@@ -21214,14 +22489,65 @@
       </p:sp>
       <p:sp>
         <p:nvSpPr>
-          <p:cNvPr id="24" name="Text 22"/>
-          <p:cNvSpPr txBox="1"/>
-          <p:nvPr/>
-        </p:nvSpPr>
-        <p:spPr>
-          <a:xfrm>
-            <a:off x="5175504" y="4261104"/>
-            <a:ext cx="3547872" cy="512064"/>
+          <p:cNvPr id="28" name="img-frame-dropbox"/>
+          <p:cNvSpPr/>
+          <p:nvPr/>
+        </p:nvSpPr>
+        <p:spPr>
+          <a:xfrm>
+            <a:off x="5175504" y="4297680"/>
+            <a:ext cx="438912" cy="438912"/>
+          </a:xfrm>
+          <a:prstGeom prst="roundRect">
+            <a:avLst>
+              <a:gd name="adj" fmla="val 12500"/>
+            </a:avLst>
+          </a:prstGeom>
+          <a:solidFill>
+            <a:schemeClr val="bg1"/>
+          </a:solidFill>
+          <a:ln w="9525">
+            <a:solidFill>
+              <a:schemeClr val="bg2"/>
+            </a:solidFill>
+            <a:prstDash val="solid"/>
+          </a:ln>
+        </p:spPr>
+      </p:sp>
+      <p:pic>
+        <p:nvPicPr>
+          <p:cNvPr id="29" name="img-dropbox" descr="dropbox">    </p:cNvPr>
+          <p:cNvPicPr>
+            <a:picLocks noChangeAspect="1"/>
+          </p:cNvPicPr>
+          <p:nvPr/>
+        </p:nvPicPr>
+        <p:blipFill>
+          <a:blip r:embed="rId3"/>
+          <a:stretch>
+            <a:fillRect/>
+          </a:stretch>
+        </p:blipFill>
+        <p:spPr>
+          <a:xfrm>
+            <a:off x="5232563" y="4354739"/>
+            <a:ext cx="324795" cy="324795"/>
+          </a:xfrm>
+          <a:prstGeom prst="rect">
+            <a:avLst/>
+          </a:prstGeom>
+        </p:spPr>
+      </p:pic>
+      <p:sp>
+        <p:nvSpPr>
+          <p:cNvPr id="30" name="Text 25"/>
+          <p:cNvSpPr txBox="1"/>
+          <p:nvPr/>
+        </p:nvSpPr>
+        <p:spPr>
+          <a:xfrm>
+            <a:off x="5669280" y="4261104"/>
+            <a:ext cx="3054096" cy="512064"/>
           </a:xfrm>
           <a:prstGeom prst="rect">
             <a:avLst/>
@@ -21261,7 +22587,7 @@
       </p:sp>
       <p:sp>
         <p:nvSpPr>
-          <p:cNvPr id="25" name="Text 23"/>
+          <p:cNvPr id="31" name="Text 26"/>
           <p:cNvSpPr txBox="1"/>
           <p:nvPr/>
         </p:nvSpPr>
@@ -21465,14 +22791,65 @@
       </p:sp>
       <p:sp>
         <p:nvSpPr>
-          <p:cNvPr id="5" name="Text 3"/>
+          <p:cNvPr id="5" name="img-frame-nasa"/>
+          <p:cNvSpPr/>
+          <p:nvPr/>
+        </p:nvSpPr>
+        <p:spPr>
+          <a:xfrm>
+            <a:off x="4005072" y="1307592"/>
+            <a:ext cx="402336" cy="402336"/>
+          </a:xfrm>
+          <a:prstGeom prst="roundRect">
+            <a:avLst>
+              <a:gd name="adj" fmla="val 13636"/>
+            </a:avLst>
+          </a:prstGeom>
+          <a:solidFill>
+            <a:schemeClr val="bg1"/>
+          </a:solidFill>
+          <a:ln w="9525">
+            <a:solidFill>
+              <a:schemeClr val="bg2"/>
+            </a:solidFill>
+            <a:prstDash val="solid"/>
+          </a:ln>
+        </p:spPr>
+      </p:sp>
+      <p:pic>
+        <p:nvPicPr>
+          <p:cNvPr id="6" name="img-nasa" descr="nasa">    </p:cNvPr>
+          <p:cNvPicPr>
+            <a:picLocks noChangeAspect="1"/>
+          </p:cNvPicPr>
+          <p:nvPr/>
+        </p:nvPicPr>
+        <p:blipFill>
+          <a:blip r:embed="rId1"/>
+          <a:stretch>
+            <a:fillRect/>
+          </a:stretch>
+        </p:blipFill>
+        <p:spPr>
+          <a:xfrm>
+            <a:off x="4057376" y="1359896"/>
+            <a:ext cx="297729" cy="297729"/>
+          </a:xfrm>
+          <a:prstGeom prst="rect">
+            <a:avLst/>
+          </a:prstGeom>
+        </p:spPr>
+      </p:pic>
+      <p:sp>
+        <p:nvSpPr>
+          <p:cNvPr id="7" name="Text 4"/>
           <p:cNvSpPr txBox="1"/>
           <p:nvPr/>
         </p:nvSpPr>
         <p:spPr>
           <a:xfrm>
             <a:off x="438912" y="1280160"/>
-            <a:ext cx="3968496" cy="292608"/>
+            <a:ext cx="3566160" cy="292608"/>
           </a:xfrm>
           <a:prstGeom prst="rect">
             <a:avLst/>
@@ -21512,14 +22889,14 @@
       </p:sp>
       <p:sp>
         <p:nvSpPr>
-          <p:cNvPr id="6" name="Text 4"/>
+          <p:cNvPr id="8" name="Text 5"/>
           <p:cNvSpPr txBox="1"/>
           <p:nvPr/>
         </p:nvSpPr>
         <p:spPr>
           <a:xfrm>
             <a:off x="438912" y="1563624"/>
-            <a:ext cx="3968496" cy="219456"/>
+            <a:ext cx="3566160" cy="219456"/>
           </a:xfrm>
           <a:prstGeom prst="rect">
             <a:avLst/>
@@ -21548,7 +22925,7 @@
       </p:sp>
       <p:sp>
         <p:nvSpPr>
-          <p:cNvPr id="7" name="Text 5"/>
+          <p:cNvPr id="9" name="Text 6"/>
           <p:cNvSpPr txBox="1"/>
           <p:nvPr/>
         </p:nvSpPr>
@@ -21584,7 +22961,7 @@
       </p:sp>
       <p:sp>
         <p:nvSpPr>
-          <p:cNvPr id="8" name="card-case-0"/>
+          <p:cNvPr id="10" name="card-case-0"/>
           <p:cNvSpPr/>
           <p:nvPr/>
         </p:nvSpPr>
@@ -21606,7 +22983,7 @@
       </p:sp>
       <p:sp>
         <p:nvSpPr>
-          <p:cNvPr id="9" name="Text 7"/>
+          <p:cNvPr id="11" name="Text 8"/>
           <p:cNvSpPr txBox="1"/>
           <p:nvPr/>
         </p:nvSpPr>
@@ -21653,7 +23030,7 @@
       </p:sp>
       <p:sp>
         <p:nvSpPr>
-          <p:cNvPr id="10" name="card-1"/>
+          <p:cNvPr id="12" name="card-1"/>
           <p:cNvSpPr/>
           <p:nvPr/>
         </p:nvSpPr>
@@ -21675,14 +23052,65 @@
       </p:sp>
       <p:sp>
         <p:nvSpPr>
-          <p:cNvPr id="11" name="Text 9"/>
+          <p:cNvPr id="13" name="img-frame-factory"/>
+          <p:cNvSpPr/>
+          <p:nvPr/>
+        </p:nvSpPr>
+        <p:spPr>
+          <a:xfrm>
+            <a:off x="8302752" y="1307592"/>
+            <a:ext cx="402336" cy="402336"/>
+          </a:xfrm>
+          <a:prstGeom prst="roundRect">
+            <a:avLst>
+              <a:gd name="adj" fmla="val 13636"/>
+            </a:avLst>
+          </a:prstGeom>
+          <a:solidFill>
+            <a:schemeClr val="bg1"/>
+          </a:solidFill>
+          <a:ln w="9525">
+            <a:solidFill>
+              <a:schemeClr val="bg2"/>
+            </a:solidFill>
+            <a:prstDash val="solid"/>
+          </a:ln>
+        </p:spPr>
+      </p:sp>
+      <p:pic>
+        <p:nvPicPr>
+          <p:cNvPr id="14" name="img-factory" descr="factory">    </p:cNvPr>
+          <p:cNvPicPr>
+            <a:picLocks noChangeAspect="1"/>
+          </p:cNvPicPr>
+          <p:nvPr/>
+        </p:nvPicPr>
+        <p:blipFill>
+          <a:blip r:embed="rId2"/>
+          <a:stretch>
+            <a:fillRect/>
+          </a:stretch>
+        </p:blipFill>
+        <p:spPr>
+          <a:xfrm>
+            <a:off x="8355056" y="1359896"/>
+            <a:ext cx="297729" cy="297729"/>
+          </a:xfrm>
+          <a:prstGeom prst="rect">
+            <a:avLst/>
+          </a:prstGeom>
+        </p:spPr>
+      </p:pic>
+      <p:sp>
+        <p:nvSpPr>
+          <p:cNvPr id="15" name="Text 11"/>
           <p:cNvSpPr txBox="1"/>
           <p:nvPr/>
         </p:nvSpPr>
         <p:spPr>
           <a:xfrm>
             <a:off x="4736592" y="1280160"/>
-            <a:ext cx="3968496" cy="292608"/>
+            <a:ext cx="3566160" cy="292608"/>
           </a:xfrm>
           <a:prstGeom prst="rect">
             <a:avLst/>
@@ -21722,14 +23150,14 @@
       </p:sp>
       <p:sp>
         <p:nvSpPr>
-          <p:cNvPr id="12" name="Text 10"/>
+          <p:cNvPr id="16" name="Text 12"/>
           <p:cNvSpPr txBox="1"/>
           <p:nvPr/>
         </p:nvSpPr>
         <p:spPr>
           <a:xfrm>
             <a:off x="4736592" y="1563624"/>
-            <a:ext cx="3968496" cy="219456"/>
+            <a:ext cx="3566160" cy="219456"/>
           </a:xfrm>
           <a:prstGeom prst="rect">
             <a:avLst/>
@@ -21758,7 +23186,7 @@
       </p:sp>
       <p:sp>
         <p:nvSpPr>
-          <p:cNvPr id="13" name="Text 11"/>
+          <p:cNvPr id="17" name="Text 13"/>
           <p:cNvSpPr txBox="1"/>
           <p:nvPr/>
         </p:nvSpPr>
@@ -21794,7 +23222,7 @@
       </p:sp>
       <p:sp>
         <p:nvSpPr>
-          <p:cNvPr id="14" name="card-case-1"/>
+          <p:cNvPr id="18" name="card-case-1"/>
           <p:cNvSpPr/>
           <p:nvPr/>
         </p:nvSpPr>
@@ -21816,7 +23244,7 @@
       </p:sp>
       <p:sp>
         <p:nvSpPr>
-          <p:cNvPr id="15" name="Text 13"/>
+          <p:cNvPr id="19" name="Text 15"/>
           <p:cNvSpPr txBox="1"/>
           <p:nvPr/>
         </p:nvSpPr>
@@ -21863,7 +23291,7 @@
       </p:sp>
       <p:sp>
         <p:nvSpPr>
-          <p:cNvPr id="16" name="card-2"/>
+          <p:cNvPr id="20" name="card-2"/>
           <p:cNvSpPr/>
           <p:nvPr/>
         </p:nvSpPr>
@@ -21885,14 +23313,65 @@
       </p:sp>
       <p:sp>
         <p:nvSpPr>
-          <p:cNvPr id="17" name="Text 15"/>
+          <p:cNvPr id="21" name="img-frame-tesla"/>
+          <p:cNvSpPr/>
+          <p:nvPr/>
+        </p:nvSpPr>
+        <p:spPr>
+          <a:xfrm>
+            <a:off x="4005072" y="3154680"/>
+            <a:ext cx="402336" cy="402336"/>
+          </a:xfrm>
+          <a:prstGeom prst="roundRect">
+            <a:avLst>
+              <a:gd name="adj" fmla="val 13636"/>
+            </a:avLst>
+          </a:prstGeom>
+          <a:solidFill>
+            <a:schemeClr val="bg1"/>
+          </a:solidFill>
+          <a:ln w="9525">
+            <a:solidFill>
+              <a:schemeClr val="bg2"/>
+            </a:solidFill>
+            <a:prstDash val="solid"/>
+          </a:ln>
+        </p:spPr>
+      </p:sp>
+      <p:pic>
+        <p:nvPicPr>
+          <p:cNvPr id="22" name="img-tesla" descr="tesla">    </p:cNvPr>
+          <p:cNvPicPr>
+            <a:picLocks noChangeAspect="1"/>
+          </p:cNvPicPr>
+          <p:nvPr/>
+        </p:nvPicPr>
+        <p:blipFill>
+          <a:blip r:embed="rId3"/>
+          <a:stretch>
+            <a:fillRect/>
+          </a:stretch>
+        </p:blipFill>
+        <p:spPr>
+          <a:xfrm>
+            <a:off x="4057376" y="3206984"/>
+            <a:ext cx="297729" cy="297729"/>
+          </a:xfrm>
+          <a:prstGeom prst="rect">
+            <a:avLst/>
+          </a:prstGeom>
+        </p:spPr>
+      </p:pic>
+      <p:sp>
+        <p:nvSpPr>
+          <p:cNvPr id="23" name="Text 18"/>
           <p:cNvSpPr txBox="1"/>
           <p:nvPr/>
         </p:nvSpPr>
         <p:spPr>
           <a:xfrm>
             <a:off x="438912" y="3127248"/>
-            <a:ext cx="3968496" cy="292608"/>
+            <a:ext cx="3566160" cy="292608"/>
           </a:xfrm>
           <a:prstGeom prst="rect">
             <a:avLst/>
@@ -21932,14 +23411,14 @@
       </p:sp>
       <p:sp>
         <p:nvSpPr>
-          <p:cNvPr id="18" name="Text 16"/>
+          <p:cNvPr id="24" name="Text 19"/>
           <p:cNvSpPr txBox="1"/>
           <p:nvPr/>
         </p:nvSpPr>
         <p:spPr>
           <a:xfrm>
             <a:off x="438912" y="3410712"/>
-            <a:ext cx="3968496" cy="219456"/>
+            <a:ext cx="3566160" cy="219456"/>
           </a:xfrm>
           <a:prstGeom prst="rect">
             <a:avLst/>
@@ -21968,7 +23447,7 @@
       </p:sp>
       <p:sp>
         <p:nvSpPr>
-          <p:cNvPr id="19" name="Text 17"/>
+          <p:cNvPr id="25" name="Text 20"/>
           <p:cNvSpPr txBox="1"/>
           <p:nvPr/>
         </p:nvSpPr>
@@ -22004,7 +23483,7 @@
       </p:sp>
       <p:sp>
         <p:nvSpPr>
-          <p:cNvPr id="20" name="card-case-2"/>
+          <p:cNvPr id="26" name="card-case-2"/>
           <p:cNvSpPr/>
           <p:nvPr/>
         </p:nvSpPr>
@@ -22026,7 +23505,7 @@
       </p:sp>
       <p:sp>
         <p:nvSpPr>
-          <p:cNvPr id="21" name="Text 19"/>
+          <p:cNvPr id="27" name="Text 22"/>
           <p:cNvSpPr txBox="1"/>
           <p:nvPr/>
         </p:nvSpPr>
@@ -22073,7 +23552,7 @@
       </p:sp>
       <p:sp>
         <p:nvSpPr>
-          <p:cNvPr id="22" name="card-3"/>
+          <p:cNvPr id="28" name="card-3"/>
           <p:cNvSpPr/>
           <p:nvPr/>
         </p:nvSpPr>
@@ -22095,14 +23574,65 @@
       </p:sp>
       <p:sp>
         <p:nvSpPr>
-          <p:cNvPr id="23" name="Text 21"/>
+          <p:cNvPr id="29" name="img-frame-m3"/>
+          <p:cNvSpPr/>
+          <p:nvPr/>
+        </p:nvSpPr>
+        <p:spPr>
+          <a:xfrm>
+            <a:off x="8302752" y="3154680"/>
+            <a:ext cx="402336" cy="402336"/>
+          </a:xfrm>
+          <a:prstGeom prst="roundRect">
+            <a:avLst>
+              <a:gd name="adj" fmla="val 13636"/>
+            </a:avLst>
+          </a:prstGeom>
+          <a:solidFill>
+            <a:schemeClr val="bg1"/>
+          </a:solidFill>
+          <a:ln w="9525">
+            <a:solidFill>
+              <a:schemeClr val="bg2"/>
+            </a:solidFill>
+            <a:prstDash val="solid"/>
+          </a:ln>
+        </p:spPr>
+      </p:sp>
+      <p:pic>
+        <p:nvPicPr>
+          <p:cNvPr id="30" name="img-m3" descr="m3">    </p:cNvPr>
+          <p:cNvPicPr>
+            <a:picLocks noChangeAspect="1"/>
+          </p:cNvPicPr>
+          <p:nvPr/>
+        </p:nvPicPr>
+        <p:blipFill>
+          <a:blip r:embed="rId4"/>
+          <a:stretch>
+            <a:fillRect/>
+          </a:stretch>
+        </p:blipFill>
+        <p:spPr>
+          <a:xfrm>
+            <a:off x="8355056" y="3206984"/>
+            <a:ext cx="297729" cy="297729"/>
+          </a:xfrm>
+          <a:prstGeom prst="rect">
+            <a:avLst/>
+          </a:prstGeom>
+        </p:spPr>
+      </p:pic>
+      <p:sp>
+        <p:nvSpPr>
+          <p:cNvPr id="31" name="Text 25"/>
           <p:cNvSpPr txBox="1"/>
           <p:nvPr/>
         </p:nvSpPr>
         <p:spPr>
           <a:xfrm>
             <a:off x="4736592" y="3127248"/>
-            <a:ext cx="3968496" cy="292608"/>
+            <a:ext cx="3566160" cy="292608"/>
           </a:xfrm>
           <a:prstGeom prst="rect">
             <a:avLst/>
@@ -22142,14 +23672,14 @@
       </p:sp>
       <p:sp>
         <p:nvSpPr>
-          <p:cNvPr id="24" name="Text 22"/>
+          <p:cNvPr id="32" name="Text 26"/>
           <p:cNvSpPr txBox="1"/>
           <p:nvPr/>
         </p:nvSpPr>
         <p:spPr>
           <a:xfrm>
             <a:off x="4736592" y="3410712"/>
-            <a:ext cx="3968496" cy="219456"/>
+            <a:ext cx="3566160" cy="219456"/>
           </a:xfrm>
           <a:prstGeom prst="rect">
             <a:avLst/>
@@ -22178,7 +23708,7 @@
       </p:sp>
       <p:sp>
         <p:nvSpPr>
-          <p:cNvPr id="25" name="Text 23"/>
+          <p:cNvPr id="33" name="Text 27"/>
           <p:cNvSpPr txBox="1"/>
           <p:nvPr/>
         </p:nvSpPr>
@@ -22214,7 +23744,7 @@
       </p:sp>
       <p:sp>
         <p:nvSpPr>
-          <p:cNvPr id="26" name="card-case-3"/>
+          <p:cNvPr id="34" name="card-case-3"/>
           <p:cNvSpPr/>
           <p:nvPr/>
         </p:nvSpPr>
@@ -22236,7 +23766,7 @@
       </p:sp>
       <p:sp>
         <p:nvSpPr>
-          <p:cNvPr id="27" name="Text 25"/>
+          <p:cNvPr id="35" name="Text 29"/>
           <p:cNvSpPr txBox="1"/>
           <p:nvPr/>
         </p:nvSpPr>
@@ -22283,7 +23813,7 @@
       </p:sp>
       <p:sp>
         <p:nvSpPr>
-          <p:cNvPr id="28" name="Text 26"/>
+          <p:cNvPr id="36" name="Text 30"/>
           <p:cNvSpPr txBox="1"/>
           <p:nvPr/>
         </p:nvSpPr>
@@ -22487,14 +24017,65 @@
       </p:sp>
       <p:sp>
         <p:nvSpPr>
-          <p:cNvPr id="5" name="Text 3"/>
+          <p:cNvPr id="5" name="img-frame-spanx"/>
+          <p:cNvSpPr/>
+          <p:nvPr/>
+        </p:nvSpPr>
+        <p:spPr>
+          <a:xfrm>
+            <a:off x="2572512" y="1307592"/>
+            <a:ext cx="402336" cy="402336"/>
+          </a:xfrm>
+          <a:prstGeom prst="roundRect">
+            <a:avLst>
+              <a:gd name="adj" fmla="val 13636"/>
+            </a:avLst>
+          </a:prstGeom>
+          <a:solidFill>
+            <a:schemeClr val="bg1"/>
+          </a:solidFill>
+          <a:ln w="9525">
+            <a:solidFill>
+              <a:schemeClr val="bg2"/>
+            </a:solidFill>
+            <a:prstDash val="solid"/>
+          </a:ln>
+        </p:spPr>
+      </p:sp>
+      <p:pic>
+        <p:nvPicPr>
+          <p:cNvPr id="6" name="img-spanx" descr="spanx">    </p:cNvPr>
+          <p:cNvPicPr>
+            <a:picLocks noChangeAspect="1"/>
+          </p:cNvPicPr>
+          <p:nvPr/>
+        </p:nvPicPr>
+        <p:blipFill>
+          <a:blip r:embed="rId1"/>
+          <a:stretch>
+            <a:fillRect/>
+          </a:stretch>
+        </p:blipFill>
+        <p:spPr>
+          <a:xfrm>
+            <a:off x="2624816" y="1359896"/>
+            <a:ext cx="297729" cy="297729"/>
+          </a:xfrm>
+          <a:prstGeom prst="rect">
+            <a:avLst/>
+          </a:prstGeom>
+        </p:spPr>
+      </p:pic>
+      <p:sp>
+        <p:nvSpPr>
+          <p:cNvPr id="7" name="Text 4"/>
           <p:cNvSpPr txBox="1"/>
           <p:nvPr/>
         </p:nvSpPr>
         <p:spPr>
           <a:xfrm>
             <a:off x="438912" y="1280160"/>
-            <a:ext cx="2535936" cy="292608"/>
+            <a:ext cx="2133600" cy="457200"/>
           </a:xfrm>
           <a:prstGeom prst="rect">
             <a:avLst/>
@@ -22534,14 +24115,14 @@
       </p:sp>
       <p:sp>
         <p:nvSpPr>
-          <p:cNvPr id="6" name="Text 4"/>
-          <p:cNvSpPr txBox="1"/>
-          <p:nvPr/>
-        </p:nvSpPr>
-        <p:spPr>
-          <a:xfrm>
-            <a:off x="438912" y="1563624"/>
-            <a:ext cx="2535936" cy="219456"/>
+          <p:cNvPr id="8" name="Text 5"/>
+          <p:cNvSpPr txBox="1"/>
+          <p:nvPr/>
+        </p:nvSpPr>
+        <p:spPr>
+          <a:xfrm>
+            <a:off x="438912" y="1728216"/>
+            <a:ext cx="2133600" cy="219456"/>
           </a:xfrm>
           <a:prstGeom prst="rect">
             <a:avLst/>
@@ -22570,14 +24151,14 @@
       </p:sp>
       <p:sp>
         <p:nvSpPr>
-          <p:cNvPr id="7" name="Text 5"/>
-          <p:cNvSpPr txBox="1"/>
-          <p:nvPr/>
-        </p:nvSpPr>
-        <p:spPr>
-          <a:xfrm>
-            <a:off x="438912" y="1783080"/>
-            <a:ext cx="2535936" cy="1554480"/>
+          <p:cNvPr id="9" name="Text 6"/>
+          <p:cNvSpPr txBox="1"/>
+          <p:nvPr/>
+        </p:nvSpPr>
+        <p:spPr>
+          <a:xfrm>
+            <a:off x="438912" y="1947672"/>
+            <a:ext cx="2535936" cy="1463040"/>
           </a:xfrm>
           <a:prstGeom prst="rect">
             <a:avLst/>
@@ -22606,7 +24187,7 @@
       </p:sp>
       <p:sp>
         <p:nvSpPr>
-          <p:cNvPr id="8" name="card-case-0"/>
+          <p:cNvPr id="10" name="card-case-0"/>
           <p:cNvSpPr/>
           <p:nvPr/>
         </p:nvSpPr>
@@ -22628,7 +24209,7 @@
       </p:sp>
       <p:sp>
         <p:nvSpPr>
-          <p:cNvPr id="9" name="Text 7"/>
+          <p:cNvPr id="11" name="Text 8"/>
           <p:cNvSpPr txBox="1"/>
           <p:nvPr/>
         </p:nvSpPr>
@@ -22675,7 +24256,7 @@
       </p:sp>
       <p:sp>
         <p:nvSpPr>
-          <p:cNvPr id="10" name="card-1"/>
+          <p:cNvPr id="12" name="card-1"/>
           <p:cNvSpPr/>
           <p:nvPr/>
         </p:nvSpPr>
@@ -22697,14 +24278,65 @@
       </p:sp>
       <p:sp>
         <p:nvSpPr>
-          <p:cNvPr id="11" name="Text 9"/>
+          <p:cNvPr id="13" name="img-frame-cirque"/>
+          <p:cNvSpPr/>
+          <p:nvPr/>
+        </p:nvSpPr>
+        <p:spPr>
+          <a:xfrm>
+            <a:off x="5437632" y="1307592"/>
+            <a:ext cx="402336" cy="402336"/>
+          </a:xfrm>
+          <a:prstGeom prst="roundRect">
+            <a:avLst>
+              <a:gd name="adj" fmla="val 13636"/>
+            </a:avLst>
+          </a:prstGeom>
+          <a:solidFill>
+            <a:schemeClr val="bg1"/>
+          </a:solidFill>
+          <a:ln w="9525">
+            <a:solidFill>
+              <a:schemeClr val="bg2"/>
+            </a:solidFill>
+            <a:prstDash val="solid"/>
+          </a:ln>
+        </p:spPr>
+      </p:sp>
+      <p:pic>
+        <p:nvPicPr>
+          <p:cNvPr id="14" name="img-cirque" descr="cirque">    </p:cNvPr>
+          <p:cNvPicPr>
+            <a:picLocks noChangeAspect="1"/>
+          </p:cNvPicPr>
+          <p:nvPr/>
+        </p:nvPicPr>
+        <p:blipFill>
+          <a:blip r:embed="rId2"/>
+          <a:stretch>
+            <a:fillRect/>
+          </a:stretch>
+        </p:blipFill>
+        <p:spPr>
+          <a:xfrm>
+            <a:off x="5489936" y="1359896"/>
+            <a:ext cx="297729" cy="297729"/>
+          </a:xfrm>
+          <a:prstGeom prst="rect">
+            <a:avLst/>
+          </a:prstGeom>
+        </p:spPr>
+      </p:pic>
+      <p:sp>
+        <p:nvSpPr>
+          <p:cNvPr id="15" name="Text 11"/>
           <p:cNvSpPr txBox="1"/>
           <p:nvPr/>
         </p:nvSpPr>
         <p:spPr>
           <a:xfrm>
             <a:off x="3304032" y="1280160"/>
-            <a:ext cx="2535936" cy="292608"/>
+            <a:ext cx="2133600" cy="457200"/>
           </a:xfrm>
           <a:prstGeom prst="rect">
             <a:avLst/>
@@ -22744,14 +24376,14 @@
       </p:sp>
       <p:sp>
         <p:nvSpPr>
-          <p:cNvPr id="12" name="Text 10"/>
-          <p:cNvSpPr txBox="1"/>
-          <p:nvPr/>
-        </p:nvSpPr>
-        <p:spPr>
-          <a:xfrm>
-            <a:off x="3304032" y="1563624"/>
-            <a:ext cx="2535936" cy="219456"/>
+          <p:cNvPr id="16" name="Text 12"/>
+          <p:cNvSpPr txBox="1"/>
+          <p:nvPr/>
+        </p:nvSpPr>
+        <p:spPr>
+          <a:xfrm>
+            <a:off x="3304032" y="1728216"/>
+            <a:ext cx="2133600" cy="219456"/>
           </a:xfrm>
           <a:prstGeom prst="rect">
             <a:avLst/>
@@ -22780,14 +24412,14 @@
       </p:sp>
       <p:sp>
         <p:nvSpPr>
-          <p:cNvPr id="13" name="Text 11"/>
-          <p:cNvSpPr txBox="1"/>
-          <p:nvPr/>
-        </p:nvSpPr>
-        <p:spPr>
-          <a:xfrm>
-            <a:off x="3304032" y="1783080"/>
-            <a:ext cx="2535936" cy="1554480"/>
+          <p:cNvPr id="17" name="Text 13"/>
+          <p:cNvSpPr txBox="1"/>
+          <p:nvPr/>
+        </p:nvSpPr>
+        <p:spPr>
+          <a:xfrm>
+            <a:off x="3304032" y="1947672"/>
+            <a:ext cx="2535936" cy="1463040"/>
           </a:xfrm>
           <a:prstGeom prst="rect">
             <a:avLst/>
@@ -22816,7 +24448,7 @@
       </p:sp>
       <p:sp>
         <p:nvSpPr>
-          <p:cNvPr id="14" name="card-case-1"/>
+          <p:cNvPr id="18" name="card-case-1"/>
           <p:cNvSpPr/>
           <p:nvPr/>
         </p:nvSpPr>
@@ -22838,7 +24470,7 @@
       </p:sp>
       <p:sp>
         <p:nvSpPr>
-          <p:cNvPr id="15" name="Text 13"/>
+          <p:cNvPr id="19" name="Text 15"/>
           <p:cNvSpPr txBox="1"/>
           <p:nvPr/>
         </p:nvSpPr>
@@ -22885,7 +24517,7 @@
       </p:sp>
       <p:sp>
         <p:nvSpPr>
-          <p:cNvPr id="16" name="card-2"/>
+          <p:cNvPr id="20" name="card-2"/>
           <p:cNvSpPr/>
           <p:nvPr/>
         </p:nvSpPr>
@@ -22907,14 +24539,65 @@
       </p:sp>
       <p:sp>
         <p:nvSpPr>
-          <p:cNvPr id="17" name="Text 15"/>
+          <p:cNvPr id="21" name="img-frame-ge"/>
+          <p:cNvSpPr/>
+          <p:nvPr/>
+        </p:nvSpPr>
+        <p:spPr>
+          <a:xfrm>
+            <a:off x="8302752" y="1307592"/>
+            <a:ext cx="402336" cy="402336"/>
+          </a:xfrm>
+          <a:prstGeom prst="roundRect">
+            <a:avLst>
+              <a:gd name="adj" fmla="val 13636"/>
+            </a:avLst>
+          </a:prstGeom>
+          <a:solidFill>
+            <a:schemeClr val="bg1"/>
+          </a:solidFill>
+          <a:ln w="9525">
+            <a:solidFill>
+              <a:schemeClr val="bg2"/>
+            </a:solidFill>
+            <a:prstDash val="solid"/>
+          </a:ln>
+        </p:spPr>
+      </p:sp>
+      <p:pic>
+        <p:nvPicPr>
+          <p:cNvPr id="22" name="img-ge" descr="ge">    </p:cNvPr>
+          <p:cNvPicPr>
+            <a:picLocks noChangeAspect="1"/>
+          </p:cNvPicPr>
+          <p:nvPr/>
+        </p:nvPicPr>
+        <p:blipFill>
+          <a:blip r:embed="rId3"/>
+          <a:stretch>
+            <a:fillRect/>
+          </a:stretch>
+        </p:blipFill>
+        <p:spPr>
+          <a:xfrm>
+            <a:off x="8355056" y="1359896"/>
+            <a:ext cx="297729" cy="297729"/>
+          </a:xfrm>
+          <a:prstGeom prst="rect">
+            <a:avLst/>
+          </a:prstGeom>
+        </p:spPr>
+      </p:pic>
+      <p:sp>
+        <p:nvSpPr>
+          <p:cNvPr id="23" name="Text 18"/>
           <p:cNvSpPr txBox="1"/>
           <p:nvPr/>
         </p:nvSpPr>
         <p:spPr>
           <a:xfrm>
             <a:off x="6169152" y="1280160"/>
-            <a:ext cx="2535936" cy="292608"/>
+            <a:ext cx="2133600" cy="457200"/>
           </a:xfrm>
           <a:prstGeom prst="rect">
             <a:avLst/>
@@ -22954,14 +24637,14 @@
       </p:sp>
       <p:sp>
         <p:nvSpPr>
-          <p:cNvPr id="18" name="Text 16"/>
-          <p:cNvSpPr txBox="1"/>
-          <p:nvPr/>
-        </p:nvSpPr>
-        <p:spPr>
-          <a:xfrm>
-            <a:off x="6169152" y="1563624"/>
-            <a:ext cx="2535936" cy="219456"/>
+          <p:cNvPr id="24" name="Text 19"/>
+          <p:cNvSpPr txBox="1"/>
+          <p:nvPr/>
+        </p:nvSpPr>
+        <p:spPr>
+          <a:xfrm>
+            <a:off x="6169152" y="1728216"/>
+            <a:ext cx="2133600" cy="219456"/>
           </a:xfrm>
           <a:prstGeom prst="rect">
             <a:avLst/>
@@ -22982,7 +24665,7 @@
                   <a:schemeClr val="tx1"/>
                 </a:solidFill>
               </a:rPr>
-              <a:t>IDEO · Stanford d.school · T. Brown(2008)</a:t>
+              <a:t>IDEO · d.school · T. Brown</a:t>
             </a:r>
             <a:endParaRPr lang="en-US" sz="900" dirty="0"/>
           </a:p>
@@ -22990,14 +24673,14 @@
       </p:sp>
       <p:sp>
         <p:nvSpPr>
-          <p:cNvPr id="19" name="Text 17"/>
-          <p:cNvSpPr txBox="1"/>
-          <p:nvPr/>
-        </p:nvSpPr>
-        <p:spPr>
-          <a:xfrm>
-            <a:off x="6169152" y="1783080"/>
-            <a:ext cx="2535936" cy="1554480"/>
+          <p:cNvPr id="25" name="Text 20"/>
+          <p:cNvSpPr txBox="1"/>
+          <p:nvPr/>
+        </p:nvSpPr>
+        <p:spPr>
+          <a:xfrm>
+            <a:off x="6169152" y="1947672"/>
+            <a:ext cx="2535936" cy="1463040"/>
           </a:xfrm>
           <a:prstGeom prst="rect">
             <a:avLst/>
@@ -23026,7 +24709,7 @@
       </p:sp>
       <p:sp>
         <p:nvSpPr>
-          <p:cNvPr id="20" name="card-case-2"/>
+          <p:cNvPr id="26" name="card-case-2"/>
           <p:cNvSpPr/>
           <p:nvPr/>
         </p:nvSpPr>
@@ -23048,7 +24731,7 @@
       </p:sp>
       <p:sp>
         <p:nvSpPr>
-          <p:cNvPr id="21" name="Text 19"/>
+          <p:cNvPr id="27" name="Text 22"/>
           <p:cNvSpPr txBox="1"/>
           <p:nvPr/>
         </p:nvSpPr>
@@ -23095,7 +24778,7 @@
       </p:sp>
       <p:sp>
         <p:nvSpPr>
-          <p:cNvPr id="22" name="Text 20"/>
+          <p:cNvPr id="28" name="Text 23"/>
           <p:cNvSpPr txBox="1"/>
           <p:nvPr/>
         </p:nvSpPr>
@@ -23299,14 +24982,65 @@
       </p:sp>
       <p:sp>
         <p:nvSpPr>
-          <p:cNvPr id="5" name="Text 3"/>
+          <p:cNvPr id="5" name="img-frame-nespresso"/>
+          <p:cNvSpPr/>
+          <p:nvPr/>
+        </p:nvSpPr>
+        <p:spPr>
+          <a:xfrm>
+            <a:off x="1856232" y="1280160"/>
+            <a:ext cx="402336" cy="402336"/>
+          </a:xfrm>
+          <a:prstGeom prst="roundRect">
+            <a:avLst>
+              <a:gd name="adj" fmla="val 13636"/>
+            </a:avLst>
+          </a:prstGeom>
+          <a:solidFill>
+            <a:schemeClr val="bg1"/>
+          </a:solidFill>
+          <a:ln w="9525">
+            <a:solidFill>
+              <a:schemeClr val="bg2"/>
+            </a:solidFill>
+            <a:prstDash val="solid"/>
+          </a:ln>
+        </p:spPr>
+      </p:sp>
+      <p:pic>
+        <p:nvPicPr>
+          <p:cNvPr id="6" name="img-nespresso" descr="nespresso">    </p:cNvPr>
+          <p:cNvPicPr>
+            <a:picLocks noChangeAspect="1"/>
+          </p:cNvPicPr>
+          <p:nvPr/>
+        </p:nvPicPr>
+        <p:blipFill>
+          <a:blip r:embed="rId1"/>
+          <a:stretch>
+            <a:fillRect/>
+          </a:stretch>
+        </p:blipFill>
+        <p:spPr>
+          <a:xfrm>
+            <a:off x="1908536" y="1332464"/>
+            <a:ext cx="297729" cy="297729"/>
+          </a:xfrm>
+          <a:prstGeom prst="rect">
+            <a:avLst/>
+          </a:prstGeom>
+        </p:spPr>
+      </p:pic>
+      <p:sp>
+        <p:nvSpPr>
+          <p:cNvPr id="7" name="Text 4"/>
           <p:cNvSpPr txBox="1"/>
           <p:nvPr/>
         </p:nvSpPr>
         <p:spPr>
           <a:xfrm>
             <a:off x="438912" y="1252728"/>
-            <a:ext cx="1819656" cy="411480"/>
+            <a:ext cx="1417320" cy="411480"/>
           </a:xfrm>
           <a:prstGeom prst="rect">
             <a:avLst/>
@@ -23346,14 +25080,14 @@
       </p:sp>
       <p:sp>
         <p:nvSpPr>
-          <p:cNvPr id="6" name="Text 4"/>
+          <p:cNvPr id="8" name="Text 5"/>
           <p:cNvSpPr txBox="1"/>
           <p:nvPr/>
         </p:nvSpPr>
         <p:spPr>
           <a:xfrm>
             <a:off x="438912" y="1655064"/>
-            <a:ext cx="1819656" cy="219456"/>
+            <a:ext cx="1417320" cy="219456"/>
           </a:xfrm>
           <a:prstGeom prst="rect">
             <a:avLst/>
@@ -23382,7 +25116,7 @@
       </p:sp>
       <p:sp>
         <p:nvSpPr>
-          <p:cNvPr id="7" name="Text 5"/>
+          <p:cNvPr id="9" name="Text 6"/>
           <p:cNvSpPr txBox="1"/>
           <p:nvPr/>
         </p:nvSpPr>
@@ -23418,7 +25152,7 @@
       </p:sp>
       <p:sp>
         <p:nvSpPr>
-          <p:cNvPr id="8" name="card-case-0"/>
+          <p:cNvPr id="10" name="card-case-0"/>
           <p:cNvSpPr/>
           <p:nvPr/>
         </p:nvSpPr>
@@ -23440,7 +25174,7 @@
       </p:sp>
       <p:sp>
         <p:nvSpPr>
-          <p:cNvPr id="9" name="Text 7"/>
+          <p:cNvPr id="11" name="Text 8"/>
           <p:cNvSpPr txBox="1"/>
           <p:nvPr/>
         </p:nvSpPr>
@@ -23487,7 +25221,7 @@
       </p:sp>
       <p:sp>
         <p:nvSpPr>
-          <p:cNvPr id="10" name="card-1"/>
+          <p:cNvPr id="12" name="card-1"/>
           <p:cNvSpPr/>
           <p:nvPr/>
         </p:nvSpPr>
@@ -23509,14 +25243,65 @@
       </p:sp>
       <p:sp>
         <p:nvSpPr>
-          <p:cNvPr id="11" name="Text 9"/>
+          <p:cNvPr id="13" name="img-frame-uber"/>
+          <p:cNvSpPr/>
+          <p:nvPr/>
+        </p:nvSpPr>
+        <p:spPr>
+          <a:xfrm>
+            <a:off x="4005072" y="1280160"/>
+            <a:ext cx="402336" cy="402336"/>
+          </a:xfrm>
+          <a:prstGeom prst="roundRect">
+            <a:avLst>
+              <a:gd name="adj" fmla="val 13636"/>
+            </a:avLst>
+          </a:prstGeom>
+          <a:solidFill>
+            <a:schemeClr val="bg1"/>
+          </a:solidFill>
+          <a:ln w="9525">
+            <a:solidFill>
+              <a:schemeClr val="bg2"/>
+            </a:solidFill>
+            <a:prstDash val="solid"/>
+          </a:ln>
+        </p:spPr>
+      </p:sp>
+      <p:pic>
+        <p:nvPicPr>
+          <p:cNvPr id="14" name="img-uber" descr="uber">    </p:cNvPr>
+          <p:cNvPicPr>
+            <a:picLocks noChangeAspect="1"/>
+          </p:cNvPicPr>
+          <p:nvPr/>
+        </p:nvPicPr>
+        <p:blipFill>
+          <a:blip r:embed="rId2"/>
+          <a:stretch>
+            <a:fillRect/>
+          </a:stretch>
+        </p:blipFill>
+        <p:spPr>
+          <a:xfrm>
+            <a:off x="4057376" y="1332464"/>
+            <a:ext cx="297729" cy="297729"/>
+          </a:xfrm>
+          <a:prstGeom prst="rect">
+            <a:avLst/>
+          </a:prstGeom>
+        </p:spPr>
+      </p:pic>
+      <p:sp>
+        <p:nvSpPr>
+          <p:cNvPr id="15" name="Text 11"/>
           <p:cNvSpPr txBox="1"/>
           <p:nvPr/>
         </p:nvSpPr>
         <p:spPr>
           <a:xfrm>
             <a:off x="2587752" y="1252728"/>
-            <a:ext cx="1819656" cy="411480"/>
+            <a:ext cx="1417320" cy="411480"/>
           </a:xfrm>
           <a:prstGeom prst="rect">
             <a:avLst/>
@@ -23556,14 +25341,14 @@
       </p:sp>
       <p:sp>
         <p:nvSpPr>
-          <p:cNvPr id="12" name="Text 10"/>
+          <p:cNvPr id="16" name="Text 12"/>
           <p:cNvSpPr txBox="1"/>
           <p:nvPr/>
         </p:nvSpPr>
         <p:spPr>
           <a:xfrm>
             <a:off x="2587752" y="1655064"/>
-            <a:ext cx="1819656" cy="219456"/>
+            <a:ext cx="1417320" cy="219456"/>
           </a:xfrm>
           <a:prstGeom prst="rect">
             <a:avLst/>
@@ -23592,7 +25377,7 @@
       </p:sp>
       <p:sp>
         <p:nvSpPr>
-          <p:cNvPr id="13" name="Text 11"/>
+          <p:cNvPr id="17" name="Text 13"/>
           <p:cNvSpPr txBox="1"/>
           <p:nvPr/>
         </p:nvSpPr>
@@ -23628,7 +25413,7 @@
       </p:sp>
       <p:sp>
         <p:nvSpPr>
-          <p:cNvPr id="14" name="card-case-1"/>
+          <p:cNvPr id="18" name="card-case-1"/>
           <p:cNvSpPr/>
           <p:nvPr/>
         </p:nvSpPr>
@@ -23650,7 +25435,7 @@
       </p:sp>
       <p:sp>
         <p:nvSpPr>
-          <p:cNvPr id="15" name="Text 13"/>
+          <p:cNvPr id="19" name="Text 15"/>
           <p:cNvSpPr txBox="1"/>
           <p:nvPr/>
         </p:nvSpPr>
@@ -23697,7 +25482,7 @@
       </p:sp>
       <p:sp>
         <p:nvSpPr>
-          <p:cNvPr id="16" name="card-2"/>
+          <p:cNvPr id="20" name="card-2"/>
           <p:cNvSpPr/>
           <p:nvPr/>
         </p:nvSpPr>
@@ -23719,14 +25504,65 @@
       </p:sp>
       <p:sp>
         <p:nvSpPr>
-          <p:cNvPr id="17" name="Text 15"/>
+          <p:cNvPr id="21" name="img-frame-dropbox"/>
+          <p:cNvSpPr/>
+          <p:nvPr/>
+        </p:nvSpPr>
+        <p:spPr>
+          <a:xfrm>
+            <a:off x="6153912" y="1280160"/>
+            <a:ext cx="402336" cy="402336"/>
+          </a:xfrm>
+          <a:prstGeom prst="roundRect">
+            <a:avLst>
+              <a:gd name="adj" fmla="val 13636"/>
+            </a:avLst>
+          </a:prstGeom>
+          <a:solidFill>
+            <a:schemeClr val="bg1"/>
+          </a:solidFill>
+          <a:ln w="9525">
+            <a:solidFill>
+              <a:schemeClr val="bg2"/>
+            </a:solidFill>
+            <a:prstDash val="solid"/>
+          </a:ln>
+        </p:spPr>
+      </p:sp>
+      <p:pic>
+        <p:nvPicPr>
+          <p:cNvPr id="22" name="img-dropbox" descr="dropbox">    </p:cNvPr>
+          <p:cNvPicPr>
+            <a:picLocks noChangeAspect="1"/>
+          </p:cNvPicPr>
+          <p:nvPr/>
+        </p:nvPicPr>
+        <p:blipFill>
+          <a:blip r:embed="rId3"/>
+          <a:stretch>
+            <a:fillRect/>
+          </a:stretch>
+        </p:blipFill>
+        <p:spPr>
+          <a:xfrm>
+            <a:off x="6206216" y="1332464"/>
+            <a:ext cx="297729" cy="297729"/>
+          </a:xfrm>
+          <a:prstGeom prst="rect">
+            <a:avLst/>
+          </a:prstGeom>
+        </p:spPr>
+      </p:pic>
+      <p:sp>
+        <p:nvSpPr>
+          <p:cNvPr id="23" name="Text 18"/>
           <p:cNvSpPr txBox="1"/>
           <p:nvPr/>
         </p:nvSpPr>
         <p:spPr>
           <a:xfrm>
             <a:off x="4736592" y="1252728"/>
-            <a:ext cx="1819656" cy="411480"/>
+            <a:ext cx="1417320" cy="411480"/>
           </a:xfrm>
           <a:prstGeom prst="rect">
             <a:avLst/>
@@ -23766,14 +25602,14 @@
       </p:sp>
       <p:sp>
         <p:nvSpPr>
-          <p:cNvPr id="18" name="Text 16"/>
+          <p:cNvPr id="24" name="Text 19"/>
           <p:cNvSpPr txBox="1"/>
           <p:nvPr/>
         </p:nvSpPr>
         <p:spPr>
           <a:xfrm>
             <a:off x="4736592" y="1655064"/>
-            <a:ext cx="1819656" cy="219456"/>
+            <a:ext cx="1417320" cy="219456"/>
           </a:xfrm>
           <a:prstGeom prst="rect">
             <a:avLst/>
@@ -23802,7 +25638,7 @@
       </p:sp>
       <p:sp>
         <p:nvSpPr>
-          <p:cNvPr id="19" name="Text 17"/>
+          <p:cNvPr id="25" name="Text 20"/>
           <p:cNvSpPr txBox="1"/>
           <p:nvPr/>
         </p:nvSpPr>
@@ -23838,7 +25674,7 @@
       </p:sp>
       <p:sp>
         <p:nvSpPr>
-          <p:cNvPr id="20" name="card-case-2"/>
+          <p:cNvPr id="26" name="card-case-2"/>
           <p:cNvSpPr/>
           <p:nvPr/>
         </p:nvSpPr>
@@ -23860,7 +25696,7 @@
       </p:sp>
       <p:sp>
         <p:nvSpPr>
-          <p:cNvPr id="21" name="Text 19"/>
+          <p:cNvPr id="27" name="Text 22"/>
           <p:cNvSpPr txBox="1"/>
           <p:nvPr/>
         </p:nvSpPr>
@@ -23907,7 +25743,7 @@
       </p:sp>
       <p:sp>
         <p:nvSpPr>
-          <p:cNvPr id="22" name="card-3"/>
+          <p:cNvPr id="28" name="card-3"/>
           <p:cNvSpPr/>
           <p:nvPr/>
         </p:nvSpPr>
@@ -23929,14 +25765,65 @@
       </p:sp>
       <p:sp>
         <p:nvSpPr>
-          <p:cNvPr id="23" name="Text 21"/>
+          <p:cNvPr id="29" name="img-frame-nsf"/>
+          <p:cNvSpPr/>
+          <p:nvPr/>
+        </p:nvSpPr>
+        <p:spPr>
+          <a:xfrm>
+            <a:off x="8302752" y="1280160"/>
+            <a:ext cx="402336" cy="402336"/>
+          </a:xfrm>
+          <a:prstGeom prst="roundRect">
+            <a:avLst>
+              <a:gd name="adj" fmla="val 13636"/>
+            </a:avLst>
+          </a:prstGeom>
+          <a:solidFill>
+            <a:schemeClr val="bg1"/>
+          </a:solidFill>
+          <a:ln w="9525">
+            <a:solidFill>
+              <a:schemeClr val="bg2"/>
+            </a:solidFill>
+            <a:prstDash val="solid"/>
+          </a:ln>
+        </p:spPr>
+      </p:sp>
+      <p:pic>
+        <p:nvPicPr>
+          <p:cNvPr id="30" name="img-nsf" descr="nsf">    </p:cNvPr>
+          <p:cNvPicPr>
+            <a:picLocks noChangeAspect="1"/>
+          </p:cNvPicPr>
+          <p:nvPr/>
+        </p:nvPicPr>
+        <p:blipFill>
+          <a:blip r:embed="rId4"/>
+          <a:stretch>
+            <a:fillRect/>
+          </a:stretch>
+        </p:blipFill>
+        <p:spPr>
+          <a:xfrm>
+            <a:off x="8355056" y="1332464"/>
+            <a:ext cx="297729" cy="297729"/>
+          </a:xfrm>
+          <a:prstGeom prst="rect">
+            <a:avLst/>
+          </a:prstGeom>
+        </p:spPr>
+      </p:pic>
+      <p:sp>
+        <p:nvSpPr>
+          <p:cNvPr id="31" name="Text 25"/>
           <p:cNvSpPr txBox="1"/>
           <p:nvPr/>
         </p:nvSpPr>
         <p:spPr>
           <a:xfrm>
             <a:off x="6885432" y="1252728"/>
-            <a:ext cx="1819656" cy="411480"/>
+            <a:ext cx="1417320" cy="411480"/>
           </a:xfrm>
           <a:prstGeom prst="rect">
             <a:avLst/>
@@ -23976,14 +25863,14 @@
       </p:sp>
       <p:sp>
         <p:nvSpPr>
-          <p:cNvPr id="24" name="Text 22"/>
+          <p:cNvPr id="32" name="Text 26"/>
           <p:cNvSpPr txBox="1"/>
           <p:nvPr/>
         </p:nvSpPr>
         <p:spPr>
           <a:xfrm>
             <a:off x="6885432" y="1655064"/>
-            <a:ext cx="1819656" cy="219456"/>
+            <a:ext cx="1417320" cy="219456"/>
           </a:xfrm>
           <a:prstGeom prst="rect">
             <a:avLst/>
@@ -24012,7 +25899,7 @@
       </p:sp>
       <p:sp>
         <p:nvSpPr>
-          <p:cNvPr id="25" name="Text 23"/>
+          <p:cNvPr id="33" name="Text 27"/>
           <p:cNvSpPr txBox="1"/>
           <p:nvPr/>
         </p:nvSpPr>
@@ -24048,7 +25935,7 @@
       </p:sp>
       <p:sp>
         <p:nvSpPr>
-          <p:cNvPr id="26" name="card-case-3"/>
+          <p:cNvPr id="34" name="card-case-3"/>
           <p:cNvSpPr/>
           <p:nvPr/>
         </p:nvSpPr>
@@ -24070,7 +25957,7 @@
       </p:sp>
       <p:sp>
         <p:nvSpPr>
-          <p:cNvPr id="27" name="Text 25"/>
+          <p:cNvPr id="35" name="Text 29"/>
           <p:cNvSpPr txBox="1"/>
           <p:nvPr/>
         </p:nvSpPr>
@@ -24117,7 +26004,7 @@
       </p:sp>
       <p:sp>
         <p:nvSpPr>
-          <p:cNvPr id="28" name="card-4"/>
+          <p:cNvPr id="36" name="card-4"/>
           <p:cNvSpPr/>
           <p:nvPr/>
         </p:nvSpPr>
@@ -24139,14 +26026,65 @@
       </p:sp>
       <p:sp>
         <p:nvSpPr>
-          <p:cNvPr id="29" name="Text 27"/>
+          <p:cNvPr id="37" name="img-frame-mit"/>
+          <p:cNvSpPr/>
+          <p:nvPr/>
+        </p:nvSpPr>
+        <p:spPr>
+          <a:xfrm>
+            <a:off x="1856232" y="3163824"/>
+            <a:ext cx="402336" cy="402336"/>
+          </a:xfrm>
+          <a:prstGeom prst="roundRect">
+            <a:avLst>
+              <a:gd name="adj" fmla="val 13636"/>
+            </a:avLst>
+          </a:prstGeom>
+          <a:solidFill>
+            <a:schemeClr val="bg1"/>
+          </a:solidFill>
+          <a:ln w="9525">
+            <a:solidFill>
+              <a:schemeClr val="bg2"/>
+            </a:solidFill>
+            <a:prstDash val="solid"/>
+          </a:ln>
+        </p:spPr>
+      </p:sp>
+      <p:pic>
+        <p:nvPicPr>
+          <p:cNvPr id="38" name="img-mit" descr="mit">    </p:cNvPr>
+          <p:cNvPicPr>
+            <a:picLocks noChangeAspect="1"/>
+          </p:cNvPicPr>
+          <p:nvPr/>
+        </p:nvPicPr>
+        <p:blipFill>
+          <a:blip r:embed="rId5"/>
+          <a:stretch>
+            <a:fillRect/>
+          </a:stretch>
+        </p:blipFill>
+        <p:spPr>
+          <a:xfrm>
+            <a:off x="1908536" y="3216128"/>
+            <a:ext cx="297729" cy="297729"/>
+          </a:xfrm>
+          <a:prstGeom prst="rect">
+            <a:avLst/>
+          </a:prstGeom>
+        </p:spPr>
+      </p:pic>
+      <p:sp>
+        <p:nvSpPr>
+          <p:cNvPr id="39" name="Text 32"/>
           <p:cNvSpPr txBox="1"/>
           <p:nvPr/>
         </p:nvSpPr>
         <p:spPr>
           <a:xfrm>
             <a:off x="438912" y="3136392"/>
-            <a:ext cx="1819656" cy="411480"/>
+            <a:ext cx="1417320" cy="411480"/>
           </a:xfrm>
           <a:prstGeom prst="rect">
             <a:avLst/>
@@ -24186,14 +26124,14 @@
       </p:sp>
       <p:sp>
         <p:nvSpPr>
-          <p:cNvPr id="30" name="Text 28"/>
+          <p:cNvPr id="40" name="Text 33"/>
           <p:cNvSpPr txBox="1"/>
           <p:nvPr/>
         </p:nvSpPr>
         <p:spPr>
           <a:xfrm>
             <a:off x="438912" y="3538728"/>
-            <a:ext cx="1819656" cy="219456"/>
+            <a:ext cx="1417320" cy="219456"/>
           </a:xfrm>
           <a:prstGeom prst="rect">
             <a:avLst/>
@@ -24222,7 +26160,7 @@
       </p:sp>
       <p:sp>
         <p:nvSpPr>
-          <p:cNvPr id="31" name="Text 29"/>
+          <p:cNvPr id="41" name="Text 34"/>
           <p:cNvSpPr txBox="1"/>
           <p:nvPr/>
         </p:nvSpPr>
@@ -24258,7 +26196,7 @@
       </p:sp>
       <p:sp>
         <p:nvSpPr>
-          <p:cNvPr id="32" name="card-case-4"/>
+          <p:cNvPr id="42" name="card-case-4"/>
           <p:cNvSpPr/>
           <p:nvPr/>
         </p:nvSpPr>
@@ -24280,7 +26218,7 @@
       </p:sp>
       <p:sp>
         <p:nvSpPr>
-          <p:cNvPr id="33" name="Text 31"/>
+          <p:cNvPr id="43" name="Text 36"/>
           <p:cNvSpPr txBox="1"/>
           <p:nvPr/>
         </p:nvSpPr>
@@ -24327,7 +26265,7 @@
       </p:sp>
       <p:sp>
         <p:nvSpPr>
-          <p:cNvPr id="34" name="card-5"/>
+          <p:cNvPr id="44" name="card-5"/>
           <p:cNvSpPr/>
           <p:nvPr/>
         </p:nvSpPr>
@@ -24349,14 +26287,65 @@
       </p:sp>
       <p:sp>
         <p:nvSpPr>
-          <p:cNvPr id="35" name="Text 33"/>
+          <p:cNvPr id="45" name="img-frame-apple"/>
+          <p:cNvSpPr/>
+          <p:nvPr/>
+        </p:nvSpPr>
+        <p:spPr>
+          <a:xfrm>
+            <a:off x="4005072" y="3163824"/>
+            <a:ext cx="402336" cy="402336"/>
+          </a:xfrm>
+          <a:prstGeom prst="roundRect">
+            <a:avLst>
+              <a:gd name="adj" fmla="val 13636"/>
+            </a:avLst>
+          </a:prstGeom>
+          <a:solidFill>
+            <a:schemeClr val="bg1"/>
+          </a:solidFill>
+          <a:ln w="9525">
+            <a:solidFill>
+              <a:schemeClr val="bg2"/>
+            </a:solidFill>
+            <a:prstDash val="solid"/>
+          </a:ln>
+        </p:spPr>
+      </p:sp>
+      <p:pic>
+        <p:nvPicPr>
+          <p:cNvPr id="46" name="img-apple" descr="apple">    </p:cNvPr>
+          <p:cNvPicPr>
+            <a:picLocks noChangeAspect="1"/>
+          </p:cNvPicPr>
+          <p:nvPr/>
+        </p:nvPicPr>
+        <p:blipFill>
+          <a:blip r:embed="rId6"/>
+          <a:stretch>
+            <a:fillRect/>
+          </a:stretch>
+        </p:blipFill>
+        <p:spPr>
+          <a:xfrm>
+            <a:off x="4057376" y="3216128"/>
+            <a:ext cx="297729" cy="297729"/>
+          </a:xfrm>
+          <a:prstGeom prst="rect">
+            <a:avLst/>
+          </a:prstGeom>
+        </p:spPr>
+      </p:pic>
+      <p:sp>
+        <p:nvSpPr>
+          <p:cNvPr id="47" name="Text 39"/>
           <p:cNvSpPr txBox="1"/>
           <p:nvPr/>
         </p:nvSpPr>
         <p:spPr>
           <a:xfrm>
             <a:off x="2587752" y="3136392"/>
-            <a:ext cx="1819656" cy="411480"/>
+            <a:ext cx="1417320" cy="411480"/>
           </a:xfrm>
           <a:prstGeom prst="rect">
             <a:avLst/>
@@ -24396,14 +26385,14 @@
       </p:sp>
       <p:sp>
         <p:nvSpPr>
-          <p:cNvPr id="36" name="Text 34"/>
+          <p:cNvPr id="48" name="Text 40"/>
           <p:cNvSpPr txBox="1"/>
           <p:nvPr/>
         </p:nvSpPr>
         <p:spPr>
           <a:xfrm>
             <a:off x="2587752" y="3538728"/>
-            <a:ext cx="1819656" cy="219456"/>
+            <a:ext cx="1417320" cy="219456"/>
           </a:xfrm>
           <a:prstGeom prst="rect">
             <a:avLst/>
@@ -24432,7 +26421,7 @@
       </p:sp>
       <p:sp>
         <p:nvSpPr>
-          <p:cNvPr id="37" name="Text 35"/>
+          <p:cNvPr id="49" name="Text 41"/>
           <p:cNvSpPr txBox="1"/>
           <p:nvPr/>
         </p:nvSpPr>
@@ -24468,7 +26457,7 @@
       </p:sp>
       <p:sp>
         <p:nvSpPr>
-          <p:cNvPr id="38" name="card-case-5"/>
+          <p:cNvPr id="50" name="card-case-5"/>
           <p:cNvSpPr/>
           <p:nvPr/>
         </p:nvSpPr>
@@ -24490,7 +26479,7 @@
       </p:sp>
       <p:sp>
         <p:nvSpPr>
-          <p:cNvPr id="39" name="Text 37"/>
+          <p:cNvPr id="51" name="Text 43"/>
           <p:cNvSpPr txBox="1"/>
           <p:nvPr/>
         </p:nvSpPr>
@@ -24537,7 +26526,7 @@
       </p:sp>
       <p:sp>
         <p:nvSpPr>
-          <p:cNvPr id="40" name="card-6"/>
+          <p:cNvPr id="52" name="card-6"/>
           <p:cNvSpPr/>
           <p:nvPr/>
         </p:nvSpPr>
@@ -24559,14 +26548,65 @@
       </p:sp>
       <p:sp>
         <p:nvSpPr>
-          <p:cNvPr id="41" name="Text 39"/>
+          <p:cNvPr id="53" name="img-frame-mcd"/>
+          <p:cNvSpPr/>
+          <p:nvPr/>
+        </p:nvSpPr>
+        <p:spPr>
+          <a:xfrm>
+            <a:off x="6153912" y="3163824"/>
+            <a:ext cx="402336" cy="402336"/>
+          </a:xfrm>
+          <a:prstGeom prst="roundRect">
+            <a:avLst>
+              <a:gd name="adj" fmla="val 13636"/>
+            </a:avLst>
+          </a:prstGeom>
+          <a:solidFill>
+            <a:schemeClr val="bg1"/>
+          </a:solidFill>
+          <a:ln w="9525">
+            <a:solidFill>
+              <a:schemeClr val="bg2"/>
+            </a:solidFill>
+            <a:prstDash val="solid"/>
+          </a:ln>
+        </p:spPr>
+      </p:sp>
+      <p:pic>
+        <p:nvPicPr>
+          <p:cNvPr id="54" name="img-mcd" descr="mcd">    </p:cNvPr>
+          <p:cNvPicPr>
+            <a:picLocks noChangeAspect="1"/>
+          </p:cNvPicPr>
+          <p:nvPr/>
+        </p:nvPicPr>
+        <p:blipFill>
+          <a:blip r:embed="rId7"/>
+          <a:stretch>
+            <a:fillRect/>
+          </a:stretch>
+        </p:blipFill>
+        <p:spPr>
+          <a:xfrm>
+            <a:off x="6206216" y="3216128"/>
+            <a:ext cx="297729" cy="297729"/>
+          </a:xfrm>
+          <a:prstGeom prst="rect">
+            <a:avLst/>
+          </a:prstGeom>
+        </p:spPr>
+      </p:pic>
+      <p:sp>
+        <p:nvSpPr>
+          <p:cNvPr id="55" name="Text 46"/>
           <p:cNvSpPr txBox="1"/>
           <p:nvPr/>
         </p:nvSpPr>
         <p:spPr>
           <a:xfrm>
             <a:off x="4736592" y="3136392"/>
-            <a:ext cx="1819656" cy="411480"/>
+            <a:ext cx="1417320" cy="411480"/>
           </a:xfrm>
           <a:prstGeom prst="rect">
             <a:avLst/>
@@ -24606,14 +26646,14 @@
       </p:sp>
       <p:sp>
         <p:nvSpPr>
-          <p:cNvPr id="42" name="Text 40"/>
+          <p:cNvPr id="56" name="Text 47"/>
           <p:cNvSpPr txBox="1"/>
           <p:nvPr/>
         </p:nvSpPr>
         <p:spPr>
           <a:xfrm>
             <a:off x="4736592" y="3538728"/>
-            <a:ext cx="1819656" cy="219456"/>
+            <a:ext cx="1417320" cy="219456"/>
           </a:xfrm>
           <a:prstGeom prst="rect">
             <a:avLst/>
@@ -24642,7 +26682,7 @@
       </p:sp>
       <p:sp>
         <p:nvSpPr>
-          <p:cNvPr id="43" name="Text 41"/>
+          <p:cNvPr id="57" name="Text 48"/>
           <p:cNvSpPr txBox="1"/>
           <p:nvPr/>
         </p:nvSpPr>
@@ -24678,7 +26718,7 @@
       </p:sp>
       <p:sp>
         <p:nvSpPr>
-          <p:cNvPr id="44" name="card-case-6"/>
+          <p:cNvPr id="58" name="card-case-6"/>
           <p:cNvSpPr/>
           <p:nvPr/>
         </p:nvSpPr>
@@ -24700,7 +26740,7 @@
       </p:sp>
       <p:sp>
         <p:nvSpPr>
-          <p:cNvPr id="45" name="Text 43"/>
+          <p:cNvPr id="59" name="Text 50"/>
           <p:cNvSpPr txBox="1"/>
           <p:nvPr/>
         </p:nvSpPr>
@@ -24747,7 +26787,7 @@
       </p:sp>
       <p:sp>
         <p:nvSpPr>
-          <p:cNvPr id="46" name="card-7"/>
+          <p:cNvPr id="60" name="card-7"/>
           <p:cNvSpPr/>
           <p:nvPr/>
         </p:nvSpPr>
@@ -24769,14 +26809,65 @@
       </p:sp>
       <p:sp>
         <p:nvSpPr>
-          <p:cNvPr id="47" name="Text 45"/>
+          <p:cNvPr id="61" name="img-frame-bluebottle"/>
+          <p:cNvSpPr/>
+          <p:nvPr/>
+        </p:nvSpPr>
+        <p:spPr>
+          <a:xfrm>
+            <a:off x="8302752" y="3163824"/>
+            <a:ext cx="402336" cy="402336"/>
+          </a:xfrm>
+          <a:prstGeom prst="roundRect">
+            <a:avLst>
+              <a:gd name="adj" fmla="val 13636"/>
+            </a:avLst>
+          </a:prstGeom>
+          <a:solidFill>
+            <a:schemeClr val="bg1"/>
+          </a:solidFill>
+          <a:ln w="9525">
+            <a:solidFill>
+              <a:schemeClr val="bg2"/>
+            </a:solidFill>
+            <a:prstDash val="solid"/>
+          </a:ln>
+        </p:spPr>
+      </p:sp>
+      <p:pic>
+        <p:nvPicPr>
+          <p:cNvPr id="62" name="img-bluebottle" descr="bluebottle">    </p:cNvPr>
+          <p:cNvPicPr>
+            <a:picLocks noChangeAspect="1"/>
+          </p:cNvPicPr>
+          <p:nvPr/>
+        </p:nvPicPr>
+        <p:blipFill>
+          <a:blip r:embed="rId8"/>
+          <a:stretch>
+            <a:fillRect/>
+          </a:stretch>
+        </p:blipFill>
+        <p:spPr>
+          <a:xfrm>
+            <a:off x="8355056" y="3216128"/>
+            <a:ext cx="297729" cy="297729"/>
+          </a:xfrm>
+          <a:prstGeom prst="rect">
+            <a:avLst/>
+          </a:prstGeom>
+        </p:spPr>
+      </p:pic>
+      <p:sp>
+        <p:nvSpPr>
+          <p:cNvPr id="63" name="Text 53"/>
           <p:cNvSpPr txBox="1"/>
           <p:nvPr/>
         </p:nvSpPr>
         <p:spPr>
           <a:xfrm>
             <a:off x="6885432" y="3136392"/>
-            <a:ext cx="1819656" cy="411480"/>
+            <a:ext cx="1417320" cy="411480"/>
           </a:xfrm>
           <a:prstGeom prst="rect">
             <a:avLst/>
@@ -24816,14 +26907,14 @@
       </p:sp>
       <p:sp>
         <p:nvSpPr>
-          <p:cNvPr id="48" name="Text 46"/>
+          <p:cNvPr id="64" name="Text 54"/>
           <p:cNvSpPr txBox="1"/>
           <p:nvPr/>
         </p:nvSpPr>
         <p:spPr>
           <a:xfrm>
             <a:off x="6885432" y="3538728"/>
-            <a:ext cx="1819656" cy="219456"/>
+            <a:ext cx="1417320" cy="219456"/>
           </a:xfrm>
           <a:prstGeom prst="rect">
             <a:avLst/>
@@ -24844,7 +26935,7 @@
                   <a:schemeClr val="tx1"/>
                 </a:solidFill>
               </a:rPr>
-              <a:t>Jake Knapp (Google Ventures)</a:t>
+              <a:t>Jake Knapp (GV)</a:t>
             </a:r>
             <a:endParaRPr lang="en-US" sz="900" dirty="0"/>
           </a:p>
@@ -24852,7 +26943,7 @@
       </p:sp>
       <p:sp>
         <p:nvSpPr>
-          <p:cNvPr id="49" name="Text 47"/>
+          <p:cNvPr id="65" name="Text 55"/>
           <p:cNvSpPr txBox="1"/>
           <p:nvPr/>
         </p:nvSpPr>
@@ -24888,7 +26979,7 @@
       </p:sp>
       <p:sp>
         <p:nvSpPr>
-          <p:cNvPr id="50" name="card-case-7"/>
+          <p:cNvPr id="66" name="card-case-7"/>
           <p:cNvSpPr/>
           <p:nvPr/>
         </p:nvSpPr>
@@ -24910,7 +27001,7 @@
       </p:sp>
       <p:sp>
         <p:nvSpPr>
-          <p:cNvPr id="51" name="Text 49"/>
+          <p:cNvPr id="67" name="Text 57"/>
           <p:cNvSpPr txBox="1"/>
           <p:nvPr/>
         </p:nvSpPr>
@@ -24957,7 +27048,7 @@
       </p:sp>
       <p:sp>
         <p:nvSpPr>
-          <p:cNvPr id="52" name="Text 50"/>
+          <p:cNvPr id="68" name="Text 58"/>
           <p:cNvSpPr txBox="1"/>
           <p:nvPr/>
         </p:nvSpPr>

--- a/startup-theory-lecture/창업이론_강의자료.pptx
+++ b/startup-theory-lecture/창업이론_강의자료.pptx
@@ -25,9 +25,10 @@
     <p:sldId id="273" r:id="rId19"/>
     <p:sldId id="274" r:id="rId20"/>
     <p:sldId id="275" r:id="rId21"/>
+    <p:sldId id="276" r:id="rId22"/>
   </p:sldIdLst>
   <p:notesMasterIdLst>
-    <p:notesMasterId r:id="rId22"/>
+    <p:notesMasterId r:id="rId23"/>
   </p:notesMasterIdLst>
   <p:sldSz cx="9144000" cy="5143500"/>
   <p:notesSz cx="5143500" cy="9144000"/>
@@ -126,20 +127,20 @@
   <p:extLst>
     <p:ext uri="{521415D9-36F7-43E2-AB2F-B90AF26B5E84}">
       <p14:sectionLst xmlns:p14="http://schemas.microsoft.com/office/powerpoint/2010/main">
-        <p14:section name="01 창업 실패 이유 설문" id="{05fb7ae9-f4d8-d855-6c97-bb68f648a80a}">
+        <p14:section name="01 창업 실패 이유 설문" id="{54d16eb4-2177-6aaa-8968-cb7aa0fd72b1}">
           <p14:sldIdLst>
             <p14:sldId id="256"/>
             <p14:sldId id="257"/>
           </p14:sldIdLst>
         </p14:section>
-        <p14:section name="02 실패의 진짜 원인" id="{755f0a94-03e6-7b61-e96c-39e30a3b19a7}">
+        <p14:section name="02 실패의 진짜 원인" id="{721fdd10-593e-939c-145c-b9734e1b052e}">
           <p14:sldIdLst>
             <p14:sldId id="258"/>
             <p14:sldId id="259"/>
             <p14:sldId id="260"/>
           </p14:sldIdLst>
         </p14:section>
-        <p14:section name="03 창업 이론의 진화" id="{b052796b-7794-1751-0dc0-59536db9fe3f}">
+        <p14:section name="03 창업 이론의 진화" id="{6d5c84af-58b8-273c-20ff-1caf57bc5ba6}">
           <p14:sldIdLst>
             <p14:sldId id="261"/>
             <p14:sldId id="262"/>
@@ -148,34 +149,39 @@
             <p14:sldId id="265"/>
           </p14:sldIdLst>
         </p14:section>
-        <p14:section name="04 졸리 모델" id="{4f9cc936-6927-3648-b7d5-cd68f6d68e41}">
+        <p14:section name="04 졸리 모델" id="{a1259936-4f2d-442e-30d8-dc3a1af5d324}">
           <p14:sldIdLst>
             <p14:sldId id="266"/>
             <p14:sldId id="267"/>
           </p14:sldIdLst>
         </p14:section>
-        <p14:section name="05 디자인 씽킹" id="{2d9552ad-a401-844e-7de3-351c6f946562}">
+        <p14:section name="05 디자인 씽킹" id="{a8b5319b-b027-0e5c-1be6-23d93431834f}">
           <p14:sldIdLst>
             <p14:sldId id="268"/>
             <p14:sldId id="269"/>
           </p14:sldIdLst>
         </p14:section>
-        <p14:section name="06 BMC vs 린 캔버스" id="{0ca25f35-c0ac-f171-acb9-8af70acdd75c}">
+        <p14:section name="06 BMC vs 린 캔버스" id="{970124bd-c1f4-0b66-e6c4-51291f0a4c8b}">
           <p14:sldIdLst>
             <p14:sldId id="270"/>
             <p14:sldId id="271"/>
             <p14:sldId id="272"/>
           </p14:sldIdLst>
         </p14:section>
-        <p14:section name="07 스타트업 오너스 매뉴얼" id="{be38fea3-50e2-66a1-194b-2691ade958e0}">
+        <p14:section name="07 스타트업 오너스 매뉴얼" id="{efea9ba1-0972-7352-ec8f-960f2ffb06bd}">
           <p14:sldIdLst>
             <p14:sldId id="273"/>
             <p14:sldId id="274"/>
           </p14:sldIdLst>
         </p14:section>
-        <p14:section name="08 종합" id="{bff00ba9-e45f-c1e9-ceba-d774662e3cfb}">
+        <p14:section name="08 종합" id="{2a16b76d-ef09-dbed-2f82-0e398cf74b6e}">
           <p14:sldIdLst>
             <p14:sldId id="275"/>
+          </p14:sldIdLst>
+        </p14:section>
+        <p14:section name="사진 출처" id="{82019323-fb4d-fc31-4b17-2d8c8a868b7c}">
+          <p14:sldIdLst>
+            <p14:sldId id="276"/>
           </p14:sldIdLst>
         </p14:section>
       </p14:sectionLst>
@@ -2045,6 +2051,94 @@
 </p:notes>
 </file>
 
+<file path=ppt/notesSlides/notesSlide21.xml><?xml version="1.0" encoding="utf-8"?>
+<p:notes xmlns:a="http://schemas.openxmlformats.org/drawingml/2006/main" xmlns:r="http://schemas.openxmlformats.org/officeDocument/2006/relationships" xmlns:p="http://schemas.openxmlformats.org/presentationml/2006/main">
+  <p:cSld>
+    <p:spTree>
+      <p:nvGrpSpPr>
+        <p:cNvPr id="1" name=""/>
+        <p:cNvGrpSpPr/>
+        <p:nvPr/>
+      </p:nvGrpSpPr>
+      <p:grpSpPr>
+        <a:xfrm>
+          <a:off x="0" y="0"/>
+          <a:ext cx="0" cy="0"/>
+          <a:chOff x="0" y="0"/>
+          <a:chExt cx="0" cy="0"/>
+        </a:xfrm>
+      </p:grpSpPr>
+      <p:sp>
+        <p:nvSpPr>
+          <p:cNvPr id="2" name="Slide Image Placeholder 1"/>
+          <p:cNvSpPr>
+            <a:spLocks noGrp="1" noRot="1" noChangeAspect="1"/>
+          </p:cNvSpPr>
+          <p:nvPr>
+            <p:ph type="sldImg"/>
+          </p:nvPr>
+        </p:nvSpPr>
+        <p:spPr/>
+      </p:sp>
+      <p:sp>
+        <p:nvSpPr>
+          <p:cNvPr id="3" name="Notes Placeholder 2"/>
+          <p:cNvSpPr>
+            <a:spLocks noGrp="1"/>
+          </p:cNvSpPr>
+          <p:nvPr>
+            <p:ph type="body" idx="1"/>
+          </p:nvPr>
+        </p:nvSpPr>
+        <p:spPr/>
+        <p:txBody>
+          <a:bodyPr/>
+          <a:lstStyle/>
+          <a:p>
+            <a:r>
+              <a:rPr lang="en-US" dirty="0"/>
+              <a:t>강의자료에 사용한 사진의 저작자와 라이선스입니다. CC BY·CC BY-SA 라이선스 사진은 저작자 표시가 필요하므로 이 슬라이드를 삭제하지 마세요.</a:t>
+            </a:r>
+            <a:endParaRPr lang="en-US" dirty="0"/>
+          </a:p>
+        </p:txBody>
+      </p:sp>
+      <p:sp>
+        <p:nvSpPr>
+          <p:cNvPr id="4" name="Slide Number Placeholder 3"/>
+          <p:cNvSpPr>
+            <a:spLocks noGrp="1"/>
+          </p:cNvSpPr>
+          <p:nvPr>
+            <p:ph type="sldNum" sz="quarter" idx="10"/>
+          </p:nvPr>
+        </p:nvSpPr>
+        <p:spPr/>
+        <p:txBody>
+          <a:bodyPr/>
+          <a:lstStyle/>
+          <a:p>
+            <a:fld id="{F7021451-1387-4CA6-816F-3879F97B5CBC}" type="slidenum">
+              <a:rPr lang="en-US"/>
+              <a:t>21</a:t>
+            </a:fld>
+            <a:endParaRPr lang="en-US"/>
+          </a:p>
+        </p:txBody>
+      </p:sp>
+    </p:spTree>
+    <p:extLst>
+      <p:ext uri="{BB962C8B-B14F-4D97-AF65-F5344CB8AC3E}">
+        <p14:creationId xmlns:p14="http://schemas.microsoft.com/office/powerpoint/2010/main" val="1024086991"/>
+      </p:ext>
+    </p:extLst>
+  </p:cSld>
+  <p:clrMapOvr>
+    <a:masterClrMapping/>
+  </p:clrMapOvr>
+</p:notes>
+</file>
+
 <file path=ppt/notesSlides/notesSlide3.xml><?xml version="1.0" encoding="utf-8"?>
 <p:notes xmlns:a="http://schemas.openxmlformats.org/drawingml/2006/main" xmlns:r="http://schemas.openxmlformats.org/officeDocument/2006/relationships" xmlns:p="http://schemas.openxmlformats.org/presentationml/2006/main">
   <p:cSld>
@@ -3412,11 +3506,11 @@
         <p:spPr>
           <a:xfrm>
             <a:off x="5760720" y="1216152"/>
-            <a:ext cx="3017520" cy="1417320"/>
+            <a:ext cx="3017520" cy="1005840"/>
           </a:xfrm>
           <a:prstGeom prst="roundRect">
             <a:avLst>
-              <a:gd name="adj" fmla="val 3871"/>
+              <a:gd name="adj" fmla="val 5455"/>
             </a:avLst>
           </a:prstGeom>
           <a:solidFill>
@@ -3433,8 +3527,8 @@
         </p:nvSpPr>
         <p:spPr>
           <a:xfrm>
-            <a:off x="5870448" y="1280160"/>
-            <a:ext cx="2834640" cy="1298448"/>
+            <a:off x="5870448" y="1243584"/>
+            <a:ext cx="2834640" cy="950976"/>
           </a:xfrm>
           <a:prstGeom prst="rect">
             <a:avLst/>
@@ -3464,7 +3558,7 @@
               <a:buNone/>
             </a:pPr>
             <a:r>
-              <a:rPr lang="en-US" sz="1800" b="1" dirty="0">
+              <a:rPr lang="en-US" sz="1600" b="1" dirty="0">
                 <a:solidFill>
                   <a:schemeClr val="accent2"/>
                 </a:solidFill>
@@ -3497,12 +3591,12 @@
         </p:nvSpPr>
         <p:spPr>
           <a:xfrm>
-            <a:off x="5760720" y="2743200"/>
-            <a:ext cx="3017520" cy="2029968"/>
+            <a:off x="5760720" y="2331720"/>
+            <a:ext cx="3017520" cy="2441448"/>
           </a:xfrm>
           <a:prstGeom prst="roundRect">
             <a:avLst>
-              <a:gd name="adj" fmla="val 2703"/>
+              <a:gd name="adj" fmla="val 2247"/>
             </a:avLst>
           </a:prstGeom>
           <a:solidFill>
@@ -3519,7 +3613,7 @@
         </p:nvSpPr>
         <p:spPr>
           <a:xfrm>
-            <a:off x="5870448" y="2834640"/>
+            <a:off x="5870448" y="2423160"/>
             <a:ext cx="566928" cy="219456"/>
           </a:xfrm>
           <a:prstGeom prst="roundRect">
@@ -3541,7 +3635,7 @@
         </p:nvSpPr>
         <p:spPr>
           <a:xfrm>
-            <a:off x="5870448" y="2834640"/>
+            <a:off x="5870448" y="2423160"/>
             <a:ext cx="566928" cy="219456"/>
           </a:xfrm>
           <a:prstGeom prst="rect">
@@ -3568,37 +3662,10 @@
             <a:endParaRPr lang="en-US" sz="900" dirty="0"/>
           </a:p>
         </p:txBody>
-      </p:sp>
-      <p:sp>
-        <p:nvSpPr>
-          <p:cNvPr id="11" name="img-frame-juicero"/>
-          <p:cNvSpPr/>
-          <p:nvPr/>
-        </p:nvSpPr>
-        <p:spPr>
-          <a:xfrm>
-            <a:off x="8119872" y="2834640"/>
-            <a:ext cx="566928" cy="566928"/>
-          </a:xfrm>
-          <a:prstGeom prst="roundRect">
-            <a:avLst>
-              <a:gd name="adj" fmla="val 9677"/>
-            </a:avLst>
-          </a:prstGeom>
-          <a:solidFill>
-            <a:schemeClr val="bg1"/>
-          </a:solidFill>
-          <a:ln w="9525">
-            <a:solidFill>
-              <a:schemeClr val="bg2"/>
-            </a:solidFill>
-            <a:prstDash val="solid"/>
-          </a:ln>
-        </p:spPr>
       </p:sp>
       <p:pic>
         <p:nvPicPr>
-          <p:cNvPr id="12" name="img-juicero" descr="juicero">    </p:cNvPr>
+          <p:cNvPr id="11" name="photo-juicero" descr="juicero photo">    </p:cNvPr>
           <p:cNvPicPr>
             <a:picLocks noChangeAspect="1"/>
           </p:cNvPicPr>
@@ -3612,14 +3679,36 @@
         </p:blipFill>
         <p:spPr>
           <a:xfrm>
-            <a:off x="8193573" y="2908341"/>
-            <a:ext cx="419527" cy="419527"/>
+            <a:off x="5870448" y="2715768"/>
+            <a:ext cx="2798064" cy="914400"/>
           </a:xfrm>
           <a:prstGeom prst="rect">
             <a:avLst/>
           </a:prstGeom>
         </p:spPr>
       </p:pic>
+      <p:sp>
+        <p:nvSpPr>
+          <p:cNvPr id="12" name="photo-frame-juicero"/>
+          <p:cNvSpPr/>
+          <p:nvPr/>
+        </p:nvSpPr>
+        <p:spPr>
+          <a:xfrm>
+            <a:off x="5870448" y="2715768"/>
+            <a:ext cx="2798064" cy="914400"/>
+          </a:xfrm>
+          <a:prstGeom prst="rect">
+            <a:avLst/>
+          </a:prstGeom>
+          <a:ln w="19050">
+            <a:solidFill>
+              <a:schemeClr val="bg1"/>
+            </a:solidFill>
+            <a:prstDash val="solid"/>
+          </a:ln>
+        </p:spPr>
+      </p:sp>
       <p:sp>
         <p:nvSpPr>
           <p:cNvPr id="13" name="Text 9"/>
@@ -3628,8 +3717,8 @@
         </p:nvSpPr>
         <p:spPr>
           <a:xfrm>
-            <a:off x="6510528" y="2807208"/>
-            <a:ext cx="1499616" cy="292608"/>
+            <a:off x="6510528" y="2395728"/>
+            <a:ext cx="2176272" cy="292608"/>
           </a:xfrm>
           <a:prstGeom prst="rect">
             <a:avLst/>
@@ -3664,8 +3753,8 @@
         </p:nvSpPr>
         <p:spPr>
           <a:xfrm>
-            <a:off x="5870448" y="3127248"/>
-            <a:ext cx="2121408" cy="1591056"/>
+            <a:off x="5870448" y="3703320"/>
+            <a:ext cx="2798064" cy="1014984"/>
           </a:xfrm>
           <a:prstGeom prst="rect">
             <a:avLst/>
@@ -3762,7 +3851,7 @@
                   <a:schemeClr val="tx1"/>
                 </a:solidFill>
               </a:rPr>
-              <a:t>출처: CB Insights, “The Top 20 Reasons Startups Fail”(101개 스타트업 사후분석); Bloomberg(2017.4)</a:t>
+              <a:t>출처: CB Insights, “The Top 20 Reasons Startups Fail”(101개 스타트업 사후분석); Bloomberg(2017.4) | 사진: Wikimedia Commons(21쪽)</a:t>
             </a:r>
             <a:endParaRPr lang="en-US" sz="800" dirty="0"/>
           </a:p>
@@ -6140,36 +6229,9 @@
           </a:p>
         </p:txBody>
       </p:sp>
-      <p:sp>
-        <p:nvSpPr>
-          <p:cNvPr id="31" name="img-frame-factory"/>
-          <p:cNvSpPr/>
-          <p:nvPr/>
-        </p:nvSpPr>
-        <p:spPr>
-          <a:xfrm>
-            <a:off x="8119872" y="4023360"/>
-            <a:ext cx="566928" cy="566928"/>
-          </a:xfrm>
-          <a:prstGeom prst="roundRect">
-            <a:avLst>
-              <a:gd name="adj" fmla="val 9677"/>
-            </a:avLst>
-          </a:prstGeom>
-          <a:solidFill>
-            <a:schemeClr val="bg1"/>
-          </a:solidFill>
-          <a:ln w="9525">
-            <a:solidFill>
-              <a:schemeClr val="bg2"/>
-            </a:solidFill>
-            <a:prstDash val="solid"/>
-          </a:ln>
-        </p:spPr>
-      </p:sp>
       <p:pic>
         <p:nvPicPr>
-          <p:cNvPr id="32" name="img-factory" descr="factory">    </p:cNvPr>
+          <p:cNvPr id="31" name="photo-etri" descr="etri photo">    </p:cNvPr>
           <p:cNvPicPr>
             <a:picLocks noChangeAspect="1"/>
           </p:cNvPicPr>
@@ -6183,14 +6245,36 @@
         </p:blipFill>
         <p:spPr>
           <a:xfrm>
-            <a:off x="8193573" y="4097061"/>
-            <a:ext cx="419527" cy="419527"/>
+            <a:off x="7699248" y="4023360"/>
+            <a:ext cx="987552" cy="658368"/>
           </a:xfrm>
           <a:prstGeom prst="rect">
             <a:avLst/>
           </a:prstGeom>
         </p:spPr>
       </p:pic>
+      <p:sp>
+        <p:nvSpPr>
+          <p:cNvPr id="32" name="photo-frame-etri"/>
+          <p:cNvSpPr/>
+          <p:nvPr/>
+        </p:nvSpPr>
+        <p:spPr>
+          <a:xfrm>
+            <a:off x="7699248" y="4023360"/>
+            <a:ext cx="987552" cy="658368"/>
+          </a:xfrm>
+          <a:prstGeom prst="rect">
+            <a:avLst/>
+          </a:prstGeom>
+          <a:ln w="19050">
+            <a:solidFill>
+              <a:schemeClr val="bg1"/>
+            </a:solidFill>
+            <a:prstDash val="solid"/>
+          </a:ln>
+        </p:spPr>
+      </p:sp>
       <p:sp>
         <p:nvSpPr>
           <p:cNvPr id="33" name="Text 30"/>
@@ -6200,7 +6284,7 @@
         <p:spPr>
           <a:xfrm>
             <a:off x="1115568" y="3995928"/>
-            <a:ext cx="6894576" cy="292608"/>
+            <a:ext cx="6473952" cy="292608"/>
           </a:xfrm>
           <a:prstGeom prst="rect">
             <a:avLst/>
@@ -6236,7 +6320,7 @@
         <p:spPr>
           <a:xfrm>
             <a:off x="475488" y="4315968"/>
-            <a:ext cx="7516368" cy="402336"/>
+            <a:ext cx="7095744" cy="402336"/>
           </a:xfrm>
           <a:prstGeom prst="rect">
             <a:avLst/>
@@ -6260,7 +6344,7 @@
                   <a:schemeClr val="tx1"/>
                 </a:solidFill>
               </a:rPr>
-              <a:t>대학·출연연 기술이전 후 사업화에 실패하는 다수의 사례는 ‘기술(시연)’ 단계는 넘었지만 ‘시장 구성원 동원(다리 3)’과 ‘보완 자산 확보(다리 4)’를 설계하지 않은 경우다. 졸리 모델은 기술 단계와 함께 각 다리의 이해관계자 동원 계획을 요구한다.</a:t>
+              <a:t>대학·출연연 기술이전 후 사업화 실패는 대개 ‘시연’ 단계는 넘었지만 ‘시장 구성원 동원(다리 3)’과 ‘보완 자산 확보(다리 4)’를 설계하지 않은 경우다.</a:t>
             </a:r>
             <a:endParaRPr lang="en-US" sz="1000" dirty="0"/>
           </a:p>
@@ -6296,7 +6380,7 @@
                   <a:schemeClr val="tx1"/>
                 </a:solidFill>
               </a:rPr>
-              <a:t>출처: Jolly, V. K.(1997), Commercializing New Technologies: Getting from Mind to Market, Harvard Business School Press</a:t>
+              <a:t>출처: Jolly, V. K.(1997), Commercializing New Technologies: Getting from Mind to Market, Harvard Business School Press | 사진: Wikimedia Commons(21쪽)</a:t>
             </a:r>
             <a:endParaRPr lang="en-US" sz="800" dirty="0"/>
           </a:p>
@@ -6574,11 +6658,11 @@
         <p:spPr>
           <a:xfrm>
             <a:off x="365760" y="2377440"/>
-            <a:ext cx="1508760" cy="1051560"/>
+            <a:ext cx="1508760" cy="896112"/>
           </a:xfrm>
           <a:prstGeom prst="roundRect">
             <a:avLst>
-              <a:gd name="adj" fmla="val 5217"/>
+              <a:gd name="adj" fmla="val 6122"/>
             </a:avLst>
           </a:prstGeom>
           <a:solidFill>
@@ -6595,8 +6679,8 @@
         </p:nvSpPr>
         <p:spPr>
           <a:xfrm>
-            <a:off x="411480" y="2395728"/>
-            <a:ext cx="1417320" cy="1005840"/>
+            <a:off x="411480" y="2386584"/>
+            <a:ext cx="1417320" cy="877824"/>
           </a:xfrm>
           <a:prstGeom prst="rect">
             <a:avLst/>
@@ -6729,11 +6813,11 @@
         <p:spPr>
           <a:xfrm>
             <a:off x="2066544" y="2377440"/>
-            <a:ext cx="1508760" cy="1051560"/>
+            <a:ext cx="1508760" cy="896112"/>
           </a:xfrm>
           <a:prstGeom prst="roundRect">
             <a:avLst>
-              <a:gd name="adj" fmla="val 5217"/>
+              <a:gd name="adj" fmla="val 6122"/>
             </a:avLst>
           </a:prstGeom>
           <a:solidFill>
@@ -6750,8 +6834,8 @@
         </p:nvSpPr>
         <p:spPr>
           <a:xfrm>
-            <a:off x="2112264" y="2395728"/>
-            <a:ext cx="1417320" cy="1005840"/>
+            <a:off x="2112264" y="2386584"/>
+            <a:ext cx="1417320" cy="877824"/>
           </a:xfrm>
           <a:prstGeom prst="rect">
             <a:avLst/>
@@ -6884,11 +6968,11 @@
         <p:spPr>
           <a:xfrm>
             <a:off x="3767328" y="2377440"/>
-            <a:ext cx="1508760" cy="1051560"/>
+            <a:ext cx="1508760" cy="896112"/>
           </a:xfrm>
           <a:prstGeom prst="roundRect">
             <a:avLst>
-              <a:gd name="adj" fmla="val 5217"/>
+              <a:gd name="adj" fmla="val 6122"/>
             </a:avLst>
           </a:prstGeom>
           <a:solidFill>
@@ -6905,8 +6989,8 @@
         </p:nvSpPr>
         <p:spPr>
           <a:xfrm>
-            <a:off x="3813048" y="2395728"/>
-            <a:ext cx="1417320" cy="1005840"/>
+            <a:off x="3813048" y="2386584"/>
+            <a:ext cx="1417320" cy="877824"/>
           </a:xfrm>
           <a:prstGeom prst="rect">
             <a:avLst/>
@@ -7039,11 +7123,11 @@
         <p:spPr>
           <a:xfrm>
             <a:off x="5468112" y="2377440"/>
-            <a:ext cx="1508760" cy="1051560"/>
+            <a:ext cx="1508760" cy="896112"/>
           </a:xfrm>
           <a:prstGeom prst="roundRect">
             <a:avLst>
-              <a:gd name="adj" fmla="val 5217"/>
+              <a:gd name="adj" fmla="val 6122"/>
             </a:avLst>
           </a:prstGeom>
           <a:solidFill>
@@ -7060,8 +7144,8 @@
         </p:nvSpPr>
         <p:spPr>
           <a:xfrm>
-            <a:off x="5513832" y="2395728"/>
-            <a:ext cx="1417320" cy="1005840"/>
+            <a:off x="5513832" y="2386584"/>
+            <a:ext cx="1417320" cy="877824"/>
           </a:xfrm>
           <a:prstGeom prst="rect">
             <a:avLst/>
@@ -7194,11 +7278,11 @@
         <p:spPr>
           <a:xfrm>
             <a:off x="7168896" y="2377440"/>
-            <a:ext cx="1508760" cy="1051560"/>
+            <a:ext cx="1508760" cy="896112"/>
           </a:xfrm>
           <a:prstGeom prst="roundRect">
             <a:avLst>
-              <a:gd name="adj" fmla="val 5217"/>
+              <a:gd name="adj" fmla="val 6122"/>
             </a:avLst>
           </a:prstGeom>
           <a:solidFill>
@@ -7215,8 +7299,8 @@
         </p:nvSpPr>
         <p:spPr>
           <a:xfrm>
-            <a:off x="7214616" y="2395728"/>
-            <a:ext cx="1417320" cy="1005840"/>
+            <a:off x="7214616" y="2386584"/>
+            <a:ext cx="1417320" cy="877824"/>
           </a:xfrm>
           <a:prstGeom prst="rect">
             <a:avLst/>
@@ -7251,12 +7335,12 @@
         </p:nvSpPr>
         <p:spPr>
           <a:xfrm>
-            <a:off x="365760" y="3566160"/>
-            <a:ext cx="8412480" cy="1207008"/>
+            <a:off x="365760" y="3401568"/>
+            <a:ext cx="8412480" cy="1371600"/>
           </a:xfrm>
           <a:prstGeom prst="roundRect">
             <a:avLst>
-              <a:gd name="adj" fmla="val 4545"/>
+              <a:gd name="adj" fmla="val 4000"/>
             </a:avLst>
           </a:prstGeom>
           <a:solidFill>
@@ -7273,7 +7357,7 @@
         </p:nvSpPr>
         <p:spPr>
           <a:xfrm>
-            <a:off x="475488" y="3657600"/>
+            <a:off x="475488" y="3493008"/>
             <a:ext cx="566928" cy="219456"/>
           </a:xfrm>
           <a:prstGeom prst="roundRect">
@@ -7295,7 +7379,7 @@
         </p:nvSpPr>
         <p:spPr>
           <a:xfrm>
-            <a:off x="475488" y="3657600"/>
+            <a:off x="475488" y="3493008"/>
             <a:ext cx="566928" cy="219456"/>
           </a:xfrm>
           <a:prstGeom prst="rect">
@@ -7322,37 +7406,10 @@
             <a:endParaRPr lang="en-US" sz="900" dirty="0"/>
           </a:p>
         </p:txBody>
-      </p:sp>
-      <p:sp>
-        <p:nvSpPr>
-          <p:cNvPr id="33" name="img-frame-postit"/>
-          <p:cNvSpPr/>
-          <p:nvPr/>
-        </p:nvSpPr>
-        <p:spPr>
-          <a:xfrm>
-            <a:off x="8119872" y="3657600"/>
-            <a:ext cx="566928" cy="566928"/>
-          </a:xfrm>
-          <a:prstGeom prst="roundRect">
-            <a:avLst>
-              <a:gd name="adj" fmla="val 9677"/>
-            </a:avLst>
-          </a:prstGeom>
-          <a:solidFill>
-            <a:schemeClr val="bg1"/>
-          </a:solidFill>
-          <a:ln w="9525">
-            <a:solidFill>
-              <a:schemeClr val="bg2"/>
-            </a:solidFill>
-            <a:prstDash val="solid"/>
-          </a:ln>
-        </p:spPr>
       </p:sp>
       <p:pic>
         <p:nvPicPr>
-          <p:cNvPr id="34" name="img-postit" descr="postit">    </p:cNvPr>
+          <p:cNvPr id="33" name="photo-postit" descr="postit photo">    </p:cNvPr>
           <p:cNvPicPr>
             <a:picLocks noChangeAspect="1"/>
           </p:cNvPicPr>
@@ -7366,14 +7423,36 @@
         </p:blipFill>
         <p:spPr>
           <a:xfrm>
-            <a:off x="8193573" y="3731301"/>
-            <a:ext cx="419527" cy="419527"/>
+            <a:off x="6903720" y="3493008"/>
+            <a:ext cx="1783080" cy="1188720"/>
           </a:xfrm>
           <a:prstGeom prst="rect">
             <a:avLst/>
           </a:prstGeom>
         </p:spPr>
       </p:pic>
+      <p:sp>
+        <p:nvSpPr>
+          <p:cNvPr id="34" name="photo-frame-postit"/>
+          <p:cNvSpPr/>
+          <p:nvPr/>
+        </p:nvSpPr>
+        <p:spPr>
+          <a:xfrm>
+            <a:off x="6903720" y="3493008"/>
+            <a:ext cx="1783080" cy="1188720"/>
+          </a:xfrm>
+          <a:prstGeom prst="rect">
+            <a:avLst/>
+          </a:prstGeom>
+          <a:ln w="19050">
+            <a:solidFill>
+              <a:schemeClr val="bg1"/>
+            </a:solidFill>
+            <a:prstDash val="solid"/>
+          </a:ln>
+        </p:spPr>
+      </p:sp>
       <p:sp>
         <p:nvSpPr>
           <p:cNvPr id="35" name="Text 32"/>
@@ -7382,8 +7461,8 @@
         </p:nvSpPr>
         <p:spPr>
           <a:xfrm>
-            <a:off x="1115568" y="3630168"/>
-            <a:ext cx="6894576" cy="292608"/>
+            <a:off x="1115568" y="3465576"/>
+            <a:ext cx="5678424" cy="292608"/>
           </a:xfrm>
           <a:prstGeom prst="rect">
             <a:avLst/>
@@ -7418,8 +7497,8 @@
         </p:nvSpPr>
         <p:spPr>
           <a:xfrm>
-            <a:off x="475488" y="3950208"/>
-            <a:ext cx="7516368" cy="768096"/>
+            <a:off x="475488" y="3785616"/>
+            <a:ext cx="6300216" cy="932688"/>
           </a:xfrm>
           <a:prstGeom prst="rect">
             <a:avLst/>
@@ -7516,7 +7595,7 @@
                   <a:schemeClr val="tx1"/>
                 </a:solidFill>
               </a:rPr>
-              <a:t>출처: 3M Company, “History of Post-it Notes”; Jolly(1997) 사례 분석 틀 적용</a:t>
+              <a:t>출처: 3M Company, “History of Post-it Notes”; Jolly(1997) 사례 분석 틀 적용 | 사진: Wikimedia Commons(21쪽)</a:t>
             </a:r>
             <a:endParaRPr lang="en-US" sz="800" dirty="0"/>
           </a:p>
@@ -8494,36 +8573,9 @@
           </a:p>
         </p:txBody>
       </p:sp>
-      <p:sp>
-        <p:nvSpPr>
-          <p:cNvPr id="28" name="img-frame-ge"/>
-          <p:cNvSpPr/>
-          <p:nvPr/>
-        </p:nvSpPr>
-        <p:spPr>
-          <a:xfrm>
-            <a:off x="8119872" y="3474720"/>
-            <a:ext cx="566928" cy="566928"/>
-          </a:xfrm>
-          <a:prstGeom prst="roundRect">
-            <a:avLst>
-              <a:gd name="adj" fmla="val 9677"/>
-            </a:avLst>
-          </a:prstGeom>
-          <a:solidFill>
-            <a:schemeClr val="bg1"/>
-          </a:solidFill>
-          <a:ln w="9525">
-            <a:solidFill>
-              <a:schemeClr val="bg2"/>
-            </a:solidFill>
-            <a:prstDash val="solid"/>
-          </a:ln>
-        </p:spPr>
-      </p:sp>
       <p:pic>
         <p:nvPicPr>
-          <p:cNvPr id="29" name="img-ge" descr="ge">    </p:cNvPr>
+          <p:cNvPr id="28" name="photo-mri" descr="mri photo">    </p:cNvPr>
           <p:cNvPicPr>
             <a:picLocks noChangeAspect="1"/>
           </p:cNvPicPr>
@@ -8537,14 +8589,36 @@
         </p:blipFill>
         <p:spPr>
           <a:xfrm>
-            <a:off x="8193573" y="3548421"/>
-            <a:ext cx="419527" cy="419527"/>
+            <a:off x="6876288" y="3474720"/>
+            <a:ext cx="1810512" cy="1207008"/>
           </a:xfrm>
           <a:prstGeom prst="rect">
             <a:avLst/>
           </a:prstGeom>
         </p:spPr>
       </p:pic>
+      <p:sp>
+        <p:nvSpPr>
+          <p:cNvPr id="29" name="photo-frame-mri"/>
+          <p:cNvSpPr/>
+          <p:nvPr/>
+        </p:nvSpPr>
+        <p:spPr>
+          <a:xfrm>
+            <a:off x="6876288" y="3474720"/>
+            <a:ext cx="1810512" cy="1207008"/>
+          </a:xfrm>
+          <a:prstGeom prst="rect">
+            <a:avLst/>
+          </a:prstGeom>
+          <a:ln w="19050">
+            <a:solidFill>
+              <a:schemeClr val="bg1"/>
+            </a:solidFill>
+            <a:prstDash val="solid"/>
+          </a:ln>
+        </p:spPr>
+      </p:sp>
       <p:sp>
         <p:nvSpPr>
           <p:cNvPr id="30" name="Text 27"/>
@@ -8554,7 +8628,7 @@
         <p:spPr>
           <a:xfrm>
             <a:off x="1115568" y="3447288"/>
-            <a:ext cx="6894576" cy="292608"/>
+            <a:ext cx="5650992" cy="292608"/>
           </a:xfrm>
           <a:prstGeom prst="rect">
             <a:avLst/>
@@ -8590,7 +8664,7 @@
         <p:spPr>
           <a:xfrm>
             <a:off x="475488" y="3767328"/>
-            <a:ext cx="7516368" cy="950976"/>
+            <a:ext cx="6272784" cy="950976"/>
           </a:xfrm>
           <a:prstGeom prst="rect">
             <a:avLst/>
@@ -8687,7 +8761,7 @@
                   <a:schemeClr val="tx1"/>
                 </a:solidFill>
               </a:rPr>
-              <a:t>출처: Stanford d.school, “An Introduction to Design Thinking”; Doug Dietz, TEDx(2012); IDEO</a:t>
+              <a:t>출처: Stanford d.school, “An Introduction to Design Thinking”; Doug Dietz, TEDx(2012); IDEO | 사진: Wikimedia Commons(21쪽)</a:t>
             </a:r>
             <a:endParaRPr lang="en-US" sz="800" dirty="0"/>
           </a:p>
@@ -9525,36 +9599,9 @@
           </a:p>
         </p:txBody>
       </p:sp>
-      <p:sp>
-        <p:nvSpPr>
-          <p:cNvPr id="28" name="img-frame-airbnb"/>
-          <p:cNvSpPr/>
-          <p:nvPr/>
-        </p:nvSpPr>
-        <p:spPr>
-          <a:xfrm>
-            <a:off x="8119872" y="1645920"/>
-            <a:ext cx="566928" cy="566928"/>
-          </a:xfrm>
-          <a:prstGeom prst="roundRect">
-            <a:avLst>
-              <a:gd name="adj" fmla="val 9677"/>
-            </a:avLst>
-          </a:prstGeom>
-          <a:solidFill>
-            <a:schemeClr val="bg1"/>
-          </a:solidFill>
-          <a:ln w="9525">
-            <a:solidFill>
-              <a:schemeClr val="bg2"/>
-            </a:solidFill>
-            <a:prstDash val="solid"/>
-          </a:ln>
-        </p:spPr>
-      </p:sp>
       <p:pic>
         <p:nvPicPr>
-          <p:cNvPr id="29" name="img-airbnb" descr="airbnb">    </p:cNvPr>
+          <p:cNvPr id="28" name="photo-airbnb" descr="airbnb photo">    </p:cNvPr>
           <p:cNvPicPr>
             <a:picLocks noChangeAspect="1"/>
           </p:cNvPicPr>
@@ -9568,14 +9615,36 @@
         </p:blipFill>
         <p:spPr>
           <a:xfrm>
-            <a:off x="8193573" y="1719621"/>
-            <a:ext cx="419527" cy="419527"/>
+            <a:off x="6419088" y="1938528"/>
+            <a:ext cx="2249424" cy="914400"/>
           </a:xfrm>
           <a:prstGeom prst="rect">
             <a:avLst/>
           </a:prstGeom>
         </p:spPr>
       </p:pic>
+      <p:sp>
+        <p:nvSpPr>
+          <p:cNvPr id="29" name="photo-frame-airbnb"/>
+          <p:cNvSpPr/>
+          <p:nvPr/>
+        </p:nvSpPr>
+        <p:spPr>
+          <a:xfrm>
+            <a:off x="6419088" y="1938528"/>
+            <a:ext cx="2249424" cy="914400"/>
+          </a:xfrm>
+          <a:prstGeom prst="rect">
+            <a:avLst/>
+          </a:prstGeom>
+          <a:ln w="19050">
+            <a:solidFill>
+              <a:schemeClr val="bg1"/>
+            </a:solidFill>
+            <a:prstDash val="solid"/>
+          </a:ln>
+        </p:spPr>
+      </p:sp>
       <p:sp>
         <p:nvSpPr>
           <p:cNvPr id="30" name="Text 27"/>
@@ -9585,7 +9654,7 @@
         <p:spPr>
           <a:xfrm>
             <a:off x="7059168" y="1618488"/>
-            <a:ext cx="950976" cy="292608"/>
+            <a:ext cx="1627632" cy="292608"/>
           </a:xfrm>
           <a:prstGeom prst="rect">
             <a:avLst/>
@@ -9620,8 +9689,8 @@
         </p:nvSpPr>
         <p:spPr>
           <a:xfrm>
-            <a:off x="6419088" y="1938528"/>
-            <a:ext cx="1572768" cy="2139696"/>
+            <a:off x="6419088" y="2926080"/>
+            <a:ext cx="2249424" cy="1152144"/>
           </a:xfrm>
           <a:prstGeom prst="rect">
             <a:avLst/>
@@ -9768,7 +9837,7 @@
                   <a:schemeClr val="tx1"/>
                 </a:solidFill>
               </a:rPr>
-              <a:t>출처: Joe Gebbia 인터뷰(First Round Review); Paul Graham, “Do Things that Don’t Scale”(2013)</a:t>
+              <a:t>출처: Joe Gebbia 인터뷰(First Round Review); Paul Graham, “Do Things that Don’t Scale”(2013) | 사진: Wikimedia Commons(21쪽)</a:t>
             </a:r>
             <a:endParaRPr lang="en-US" sz="800" dirty="0"/>
           </a:p>
@@ -10595,36 +10664,9 @@
           </a:p>
         </p:txBody>
       </p:sp>
-      <p:sp>
-        <p:nvSpPr>
-          <p:cNvPr id="22" name="img-frame-nespresso"/>
-          <p:cNvSpPr/>
-          <p:nvPr/>
-        </p:nvSpPr>
-        <p:spPr>
-          <a:xfrm>
-            <a:off x="4206240" y="2651760"/>
-            <a:ext cx="731520" cy="731520"/>
-          </a:xfrm>
-          <a:prstGeom prst="roundRect">
-            <a:avLst>
-              <a:gd name="adj" fmla="val 7500"/>
-            </a:avLst>
-          </a:prstGeom>
-          <a:solidFill>
-            <a:schemeClr val="bg1"/>
-          </a:solidFill>
-          <a:ln w="9525">
-            <a:solidFill>
-              <a:schemeClr val="bg2"/>
-            </a:solidFill>
-            <a:prstDash val="solid"/>
-          </a:ln>
-        </p:spPr>
-      </p:sp>
       <p:pic>
         <p:nvPicPr>
-          <p:cNvPr id="23" name="img-nespresso" descr="nespresso">    </p:cNvPr>
+          <p:cNvPr id="22" name="photo-nespresso2" descr="nespresso2 photo">    </p:cNvPr>
           <p:cNvPicPr>
             <a:picLocks noChangeAspect="1"/>
           </p:cNvPicPr>
@@ -10638,14 +10680,36 @@
         </p:blipFill>
         <p:spPr>
           <a:xfrm>
-            <a:off x="4301338" y="2746858"/>
-            <a:ext cx="541325" cy="541325"/>
+            <a:off x="3822192" y="2331720"/>
+            <a:ext cx="1499616" cy="1097280"/>
           </a:xfrm>
           <a:prstGeom prst="rect">
             <a:avLst/>
           </a:prstGeom>
         </p:spPr>
       </p:pic>
+      <p:sp>
+        <p:nvSpPr>
+          <p:cNvPr id="23" name="photo-frame-nespresso2"/>
+          <p:cNvSpPr/>
+          <p:nvPr/>
+        </p:nvSpPr>
+        <p:spPr>
+          <a:xfrm>
+            <a:off x="3822192" y="2331720"/>
+            <a:ext cx="1499616" cy="1097280"/>
+          </a:xfrm>
+          <a:prstGeom prst="rect">
+            <a:avLst/>
+          </a:prstGeom>
+          <a:ln w="19050">
+            <a:solidFill>
+              <a:schemeClr val="bg1"/>
+            </a:solidFill>
+            <a:prstDash val="solid"/>
+          </a:ln>
+        </p:spPr>
+      </p:sp>
       <p:sp>
         <p:nvSpPr>
           <p:cNvPr id="24" name="Text 21"/>
@@ -10712,7 +10776,7 @@
                   <a:schemeClr val="tx1"/>
                 </a:solidFill>
               </a:rPr>
-              <a:t>출처: Osterwalder, A. &amp; Pigneur, Y.(2010), Business Model Generation; Nestlé Nespresso 공개자료</a:t>
+              <a:t>출처: Osterwalder, A. &amp; Pigneur, Y.(2010), Business Model Generation; Nestlé Nespresso 공개자료 | 사진: Wikimedia Commons(21쪽)</a:t>
             </a:r>
             <a:endParaRPr lang="en-US" sz="800" dirty="0"/>
           </a:p>
@@ -13367,15 +13431,216 @@
           </a:p>
         </p:txBody>
       </p:sp>
-      <p:sp>
-        <p:nvSpPr>
-          <p:cNvPr id="8" name="img-frame-nespresso"/>
+      <p:pic>
+        <p:nvPicPr>
+          <p:cNvPr id="8" name="photo-nespresso" descr="nespresso photo">    </p:cNvPr>
+          <p:cNvPicPr>
+            <a:picLocks noChangeAspect="1"/>
+          </p:cNvPicPr>
+          <p:nvPr/>
+        </p:nvPicPr>
+        <p:blipFill>
+          <a:blip r:embed="rId1"/>
+          <a:stretch>
+            <a:fillRect/>
+          </a:stretch>
+        </p:blipFill>
+        <p:spPr>
+          <a:xfrm>
+            <a:off x="3058668" y="3794760"/>
+            <a:ext cx="1330452" cy="886968"/>
+          </a:xfrm>
+          <a:prstGeom prst="rect">
+            <a:avLst/>
+          </a:prstGeom>
+        </p:spPr>
+      </p:pic>
+      <p:sp>
+        <p:nvSpPr>
+          <p:cNvPr id="9" name="photo-frame-nespresso"/>
           <p:cNvSpPr/>
           <p:nvPr/>
         </p:nvSpPr>
         <p:spPr>
           <a:xfrm>
-            <a:off x="3822192" y="3794760"/>
+            <a:off x="3058668" y="3794760"/>
+            <a:ext cx="1330452" cy="886968"/>
+          </a:xfrm>
+          <a:prstGeom prst="rect">
+            <a:avLst/>
+          </a:prstGeom>
+          <a:ln w="19050">
+            <a:solidFill>
+              <a:schemeClr val="bg1"/>
+            </a:solidFill>
+            <a:prstDash val="solid"/>
+          </a:ln>
+        </p:spPr>
+      </p:sp>
+      <p:sp>
+        <p:nvSpPr>
+          <p:cNvPr id="10" name="Text 6"/>
+          <p:cNvSpPr txBox="1"/>
+          <p:nvPr/>
+        </p:nvSpPr>
+        <p:spPr>
+          <a:xfrm>
+            <a:off x="1115568" y="3767328"/>
+            <a:ext cx="1833372" cy="292608"/>
+          </a:xfrm>
+          <a:prstGeom prst="rect">
+            <a:avLst/>
+          </a:prstGeom>
+          <a:noFill/>
+          <a:ln/>
+        </p:spPr>
+        <p:txBody>
+          <a:bodyPr wrap="square" lIns="762" tIns="762" rIns="762" bIns="762" rtlCol="0" anchor="ctr"/>
+          <a:lstStyle/>
+          <a:p>
+            <a:pPr indent="0" marL="0">
+              <a:buNone/>
+            </a:pPr>
+            <a:r>
+              <a:rPr lang="en-US" sz="1100" b="1" dirty="0">
+                <a:solidFill>
+                  <a:schemeClr val="accent2"/>
+                </a:solidFill>
+              </a:rPr>
+              <a:t>BMC 적합: 네스프레소</a:t>
+            </a:r>
+            <a:endParaRPr lang="en-US" sz="1100" dirty="0"/>
+          </a:p>
+        </p:txBody>
+      </p:sp>
+      <p:sp>
+        <p:nvSpPr>
+          <p:cNvPr id="11" name="Text 7"/>
+          <p:cNvSpPr txBox="1"/>
+          <p:nvPr/>
+        </p:nvSpPr>
+        <p:spPr>
+          <a:xfrm>
+            <a:off x="475488" y="4087368"/>
+            <a:ext cx="2455164" cy="630936"/>
+          </a:xfrm>
+          <a:prstGeom prst="rect">
+            <a:avLst/>
+          </a:prstGeom>
+          <a:noFill/>
+          <a:ln/>
+        </p:spPr>
+        <p:txBody>
+          <a:bodyPr wrap="square" lIns="762" tIns="762" rIns="762" bIns="762" rtlCol="0" anchor="t"/>
+          <a:lstStyle/>
+          <a:p>
+            <a:pPr indent="0" marL="0">
+              <a:spcAft>
+                <a:spcPts val="200"/>
+              </a:spcAft>
+              <a:buNone/>
+            </a:pPr>
+            <a:r>
+              <a:rPr lang="en-US" sz="1000" dirty="0">
+                <a:solidFill>
+                  <a:schemeClr val="tx1"/>
+                </a:solidFill>
+              </a:rPr>
+              <a:t>이미 작동하는 사업에서 ‘머신 판매’ 대신 ‘캡슐 반복 구매’로 수익 구조를 재설계 – 전체 구조 변경이 핵심</a:t>
+            </a:r>
+            <a:endParaRPr lang="en-US" sz="1000" dirty="0"/>
+          </a:p>
+        </p:txBody>
+      </p:sp>
+      <p:sp>
+        <p:nvSpPr>
+          <p:cNvPr id="12" name="case-card"/>
+          <p:cNvSpPr/>
+          <p:nvPr/>
+        </p:nvSpPr>
+        <p:spPr>
+          <a:xfrm>
+            <a:off x="4663440" y="3703320"/>
+            <a:ext cx="4114800" cy="1069848"/>
+          </a:xfrm>
+          <a:prstGeom prst="roundRect">
+            <a:avLst>
+              <a:gd name="adj" fmla="val 5128"/>
+            </a:avLst>
+          </a:prstGeom>
+          <a:solidFill>
+            <a:schemeClr val="accent6"/>
+          </a:solidFill>
+          <a:ln/>
+        </p:spPr>
+      </p:sp>
+      <p:sp>
+        <p:nvSpPr>
+          <p:cNvPr id="13" name="case-chip"/>
+          <p:cNvSpPr/>
+          <p:nvPr/>
+        </p:nvSpPr>
+        <p:spPr>
+          <a:xfrm>
+            <a:off x="4773168" y="3794760"/>
+            <a:ext cx="566928" cy="219456"/>
+          </a:xfrm>
+          <a:prstGeom prst="roundRect">
+            <a:avLst>
+              <a:gd name="adj" fmla="val 20833"/>
+            </a:avLst>
+          </a:prstGeom>
+          <a:solidFill>
+            <a:schemeClr val="accent2"/>
+          </a:solidFill>
+          <a:ln/>
+        </p:spPr>
+      </p:sp>
+      <p:sp>
+        <p:nvSpPr>
+          <p:cNvPr id="14" name="Text 10"/>
+          <p:cNvSpPr txBox="1"/>
+          <p:nvPr/>
+        </p:nvSpPr>
+        <p:spPr>
+          <a:xfrm>
+            <a:off x="4773168" y="3794760"/>
+            <a:ext cx="566928" cy="219456"/>
+          </a:xfrm>
+          <a:prstGeom prst="rect">
+            <a:avLst/>
+          </a:prstGeom>
+          <a:noFill/>
+          <a:ln/>
+        </p:spPr>
+        <p:txBody>
+          <a:bodyPr wrap="square" lIns="0" tIns="0" rIns="0" bIns="0" rtlCol="0" anchor="ctr"/>
+          <a:lstStyle/>
+          <a:p>
+            <a:pPr algn="ctr" indent="0" marL="0">
+              <a:buNone/>
+            </a:pPr>
+            <a:r>
+              <a:rPr lang="en-US" sz="900" b="1" dirty="0">
+                <a:solidFill>
+                  <a:schemeClr val="bg1"/>
+                </a:solidFill>
+              </a:rPr>
+              <a:t>CASE</a:t>
+            </a:r>
+            <a:endParaRPr lang="en-US" sz="900" dirty="0"/>
+          </a:p>
+        </p:txBody>
+      </p:sp>
+      <p:sp>
+        <p:nvSpPr>
+          <p:cNvPr id="15" name="img-frame-uber"/>
+          <p:cNvSpPr/>
+          <p:nvPr/>
+        </p:nvSpPr>
+        <p:spPr>
+          <a:xfrm>
+            <a:off x="8119872" y="3794760"/>
             <a:ext cx="566928" cy="566928"/>
           </a:xfrm>
           <a:prstGeom prst="roundRect">
@@ -13396,212 +13661,6 @@
       </p:sp>
       <p:pic>
         <p:nvPicPr>
-          <p:cNvPr id="9" name="img-nespresso" descr="nespresso">    </p:cNvPr>
-          <p:cNvPicPr>
-            <a:picLocks noChangeAspect="1"/>
-          </p:cNvPicPr>
-          <p:nvPr/>
-        </p:nvPicPr>
-        <p:blipFill>
-          <a:blip r:embed="rId1"/>
-          <a:stretch>
-            <a:fillRect/>
-          </a:stretch>
-        </p:blipFill>
-        <p:spPr>
-          <a:xfrm>
-            <a:off x="3895893" y="3868461"/>
-            <a:ext cx="419527" cy="419527"/>
-          </a:xfrm>
-          <a:prstGeom prst="rect">
-            <a:avLst/>
-          </a:prstGeom>
-        </p:spPr>
-      </p:pic>
-      <p:sp>
-        <p:nvSpPr>
-          <p:cNvPr id="10" name="Text 6"/>
-          <p:cNvSpPr txBox="1"/>
-          <p:nvPr/>
-        </p:nvSpPr>
-        <p:spPr>
-          <a:xfrm>
-            <a:off x="1115568" y="3767328"/>
-            <a:ext cx="2596896" cy="292608"/>
-          </a:xfrm>
-          <a:prstGeom prst="rect">
-            <a:avLst/>
-          </a:prstGeom>
-          <a:noFill/>
-          <a:ln/>
-        </p:spPr>
-        <p:txBody>
-          <a:bodyPr wrap="square" lIns="762" tIns="762" rIns="762" bIns="762" rtlCol="0" anchor="ctr"/>
-          <a:lstStyle/>
-          <a:p>
-            <a:pPr indent="0" marL="0">
-              <a:buNone/>
-            </a:pPr>
-            <a:r>
-              <a:rPr lang="en-US" sz="1100" b="1" dirty="0">
-                <a:solidFill>
-                  <a:schemeClr val="accent2"/>
-                </a:solidFill>
-              </a:rPr>
-              <a:t>BMC가 맞는 경우: 네스프레소</a:t>
-            </a:r>
-            <a:endParaRPr lang="en-US" sz="1100" dirty="0"/>
-          </a:p>
-        </p:txBody>
-      </p:sp>
-      <p:sp>
-        <p:nvSpPr>
-          <p:cNvPr id="11" name="Text 7"/>
-          <p:cNvSpPr txBox="1"/>
-          <p:nvPr/>
-        </p:nvSpPr>
-        <p:spPr>
-          <a:xfrm>
-            <a:off x="475488" y="4087368"/>
-            <a:ext cx="3218688" cy="630936"/>
-          </a:xfrm>
-          <a:prstGeom prst="rect">
-            <a:avLst/>
-          </a:prstGeom>
-          <a:noFill/>
-          <a:ln/>
-        </p:spPr>
-        <p:txBody>
-          <a:bodyPr wrap="square" lIns="762" tIns="762" rIns="762" bIns="762" rtlCol="0" anchor="t"/>
-          <a:lstStyle/>
-          <a:p>
-            <a:pPr indent="0" marL="0">
-              <a:spcAft>
-                <a:spcPts val="200"/>
-              </a:spcAft>
-              <a:buNone/>
-            </a:pPr>
-            <a:r>
-              <a:rPr lang="en-US" sz="1000" dirty="0">
-                <a:solidFill>
-                  <a:schemeClr val="tx1"/>
-                </a:solidFill>
-              </a:rPr>
-              <a:t>이미 작동하는 사업에서 ‘머신 판매’ 대신 ‘캡슐 반복 구매’로 수익 구조를 재설계 – 전체 구조 변경이 핵심</a:t>
-            </a:r>
-            <a:endParaRPr lang="en-US" sz="1000" dirty="0"/>
-          </a:p>
-        </p:txBody>
-      </p:sp>
-      <p:sp>
-        <p:nvSpPr>
-          <p:cNvPr id="12" name="case-card"/>
-          <p:cNvSpPr/>
-          <p:nvPr/>
-        </p:nvSpPr>
-        <p:spPr>
-          <a:xfrm>
-            <a:off x="4663440" y="3703320"/>
-            <a:ext cx="4114800" cy="1069848"/>
-          </a:xfrm>
-          <a:prstGeom prst="roundRect">
-            <a:avLst>
-              <a:gd name="adj" fmla="val 5128"/>
-            </a:avLst>
-          </a:prstGeom>
-          <a:solidFill>
-            <a:schemeClr val="accent6"/>
-          </a:solidFill>
-          <a:ln/>
-        </p:spPr>
-      </p:sp>
-      <p:sp>
-        <p:nvSpPr>
-          <p:cNvPr id="13" name="case-chip"/>
-          <p:cNvSpPr/>
-          <p:nvPr/>
-        </p:nvSpPr>
-        <p:spPr>
-          <a:xfrm>
-            <a:off x="4773168" y="3794760"/>
-            <a:ext cx="566928" cy="219456"/>
-          </a:xfrm>
-          <a:prstGeom prst="roundRect">
-            <a:avLst>
-              <a:gd name="adj" fmla="val 20833"/>
-            </a:avLst>
-          </a:prstGeom>
-          <a:solidFill>
-            <a:schemeClr val="accent2"/>
-          </a:solidFill>
-          <a:ln/>
-        </p:spPr>
-      </p:sp>
-      <p:sp>
-        <p:nvSpPr>
-          <p:cNvPr id="14" name="Text 10"/>
-          <p:cNvSpPr txBox="1"/>
-          <p:nvPr/>
-        </p:nvSpPr>
-        <p:spPr>
-          <a:xfrm>
-            <a:off x="4773168" y="3794760"/>
-            <a:ext cx="566928" cy="219456"/>
-          </a:xfrm>
-          <a:prstGeom prst="rect">
-            <a:avLst/>
-          </a:prstGeom>
-          <a:noFill/>
-          <a:ln/>
-        </p:spPr>
-        <p:txBody>
-          <a:bodyPr wrap="square" lIns="0" tIns="0" rIns="0" bIns="0" rtlCol="0" anchor="ctr"/>
-          <a:lstStyle/>
-          <a:p>
-            <a:pPr algn="ctr" indent="0" marL="0">
-              <a:buNone/>
-            </a:pPr>
-            <a:r>
-              <a:rPr lang="en-US" sz="900" b="1" dirty="0">
-                <a:solidFill>
-                  <a:schemeClr val="bg1"/>
-                </a:solidFill>
-              </a:rPr>
-              <a:t>CASE</a:t>
-            </a:r>
-            <a:endParaRPr lang="en-US" sz="900" dirty="0"/>
-          </a:p>
-        </p:txBody>
-      </p:sp>
-      <p:sp>
-        <p:nvSpPr>
-          <p:cNvPr id="15" name="img-frame-uber"/>
-          <p:cNvSpPr/>
-          <p:nvPr/>
-        </p:nvSpPr>
-        <p:spPr>
-          <a:xfrm>
-            <a:off x="8119872" y="3794760"/>
-            <a:ext cx="566928" cy="566928"/>
-          </a:xfrm>
-          <a:prstGeom prst="roundRect">
-            <a:avLst>
-              <a:gd name="adj" fmla="val 9677"/>
-            </a:avLst>
-          </a:prstGeom>
-          <a:solidFill>
-            <a:schemeClr val="bg1"/>
-          </a:solidFill>
-          <a:ln w="9525">
-            <a:solidFill>
-              <a:schemeClr val="bg2"/>
-            </a:solidFill>
-            <a:prstDash val="solid"/>
-          </a:ln>
-        </p:spPr>
-      </p:sp>
-      <p:pic>
-        <p:nvPicPr>
           <p:cNvPr id="16" name="img-uber" descr="uber">    </p:cNvPr>
           <p:cNvPicPr>
             <a:picLocks noChangeAspect="1"/>
@@ -13654,7 +13713,7 @@
                   <a:schemeClr val="accent2"/>
                 </a:solidFill>
               </a:rPr>
-              <a:t>린 캔버스가 맞는 경우: 우버 초기</a:t>
+              <a:t>린 캔버스 적합: 우버 초기</a:t>
             </a:r>
             <a:endParaRPr lang="en-US" sz="1100" dirty="0"/>
           </a:p>
@@ -13729,7 +13788,7 @@
                   <a:schemeClr val="tx1"/>
                 </a:solidFill>
               </a:rPr>
-              <a:t>출처: Osterwalder &amp; Pigneur(2010); Maurya(2012) Running Lean</a:t>
+              <a:t>출처: Osterwalder &amp; Pigneur(2010); Maurya(2012) Running Lean | 사진: Wikimedia Commons(21쪽)</a:t>
             </a:r>
             <a:endParaRPr lang="en-US" sz="800" dirty="0"/>
           </a:p>
@@ -14573,36 +14632,9 @@
           </a:p>
         </p:txBody>
       </p:sp>
-      <p:sp>
-        <p:nvSpPr>
-          <p:cNvPr id="25" name="img-frame-webvan"/>
-          <p:cNvSpPr/>
-          <p:nvPr/>
-        </p:nvSpPr>
-        <p:spPr>
-          <a:xfrm>
-            <a:off x="8119872" y="3794760"/>
-            <a:ext cx="566928" cy="566928"/>
-          </a:xfrm>
-          <a:prstGeom prst="roundRect">
-            <a:avLst>
-              <a:gd name="adj" fmla="val 9677"/>
-            </a:avLst>
-          </a:prstGeom>
-          <a:solidFill>
-            <a:schemeClr val="bg1"/>
-          </a:solidFill>
-          <a:ln w="9525">
-            <a:solidFill>
-              <a:schemeClr val="bg2"/>
-            </a:solidFill>
-            <a:prstDash val="solid"/>
-          </a:ln>
-        </p:spPr>
-      </p:sp>
       <p:pic>
         <p:nvPicPr>
-          <p:cNvPr id="26" name="img-webvan" descr="webvan">    </p:cNvPr>
+          <p:cNvPr id="25" name="photo-webvan2" descr="webvan2 photo">    </p:cNvPr>
           <p:cNvPicPr>
             <a:picLocks noChangeAspect="1"/>
           </p:cNvPicPr>
@@ -14616,14 +14648,36 @@
         </p:blipFill>
         <p:spPr>
           <a:xfrm>
-            <a:off x="8193573" y="3868461"/>
-            <a:ext cx="419527" cy="419527"/>
+            <a:off x="7356348" y="3794760"/>
+            <a:ext cx="1330452" cy="886968"/>
           </a:xfrm>
           <a:prstGeom prst="rect">
             <a:avLst/>
           </a:prstGeom>
         </p:spPr>
       </p:pic>
+      <p:sp>
+        <p:nvSpPr>
+          <p:cNvPr id="26" name="photo-frame-webvan2"/>
+          <p:cNvSpPr/>
+          <p:nvPr/>
+        </p:nvSpPr>
+        <p:spPr>
+          <a:xfrm>
+            <a:off x="7356348" y="3794760"/>
+            <a:ext cx="1330452" cy="886968"/>
+          </a:xfrm>
+          <a:prstGeom prst="rect">
+            <a:avLst/>
+          </a:prstGeom>
+          <a:ln w="19050">
+            <a:solidFill>
+              <a:schemeClr val="bg1"/>
+            </a:solidFill>
+            <a:prstDash val="solid"/>
+          </a:ln>
+        </p:spPr>
+      </p:sp>
       <p:sp>
         <p:nvSpPr>
           <p:cNvPr id="27" name="Text 24"/>
@@ -14633,7 +14687,7 @@
         <p:spPr>
           <a:xfrm>
             <a:off x="1115568" y="3767328"/>
-            <a:ext cx="6894576" cy="292608"/>
+            <a:ext cx="6131052" cy="292608"/>
           </a:xfrm>
           <a:prstGeom prst="rect">
             <a:avLst/>
@@ -14669,7 +14723,7 @@
         <p:spPr>
           <a:xfrm>
             <a:off x="475488" y="4087368"/>
-            <a:ext cx="7516368" cy="630936"/>
+            <a:ext cx="6752844" cy="630936"/>
           </a:xfrm>
           <a:prstGeom prst="rect">
             <a:avLst/>
@@ -14729,7 +14783,7 @@
                   <a:schemeClr val="tx1"/>
                 </a:solidFill>
               </a:rPr>
-              <a:t>출처: Blank, S. &amp; Dorf, B.(2012), The Startup Owner’s Manual, K&amp;S Ranch; Blank, S.(2005), The Four Steps to the Epiphany</a:t>
+              <a:t>출처: Blank, S. &amp; Dorf, B.(2012), The Startup Owner’s Manual, K&amp;S Ranch; Blank, S.(2005), The Four Steps to the Epiphany | 사진: Wikimedia Commons(21쪽)</a:t>
             </a:r>
             <a:endParaRPr lang="en-US" sz="800" dirty="0"/>
           </a:p>
@@ -15385,36 +15439,9 @@
           </a:p>
         </p:txBody>
       </p:sp>
-      <p:sp>
-        <p:nvSpPr>
-          <p:cNvPr id="19" name="img-frame-baemin"/>
-          <p:cNvSpPr/>
-          <p:nvPr/>
-        </p:nvSpPr>
-        <p:spPr>
-          <a:xfrm>
-            <a:off x="8119872" y="1325880"/>
-            <a:ext cx="566928" cy="566928"/>
-          </a:xfrm>
-          <a:prstGeom prst="roundRect">
-            <a:avLst>
-              <a:gd name="adj" fmla="val 9677"/>
-            </a:avLst>
-          </a:prstGeom>
-          <a:solidFill>
-            <a:schemeClr val="bg1"/>
-          </a:solidFill>
-          <a:ln w="9525">
-            <a:solidFill>
-              <a:schemeClr val="bg2"/>
-            </a:solidFill>
-            <a:prstDash val="solid"/>
-          </a:ln>
-        </p:spPr>
-      </p:sp>
       <p:pic>
         <p:nvPicPr>
-          <p:cNvPr id="20" name="img-baemin" descr="baemin">    </p:cNvPr>
+          <p:cNvPr id="19" name="photo-baemin" descr="baemin photo">    </p:cNvPr>
           <p:cNvPicPr>
             <a:picLocks noChangeAspect="1"/>
           </p:cNvPicPr>
@@ -15428,14 +15455,36 @@
         </p:blipFill>
         <p:spPr>
           <a:xfrm>
-            <a:off x="8193573" y="1399581"/>
-            <a:ext cx="419527" cy="419527"/>
+            <a:off x="4681728" y="1618488"/>
+            <a:ext cx="3986784" cy="1143000"/>
           </a:xfrm>
           <a:prstGeom prst="rect">
             <a:avLst/>
           </a:prstGeom>
         </p:spPr>
       </p:pic>
+      <p:sp>
+        <p:nvSpPr>
+          <p:cNvPr id="20" name="photo-frame-baemin"/>
+          <p:cNvSpPr/>
+          <p:nvPr/>
+        </p:nvSpPr>
+        <p:spPr>
+          <a:xfrm>
+            <a:off x="4681728" y="1618488"/>
+            <a:ext cx="3986784" cy="1143000"/>
+          </a:xfrm>
+          <a:prstGeom prst="rect">
+            <a:avLst/>
+          </a:prstGeom>
+          <a:ln w="19050">
+            <a:solidFill>
+              <a:schemeClr val="bg1"/>
+            </a:solidFill>
+            <a:prstDash val="solid"/>
+          </a:ln>
+        </p:spPr>
+      </p:sp>
       <p:sp>
         <p:nvSpPr>
           <p:cNvPr id="21" name="Text 18"/>
@@ -15445,7 +15494,7 @@
         <p:spPr>
           <a:xfrm>
             <a:off x="5321808" y="1298448"/>
-            <a:ext cx="2688336" cy="292608"/>
+            <a:ext cx="3364992" cy="292608"/>
           </a:xfrm>
           <a:prstGeom prst="rect">
             <a:avLst/>
@@ -15480,8 +15529,8 @@
         </p:nvSpPr>
         <p:spPr>
           <a:xfrm>
-            <a:off x="4681728" y="1618488"/>
-            <a:ext cx="3310128" cy="3099816"/>
+            <a:off x="4681728" y="2834640"/>
+            <a:ext cx="3986784" cy="1883664"/>
           </a:xfrm>
           <a:prstGeom prst="rect">
             <a:avLst/>
@@ -15500,7 +15549,7 @@
               <a:buNone/>
             </a:pPr>
             <a:r>
-              <a:rPr lang="en-US" sz="1050" b="1" dirty="0">
+              <a:rPr lang="en-US" sz="1000" b="1" dirty="0">
                 <a:solidFill>
                   <a:schemeClr val="tx1"/>
                 </a:solidFill>
@@ -15514,14 +15563,14 @@
               <a:buNone/>
             </a:pPr>
             <a:r>
-              <a:rPr lang="en-US" sz="1050" dirty="0">
+              <a:rPr lang="en-US" sz="1000" dirty="0">
                 <a:solidFill>
                   <a:schemeClr val="tx1"/>
                 </a:solidFill>
               </a:rPr>
               <a:t>사람들은 배달 음식점 정보를 쉽게 찾고 싶어한다</a:t>
             </a:r>
-            <a:endParaRPr lang="en-US" sz="1050" dirty="0"/>
+            <a:endParaRPr lang="en-US" sz="1000" dirty="0"/>
           </a:p>
           <a:p>
             <a:pPr indent="0" marL="0">
@@ -15531,16 +15580,13 @@
               <a:buNone/>
             </a:pPr>
             <a:r>
-              <a:rPr lang="en-US" sz="500" dirty="0">
+              <a:rPr lang="en-US" sz="1000" b="1" dirty="0">
                 <a:solidFill>
                   <a:schemeClr val="tx1"/>
                 </a:solidFill>
               </a:rPr>
-              <a:t> </a:t>
-            </a:r>
-            <a:endParaRPr lang="en-US" sz="1050" dirty="0"/>
-          </a:p>
-          <a:p>
+              <a:t>현장 검증: </a:t>
+            </a:r>
             <a:pPr indent="0" marL="0">
               <a:spcAft>
                 <a:spcPts val="200"/>
@@ -15548,13 +15594,16 @@
               <a:buNone/>
             </a:pPr>
             <a:r>
-              <a:rPr lang="en-US" sz="1050" b="1" dirty="0">
+              <a:rPr lang="en-US" sz="1000" dirty="0">
                 <a:solidFill>
                   <a:schemeClr val="tx1"/>
                 </a:solidFill>
               </a:rPr>
-              <a:t>현장 검증: </a:t>
-            </a:r>
+              <a:t>창업팀이 직접 거리와 아파트 단지를 돌며 버려진 전단지를 수집해 음식점 데이터를 구축</a:t>
+            </a:r>
+            <a:endParaRPr lang="en-US" sz="1000" dirty="0"/>
+          </a:p>
+          <a:p>
             <a:pPr indent="0" marL="0">
               <a:spcAft>
                 <a:spcPts val="200"/>
@@ -15562,16 +15611,13 @@
               <a:buNone/>
             </a:pPr>
             <a:r>
-              <a:rPr lang="en-US" sz="1050" dirty="0">
+              <a:rPr lang="en-US" sz="1000" b="1" dirty="0">
                 <a:solidFill>
                   <a:schemeClr val="tx1"/>
                 </a:solidFill>
               </a:rPr>
-              <a:t>창업팀이 직접 거리와 아파트 단지를 돌며 버려진 전단지를 수집해 음식점 데이터를 구축</a:t>
-            </a:r>
-            <a:endParaRPr lang="en-US" sz="1050" dirty="0"/>
-          </a:p>
-          <a:p>
+              <a:t>문제 재정의: </a:t>
+            </a:r>
             <a:pPr indent="0" marL="0">
               <a:spcAft>
                 <a:spcPts val="200"/>
@@ -15579,14 +15625,14 @@
               <a:buNone/>
             </a:pPr>
             <a:r>
-              <a:rPr lang="en-US" sz="500" dirty="0">
+              <a:rPr lang="en-US" sz="1000" dirty="0">
                 <a:solidFill>
                   <a:schemeClr val="tx1"/>
                 </a:solidFill>
               </a:rPr>
-              <a:t> </a:t>
-            </a:r>
-            <a:endParaRPr lang="en-US" sz="1050" dirty="0"/>
+              <a:t>전단지 정보가 흩어져 있다는 고객 불편 + 광고 효과를 알 수 없다는 사장님 불편을 동시에 확인</a:t>
+            </a:r>
+            <a:endParaRPr lang="en-US" sz="1000" dirty="0"/>
           </a:p>
           <a:p>
             <a:pPr indent="0" marL="0">
@@ -15596,12 +15642,12 @@
               <a:buNone/>
             </a:pPr>
             <a:r>
-              <a:rPr lang="en-US" sz="1050" b="1" dirty="0">
+              <a:rPr lang="en-US" sz="1000" b="1" dirty="0">
                 <a:solidFill>
                   <a:schemeClr val="tx1"/>
                 </a:solidFill>
               </a:rPr>
-              <a:t>문제 재정의: </a:t>
+              <a:t>결과: </a:t>
             </a:r>
             <a:pPr indent="0" marL="0">
               <a:spcAft>
@@ -15610,62 +15656,14 @@
               <a:buNone/>
             </a:pPr>
             <a:r>
-              <a:rPr lang="en-US" sz="1050" dirty="0">
-                <a:solidFill>
-                  <a:schemeClr val="tx1"/>
-                </a:solidFill>
-              </a:rPr>
-              <a:t>전단지 정보가 흩어져 있다는 고객 불편 + 광고 효과를 알 수 없다는 사장님 불편을 동시에 확인</a:t>
-            </a:r>
-            <a:endParaRPr lang="en-US" sz="1050" dirty="0"/>
-          </a:p>
-          <a:p>
-            <a:pPr indent="0" marL="0">
-              <a:spcAft>
-                <a:spcPts val="200"/>
-              </a:spcAft>
-              <a:buNone/>
-            </a:pPr>
-            <a:r>
-              <a:rPr lang="en-US" sz="500" dirty="0">
-                <a:solidFill>
-                  <a:schemeClr val="tx1"/>
-                </a:solidFill>
-              </a:rPr>
-              <a:t> </a:t>
-            </a:r>
-            <a:endParaRPr lang="en-US" sz="1050" dirty="0"/>
-          </a:p>
-          <a:p>
-            <a:pPr indent="0" marL="0">
-              <a:spcAft>
-                <a:spcPts val="200"/>
-              </a:spcAft>
-              <a:buNone/>
-            </a:pPr>
-            <a:r>
-              <a:rPr lang="en-US" sz="1050" b="1" dirty="0">
-                <a:solidFill>
-                  <a:schemeClr val="tx1"/>
-                </a:solidFill>
-              </a:rPr>
-              <a:t>결과: </a:t>
-            </a:r>
-            <a:pPr indent="0" marL="0">
-              <a:spcAft>
-                <a:spcPts val="200"/>
-              </a:spcAft>
-              <a:buNone/>
-            </a:pPr>
-            <a:r>
-              <a:rPr lang="en-US" sz="1050" b="1" dirty="0">
+              <a:rPr lang="en-US" sz="1000" b="1" dirty="0">
                 <a:solidFill>
                   <a:schemeClr val="accent2"/>
                 </a:solidFill>
               </a:rPr>
               <a:t>양면 고객의 문제를 검증한 뒤 서비스 확장 → 2019년 딜리버리히어로가 약 40억 달러 가치로 인수 합의</a:t>
             </a:r>
-            <a:endParaRPr lang="en-US" sz="1050" dirty="0"/>
+            <a:endParaRPr lang="en-US" sz="1000" dirty="0"/>
           </a:p>
         </p:txBody>
       </p:sp>
@@ -15735,7 +15733,7 @@
                   <a:schemeClr val="tx1"/>
                 </a:solidFill>
               </a:rPr>
-              <a:t>출처: Blank &amp; Dorf(2012); 우아한형제들 창업 스토리(언론 보도); Delivery Hero 발표(2019.12)</a:t>
+              <a:t>출처: Blank &amp; Dorf(2012); 우아한형제들 창업 스토리(언론 보도); Delivery Hero 발표(2019.12) | 사진: Wikimedia Commons(21쪽)</a:t>
             </a:r>
             <a:endParaRPr lang="en-US" sz="800" dirty="0"/>
           </a:p>
@@ -18395,6 +18393,5028 @@
 </p:sld>
 </file>
 
+<file path=ppt/slides/slide21.xml><?xml version="1.0" encoding="utf-8"?>
+<p:sld xmlns:a="http://schemas.openxmlformats.org/drawingml/2006/main" xmlns:r="http://schemas.openxmlformats.org/officeDocument/2006/relationships" xmlns:p="http://schemas.openxmlformats.org/presentationml/2006/main">
+  <p:cSld name="Slide 21">
+    <p:spTree>
+      <p:nvGrpSpPr>
+        <p:cNvPr id="1" name=""/>
+        <p:cNvGrpSpPr/>
+        <p:nvPr/>
+      </p:nvGrpSpPr>
+      <p:grpSpPr>
+        <a:xfrm>
+          <a:off x="0" y="0"/>
+          <a:ext cx="0" cy="0"/>
+          <a:chOff x="0" y="0"/>
+          <a:chExt cx="0" cy="0"/>
+        </a:xfrm>
+      </p:grpSpPr>
+      <p:sp>
+        <p:nvSpPr>
+          <p:cNvPr id="2" name="Text 3"/>
+          <p:cNvSpPr/>
+          <p:nvPr>
+            <p:ph idx="104" type="body" hasCustomPrompt="1"/>
+          </p:nvPr>
+        </p:nvSpPr>
+        <p:spPr>
+          <a:xfrm>
+            <a:off x="365760" y="685800"/>
+            <a:ext cx="548640" cy="420624"/>
+          </a:xfrm>
+          <a:prstGeom prst="rect">
+            <a:avLst/>
+          </a:prstGeom>
+          <a:noFill/>
+          <a:ln/>
+        </p:spPr>
+        <p:txBody>
+          <a:bodyPr wrap="square" lIns="0" tIns="0" rIns="0" bIns="0" rtlCol="0" anchor="ctr"/>
+          <a:lstStyle/>
+          <a:p>
+            <a:pPr algn="ctr" indent="0" marL="0">
+              <a:buNone/>
+            </a:pPr>
+            <a:r>
+              <a:rPr lang="en-US" sz="1600" b="1" dirty="0">
+                <a:solidFill>
+                  <a:schemeClr val="tx2"/>
+                </a:solidFill>
+              </a:rPr>
+              <a:t>※</a:t>
+            </a:r>
+            <a:endParaRPr lang="en-US" sz="1600" dirty="0"/>
+          </a:p>
+        </p:txBody>
+      </p:sp>
+      <p:sp>
+        <p:nvSpPr>
+          <p:cNvPr id="3" name="Text 3"/>
+          <p:cNvSpPr/>
+          <p:nvPr>
+            <p:ph idx="105" type="title" hasCustomPrompt="1"/>
+          </p:nvPr>
+        </p:nvSpPr>
+        <p:spPr>
+          <a:xfrm>
+            <a:off x="1097280" y="685800"/>
+            <a:ext cx="7589520" cy="420624"/>
+          </a:xfrm>
+          <a:prstGeom prst="rect">
+            <a:avLst/>
+          </a:prstGeom>
+          <a:noFill/>
+          <a:ln/>
+        </p:spPr>
+        <p:txBody>
+          <a:bodyPr wrap="square" lIns="0" tIns="0" rIns="0" bIns="0" rtlCol="0" anchor="ctr"/>
+          <a:lstStyle/>
+          <a:p>
+            <a:pPr algn="l" indent="0" marL="0">
+              <a:buNone/>
+            </a:pPr>
+            <a:r>
+              <a:rPr lang="en-US" sz="1900" b="1" dirty="0">
+                <a:solidFill>
+                  <a:schemeClr val="bg1"/>
+                </a:solidFill>
+              </a:rPr>
+              <a:t>사진 출처 및 라이선스</a:t>
+            </a:r>
+            <a:endParaRPr lang="en-US" sz="1900" dirty="0"/>
+          </a:p>
+        </p:txBody>
+      </p:sp>
+      <p:graphicFrame>
+        <p:nvGraphicFramePr>
+          <p:cNvPr id="22" name="Table 0"/>
+          <p:cNvGraphicFramePr>
+            <a:graphicFrameLocks noGrp="1"/>
+          </p:cNvGraphicFramePr>
+          <p:nvPr>
+            <p:extLst>
+              <p:ext uri="{D42A27DB-BD31-4B8C-83A1-F6EECF244321}">
+                <p14:modId xmlns:p14="http://schemas.microsoft.com/office/powerpoint/2010/main" val="1579011935"/>
+              </p:ext>
+            </p:extLst>
+          </p:nvPr>
+        </p:nvGraphicFramePr>
+        <p:xfrm>
+          <a:off x="365760" y="1234440"/>
+          <a:ext cx="4114800" cy="914400"/>
+        </p:xfrm>
+        <a:graphic>
+          <a:graphicData uri="http://schemas.openxmlformats.org/drawingml/2006/table">
+            <a:tbl>
+              <a:tblPr/>
+              <a:tblGrid>
+                <a:gridCol w="411480"/>
+                <a:gridCol w="1463040"/>
+                <a:gridCol w="1234440"/>
+                <a:gridCol w="1005840"/>
+              </a:tblGrid>
+              <a:tr h="310896">
+                <a:tc>
+                  <a:txBody>
+                    <a:bodyPr/>
+                    <a:lstStyle/>
+                    <a:p>
+                      <a:pPr algn="ctr" indent="0" marL="0">
+                        <a:buNone/>
+                      </a:pPr>
+                      <a:r>
+                        <a:rPr lang="en-US" sz="1000" b="1" dirty="0">
+                          <a:solidFill>
+                            <a:schemeClr val="bg1"/>
+                          </a:solidFill>
+                          <a:latin typeface="맑은 고딕" pitchFamily="34" charset="0"/>
+                          <a:ea typeface="맑은 고딕" pitchFamily="34" charset="-122"/>
+                          <a:cs typeface="맑은 고딕" pitchFamily="34" charset="-120"/>
+                        </a:rPr>
+                        <a:t>쪽</a:t>
+                      </a:r>
+                      <a:endParaRPr lang="en-US" sz="1000" dirty="0">
+                        <a:latin typeface="맑은 고딕" charset="0"/>
+                        <a:ea typeface="맑은 고딕" charset="0"/>
+                        <a:cs typeface="맑은 고딕" charset="0"/>
+                      </a:endParaRPr>
+                    </a:p>
+                  </a:txBody>
+                  <a:tcPr marL="91440" marR="91440" marT="45720" marB="45720" anchor="ctr">
+                    <a:lnL w="9525" cap="flat" cmpd="sng" algn="ctr">
+                      <a:solidFill>
+                        <a:srgbClr val="D9D9D9"/>
+                      </a:solidFill>
+                      <a:prstDash val="solid"/>
+                      <a:round/>
+                      <a:headEnd type="none" w="med" len="med"/>
+                      <a:tailEnd type="none" w="med" len="med"/>
+                    </a:lnL>
+                    <a:lnR w="9525" cap="flat" cmpd="sng" algn="ctr">
+                      <a:solidFill>
+                        <a:srgbClr val="D9D9D9"/>
+                      </a:solidFill>
+                      <a:prstDash val="solid"/>
+                      <a:round/>
+                      <a:headEnd type="none" w="med" len="med"/>
+                      <a:tailEnd type="none" w="med" len="med"/>
+                    </a:lnR>
+                    <a:lnT w="9525" cap="flat" cmpd="sng" algn="ctr">
+                      <a:solidFill>
+                        <a:srgbClr val="D9D9D9"/>
+                      </a:solidFill>
+                      <a:prstDash val="solid"/>
+                      <a:round/>
+                      <a:headEnd type="none" w="med" len="med"/>
+                      <a:tailEnd type="none" w="med" len="med"/>
+                    </a:lnT>
+                    <a:lnB w="9525" cap="flat" cmpd="sng" algn="ctr">
+                      <a:solidFill>
+                        <a:srgbClr val="D9D9D9"/>
+                      </a:solidFill>
+                      <a:prstDash val="solid"/>
+                      <a:round/>
+                      <a:headEnd type="none" w="med" len="med"/>
+                      <a:tailEnd type="none" w="med" len="med"/>
+                    </a:lnB>
+                    <a:solidFill>
+                      <a:schemeClr val="tx2"/>
+                    </a:solidFill>
+                  </a:tcPr>
+                </a:tc>
+                <a:tc>
+                  <a:txBody>
+                    <a:bodyPr/>
+                    <a:lstStyle/>
+                    <a:p>
+                      <a:pPr algn="ctr" indent="0" marL="0">
+                        <a:buNone/>
+                      </a:pPr>
+                      <a:r>
+                        <a:rPr lang="en-US" sz="1000" b="1" dirty="0">
+                          <a:solidFill>
+                            <a:schemeClr val="bg1"/>
+                          </a:solidFill>
+                          <a:latin typeface="맑은 고딕" pitchFamily="34" charset="0"/>
+                          <a:ea typeface="맑은 고딕" pitchFamily="34" charset="-122"/>
+                          <a:cs typeface="맑은 고딕" pitchFamily="34" charset="-120"/>
+                        </a:rPr>
+                        <a:t>사진</a:t>
+                      </a:r>
+                      <a:endParaRPr lang="en-US" sz="1000" dirty="0">
+                        <a:latin typeface="맑은 고딕" charset="0"/>
+                        <a:ea typeface="맑은 고딕" charset="0"/>
+                        <a:cs typeface="맑은 고딕" charset="0"/>
+                      </a:endParaRPr>
+                    </a:p>
+                  </a:txBody>
+                  <a:tcPr marL="91440" marR="91440" marT="45720" marB="45720" anchor="ctr">
+                    <a:lnL w="9525" cap="flat" cmpd="sng" algn="ctr">
+                      <a:solidFill>
+                        <a:srgbClr val="D9D9D9"/>
+                      </a:solidFill>
+                      <a:prstDash val="solid"/>
+                      <a:round/>
+                      <a:headEnd type="none" w="med" len="med"/>
+                      <a:tailEnd type="none" w="med" len="med"/>
+                    </a:lnL>
+                    <a:lnR w="9525" cap="flat" cmpd="sng" algn="ctr">
+                      <a:solidFill>
+                        <a:srgbClr val="D9D9D9"/>
+                      </a:solidFill>
+                      <a:prstDash val="solid"/>
+                      <a:round/>
+                      <a:headEnd type="none" w="med" len="med"/>
+                      <a:tailEnd type="none" w="med" len="med"/>
+                    </a:lnR>
+                    <a:lnT w="9525" cap="flat" cmpd="sng" algn="ctr">
+                      <a:solidFill>
+                        <a:srgbClr val="D9D9D9"/>
+                      </a:solidFill>
+                      <a:prstDash val="solid"/>
+                      <a:round/>
+                      <a:headEnd type="none" w="med" len="med"/>
+                      <a:tailEnd type="none" w="med" len="med"/>
+                    </a:lnT>
+                    <a:lnB w="9525" cap="flat" cmpd="sng" algn="ctr">
+                      <a:solidFill>
+                        <a:srgbClr val="D9D9D9"/>
+                      </a:solidFill>
+                      <a:prstDash val="solid"/>
+                      <a:round/>
+                      <a:headEnd type="none" w="med" len="med"/>
+                      <a:tailEnd type="none" w="med" len="med"/>
+                    </a:lnB>
+                    <a:solidFill>
+                      <a:schemeClr val="tx2"/>
+                    </a:solidFill>
+                  </a:tcPr>
+                </a:tc>
+                <a:tc>
+                  <a:txBody>
+                    <a:bodyPr/>
+                    <a:lstStyle/>
+                    <a:p>
+                      <a:pPr algn="ctr" indent="0" marL="0">
+                        <a:buNone/>
+                      </a:pPr>
+                      <a:r>
+                        <a:rPr lang="en-US" sz="1000" b="1" dirty="0">
+                          <a:solidFill>
+                            <a:schemeClr val="bg1"/>
+                          </a:solidFill>
+                          <a:latin typeface="맑은 고딕" pitchFamily="34" charset="0"/>
+                          <a:ea typeface="맑은 고딕" pitchFamily="34" charset="-122"/>
+                          <a:cs typeface="맑은 고딕" pitchFamily="34" charset="-120"/>
+                        </a:rPr>
+                        <a:t>저작자</a:t>
+                      </a:r>
+                      <a:endParaRPr lang="en-US" sz="1000" dirty="0">
+                        <a:latin typeface="맑은 고딕" charset="0"/>
+                        <a:ea typeface="맑은 고딕" charset="0"/>
+                        <a:cs typeface="맑은 고딕" charset="0"/>
+                      </a:endParaRPr>
+                    </a:p>
+                  </a:txBody>
+                  <a:tcPr marL="91440" marR="91440" marT="45720" marB="45720" anchor="ctr">
+                    <a:lnL w="9525" cap="flat" cmpd="sng" algn="ctr">
+                      <a:solidFill>
+                        <a:srgbClr val="D9D9D9"/>
+                      </a:solidFill>
+                      <a:prstDash val="solid"/>
+                      <a:round/>
+                      <a:headEnd type="none" w="med" len="med"/>
+                      <a:tailEnd type="none" w="med" len="med"/>
+                    </a:lnL>
+                    <a:lnR w="9525" cap="flat" cmpd="sng" algn="ctr">
+                      <a:solidFill>
+                        <a:srgbClr val="D9D9D9"/>
+                      </a:solidFill>
+                      <a:prstDash val="solid"/>
+                      <a:round/>
+                      <a:headEnd type="none" w="med" len="med"/>
+                      <a:tailEnd type="none" w="med" len="med"/>
+                    </a:lnR>
+                    <a:lnT w="9525" cap="flat" cmpd="sng" algn="ctr">
+                      <a:solidFill>
+                        <a:srgbClr val="D9D9D9"/>
+                      </a:solidFill>
+                      <a:prstDash val="solid"/>
+                      <a:round/>
+                      <a:headEnd type="none" w="med" len="med"/>
+                      <a:tailEnd type="none" w="med" len="med"/>
+                    </a:lnT>
+                    <a:lnB w="9525" cap="flat" cmpd="sng" algn="ctr">
+                      <a:solidFill>
+                        <a:srgbClr val="D9D9D9"/>
+                      </a:solidFill>
+                      <a:prstDash val="solid"/>
+                      <a:round/>
+                      <a:headEnd type="none" w="med" len="med"/>
+                      <a:tailEnd type="none" w="med" len="med"/>
+                    </a:lnB>
+                    <a:solidFill>
+                      <a:schemeClr val="tx2"/>
+                    </a:solidFill>
+                  </a:tcPr>
+                </a:tc>
+                <a:tc>
+                  <a:txBody>
+                    <a:bodyPr/>
+                    <a:lstStyle/>
+                    <a:p>
+                      <a:pPr algn="ctr" indent="0" marL="0">
+                        <a:buNone/>
+                      </a:pPr>
+                      <a:r>
+                        <a:rPr lang="en-US" sz="1000" b="1" dirty="0">
+                          <a:solidFill>
+                            <a:schemeClr val="bg1"/>
+                          </a:solidFill>
+                          <a:latin typeface="맑은 고딕" pitchFamily="34" charset="0"/>
+                          <a:ea typeface="맑은 고딕" pitchFamily="34" charset="-122"/>
+                          <a:cs typeface="맑은 고딕" pitchFamily="34" charset="-120"/>
+                        </a:rPr>
+                        <a:t>라이선스</a:t>
+                      </a:r>
+                      <a:endParaRPr lang="en-US" sz="1000" dirty="0">
+                        <a:latin typeface="맑은 고딕" charset="0"/>
+                        <a:ea typeface="맑은 고딕" charset="0"/>
+                        <a:cs typeface="맑은 고딕" charset="0"/>
+                      </a:endParaRPr>
+                    </a:p>
+                  </a:txBody>
+                  <a:tcPr marL="91440" marR="91440" marT="45720" marB="45720" anchor="ctr">
+                    <a:lnL w="9525" cap="flat" cmpd="sng" algn="ctr">
+                      <a:solidFill>
+                        <a:srgbClr val="D9D9D9"/>
+                      </a:solidFill>
+                      <a:prstDash val="solid"/>
+                      <a:round/>
+                      <a:headEnd type="none" w="med" len="med"/>
+                      <a:tailEnd type="none" w="med" len="med"/>
+                    </a:lnL>
+                    <a:lnR w="9525" cap="flat" cmpd="sng" algn="ctr">
+                      <a:solidFill>
+                        <a:srgbClr val="D9D9D9"/>
+                      </a:solidFill>
+                      <a:prstDash val="solid"/>
+                      <a:round/>
+                      <a:headEnd type="none" w="med" len="med"/>
+                      <a:tailEnd type="none" w="med" len="med"/>
+                    </a:lnR>
+                    <a:lnT w="9525" cap="flat" cmpd="sng" algn="ctr">
+                      <a:solidFill>
+                        <a:srgbClr val="D9D9D9"/>
+                      </a:solidFill>
+                      <a:prstDash val="solid"/>
+                      <a:round/>
+                      <a:headEnd type="none" w="med" len="med"/>
+                      <a:tailEnd type="none" w="med" len="med"/>
+                    </a:lnT>
+                    <a:lnB w="9525" cap="flat" cmpd="sng" algn="ctr">
+                      <a:solidFill>
+                        <a:srgbClr val="D9D9D9"/>
+                      </a:solidFill>
+                      <a:prstDash val="solid"/>
+                      <a:round/>
+                      <a:headEnd type="none" w="med" len="med"/>
+                      <a:tailEnd type="none" w="med" len="med"/>
+                    </a:lnB>
+                    <a:solidFill>
+                      <a:schemeClr val="tx2"/>
+                    </a:solidFill>
+                  </a:tcPr>
+                </a:tc>
+              </a:tr>
+              <a:tr h="310896">
+                <a:tc>
+                  <a:txBody>
+                    <a:bodyPr/>
+                    <a:lstStyle/>
+                    <a:p>
+                      <a:pPr algn="ctr" indent="0" marL="0">
+                        <a:buNone/>
+                      </a:pPr>
+                      <a:r>
+                        <a:rPr lang="en-US" sz="900" dirty="0">
+                          <a:solidFill>
+                            <a:schemeClr val="tx1"/>
+                          </a:solidFill>
+                          <a:latin typeface="맑은 고딕" pitchFamily="34" charset="0"/>
+                          <a:ea typeface="맑은 고딕" pitchFamily="34" charset="-122"/>
+                          <a:cs typeface="맑은 고딕" pitchFamily="34" charset="-120"/>
+                        </a:rPr>
+                        <a:t>1</a:t>
+                      </a:r>
+                      <a:endParaRPr lang="en-US" sz="900" dirty="0">
+                        <a:latin typeface="맑은 고딕" charset="0"/>
+                        <a:ea typeface="맑은 고딕" charset="0"/>
+                        <a:cs typeface="맑은 고딕" charset="0"/>
+                      </a:endParaRPr>
+                    </a:p>
+                  </a:txBody>
+                  <a:tcPr marL="36576" marR="36576" marT="36576" marB="36576" anchor="ctr">
+                    <a:lnL w="9525" cap="flat" cmpd="sng" algn="ctr">
+                      <a:solidFill>
+                        <a:srgbClr val="D9D9D9"/>
+                      </a:solidFill>
+                      <a:prstDash val="solid"/>
+                      <a:round/>
+                      <a:headEnd type="none" w="med" len="med"/>
+                      <a:tailEnd type="none" w="med" len="med"/>
+                    </a:lnL>
+                    <a:lnR w="9525" cap="flat" cmpd="sng" algn="ctr">
+                      <a:solidFill>
+                        <a:srgbClr val="D9D9D9"/>
+                      </a:solidFill>
+                      <a:prstDash val="solid"/>
+                      <a:round/>
+                      <a:headEnd type="none" w="med" len="med"/>
+                      <a:tailEnd type="none" w="med" len="med"/>
+                    </a:lnR>
+                    <a:lnT w="9525" cap="flat" cmpd="sng" algn="ctr">
+                      <a:solidFill>
+                        <a:srgbClr val="D9D9D9"/>
+                      </a:solidFill>
+                      <a:prstDash val="solid"/>
+                      <a:round/>
+                      <a:headEnd type="none" w="med" len="med"/>
+                      <a:tailEnd type="none" w="med" len="med"/>
+                    </a:lnT>
+                    <a:lnB w="9525" cap="flat" cmpd="sng" algn="ctr">
+                      <a:solidFill>
+                        <a:srgbClr val="D9D9D9"/>
+                      </a:solidFill>
+                      <a:prstDash val="solid"/>
+                      <a:round/>
+                      <a:headEnd type="none" w="med" len="med"/>
+                      <a:tailEnd type="none" w="med" len="med"/>
+                    </a:lnB>
+                  </a:tcPr>
+                </a:tc>
+                <a:tc>
+                  <a:txBody>
+                    <a:bodyPr/>
+                    <a:lstStyle/>
+                    <a:p>
+                      <a:pPr algn="l" indent="0" marL="0">
+                        <a:buNone/>
+                      </a:pPr>
+                      <a:r>
+                        <a:rPr lang="en-US" sz="900" dirty="0">
+                          <a:solidFill>
+                            <a:schemeClr val="tx1"/>
+                          </a:solidFill>
+                          <a:latin typeface="맑은 고딕" pitchFamily="34" charset="0"/>
+                          <a:ea typeface="맑은 고딕" pitchFamily="34" charset="-122"/>
+                          <a:cs typeface="맑은 고딕" pitchFamily="34" charset="-120"/>
+                        </a:rPr>
+                        <a:t>분해된 주서로 착즙기</a:t>
+                      </a:r>
+                      <a:endParaRPr lang="en-US" sz="900" dirty="0">
+                        <a:latin typeface="맑은 고딕" charset="0"/>
+                        <a:ea typeface="맑은 고딕" charset="0"/>
+                        <a:cs typeface="맑은 고딕" charset="0"/>
+                      </a:endParaRPr>
+                    </a:p>
+                  </a:txBody>
+                  <a:tcPr marL="36576" marR="36576" marT="36576" marB="36576" anchor="ctr">
+                    <a:lnL w="9525" cap="flat" cmpd="sng" algn="ctr">
+                      <a:solidFill>
+                        <a:srgbClr val="D9D9D9"/>
+                      </a:solidFill>
+                      <a:prstDash val="solid"/>
+                      <a:round/>
+                      <a:headEnd type="none" w="med" len="med"/>
+                      <a:tailEnd type="none" w="med" len="med"/>
+                    </a:lnL>
+                    <a:lnR w="9525" cap="flat" cmpd="sng" algn="ctr">
+                      <a:solidFill>
+                        <a:srgbClr val="D9D9D9"/>
+                      </a:solidFill>
+                      <a:prstDash val="solid"/>
+                      <a:round/>
+                      <a:headEnd type="none" w="med" len="med"/>
+                      <a:tailEnd type="none" w="med" len="med"/>
+                    </a:lnR>
+                    <a:lnT w="9525" cap="flat" cmpd="sng" algn="ctr">
+                      <a:solidFill>
+                        <a:srgbClr val="D9D9D9"/>
+                      </a:solidFill>
+                      <a:prstDash val="solid"/>
+                      <a:round/>
+                      <a:headEnd type="none" w="med" len="med"/>
+                      <a:tailEnd type="none" w="med" len="med"/>
+                    </a:lnT>
+                    <a:lnB w="9525" cap="flat" cmpd="sng" algn="ctr">
+                      <a:solidFill>
+                        <a:srgbClr val="D9D9D9"/>
+                      </a:solidFill>
+                      <a:prstDash val="solid"/>
+                      <a:round/>
+                      <a:headEnd type="none" w="med" len="med"/>
+                      <a:tailEnd type="none" w="med" len="med"/>
+                    </a:lnB>
+                  </a:tcPr>
+                </a:tc>
+                <a:tc>
+                  <a:txBody>
+                    <a:bodyPr/>
+                    <a:lstStyle/>
+                    <a:p>
+                      <a:pPr algn="l" indent="0" marL="0">
+                        <a:buNone/>
+                      </a:pPr>
+                      <a:r>
+                        <a:rPr lang="en-US" sz="900" dirty="0">
+                          <a:solidFill>
+                            <a:schemeClr val="tx1"/>
+                          </a:solidFill>
+                          <a:latin typeface="맑은 고딕" pitchFamily="34" charset="0"/>
+                          <a:ea typeface="맑은 고딕" pitchFamily="34" charset="-122"/>
+                          <a:cs typeface="맑은 고딕" pitchFamily="34" charset="-120"/>
+                        </a:rPr>
+                        <a:t>Steve Jurvetson</a:t>
+                      </a:r>
+                      <a:endParaRPr lang="en-US" sz="900" dirty="0">
+                        <a:latin typeface="맑은 고딕" charset="0"/>
+                        <a:ea typeface="맑은 고딕" charset="0"/>
+                        <a:cs typeface="맑은 고딕" charset="0"/>
+                      </a:endParaRPr>
+                    </a:p>
+                  </a:txBody>
+                  <a:tcPr marL="36576" marR="36576" marT="36576" marB="36576" anchor="ctr">
+                    <a:lnL w="9525" cap="flat" cmpd="sng" algn="ctr">
+                      <a:solidFill>
+                        <a:srgbClr val="D9D9D9"/>
+                      </a:solidFill>
+                      <a:prstDash val="solid"/>
+                      <a:round/>
+                      <a:headEnd type="none" w="med" len="med"/>
+                      <a:tailEnd type="none" w="med" len="med"/>
+                    </a:lnL>
+                    <a:lnR w="9525" cap="flat" cmpd="sng" algn="ctr">
+                      <a:solidFill>
+                        <a:srgbClr val="D9D9D9"/>
+                      </a:solidFill>
+                      <a:prstDash val="solid"/>
+                      <a:round/>
+                      <a:headEnd type="none" w="med" len="med"/>
+                      <a:tailEnd type="none" w="med" len="med"/>
+                    </a:lnR>
+                    <a:lnT w="9525" cap="flat" cmpd="sng" algn="ctr">
+                      <a:solidFill>
+                        <a:srgbClr val="D9D9D9"/>
+                      </a:solidFill>
+                      <a:prstDash val="solid"/>
+                      <a:round/>
+                      <a:headEnd type="none" w="med" len="med"/>
+                      <a:tailEnd type="none" w="med" len="med"/>
+                    </a:lnT>
+                    <a:lnB w="9525" cap="flat" cmpd="sng" algn="ctr">
+                      <a:solidFill>
+                        <a:srgbClr val="D9D9D9"/>
+                      </a:solidFill>
+                      <a:prstDash val="solid"/>
+                      <a:round/>
+                      <a:headEnd type="none" w="med" len="med"/>
+                      <a:tailEnd type="none" w="med" len="med"/>
+                    </a:lnB>
+                  </a:tcPr>
+                </a:tc>
+                <a:tc>
+                  <a:txBody>
+                    <a:bodyPr/>
+                    <a:lstStyle/>
+                    <a:p>
+                      <a:pPr algn="l" indent="0" marL="0">
+                        <a:buNone/>
+                      </a:pPr>
+                      <a:r>
+                        <a:rPr lang="en-US" sz="900" dirty="0">
+                          <a:solidFill>
+                            <a:schemeClr val="tx1"/>
+                          </a:solidFill>
+                          <a:latin typeface="맑은 고딕" pitchFamily="34" charset="0"/>
+                          <a:ea typeface="맑은 고딕" pitchFamily="34" charset="-122"/>
+                          <a:cs typeface="맑은 고딕" pitchFamily="34" charset="-120"/>
+                        </a:rPr>
+                        <a:t>CC BY 2.0</a:t>
+                      </a:r>
+                      <a:endParaRPr lang="en-US" sz="900" dirty="0">
+                        <a:latin typeface="맑은 고딕" charset="0"/>
+                        <a:ea typeface="맑은 고딕" charset="0"/>
+                        <a:cs typeface="맑은 고딕" charset="0"/>
+                      </a:endParaRPr>
+                    </a:p>
+                  </a:txBody>
+                  <a:tcPr marL="36576" marR="36576" marT="36576" marB="36576" anchor="ctr">
+                    <a:lnL w="9525" cap="flat" cmpd="sng" algn="ctr">
+                      <a:solidFill>
+                        <a:srgbClr val="D9D9D9"/>
+                      </a:solidFill>
+                      <a:prstDash val="solid"/>
+                      <a:round/>
+                      <a:headEnd type="none" w="med" len="med"/>
+                      <a:tailEnd type="none" w="med" len="med"/>
+                    </a:lnL>
+                    <a:lnR w="9525" cap="flat" cmpd="sng" algn="ctr">
+                      <a:solidFill>
+                        <a:srgbClr val="D9D9D9"/>
+                      </a:solidFill>
+                      <a:prstDash val="solid"/>
+                      <a:round/>
+                      <a:headEnd type="none" w="med" len="med"/>
+                      <a:tailEnd type="none" w="med" len="med"/>
+                    </a:lnR>
+                    <a:lnT w="9525" cap="flat" cmpd="sng" algn="ctr">
+                      <a:solidFill>
+                        <a:srgbClr val="D9D9D9"/>
+                      </a:solidFill>
+                      <a:prstDash val="solid"/>
+                      <a:round/>
+                      <a:headEnd type="none" w="med" len="med"/>
+                      <a:tailEnd type="none" w="med" len="med"/>
+                    </a:lnT>
+                    <a:lnB w="9525" cap="flat" cmpd="sng" algn="ctr">
+                      <a:solidFill>
+                        <a:srgbClr val="D9D9D9"/>
+                      </a:solidFill>
+                      <a:prstDash val="solid"/>
+                      <a:round/>
+                      <a:headEnd type="none" w="med" len="med"/>
+                      <a:tailEnd type="none" w="med" len="med"/>
+                    </a:lnB>
+                  </a:tcPr>
+                </a:tc>
+              </a:tr>
+              <a:tr h="310896">
+                <a:tc>
+                  <a:txBody>
+                    <a:bodyPr/>
+                    <a:lstStyle/>
+                    <a:p>
+                      <a:pPr algn="ctr" indent="0" marL="0">
+                        <a:buNone/>
+                      </a:pPr>
+                      <a:r>
+                        <a:rPr lang="en-US" sz="900" dirty="0">
+                          <a:solidFill>
+                            <a:schemeClr val="tx1"/>
+                          </a:solidFill>
+                          <a:latin typeface="맑은 고딕" pitchFamily="34" charset="0"/>
+                          <a:ea typeface="맑은 고딕" pitchFamily="34" charset="-122"/>
+                          <a:cs typeface="맑은 고딕" pitchFamily="34" charset="-120"/>
+                        </a:rPr>
+                        <a:t>3</a:t>
+                      </a:r>
+                      <a:endParaRPr lang="en-US" sz="900" dirty="0">
+                        <a:latin typeface="맑은 고딕" charset="0"/>
+                        <a:ea typeface="맑은 고딕" charset="0"/>
+                        <a:cs typeface="맑은 고딕" charset="0"/>
+                      </a:endParaRPr>
+                    </a:p>
+                  </a:txBody>
+                  <a:tcPr marL="36576" marR="36576" marT="36576" marB="36576" anchor="ctr">
+                    <a:lnL w="9525" cap="flat" cmpd="sng" algn="ctr">
+                      <a:solidFill>
+                        <a:srgbClr val="D9D9D9"/>
+                      </a:solidFill>
+                      <a:prstDash val="solid"/>
+                      <a:round/>
+                      <a:headEnd type="none" w="med" len="med"/>
+                      <a:tailEnd type="none" w="med" len="med"/>
+                    </a:lnL>
+                    <a:lnR w="9525" cap="flat" cmpd="sng" algn="ctr">
+                      <a:solidFill>
+                        <a:srgbClr val="D9D9D9"/>
+                      </a:solidFill>
+                      <a:prstDash val="solid"/>
+                      <a:round/>
+                      <a:headEnd type="none" w="med" len="med"/>
+                      <a:tailEnd type="none" w="med" len="med"/>
+                    </a:lnR>
+                    <a:lnT w="9525" cap="flat" cmpd="sng" algn="ctr">
+                      <a:solidFill>
+                        <a:srgbClr val="D9D9D9"/>
+                      </a:solidFill>
+                      <a:prstDash val="solid"/>
+                      <a:round/>
+                      <a:headEnd type="none" w="med" len="med"/>
+                      <a:tailEnd type="none" w="med" len="med"/>
+                    </a:lnT>
+                    <a:lnB w="9525" cap="flat" cmpd="sng" algn="ctr">
+                      <a:solidFill>
+                        <a:srgbClr val="D9D9D9"/>
+                      </a:solidFill>
+                      <a:prstDash val="solid"/>
+                      <a:round/>
+                      <a:headEnd type="none" w="med" len="med"/>
+                      <a:tailEnd type="none" w="med" len="med"/>
+                    </a:lnB>
+                  </a:tcPr>
+                </a:tc>
+                <a:tc>
+                  <a:txBody>
+                    <a:bodyPr/>
+                    <a:lstStyle/>
+                    <a:p>
+                      <a:pPr algn="l" indent="0" marL="0">
+                        <a:buNone/>
+                      </a:pPr>
+                      <a:r>
+                        <a:rPr lang="en-US" sz="900" dirty="0">
+                          <a:solidFill>
+                            <a:schemeClr val="tx1"/>
+                          </a:solidFill>
+                          <a:latin typeface="맑은 고딕" pitchFamily="34" charset="0"/>
+                          <a:ea typeface="맑은 고딕" pitchFamily="34" charset="-122"/>
+                          <a:cs typeface="맑은 고딕" pitchFamily="34" charset="-120"/>
+                        </a:rPr>
+                        <a:t>퀴비 로고</a:t>
+                      </a:r>
+                      <a:endParaRPr lang="en-US" sz="900" dirty="0">
+                        <a:latin typeface="맑은 고딕" charset="0"/>
+                        <a:ea typeface="맑은 고딕" charset="0"/>
+                        <a:cs typeface="맑은 고딕" charset="0"/>
+                      </a:endParaRPr>
+                    </a:p>
+                  </a:txBody>
+                  <a:tcPr marL="36576" marR="36576" marT="36576" marB="36576" anchor="ctr">
+                    <a:lnL w="9525" cap="flat" cmpd="sng" algn="ctr">
+                      <a:solidFill>
+                        <a:srgbClr val="D9D9D9"/>
+                      </a:solidFill>
+                      <a:prstDash val="solid"/>
+                      <a:round/>
+                      <a:headEnd type="none" w="med" len="med"/>
+                      <a:tailEnd type="none" w="med" len="med"/>
+                    </a:lnL>
+                    <a:lnR w="9525" cap="flat" cmpd="sng" algn="ctr">
+                      <a:solidFill>
+                        <a:srgbClr val="D9D9D9"/>
+                      </a:solidFill>
+                      <a:prstDash val="solid"/>
+                      <a:round/>
+                      <a:headEnd type="none" w="med" len="med"/>
+                      <a:tailEnd type="none" w="med" len="med"/>
+                    </a:lnR>
+                    <a:lnT w="9525" cap="flat" cmpd="sng" algn="ctr">
+                      <a:solidFill>
+                        <a:srgbClr val="D9D9D9"/>
+                      </a:solidFill>
+                      <a:prstDash val="solid"/>
+                      <a:round/>
+                      <a:headEnd type="none" w="med" len="med"/>
+                      <a:tailEnd type="none" w="med" len="med"/>
+                    </a:lnT>
+                    <a:lnB w="9525" cap="flat" cmpd="sng" algn="ctr">
+                      <a:solidFill>
+                        <a:srgbClr val="D9D9D9"/>
+                      </a:solidFill>
+                      <a:prstDash val="solid"/>
+                      <a:round/>
+                      <a:headEnd type="none" w="med" len="med"/>
+                      <a:tailEnd type="none" w="med" len="med"/>
+                    </a:lnB>
+                  </a:tcPr>
+                </a:tc>
+                <a:tc>
+                  <a:txBody>
+                    <a:bodyPr/>
+                    <a:lstStyle/>
+                    <a:p>
+                      <a:pPr algn="l" indent="0" marL="0">
+                        <a:buNone/>
+                      </a:pPr>
+                      <a:r>
+                        <a:rPr lang="en-US" sz="900" dirty="0">
+                          <a:solidFill>
+                            <a:schemeClr val="tx1"/>
+                          </a:solidFill>
+                          <a:latin typeface="맑은 고딕" pitchFamily="34" charset="0"/>
+                          <a:ea typeface="맑은 고딕" pitchFamily="34" charset="-122"/>
+                          <a:cs typeface="맑은 고딕" pitchFamily="34" charset="-120"/>
+                        </a:rPr>
+                        <a:t>Quibi Holdings LLC</a:t>
+                      </a:r>
+                      <a:endParaRPr lang="en-US" sz="900" dirty="0">
+                        <a:latin typeface="맑은 고딕" charset="0"/>
+                        <a:ea typeface="맑은 고딕" charset="0"/>
+                        <a:cs typeface="맑은 고딕" charset="0"/>
+                      </a:endParaRPr>
+                    </a:p>
+                  </a:txBody>
+                  <a:tcPr marL="36576" marR="36576" marT="36576" marB="36576" anchor="ctr">
+                    <a:lnL w="9525" cap="flat" cmpd="sng" algn="ctr">
+                      <a:solidFill>
+                        <a:srgbClr val="D9D9D9"/>
+                      </a:solidFill>
+                      <a:prstDash val="solid"/>
+                      <a:round/>
+                      <a:headEnd type="none" w="med" len="med"/>
+                      <a:tailEnd type="none" w="med" len="med"/>
+                    </a:lnL>
+                    <a:lnR w="9525" cap="flat" cmpd="sng" algn="ctr">
+                      <a:solidFill>
+                        <a:srgbClr val="D9D9D9"/>
+                      </a:solidFill>
+                      <a:prstDash val="solid"/>
+                      <a:round/>
+                      <a:headEnd type="none" w="med" len="med"/>
+                      <a:tailEnd type="none" w="med" len="med"/>
+                    </a:lnR>
+                    <a:lnT w="9525" cap="flat" cmpd="sng" algn="ctr">
+                      <a:solidFill>
+                        <a:srgbClr val="D9D9D9"/>
+                      </a:solidFill>
+                      <a:prstDash val="solid"/>
+                      <a:round/>
+                      <a:headEnd type="none" w="med" len="med"/>
+                      <a:tailEnd type="none" w="med" len="med"/>
+                    </a:lnT>
+                    <a:lnB w="9525" cap="flat" cmpd="sng" algn="ctr">
+                      <a:solidFill>
+                        <a:srgbClr val="D9D9D9"/>
+                      </a:solidFill>
+                      <a:prstDash val="solid"/>
+                      <a:round/>
+                      <a:headEnd type="none" w="med" len="med"/>
+                      <a:tailEnd type="none" w="med" len="med"/>
+                    </a:lnB>
+                  </a:tcPr>
+                </a:tc>
+                <a:tc>
+                  <a:txBody>
+                    <a:bodyPr/>
+                    <a:lstStyle/>
+                    <a:p>
+                      <a:pPr algn="l" indent="0" marL="0">
+                        <a:buNone/>
+                      </a:pPr>
+                      <a:r>
+                        <a:rPr lang="en-US" sz="900" dirty="0">
+                          <a:solidFill>
+                            <a:schemeClr val="tx1"/>
+                          </a:solidFill>
+                          <a:latin typeface="맑은 고딕" pitchFamily="34" charset="0"/>
+                          <a:ea typeface="맑은 고딕" pitchFamily="34" charset="-122"/>
+                          <a:cs typeface="맑은 고딕" pitchFamily="34" charset="-120"/>
+                        </a:rPr>
+                        <a:t>Public domain</a:t>
+                      </a:r>
+                      <a:endParaRPr lang="en-US" sz="900" dirty="0">
+                        <a:latin typeface="맑은 고딕" charset="0"/>
+                        <a:ea typeface="맑은 고딕" charset="0"/>
+                        <a:cs typeface="맑은 고딕" charset="0"/>
+                      </a:endParaRPr>
+                    </a:p>
+                  </a:txBody>
+                  <a:tcPr marL="36576" marR="36576" marT="36576" marB="36576" anchor="ctr">
+                    <a:lnL w="9525" cap="flat" cmpd="sng" algn="ctr">
+                      <a:solidFill>
+                        <a:srgbClr val="D9D9D9"/>
+                      </a:solidFill>
+                      <a:prstDash val="solid"/>
+                      <a:round/>
+                      <a:headEnd type="none" w="med" len="med"/>
+                      <a:tailEnd type="none" w="med" len="med"/>
+                    </a:lnL>
+                    <a:lnR w="9525" cap="flat" cmpd="sng" algn="ctr">
+                      <a:solidFill>
+                        <a:srgbClr val="D9D9D9"/>
+                      </a:solidFill>
+                      <a:prstDash val="solid"/>
+                      <a:round/>
+                      <a:headEnd type="none" w="med" len="med"/>
+                      <a:tailEnd type="none" w="med" len="med"/>
+                    </a:lnR>
+                    <a:lnT w="9525" cap="flat" cmpd="sng" algn="ctr">
+                      <a:solidFill>
+                        <a:srgbClr val="D9D9D9"/>
+                      </a:solidFill>
+                      <a:prstDash val="solid"/>
+                      <a:round/>
+                      <a:headEnd type="none" w="med" len="med"/>
+                      <a:tailEnd type="none" w="med" len="med"/>
+                    </a:lnT>
+                    <a:lnB w="9525" cap="flat" cmpd="sng" algn="ctr">
+                      <a:solidFill>
+                        <a:srgbClr val="D9D9D9"/>
+                      </a:solidFill>
+                      <a:prstDash val="solid"/>
+                      <a:round/>
+                      <a:headEnd type="none" w="med" len="med"/>
+                      <a:tailEnd type="none" w="med" len="med"/>
+                    </a:lnB>
+                  </a:tcPr>
+                </a:tc>
+              </a:tr>
+              <a:tr h="310896">
+                <a:tc>
+                  <a:txBody>
+                    <a:bodyPr/>
+                    <a:lstStyle/>
+                    <a:p>
+                      <a:pPr algn="ctr" indent="0" marL="0">
+                        <a:buNone/>
+                      </a:pPr>
+                      <a:r>
+                        <a:rPr lang="en-US" sz="900" dirty="0">
+                          <a:solidFill>
+                            <a:schemeClr val="tx1"/>
+                          </a:solidFill>
+                          <a:latin typeface="맑은 고딕" pitchFamily="34" charset="0"/>
+                          <a:ea typeface="맑은 고딕" pitchFamily="34" charset="-122"/>
+                          <a:cs typeface="맑은 고딕" pitchFamily="34" charset="-120"/>
+                        </a:rPr>
+                        <a:t>4</a:t>
+                      </a:r>
+                      <a:endParaRPr lang="en-US" sz="900" dirty="0">
+                        <a:latin typeface="맑은 고딕" charset="0"/>
+                        <a:ea typeface="맑은 고딕" charset="0"/>
+                        <a:cs typeface="맑은 고딕" charset="0"/>
+                      </a:endParaRPr>
+                    </a:p>
+                  </a:txBody>
+                  <a:tcPr marL="36576" marR="36576" marT="36576" marB="36576" anchor="ctr">
+                    <a:lnL w="9525" cap="flat" cmpd="sng" algn="ctr">
+                      <a:solidFill>
+                        <a:srgbClr val="D9D9D9"/>
+                      </a:solidFill>
+                      <a:prstDash val="solid"/>
+                      <a:round/>
+                      <a:headEnd type="none" w="med" len="med"/>
+                      <a:tailEnd type="none" w="med" len="med"/>
+                    </a:lnL>
+                    <a:lnR w="9525" cap="flat" cmpd="sng" algn="ctr">
+                      <a:solidFill>
+                        <a:srgbClr val="D9D9D9"/>
+                      </a:solidFill>
+                      <a:prstDash val="solid"/>
+                      <a:round/>
+                      <a:headEnd type="none" w="med" len="med"/>
+                      <a:tailEnd type="none" w="med" len="med"/>
+                    </a:lnR>
+                    <a:lnT w="9525" cap="flat" cmpd="sng" algn="ctr">
+                      <a:solidFill>
+                        <a:srgbClr val="D9D9D9"/>
+                      </a:solidFill>
+                      <a:prstDash val="solid"/>
+                      <a:round/>
+                      <a:headEnd type="none" w="med" len="med"/>
+                      <a:tailEnd type="none" w="med" len="med"/>
+                    </a:lnT>
+                    <a:lnB w="9525" cap="flat" cmpd="sng" algn="ctr">
+                      <a:solidFill>
+                        <a:srgbClr val="D9D9D9"/>
+                      </a:solidFill>
+                      <a:prstDash val="solid"/>
+                      <a:round/>
+                      <a:headEnd type="none" w="med" len="med"/>
+                      <a:tailEnd type="none" w="med" len="med"/>
+                    </a:lnB>
+                  </a:tcPr>
+                </a:tc>
+                <a:tc>
+                  <a:txBody>
+                    <a:bodyPr/>
+                    <a:lstStyle/>
+                    <a:p>
+                      <a:pPr algn="l" indent="0" marL="0">
+                        <a:buNone/>
+                      </a:pPr>
+                      <a:r>
+                        <a:rPr lang="en-US" sz="900" dirty="0">
+                          <a:solidFill>
+                            <a:schemeClr val="tx1"/>
+                          </a:solidFill>
+                          <a:latin typeface="맑은 고딕" pitchFamily="34" charset="0"/>
+                          <a:ea typeface="맑은 고딕" pitchFamily="34" charset="-122"/>
+                          <a:cs typeface="맑은 고딕" pitchFamily="34" charset="-120"/>
+                        </a:rPr>
+                        <a:t>웹밴 배송 트럭</a:t>
+                      </a:r>
+                      <a:endParaRPr lang="en-US" sz="900" dirty="0">
+                        <a:latin typeface="맑은 고딕" charset="0"/>
+                        <a:ea typeface="맑은 고딕" charset="0"/>
+                        <a:cs typeface="맑은 고딕" charset="0"/>
+                      </a:endParaRPr>
+                    </a:p>
+                  </a:txBody>
+                  <a:tcPr marL="36576" marR="36576" marT="36576" marB="36576" anchor="ctr">
+                    <a:lnL w="9525" cap="flat" cmpd="sng" algn="ctr">
+                      <a:solidFill>
+                        <a:srgbClr val="D9D9D9"/>
+                      </a:solidFill>
+                      <a:prstDash val="solid"/>
+                      <a:round/>
+                      <a:headEnd type="none" w="med" len="med"/>
+                      <a:tailEnd type="none" w="med" len="med"/>
+                    </a:lnL>
+                    <a:lnR w="9525" cap="flat" cmpd="sng" algn="ctr">
+                      <a:solidFill>
+                        <a:srgbClr val="D9D9D9"/>
+                      </a:solidFill>
+                      <a:prstDash val="solid"/>
+                      <a:round/>
+                      <a:headEnd type="none" w="med" len="med"/>
+                      <a:tailEnd type="none" w="med" len="med"/>
+                    </a:lnR>
+                    <a:lnT w="9525" cap="flat" cmpd="sng" algn="ctr">
+                      <a:solidFill>
+                        <a:srgbClr val="D9D9D9"/>
+                      </a:solidFill>
+                      <a:prstDash val="solid"/>
+                      <a:round/>
+                      <a:headEnd type="none" w="med" len="med"/>
+                      <a:tailEnd type="none" w="med" len="med"/>
+                    </a:lnT>
+                    <a:lnB w="9525" cap="flat" cmpd="sng" algn="ctr">
+                      <a:solidFill>
+                        <a:srgbClr val="D9D9D9"/>
+                      </a:solidFill>
+                      <a:prstDash val="solid"/>
+                      <a:round/>
+                      <a:headEnd type="none" w="med" len="med"/>
+                      <a:tailEnd type="none" w="med" len="med"/>
+                    </a:lnB>
+                  </a:tcPr>
+                </a:tc>
+                <a:tc>
+                  <a:txBody>
+                    <a:bodyPr/>
+                    <a:lstStyle/>
+                    <a:p>
+                      <a:pPr algn="l" indent="0" marL="0">
+                        <a:buNone/>
+                      </a:pPr>
+                      <a:r>
+                        <a:rPr lang="en-US" sz="900" dirty="0">
+                          <a:solidFill>
+                            <a:schemeClr val="tx1"/>
+                          </a:solidFill>
+                          <a:latin typeface="맑은 고딕" pitchFamily="34" charset="0"/>
+                          <a:ea typeface="맑은 고딕" pitchFamily="34" charset="-122"/>
+                          <a:cs typeface="맑은 고딕" pitchFamily="34" charset="-120"/>
+                        </a:rPr>
+                        <a:t>Mark Coggins</a:t>
+                      </a:r>
+                      <a:endParaRPr lang="en-US" sz="900" dirty="0">
+                        <a:latin typeface="맑은 고딕" charset="0"/>
+                        <a:ea typeface="맑은 고딕" charset="0"/>
+                        <a:cs typeface="맑은 고딕" charset="0"/>
+                      </a:endParaRPr>
+                    </a:p>
+                  </a:txBody>
+                  <a:tcPr marL="36576" marR="36576" marT="36576" marB="36576" anchor="ctr">
+                    <a:lnL w="9525" cap="flat" cmpd="sng" algn="ctr">
+                      <a:solidFill>
+                        <a:srgbClr val="D9D9D9"/>
+                      </a:solidFill>
+                      <a:prstDash val="solid"/>
+                      <a:round/>
+                      <a:headEnd type="none" w="med" len="med"/>
+                      <a:tailEnd type="none" w="med" len="med"/>
+                    </a:lnL>
+                    <a:lnR w="9525" cap="flat" cmpd="sng" algn="ctr">
+                      <a:solidFill>
+                        <a:srgbClr val="D9D9D9"/>
+                      </a:solidFill>
+                      <a:prstDash val="solid"/>
+                      <a:round/>
+                      <a:headEnd type="none" w="med" len="med"/>
+                      <a:tailEnd type="none" w="med" len="med"/>
+                    </a:lnR>
+                    <a:lnT w="9525" cap="flat" cmpd="sng" algn="ctr">
+                      <a:solidFill>
+                        <a:srgbClr val="D9D9D9"/>
+                      </a:solidFill>
+                      <a:prstDash val="solid"/>
+                      <a:round/>
+                      <a:headEnd type="none" w="med" len="med"/>
+                      <a:tailEnd type="none" w="med" len="med"/>
+                    </a:lnT>
+                    <a:lnB w="9525" cap="flat" cmpd="sng" algn="ctr">
+                      <a:solidFill>
+                        <a:srgbClr val="D9D9D9"/>
+                      </a:solidFill>
+                      <a:prstDash val="solid"/>
+                      <a:round/>
+                      <a:headEnd type="none" w="med" len="med"/>
+                      <a:tailEnd type="none" w="med" len="med"/>
+                    </a:lnB>
+                  </a:tcPr>
+                </a:tc>
+                <a:tc>
+                  <a:txBody>
+                    <a:bodyPr/>
+                    <a:lstStyle/>
+                    <a:p>
+                      <a:pPr algn="l" indent="0" marL="0">
+                        <a:buNone/>
+                      </a:pPr>
+                      <a:r>
+                        <a:rPr lang="en-US" sz="900" dirty="0">
+                          <a:solidFill>
+                            <a:schemeClr val="tx1"/>
+                          </a:solidFill>
+                          <a:latin typeface="맑은 고딕" pitchFamily="34" charset="0"/>
+                          <a:ea typeface="맑은 고딕" pitchFamily="34" charset="-122"/>
+                          <a:cs typeface="맑은 고딕" pitchFamily="34" charset="-120"/>
+                        </a:rPr>
+                        <a:t>CC BY 2.0</a:t>
+                      </a:r>
+                      <a:endParaRPr lang="en-US" sz="900" dirty="0">
+                        <a:latin typeface="맑은 고딕" charset="0"/>
+                        <a:ea typeface="맑은 고딕" charset="0"/>
+                        <a:cs typeface="맑은 고딕" charset="0"/>
+                      </a:endParaRPr>
+                    </a:p>
+                  </a:txBody>
+                  <a:tcPr marL="36576" marR="36576" marT="36576" marB="36576" anchor="ctr">
+                    <a:lnL w="9525" cap="flat" cmpd="sng" algn="ctr">
+                      <a:solidFill>
+                        <a:srgbClr val="D9D9D9"/>
+                      </a:solidFill>
+                      <a:prstDash val="solid"/>
+                      <a:round/>
+                      <a:headEnd type="none" w="med" len="med"/>
+                      <a:tailEnd type="none" w="med" len="med"/>
+                    </a:lnL>
+                    <a:lnR w="9525" cap="flat" cmpd="sng" algn="ctr">
+                      <a:solidFill>
+                        <a:srgbClr val="D9D9D9"/>
+                      </a:solidFill>
+                      <a:prstDash val="solid"/>
+                      <a:round/>
+                      <a:headEnd type="none" w="med" len="med"/>
+                      <a:tailEnd type="none" w="med" len="med"/>
+                    </a:lnR>
+                    <a:lnT w="9525" cap="flat" cmpd="sng" algn="ctr">
+                      <a:solidFill>
+                        <a:srgbClr val="D9D9D9"/>
+                      </a:solidFill>
+                      <a:prstDash val="solid"/>
+                      <a:round/>
+                      <a:headEnd type="none" w="med" len="med"/>
+                      <a:tailEnd type="none" w="med" len="med"/>
+                    </a:lnT>
+                    <a:lnB w="9525" cap="flat" cmpd="sng" algn="ctr">
+                      <a:solidFill>
+                        <a:srgbClr val="D9D9D9"/>
+                      </a:solidFill>
+                      <a:prstDash val="solid"/>
+                      <a:round/>
+                      <a:headEnd type="none" w="med" len="med"/>
+                      <a:tailEnd type="none" w="med" len="med"/>
+                    </a:lnB>
+                  </a:tcPr>
+                </a:tc>
+              </a:tr>
+              <a:tr h="310896">
+                <a:tc>
+                  <a:txBody>
+                    <a:bodyPr/>
+                    <a:lstStyle/>
+                    <a:p>
+                      <a:pPr algn="ctr" indent="0" marL="0">
+                        <a:buNone/>
+                      </a:pPr>
+                      <a:r>
+                        <a:rPr lang="en-US" sz="900" dirty="0">
+                          <a:solidFill>
+                            <a:schemeClr val="tx1"/>
+                          </a:solidFill>
+                          <a:latin typeface="맑은 고딕" pitchFamily="34" charset="0"/>
+                          <a:ea typeface="맑은 고딕" pitchFamily="34" charset="-122"/>
+                          <a:cs typeface="맑은 고딕" pitchFamily="34" charset="-120"/>
+                        </a:rPr>
+                        <a:t>4</a:t>
+                      </a:r>
+                      <a:endParaRPr lang="en-US" sz="900" dirty="0">
+                        <a:latin typeface="맑은 고딕" charset="0"/>
+                        <a:ea typeface="맑은 고딕" charset="0"/>
+                        <a:cs typeface="맑은 고딕" charset="0"/>
+                      </a:endParaRPr>
+                    </a:p>
+                  </a:txBody>
+                  <a:tcPr marL="36576" marR="36576" marT="36576" marB="36576" anchor="ctr">
+                    <a:lnL w="9525" cap="flat" cmpd="sng" algn="ctr">
+                      <a:solidFill>
+                        <a:srgbClr val="D9D9D9"/>
+                      </a:solidFill>
+                      <a:prstDash val="solid"/>
+                      <a:round/>
+                      <a:headEnd type="none" w="med" len="med"/>
+                      <a:tailEnd type="none" w="med" len="med"/>
+                    </a:lnL>
+                    <a:lnR w="9525" cap="flat" cmpd="sng" algn="ctr">
+                      <a:solidFill>
+                        <a:srgbClr val="D9D9D9"/>
+                      </a:solidFill>
+                      <a:prstDash val="solid"/>
+                      <a:round/>
+                      <a:headEnd type="none" w="med" len="med"/>
+                      <a:tailEnd type="none" w="med" len="med"/>
+                    </a:lnR>
+                    <a:lnT w="9525" cap="flat" cmpd="sng" algn="ctr">
+                      <a:solidFill>
+                        <a:srgbClr val="D9D9D9"/>
+                      </a:solidFill>
+                      <a:prstDash val="solid"/>
+                      <a:round/>
+                      <a:headEnd type="none" w="med" len="med"/>
+                      <a:tailEnd type="none" w="med" len="med"/>
+                    </a:lnT>
+                    <a:lnB w="9525" cap="flat" cmpd="sng" algn="ctr">
+                      <a:solidFill>
+                        <a:srgbClr val="D9D9D9"/>
+                      </a:solidFill>
+                      <a:prstDash val="solid"/>
+                      <a:round/>
+                      <a:headEnd type="none" w="med" len="med"/>
+                      <a:tailEnd type="none" w="med" len="med"/>
+                    </a:lnB>
+                  </a:tcPr>
+                </a:tc>
+                <a:tc>
+                  <a:txBody>
+                    <a:bodyPr/>
+                    <a:lstStyle/>
+                    <a:p>
+                      <a:pPr algn="l" indent="0" marL="0">
+                        <a:buNone/>
+                      </a:pPr>
+                      <a:r>
+                        <a:rPr lang="en-US" sz="900" dirty="0">
+                          <a:solidFill>
+                            <a:schemeClr val="tx1"/>
+                          </a:solidFill>
+                          <a:latin typeface="맑은 고딕" pitchFamily="34" charset="0"/>
+                          <a:ea typeface="맑은 고딕" pitchFamily="34" charset="-122"/>
+                          <a:cs typeface="맑은 고딕" pitchFamily="34" charset="-120"/>
+                        </a:rPr>
+                        <a:t>자포스 본사 입구</a:t>
+                      </a:r>
+                      <a:endParaRPr lang="en-US" sz="900" dirty="0">
+                        <a:latin typeface="맑은 고딕" charset="0"/>
+                        <a:ea typeface="맑은 고딕" charset="0"/>
+                        <a:cs typeface="맑은 고딕" charset="0"/>
+                      </a:endParaRPr>
+                    </a:p>
+                  </a:txBody>
+                  <a:tcPr marL="36576" marR="36576" marT="36576" marB="36576" anchor="ctr">
+                    <a:lnL w="9525" cap="flat" cmpd="sng" algn="ctr">
+                      <a:solidFill>
+                        <a:srgbClr val="D9D9D9"/>
+                      </a:solidFill>
+                      <a:prstDash val="solid"/>
+                      <a:round/>
+                      <a:headEnd type="none" w="med" len="med"/>
+                      <a:tailEnd type="none" w="med" len="med"/>
+                    </a:lnL>
+                    <a:lnR w="9525" cap="flat" cmpd="sng" algn="ctr">
+                      <a:solidFill>
+                        <a:srgbClr val="D9D9D9"/>
+                      </a:solidFill>
+                      <a:prstDash val="solid"/>
+                      <a:round/>
+                      <a:headEnd type="none" w="med" len="med"/>
+                      <a:tailEnd type="none" w="med" len="med"/>
+                    </a:lnR>
+                    <a:lnT w="9525" cap="flat" cmpd="sng" algn="ctr">
+                      <a:solidFill>
+                        <a:srgbClr val="D9D9D9"/>
+                      </a:solidFill>
+                      <a:prstDash val="solid"/>
+                      <a:round/>
+                      <a:headEnd type="none" w="med" len="med"/>
+                      <a:tailEnd type="none" w="med" len="med"/>
+                    </a:lnT>
+                    <a:lnB w="9525" cap="flat" cmpd="sng" algn="ctr">
+                      <a:solidFill>
+                        <a:srgbClr val="D9D9D9"/>
+                      </a:solidFill>
+                      <a:prstDash val="solid"/>
+                      <a:round/>
+                      <a:headEnd type="none" w="med" len="med"/>
+                      <a:tailEnd type="none" w="med" len="med"/>
+                    </a:lnB>
+                  </a:tcPr>
+                </a:tc>
+                <a:tc>
+                  <a:txBody>
+                    <a:bodyPr/>
+                    <a:lstStyle/>
+                    <a:p>
+                      <a:pPr algn="l" indent="0" marL="0">
+                        <a:buNone/>
+                      </a:pPr>
+                      <a:r>
+                        <a:rPr lang="en-US" sz="900" dirty="0">
+                          <a:solidFill>
+                            <a:schemeClr val="tx1"/>
+                          </a:solidFill>
+                          <a:latin typeface="맑은 고딕" pitchFamily="34" charset="0"/>
+                          <a:ea typeface="맑은 고딕" pitchFamily="34" charset="-122"/>
+                          <a:cs typeface="맑은 고딕" pitchFamily="34" charset="-120"/>
+                        </a:rPr>
+                        <a:t>Svoboda v práci</a:t>
+                      </a:r>
+                      <a:endParaRPr lang="en-US" sz="900" dirty="0">
+                        <a:latin typeface="맑은 고딕" charset="0"/>
+                        <a:ea typeface="맑은 고딕" charset="0"/>
+                        <a:cs typeface="맑은 고딕" charset="0"/>
+                      </a:endParaRPr>
+                    </a:p>
+                  </a:txBody>
+                  <a:tcPr marL="36576" marR="36576" marT="36576" marB="36576" anchor="ctr">
+                    <a:lnL w="9525" cap="flat" cmpd="sng" algn="ctr">
+                      <a:solidFill>
+                        <a:srgbClr val="D9D9D9"/>
+                      </a:solidFill>
+                      <a:prstDash val="solid"/>
+                      <a:round/>
+                      <a:headEnd type="none" w="med" len="med"/>
+                      <a:tailEnd type="none" w="med" len="med"/>
+                    </a:lnL>
+                    <a:lnR w="9525" cap="flat" cmpd="sng" algn="ctr">
+                      <a:solidFill>
+                        <a:srgbClr val="D9D9D9"/>
+                      </a:solidFill>
+                      <a:prstDash val="solid"/>
+                      <a:round/>
+                      <a:headEnd type="none" w="med" len="med"/>
+                      <a:tailEnd type="none" w="med" len="med"/>
+                    </a:lnR>
+                    <a:lnT w="9525" cap="flat" cmpd="sng" algn="ctr">
+                      <a:solidFill>
+                        <a:srgbClr val="D9D9D9"/>
+                      </a:solidFill>
+                      <a:prstDash val="solid"/>
+                      <a:round/>
+                      <a:headEnd type="none" w="med" len="med"/>
+                      <a:tailEnd type="none" w="med" len="med"/>
+                    </a:lnT>
+                    <a:lnB w="9525" cap="flat" cmpd="sng" algn="ctr">
+                      <a:solidFill>
+                        <a:srgbClr val="D9D9D9"/>
+                      </a:solidFill>
+                      <a:prstDash val="solid"/>
+                      <a:round/>
+                      <a:headEnd type="none" w="med" len="med"/>
+                      <a:tailEnd type="none" w="med" len="med"/>
+                    </a:lnB>
+                  </a:tcPr>
+                </a:tc>
+                <a:tc>
+                  <a:txBody>
+                    <a:bodyPr/>
+                    <a:lstStyle/>
+                    <a:p>
+                      <a:pPr algn="l" indent="0" marL="0">
+                        <a:buNone/>
+                      </a:pPr>
+                      <a:r>
+                        <a:rPr lang="en-US" sz="900" dirty="0">
+                          <a:solidFill>
+                            <a:schemeClr val="tx1"/>
+                          </a:solidFill>
+                          <a:latin typeface="맑은 고딕" pitchFamily="34" charset="0"/>
+                          <a:ea typeface="맑은 고딕" pitchFamily="34" charset="-122"/>
+                          <a:cs typeface="맑은 고딕" pitchFamily="34" charset="-120"/>
+                        </a:rPr>
+                        <a:t>CC BY-SA 2.0</a:t>
+                      </a:r>
+                      <a:endParaRPr lang="en-US" sz="900" dirty="0">
+                        <a:latin typeface="맑은 고딕" charset="0"/>
+                        <a:ea typeface="맑은 고딕" charset="0"/>
+                        <a:cs typeface="맑은 고딕" charset="0"/>
+                      </a:endParaRPr>
+                    </a:p>
+                  </a:txBody>
+                  <a:tcPr marL="36576" marR="36576" marT="36576" marB="36576" anchor="ctr">
+                    <a:lnL w="9525" cap="flat" cmpd="sng" algn="ctr">
+                      <a:solidFill>
+                        <a:srgbClr val="D9D9D9"/>
+                      </a:solidFill>
+                      <a:prstDash val="solid"/>
+                      <a:round/>
+                      <a:headEnd type="none" w="med" len="med"/>
+                      <a:tailEnd type="none" w="med" len="med"/>
+                    </a:lnL>
+                    <a:lnR w="9525" cap="flat" cmpd="sng" algn="ctr">
+                      <a:solidFill>
+                        <a:srgbClr val="D9D9D9"/>
+                      </a:solidFill>
+                      <a:prstDash val="solid"/>
+                      <a:round/>
+                      <a:headEnd type="none" w="med" len="med"/>
+                      <a:tailEnd type="none" w="med" len="med"/>
+                    </a:lnR>
+                    <a:lnT w="9525" cap="flat" cmpd="sng" algn="ctr">
+                      <a:solidFill>
+                        <a:srgbClr val="D9D9D9"/>
+                      </a:solidFill>
+                      <a:prstDash val="solid"/>
+                      <a:round/>
+                      <a:headEnd type="none" w="med" len="med"/>
+                      <a:tailEnd type="none" w="med" len="med"/>
+                    </a:lnT>
+                    <a:lnB w="9525" cap="flat" cmpd="sng" algn="ctr">
+                      <a:solidFill>
+                        <a:srgbClr val="D9D9D9"/>
+                      </a:solidFill>
+                      <a:prstDash val="solid"/>
+                      <a:round/>
+                      <a:headEnd type="none" w="med" len="med"/>
+                      <a:tailEnd type="none" w="med" len="med"/>
+                    </a:lnB>
+                  </a:tcPr>
+                </a:tc>
+              </a:tr>
+              <a:tr h="310896">
+                <a:tc>
+                  <a:txBody>
+                    <a:bodyPr/>
+                    <a:lstStyle/>
+                    <a:p>
+                      <a:pPr algn="ctr" indent="0" marL="0">
+                        <a:buNone/>
+                      </a:pPr>
+                      <a:r>
+                        <a:rPr lang="en-US" sz="900" dirty="0">
+                          <a:solidFill>
+                            <a:schemeClr val="tx1"/>
+                          </a:solidFill>
+                          <a:latin typeface="맑은 고딕" pitchFamily="34" charset="0"/>
+                          <a:ea typeface="맑은 고딕" pitchFamily="34" charset="-122"/>
+                          <a:cs typeface="맑은 고딕" pitchFamily="34" charset="-120"/>
+                        </a:rPr>
+                        <a:t>4</a:t>
+                      </a:r>
+                      <a:endParaRPr lang="en-US" sz="900" dirty="0">
+                        <a:latin typeface="맑은 고딕" charset="0"/>
+                        <a:ea typeface="맑은 고딕" charset="0"/>
+                        <a:cs typeface="맑은 고딕" charset="0"/>
+                      </a:endParaRPr>
+                    </a:p>
+                  </a:txBody>
+                  <a:tcPr marL="36576" marR="36576" marT="36576" marB="36576" anchor="ctr">
+                    <a:lnL w="9525" cap="flat" cmpd="sng" algn="ctr">
+                      <a:solidFill>
+                        <a:srgbClr val="D9D9D9"/>
+                      </a:solidFill>
+                      <a:prstDash val="solid"/>
+                      <a:round/>
+                      <a:headEnd type="none" w="med" len="med"/>
+                      <a:tailEnd type="none" w="med" len="med"/>
+                    </a:lnL>
+                    <a:lnR w="9525" cap="flat" cmpd="sng" algn="ctr">
+                      <a:solidFill>
+                        <a:srgbClr val="D9D9D9"/>
+                      </a:solidFill>
+                      <a:prstDash val="solid"/>
+                      <a:round/>
+                      <a:headEnd type="none" w="med" len="med"/>
+                      <a:tailEnd type="none" w="med" len="med"/>
+                    </a:lnR>
+                    <a:lnT w="9525" cap="flat" cmpd="sng" algn="ctr">
+                      <a:solidFill>
+                        <a:srgbClr val="D9D9D9"/>
+                      </a:solidFill>
+                      <a:prstDash val="solid"/>
+                      <a:round/>
+                      <a:headEnd type="none" w="med" len="med"/>
+                      <a:tailEnd type="none" w="med" len="med"/>
+                    </a:lnT>
+                    <a:lnB w="9525" cap="flat" cmpd="sng" algn="ctr">
+                      <a:solidFill>
+                        <a:srgbClr val="D9D9D9"/>
+                      </a:solidFill>
+                      <a:prstDash val="solid"/>
+                      <a:round/>
+                      <a:headEnd type="none" w="med" len="med"/>
+                      <a:tailEnd type="none" w="med" len="med"/>
+                    </a:lnB>
+                  </a:tcPr>
+                </a:tc>
+                <a:tc>
+                  <a:txBody>
+                    <a:bodyPr/>
+                    <a:lstStyle/>
+                    <a:p>
+                      <a:pPr algn="l" indent="0" marL="0">
+                        <a:buNone/>
+                      </a:pPr>
+                      <a:r>
+                        <a:rPr lang="en-US" sz="900" dirty="0">
+                          <a:solidFill>
+                            <a:schemeClr val="tx1"/>
+                          </a:solidFill>
+                          <a:latin typeface="맑은 고딕" pitchFamily="34" charset="0"/>
+                          <a:ea typeface="맑은 고딕" pitchFamily="34" charset="-122"/>
+                          <a:cs typeface="맑은 고딕" pitchFamily="34" charset="-120"/>
+                        </a:rPr>
+                        <a:t>드롭박스 창업자 D. 휴스턴</a:t>
+                      </a:r>
+                      <a:endParaRPr lang="en-US" sz="900" dirty="0">
+                        <a:latin typeface="맑은 고딕" charset="0"/>
+                        <a:ea typeface="맑은 고딕" charset="0"/>
+                        <a:cs typeface="맑은 고딕" charset="0"/>
+                      </a:endParaRPr>
+                    </a:p>
+                  </a:txBody>
+                  <a:tcPr marL="36576" marR="36576" marT="36576" marB="36576" anchor="ctr">
+                    <a:lnL w="9525" cap="flat" cmpd="sng" algn="ctr">
+                      <a:solidFill>
+                        <a:srgbClr val="D9D9D9"/>
+                      </a:solidFill>
+                      <a:prstDash val="solid"/>
+                      <a:round/>
+                      <a:headEnd type="none" w="med" len="med"/>
+                      <a:tailEnd type="none" w="med" len="med"/>
+                    </a:lnL>
+                    <a:lnR w="9525" cap="flat" cmpd="sng" algn="ctr">
+                      <a:solidFill>
+                        <a:srgbClr val="D9D9D9"/>
+                      </a:solidFill>
+                      <a:prstDash val="solid"/>
+                      <a:round/>
+                      <a:headEnd type="none" w="med" len="med"/>
+                      <a:tailEnd type="none" w="med" len="med"/>
+                    </a:lnR>
+                    <a:lnT w="9525" cap="flat" cmpd="sng" algn="ctr">
+                      <a:solidFill>
+                        <a:srgbClr val="D9D9D9"/>
+                      </a:solidFill>
+                      <a:prstDash val="solid"/>
+                      <a:round/>
+                      <a:headEnd type="none" w="med" len="med"/>
+                      <a:tailEnd type="none" w="med" len="med"/>
+                    </a:lnT>
+                    <a:lnB w="9525" cap="flat" cmpd="sng" algn="ctr">
+                      <a:solidFill>
+                        <a:srgbClr val="D9D9D9"/>
+                      </a:solidFill>
+                      <a:prstDash val="solid"/>
+                      <a:round/>
+                      <a:headEnd type="none" w="med" len="med"/>
+                      <a:tailEnd type="none" w="med" len="med"/>
+                    </a:lnB>
+                  </a:tcPr>
+                </a:tc>
+                <a:tc>
+                  <a:txBody>
+                    <a:bodyPr/>
+                    <a:lstStyle/>
+                    <a:p>
+                      <a:pPr algn="l" indent="0" marL="0">
+                        <a:buNone/>
+                      </a:pPr>
+                      <a:r>
+                        <a:rPr lang="en-US" sz="900" dirty="0">
+                          <a:solidFill>
+                            <a:schemeClr val="tx1"/>
+                          </a:solidFill>
+                          <a:latin typeface="맑은 고딕" pitchFamily="34" charset="0"/>
+                          <a:ea typeface="맑은 고딕" pitchFamily="34" charset="-122"/>
+                          <a:cs typeface="맑은 고딕" pitchFamily="34" charset="-120"/>
+                        </a:rPr>
+                        <a:t>Financial Times</a:t>
+                      </a:r>
+                      <a:endParaRPr lang="en-US" sz="900" dirty="0">
+                        <a:latin typeface="맑은 고딕" charset="0"/>
+                        <a:ea typeface="맑은 고딕" charset="0"/>
+                        <a:cs typeface="맑은 고딕" charset="0"/>
+                      </a:endParaRPr>
+                    </a:p>
+                  </a:txBody>
+                  <a:tcPr marL="36576" marR="36576" marT="36576" marB="36576" anchor="ctr">
+                    <a:lnL w="9525" cap="flat" cmpd="sng" algn="ctr">
+                      <a:solidFill>
+                        <a:srgbClr val="D9D9D9"/>
+                      </a:solidFill>
+                      <a:prstDash val="solid"/>
+                      <a:round/>
+                      <a:headEnd type="none" w="med" len="med"/>
+                      <a:tailEnd type="none" w="med" len="med"/>
+                    </a:lnL>
+                    <a:lnR w="9525" cap="flat" cmpd="sng" algn="ctr">
+                      <a:solidFill>
+                        <a:srgbClr val="D9D9D9"/>
+                      </a:solidFill>
+                      <a:prstDash val="solid"/>
+                      <a:round/>
+                      <a:headEnd type="none" w="med" len="med"/>
+                      <a:tailEnd type="none" w="med" len="med"/>
+                    </a:lnR>
+                    <a:lnT w="9525" cap="flat" cmpd="sng" algn="ctr">
+                      <a:solidFill>
+                        <a:srgbClr val="D9D9D9"/>
+                      </a:solidFill>
+                      <a:prstDash val="solid"/>
+                      <a:round/>
+                      <a:headEnd type="none" w="med" len="med"/>
+                      <a:tailEnd type="none" w="med" len="med"/>
+                    </a:lnT>
+                    <a:lnB w="9525" cap="flat" cmpd="sng" algn="ctr">
+                      <a:solidFill>
+                        <a:srgbClr val="D9D9D9"/>
+                      </a:solidFill>
+                      <a:prstDash val="solid"/>
+                      <a:round/>
+                      <a:headEnd type="none" w="med" len="med"/>
+                      <a:tailEnd type="none" w="med" len="med"/>
+                    </a:lnB>
+                  </a:tcPr>
+                </a:tc>
+                <a:tc>
+                  <a:txBody>
+                    <a:bodyPr/>
+                    <a:lstStyle/>
+                    <a:p>
+                      <a:pPr algn="l" indent="0" marL="0">
+                        <a:buNone/>
+                      </a:pPr>
+                      <a:r>
+                        <a:rPr lang="en-US" sz="900" dirty="0">
+                          <a:solidFill>
+                            <a:schemeClr val="tx1"/>
+                          </a:solidFill>
+                          <a:latin typeface="맑은 고딕" pitchFamily="34" charset="0"/>
+                          <a:ea typeface="맑은 고딕" pitchFamily="34" charset="-122"/>
+                          <a:cs typeface="맑은 고딕" pitchFamily="34" charset="-120"/>
+                        </a:rPr>
+                        <a:t>CC BY 2.0</a:t>
+                      </a:r>
+                      <a:endParaRPr lang="en-US" sz="900" dirty="0">
+                        <a:latin typeface="맑은 고딕" charset="0"/>
+                        <a:ea typeface="맑은 고딕" charset="0"/>
+                        <a:cs typeface="맑은 고딕" charset="0"/>
+                      </a:endParaRPr>
+                    </a:p>
+                  </a:txBody>
+                  <a:tcPr marL="36576" marR="36576" marT="36576" marB="36576" anchor="ctr">
+                    <a:lnL w="9525" cap="flat" cmpd="sng" algn="ctr">
+                      <a:solidFill>
+                        <a:srgbClr val="D9D9D9"/>
+                      </a:solidFill>
+                      <a:prstDash val="solid"/>
+                      <a:round/>
+                      <a:headEnd type="none" w="med" len="med"/>
+                      <a:tailEnd type="none" w="med" len="med"/>
+                    </a:lnL>
+                    <a:lnR w="9525" cap="flat" cmpd="sng" algn="ctr">
+                      <a:solidFill>
+                        <a:srgbClr val="D9D9D9"/>
+                      </a:solidFill>
+                      <a:prstDash val="solid"/>
+                      <a:round/>
+                      <a:headEnd type="none" w="med" len="med"/>
+                      <a:tailEnd type="none" w="med" len="med"/>
+                    </a:lnR>
+                    <a:lnT w="9525" cap="flat" cmpd="sng" algn="ctr">
+                      <a:solidFill>
+                        <a:srgbClr val="D9D9D9"/>
+                      </a:solidFill>
+                      <a:prstDash val="solid"/>
+                      <a:round/>
+                      <a:headEnd type="none" w="med" len="med"/>
+                      <a:tailEnd type="none" w="med" len="med"/>
+                    </a:lnT>
+                    <a:lnB w="9525" cap="flat" cmpd="sng" algn="ctr">
+                      <a:solidFill>
+                        <a:srgbClr val="D9D9D9"/>
+                      </a:solidFill>
+                      <a:prstDash val="solid"/>
+                      <a:round/>
+                      <a:headEnd type="none" w="med" len="med"/>
+                      <a:tailEnd type="none" w="med" len="med"/>
+                    </a:lnB>
+                  </a:tcPr>
+                </a:tc>
+              </a:tr>
+              <a:tr h="310896">
+                <a:tc>
+                  <a:txBody>
+                    <a:bodyPr/>
+                    <a:lstStyle/>
+                    <a:p>
+                      <a:pPr algn="ctr" indent="0" marL="0">
+                        <a:buNone/>
+                      </a:pPr>
+                      <a:r>
+                        <a:rPr lang="en-US" sz="900" dirty="0">
+                          <a:solidFill>
+                            <a:schemeClr val="tx1"/>
+                          </a:solidFill>
+                          <a:latin typeface="맑은 고딕" pitchFamily="34" charset="0"/>
+                          <a:ea typeface="맑은 고딕" pitchFamily="34" charset="-122"/>
+                          <a:cs typeface="맑은 고딕" pitchFamily="34" charset="-120"/>
+                        </a:rPr>
+                        <a:t>7</a:t>
+                      </a:r>
+                      <a:endParaRPr lang="en-US" sz="900" dirty="0">
+                        <a:latin typeface="맑은 고딕" charset="0"/>
+                        <a:ea typeface="맑은 고딕" charset="0"/>
+                        <a:cs typeface="맑은 고딕" charset="0"/>
+                      </a:endParaRPr>
+                    </a:p>
+                  </a:txBody>
+                  <a:tcPr marL="36576" marR="36576" marT="36576" marB="36576" anchor="ctr">
+                    <a:lnL w="9525" cap="flat" cmpd="sng" algn="ctr">
+                      <a:solidFill>
+                        <a:srgbClr val="D9D9D9"/>
+                      </a:solidFill>
+                      <a:prstDash val="solid"/>
+                      <a:round/>
+                      <a:headEnd type="none" w="med" len="med"/>
+                      <a:tailEnd type="none" w="med" len="med"/>
+                    </a:lnL>
+                    <a:lnR w="9525" cap="flat" cmpd="sng" algn="ctr">
+                      <a:solidFill>
+                        <a:srgbClr val="D9D9D9"/>
+                      </a:solidFill>
+                      <a:prstDash val="solid"/>
+                      <a:round/>
+                      <a:headEnd type="none" w="med" len="med"/>
+                      <a:tailEnd type="none" w="med" len="med"/>
+                    </a:lnR>
+                    <a:lnT w="9525" cap="flat" cmpd="sng" algn="ctr">
+                      <a:solidFill>
+                        <a:srgbClr val="D9D9D9"/>
+                      </a:solidFill>
+                      <a:prstDash val="solid"/>
+                      <a:round/>
+                      <a:headEnd type="none" w="med" len="med"/>
+                      <a:tailEnd type="none" w="med" len="med"/>
+                    </a:lnT>
+                    <a:lnB w="9525" cap="flat" cmpd="sng" algn="ctr">
+                      <a:solidFill>
+                        <a:srgbClr val="D9D9D9"/>
+                      </a:solidFill>
+                      <a:prstDash val="solid"/>
+                      <a:round/>
+                      <a:headEnd type="none" w="med" len="med"/>
+                      <a:tailEnd type="none" w="med" len="med"/>
+                    </a:lnB>
+                  </a:tcPr>
+                </a:tc>
+                <a:tc>
+                  <a:txBody>
+                    <a:bodyPr/>
+                    <a:lstStyle/>
+                    <a:p>
+                      <a:pPr algn="l" indent="0" marL="0">
+                        <a:buNone/>
+                      </a:pPr>
+                      <a:r>
+                        <a:rPr lang="en-US" sz="900" dirty="0">
+                          <a:solidFill>
+                            <a:schemeClr val="tx1"/>
+                          </a:solidFill>
+                          <a:latin typeface="맑은 고딕" pitchFamily="34" charset="0"/>
+                          <a:ea typeface="맑은 고딕" pitchFamily="34" charset="-122"/>
+                          <a:cs typeface="맑은 고딕" pitchFamily="34" charset="-120"/>
+                        </a:rPr>
+                        <a:t>테슬라 로드스터</a:t>
+                      </a:r>
+                      <a:endParaRPr lang="en-US" sz="900" dirty="0">
+                        <a:latin typeface="맑은 고딕" charset="0"/>
+                        <a:ea typeface="맑은 고딕" charset="0"/>
+                        <a:cs typeface="맑은 고딕" charset="0"/>
+                      </a:endParaRPr>
+                    </a:p>
+                  </a:txBody>
+                  <a:tcPr marL="36576" marR="36576" marT="36576" marB="36576" anchor="ctr">
+                    <a:lnL w="9525" cap="flat" cmpd="sng" algn="ctr">
+                      <a:solidFill>
+                        <a:srgbClr val="D9D9D9"/>
+                      </a:solidFill>
+                      <a:prstDash val="solid"/>
+                      <a:round/>
+                      <a:headEnd type="none" w="med" len="med"/>
+                      <a:tailEnd type="none" w="med" len="med"/>
+                    </a:lnL>
+                    <a:lnR w="9525" cap="flat" cmpd="sng" algn="ctr">
+                      <a:solidFill>
+                        <a:srgbClr val="D9D9D9"/>
+                      </a:solidFill>
+                      <a:prstDash val="solid"/>
+                      <a:round/>
+                      <a:headEnd type="none" w="med" len="med"/>
+                      <a:tailEnd type="none" w="med" len="med"/>
+                    </a:lnR>
+                    <a:lnT w="9525" cap="flat" cmpd="sng" algn="ctr">
+                      <a:solidFill>
+                        <a:srgbClr val="D9D9D9"/>
+                      </a:solidFill>
+                      <a:prstDash val="solid"/>
+                      <a:round/>
+                      <a:headEnd type="none" w="med" len="med"/>
+                      <a:tailEnd type="none" w="med" len="med"/>
+                    </a:lnT>
+                    <a:lnB w="9525" cap="flat" cmpd="sng" algn="ctr">
+                      <a:solidFill>
+                        <a:srgbClr val="D9D9D9"/>
+                      </a:solidFill>
+                      <a:prstDash val="solid"/>
+                      <a:round/>
+                      <a:headEnd type="none" w="med" len="med"/>
+                      <a:tailEnd type="none" w="med" len="med"/>
+                    </a:lnB>
+                  </a:tcPr>
+                </a:tc>
+                <a:tc>
+                  <a:txBody>
+                    <a:bodyPr/>
+                    <a:lstStyle/>
+                    <a:p>
+                      <a:pPr algn="l" indent="0" marL="0">
+                        <a:buNone/>
+                      </a:pPr>
+                      <a:r>
+                        <a:rPr lang="en-US" sz="900" dirty="0">
+                          <a:solidFill>
+                            <a:schemeClr val="tx1"/>
+                          </a:solidFill>
+                          <a:latin typeface="맑은 고딕" pitchFamily="34" charset="0"/>
+                          <a:ea typeface="맑은 고딕" pitchFamily="34" charset="-122"/>
+                          <a:cs typeface="맑은 고딕" pitchFamily="34" charset="-120"/>
+                        </a:rPr>
+                        <a:t>BrokenSphere</a:t>
+                      </a:r>
+                      <a:endParaRPr lang="en-US" sz="900" dirty="0">
+                        <a:latin typeface="맑은 고딕" charset="0"/>
+                        <a:ea typeface="맑은 고딕" charset="0"/>
+                        <a:cs typeface="맑은 고딕" charset="0"/>
+                      </a:endParaRPr>
+                    </a:p>
+                  </a:txBody>
+                  <a:tcPr marL="36576" marR="36576" marT="36576" marB="36576" anchor="ctr">
+                    <a:lnL w="9525" cap="flat" cmpd="sng" algn="ctr">
+                      <a:solidFill>
+                        <a:srgbClr val="D9D9D9"/>
+                      </a:solidFill>
+                      <a:prstDash val="solid"/>
+                      <a:round/>
+                      <a:headEnd type="none" w="med" len="med"/>
+                      <a:tailEnd type="none" w="med" len="med"/>
+                    </a:lnL>
+                    <a:lnR w="9525" cap="flat" cmpd="sng" algn="ctr">
+                      <a:solidFill>
+                        <a:srgbClr val="D9D9D9"/>
+                      </a:solidFill>
+                      <a:prstDash val="solid"/>
+                      <a:round/>
+                      <a:headEnd type="none" w="med" len="med"/>
+                      <a:tailEnd type="none" w="med" len="med"/>
+                    </a:lnR>
+                    <a:lnT w="9525" cap="flat" cmpd="sng" algn="ctr">
+                      <a:solidFill>
+                        <a:srgbClr val="D9D9D9"/>
+                      </a:solidFill>
+                      <a:prstDash val="solid"/>
+                      <a:round/>
+                      <a:headEnd type="none" w="med" len="med"/>
+                      <a:tailEnd type="none" w="med" len="med"/>
+                    </a:lnT>
+                    <a:lnB w="9525" cap="flat" cmpd="sng" algn="ctr">
+                      <a:solidFill>
+                        <a:srgbClr val="D9D9D9"/>
+                      </a:solidFill>
+                      <a:prstDash val="solid"/>
+                      <a:round/>
+                      <a:headEnd type="none" w="med" len="med"/>
+                      <a:tailEnd type="none" w="med" len="med"/>
+                    </a:lnB>
+                  </a:tcPr>
+                </a:tc>
+                <a:tc>
+                  <a:txBody>
+                    <a:bodyPr/>
+                    <a:lstStyle/>
+                    <a:p>
+                      <a:pPr algn="l" indent="0" marL="0">
+                        <a:buNone/>
+                      </a:pPr>
+                      <a:r>
+                        <a:rPr lang="en-US" sz="900" dirty="0">
+                          <a:solidFill>
+                            <a:schemeClr val="tx1"/>
+                          </a:solidFill>
+                          <a:latin typeface="맑은 고딕" pitchFamily="34" charset="0"/>
+                          <a:ea typeface="맑은 고딕" pitchFamily="34" charset="-122"/>
+                          <a:cs typeface="맑은 고딕" pitchFamily="34" charset="-120"/>
+                        </a:rPr>
+                        <a:t>CC BY-SA 3.0</a:t>
+                      </a:r>
+                      <a:endParaRPr lang="en-US" sz="900" dirty="0">
+                        <a:latin typeface="맑은 고딕" charset="0"/>
+                        <a:ea typeface="맑은 고딕" charset="0"/>
+                        <a:cs typeface="맑은 고딕" charset="0"/>
+                      </a:endParaRPr>
+                    </a:p>
+                  </a:txBody>
+                  <a:tcPr marL="36576" marR="36576" marT="36576" marB="36576" anchor="ctr">
+                    <a:lnL w="9525" cap="flat" cmpd="sng" algn="ctr">
+                      <a:solidFill>
+                        <a:srgbClr val="D9D9D9"/>
+                      </a:solidFill>
+                      <a:prstDash val="solid"/>
+                      <a:round/>
+                      <a:headEnd type="none" w="med" len="med"/>
+                      <a:tailEnd type="none" w="med" len="med"/>
+                    </a:lnL>
+                    <a:lnR w="9525" cap="flat" cmpd="sng" algn="ctr">
+                      <a:solidFill>
+                        <a:srgbClr val="D9D9D9"/>
+                      </a:solidFill>
+                      <a:prstDash val="solid"/>
+                      <a:round/>
+                      <a:headEnd type="none" w="med" len="med"/>
+                      <a:tailEnd type="none" w="med" len="med"/>
+                    </a:lnR>
+                    <a:lnT w="9525" cap="flat" cmpd="sng" algn="ctr">
+                      <a:solidFill>
+                        <a:srgbClr val="D9D9D9"/>
+                      </a:solidFill>
+                      <a:prstDash val="solid"/>
+                      <a:round/>
+                      <a:headEnd type="none" w="med" len="med"/>
+                      <a:tailEnd type="none" w="med" len="med"/>
+                    </a:lnT>
+                    <a:lnB w="9525" cap="flat" cmpd="sng" algn="ctr">
+                      <a:solidFill>
+                        <a:srgbClr val="D9D9D9"/>
+                      </a:solidFill>
+                      <a:prstDash val="solid"/>
+                      <a:round/>
+                      <a:headEnd type="none" w="med" len="med"/>
+                      <a:tailEnd type="none" w="med" len="med"/>
+                    </a:lnB>
+                  </a:tcPr>
+                </a:tc>
+              </a:tr>
+              <a:tr h="310896">
+                <a:tc>
+                  <a:txBody>
+                    <a:bodyPr/>
+                    <a:lstStyle/>
+                    <a:p>
+                      <a:pPr algn="ctr" indent="0" marL="0">
+                        <a:buNone/>
+                      </a:pPr>
+                      <a:r>
+                        <a:rPr lang="en-US" sz="900" dirty="0">
+                          <a:solidFill>
+                            <a:schemeClr val="tx1"/>
+                          </a:solidFill>
+                          <a:latin typeface="맑은 고딕" pitchFamily="34" charset="0"/>
+                          <a:ea typeface="맑은 고딕" pitchFamily="34" charset="-122"/>
+                          <a:cs typeface="맑은 고딕" pitchFamily="34" charset="-120"/>
+                        </a:rPr>
+                        <a:t>7·12</a:t>
+                      </a:r>
+                      <a:endParaRPr lang="en-US" sz="900" dirty="0">
+                        <a:latin typeface="맑은 고딕" charset="0"/>
+                        <a:ea typeface="맑은 고딕" charset="0"/>
+                        <a:cs typeface="맑은 고딕" charset="0"/>
+                      </a:endParaRPr>
+                    </a:p>
+                  </a:txBody>
+                  <a:tcPr marL="36576" marR="36576" marT="36576" marB="36576" anchor="ctr">
+                    <a:lnL w="9525" cap="flat" cmpd="sng" algn="ctr">
+                      <a:solidFill>
+                        <a:srgbClr val="D9D9D9"/>
+                      </a:solidFill>
+                      <a:prstDash val="solid"/>
+                      <a:round/>
+                      <a:headEnd type="none" w="med" len="med"/>
+                      <a:tailEnd type="none" w="med" len="med"/>
+                    </a:lnL>
+                    <a:lnR w="9525" cap="flat" cmpd="sng" algn="ctr">
+                      <a:solidFill>
+                        <a:srgbClr val="D9D9D9"/>
+                      </a:solidFill>
+                      <a:prstDash val="solid"/>
+                      <a:round/>
+                      <a:headEnd type="none" w="med" len="med"/>
+                      <a:tailEnd type="none" w="med" len="med"/>
+                    </a:lnR>
+                    <a:lnT w="9525" cap="flat" cmpd="sng" algn="ctr">
+                      <a:solidFill>
+                        <a:srgbClr val="D9D9D9"/>
+                      </a:solidFill>
+                      <a:prstDash val="solid"/>
+                      <a:round/>
+                      <a:headEnd type="none" w="med" len="med"/>
+                      <a:tailEnd type="none" w="med" len="med"/>
+                    </a:lnT>
+                    <a:lnB w="9525" cap="flat" cmpd="sng" algn="ctr">
+                      <a:solidFill>
+                        <a:srgbClr val="D9D9D9"/>
+                      </a:solidFill>
+                      <a:prstDash val="solid"/>
+                      <a:round/>
+                      <a:headEnd type="none" w="med" len="med"/>
+                      <a:tailEnd type="none" w="med" len="med"/>
+                    </a:lnB>
+                  </a:tcPr>
+                </a:tc>
+                <a:tc>
+                  <a:txBody>
+                    <a:bodyPr/>
+                    <a:lstStyle/>
+                    <a:p>
+                      <a:pPr algn="l" indent="0" marL="0">
+                        <a:buNone/>
+                      </a:pPr>
+                      <a:r>
+                        <a:rPr lang="en-US" sz="900" dirty="0">
+                          <a:solidFill>
+                            <a:schemeClr val="tx1"/>
+                          </a:solidFill>
+                          <a:latin typeface="맑은 고딕" pitchFamily="34" charset="0"/>
+                          <a:ea typeface="맑은 고딕" pitchFamily="34" charset="-122"/>
+                          <a:cs typeface="맑은 고딕" pitchFamily="34" charset="-120"/>
+                        </a:rPr>
+                        <a:t>포스트잇 메모지</a:t>
+                      </a:r>
+                      <a:endParaRPr lang="en-US" sz="900" dirty="0">
+                        <a:latin typeface="맑은 고딕" charset="0"/>
+                        <a:ea typeface="맑은 고딕" charset="0"/>
+                        <a:cs typeface="맑은 고딕" charset="0"/>
+                      </a:endParaRPr>
+                    </a:p>
+                  </a:txBody>
+                  <a:tcPr marL="36576" marR="36576" marT="36576" marB="36576" anchor="ctr">
+                    <a:lnL w="9525" cap="flat" cmpd="sng" algn="ctr">
+                      <a:solidFill>
+                        <a:srgbClr val="D9D9D9"/>
+                      </a:solidFill>
+                      <a:prstDash val="solid"/>
+                      <a:round/>
+                      <a:headEnd type="none" w="med" len="med"/>
+                      <a:tailEnd type="none" w="med" len="med"/>
+                    </a:lnL>
+                    <a:lnR w="9525" cap="flat" cmpd="sng" algn="ctr">
+                      <a:solidFill>
+                        <a:srgbClr val="D9D9D9"/>
+                      </a:solidFill>
+                      <a:prstDash val="solid"/>
+                      <a:round/>
+                      <a:headEnd type="none" w="med" len="med"/>
+                      <a:tailEnd type="none" w="med" len="med"/>
+                    </a:lnR>
+                    <a:lnT w="9525" cap="flat" cmpd="sng" algn="ctr">
+                      <a:solidFill>
+                        <a:srgbClr val="D9D9D9"/>
+                      </a:solidFill>
+                      <a:prstDash val="solid"/>
+                      <a:round/>
+                      <a:headEnd type="none" w="med" len="med"/>
+                      <a:tailEnd type="none" w="med" len="med"/>
+                    </a:lnT>
+                    <a:lnB w="9525" cap="flat" cmpd="sng" algn="ctr">
+                      <a:solidFill>
+                        <a:srgbClr val="D9D9D9"/>
+                      </a:solidFill>
+                      <a:prstDash val="solid"/>
+                      <a:round/>
+                      <a:headEnd type="none" w="med" len="med"/>
+                      <a:tailEnd type="none" w="med" len="med"/>
+                    </a:lnB>
+                  </a:tcPr>
+                </a:tc>
+                <a:tc>
+                  <a:txBody>
+                    <a:bodyPr/>
+                    <a:lstStyle/>
+                    <a:p>
+                      <a:pPr algn="l" indent="0" marL="0">
+                        <a:buNone/>
+                      </a:pPr>
+                      <a:r>
+                        <a:rPr lang="en-US" sz="900" dirty="0">
+                          <a:solidFill>
+                            <a:schemeClr val="tx1"/>
+                          </a:solidFill>
+                          <a:latin typeface="맑은 고딕" pitchFamily="34" charset="0"/>
+                          <a:ea typeface="맑은 고딕" pitchFamily="34" charset="-122"/>
+                          <a:cs typeface="맑은 고딕" pitchFamily="34" charset="-120"/>
+                        </a:rPr>
+                        <a:t>EraserGirl</a:t>
+                      </a:r>
+                      <a:endParaRPr lang="en-US" sz="900" dirty="0">
+                        <a:latin typeface="맑은 고딕" charset="0"/>
+                        <a:ea typeface="맑은 고딕" charset="0"/>
+                        <a:cs typeface="맑은 고딕" charset="0"/>
+                      </a:endParaRPr>
+                    </a:p>
+                  </a:txBody>
+                  <a:tcPr marL="36576" marR="36576" marT="36576" marB="36576" anchor="ctr">
+                    <a:lnL w="9525" cap="flat" cmpd="sng" algn="ctr">
+                      <a:solidFill>
+                        <a:srgbClr val="D9D9D9"/>
+                      </a:solidFill>
+                      <a:prstDash val="solid"/>
+                      <a:round/>
+                      <a:headEnd type="none" w="med" len="med"/>
+                      <a:tailEnd type="none" w="med" len="med"/>
+                    </a:lnL>
+                    <a:lnR w="9525" cap="flat" cmpd="sng" algn="ctr">
+                      <a:solidFill>
+                        <a:srgbClr val="D9D9D9"/>
+                      </a:solidFill>
+                      <a:prstDash val="solid"/>
+                      <a:round/>
+                      <a:headEnd type="none" w="med" len="med"/>
+                      <a:tailEnd type="none" w="med" len="med"/>
+                    </a:lnR>
+                    <a:lnT w="9525" cap="flat" cmpd="sng" algn="ctr">
+                      <a:solidFill>
+                        <a:srgbClr val="D9D9D9"/>
+                      </a:solidFill>
+                      <a:prstDash val="solid"/>
+                      <a:round/>
+                      <a:headEnd type="none" w="med" len="med"/>
+                      <a:tailEnd type="none" w="med" len="med"/>
+                    </a:lnT>
+                    <a:lnB w="9525" cap="flat" cmpd="sng" algn="ctr">
+                      <a:solidFill>
+                        <a:srgbClr val="D9D9D9"/>
+                      </a:solidFill>
+                      <a:prstDash val="solid"/>
+                      <a:round/>
+                      <a:headEnd type="none" w="med" len="med"/>
+                      <a:tailEnd type="none" w="med" len="med"/>
+                    </a:lnB>
+                  </a:tcPr>
+                </a:tc>
+                <a:tc>
+                  <a:txBody>
+                    <a:bodyPr/>
+                    <a:lstStyle/>
+                    <a:p>
+                      <a:pPr algn="l" indent="0" marL="0">
+                        <a:buNone/>
+                      </a:pPr>
+                      <a:r>
+                        <a:rPr lang="en-US" sz="900" dirty="0">
+                          <a:solidFill>
+                            <a:schemeClr val="tx1"/>
+                          </a:solidFill>
+                          <a:latin typeface="맑은 고딕" pitchFamily="34" charset="0"/>
+                          <a:ea typeface="맑은 고딕" pitchFamily="34" charset="-122"/>
+                          <a:cs typeface="맑은 고딕" pitchFamily="34" charset="-120"/>
+                        </a:rPr>
+                        <a:t>Public domain</a:t>
+                      </a:r>
+                      <a:endParaRPr lang="en-US" sz="900" dirty="0">
+                        <a:latin typeface="맑은 고딕" charset="0"/>
+                        <a:ea typeface="맑은 고딕" charset="0"/>
+                        <a:cs typeface="맑은 고딕" charset="0"/>
+                      </a:endParaRPr>
+                    </a:p>
+                  </a:txBody>
+                  <a:tcPr marL="36576" marR="36576" marT="36576" marB="36576" anchor="ctr">
+                    <a:lnL w="9525" cap="flat" cmpd="sng" algn="ctr">
+                      <a:solidFill>
+                        <a:srgbClr val="D9D9D9"/>
+                      </a:solidFill>
+                      <a:prstDash val="solid"/>
+                      <a:round/>
+                      <a:headEnd type="none" w="med" len="med"/>
+                      <a:tailEnd type="none" w="med" len="med"/>
+                    </a:lnL>
+                    <a:lnR w="9525" cap="flat" cmpd="sng" algn="ctr">
+                      <a:solidFill>
+                        <a:srgbClr val="D9D9D9"/>
+                      </a:solidFill>
+                      <a:prstDash val="solid"/>
+                      <a:round/>
+                      <a:headEnd type="none" w="med" len="med"/>
+                      <a:tailEnd type="none" w="med" len="med"/>
+                    </a:lnR>
+                    <a:lnT w="9525" cap="flat" cmpd="sng" algn="ctr">
+                      <a:solidFill>
+                        <a:srgbClr val="D9D9D9"/>
+                      </a:solidFill>
+                      <a:prstDash val="solid"/>
+                      <a:round/>
+                      <a:headEnd type="none" w="med" len="med"/>
+                      <a:tailEnd type="none" w="med" len="med"/>
+                    </a:lnT>
+                    <a:lnB w="9525" cap="flat" cmpd="sng" algn="ctr">
+                      <a:solidFill>
+                        <a:srgbClr val="D9D9D9"/>
+                      </a:solidFill>
+                      <a:prstDash val="solid"/>
+                      <a:round/>
+                      <a:headEnd type="none" w="med" len="med"/>
+                      <a:tailEnd type="none" w="med" len="med"/>
+                    </a:lnB>
+                  </a:tcPr>
+                </a:tc>
+              </a:tr>
+              <a:tr h="310896">
+                <a:tc>
+                  <a:txBody>
+                    <a:bodyPr/>
+                    <a:lstStyle/>
+                    <a:p>
+                      <a:pPr algn="ctr" indent="0" marL="0">
+                        <a:buNone/>
+                      </a:pPr>
+                      <a:r>
+                        <a:rPr lang="en-US" sz="900" dirty="0">
+                          <a:solidFill>
+                            <a:schemeClr val="tx1"/>
+                          </a:solidFill>
+                          <a:latin typeface="맑은 고딕" pitchFamily="34" charset="0"/>
+                          <a:ea typeface="맑은 고딕" pitchFamily="34" charset="-122"/>
+                          <a:cs typeface="맑은 고딕" pitchFamily="34" charset="-120"/>
+                        </a:rPr>
+                        <a:t>8</a:t>
+                      </a:r>
+                      <a:endParaRPr lang="en-US" sz="900" dirty="0">
+                        <a:latin typeface="맑은 고딕" charset="0"/>
+                        <a:ea typeface="맑은 고딕" charset="0"/>
+                        <a:cs typeface="맑은 고딕" charset="0"/>
+                      </a:endParaRPr>
+                    </a:p>
+                  </a:txBody>
+                  <a:tcPr marL="36576" marR="36576" marT="36576" marB="36576" anchor="ctr">
+                    <a:lnL w="9525" cap="flat" cmpd="sng" algn="ctr">
+                      <a:solidFill>
+                        <a:srgbClr val="D9D9D9"/>
+                      </a:solidFill>
+                      <a:prstDash val="solid"/>
+                      <a:round/>
+                      <a:headEnd type="none" w="med" len="med"/>
+                      <a:tailEnd type="none" w="med" len="med"/>
+                    </a:lnL>
+                    <a:lnR w="9525" cap="flat" cmpd="sng" algn="ctr">
+                      <a:solidFill>
+                        <a:srgbClr val="D9D9D9"/>
+                      </a:solidFill>
+                      <a:prstDash val="solid"/>
+                      <a:round/>
+                      <a:headEnd type="none" w="med" len="med"/>
+                      <a:tailEnd type="none" w="med" len="med"/>
+                    </a:lnR>
+                    <a:lnT w="9525" cap="flat" cmpd="sng" algn="ctr">
+                      <a:solidFill>
+                        <a:srgbClr val="D9D9D9"/>
+                      </a:solidFill>
+                      <a:prstDash val="solid"/>
+                      <a:round/>
+                      <a:headEnd type="none" w="med" len="med"/>
+                      <a:tailEnd type="none" w="med" len="med"/>
+                    </a:lnT>
+                    <a:lnB w="9525" cap="flat" cmpd="sng" algn="ctr">
+                      <a:solidFill>
+                        <a:srgbClr val="D9D9D9"/>
+                      </a:solidFill>
+                      <a:prstDash val="solid"/>
+                      <a:round/>
+                      <a:headEnd type="none" w="med" len="med"/>
+                      <a:tailEnd type="none" w="med" len="med"/>
+                    </a:lnB>
+                  </a:tcPr>
+                </a:tc>
+                <a:tc>
+                  <a:txBody>
+                    <a:bodyPr/>
+                    <a:lstStyle/>
+                    <a:p>
+                      <a:pPr algn="l" indent="0" marL="0">
+                        <a:buNone/>
+                      </a:pPr>
+                      <a:r>
+                        <a:rPr lang="en-US" sz="900" dirty="0">
+                          <a:solidFill>
+                            <a:schemeClr val="tx1"/>
+                          </a:solidFill>
+                          <a:latin typeface="맑은 고딕" pitchFamily="34" charset="0"/>
+                          <a:ea typeface="맑은 고딕" pitchFamily="34" charset="-122"/>
+                          <a:cs typeface="맑은 고딕" pitchFamily="34" charset="-120"/>
+                        </a:rPr>
+                        <a:t>스팽스 매장</a:t>
+                      </a:r>
+                      <a:endParaRPr lang="en-US" sz="900" dirty="0">
+                        <a:latin typeface="맑은 고딕" charset="0"/>
+                        <a:ea typeface="맑은 고딕" charset="0"/>
+                        <a:cs typeface="맑은 고딕" charset="0"/>
+                      </a:endParaRPr>
+                    </a:p>
+                  </a:txBody>
+                  <a:tcPr marL="36576" marR="36576" marT="36576" marB="36576" anchor="ctr">
+                    <a:lnL w="9525" cap="flat" cmpd="sng" algn="ctr">
+                      <a:solidFill>
+                        <a:srgbClr val="D9D9D9"/>
+                      </a:solidFill>
+                      <a:prstDash val="solid"/>
+                      <a:round/>
+                      <a:headEnd type="none" w="med" len="med"/>
+                      <a:tailEnd type="none" w="med" len="med"/>
+                    </a:lnL>
+                    <a:lnR w="9525" cap="flat" cmpd="sng" algn="ctr">
+                      <a:solidFill>
+                        <a:srgbClr val="D9D9D9"/>
+                      </a:solidFill>
+                      <a:prstDash val="solid"/>
+                      <a:round/>
+                      <a:headEnd type="none" w="med" len="med"/>
+                      <a:tailEnd type="none" w="med" len="med"/>
+                    </a:lnR>
+                    <a:lnT w="9525" cap="flat" cmpd="sng" algn="ctr">
+                      <a:solidFill>
+                        <a:srgbClr val="D9D9D9"/>
+                      </a:solidFill>
+                      <a:prstDash val="solid"/>
+                      <a:round/>
+                      <a:headEnd type="none" w="med" len="med"/>
+                      <a:tailEnd type="none" w="med" len="med"/>
+                    </a:lnT>
+                    <a:lnB w="9525" cap="flat" cmpd="sng" algn="ctr">
+                      <a:solidFill>
+                        <a:srgbClr val="D9D9D9"/>
+                      </a:solidFill>
+                      <a:prstDash val="solid"/>
+                      <a:round/>
+                      <a:headEnd type="none" w="med" len="med"/>
+                      <a:tailEnd type="none" w="med" len="med"/>
+                    </a:lnB>
+                  </a:tcPr>
+                </a:tc>
+                <a:tc>
+                  <a:txBody>
+                    <a:bodyPr/>
+                    <a:lstStyle/>
+                    <a:p>
+                      <a:pPr algn="l" indent="0" marL="0">
+                        <a:buNone/>
+                      </a:pPr>
+                      <a:r>
+                        <a:rPr lang="en-US" sz="900" dirty="0">
+                          <a:solidFill>
+                            <a:schemeClr val="tx1"/>
+                          </a:solidFill>
+                          <a:latin typeface="맑은 고딕" pitchFamily="34" charset="0"/>
+                          <a:ea typeface="맑은 고딕" pitchFamily="34" charset="-122"/>
+                          <a:cs typeface="맑은 고딕" pitchFamily="34" charset="-120"/>
+                        </a:rPr>
+                        <a:t>Mike Mozart</a:t>
+                      </a:r>
+                      <a:endParaRPr lang="en-US" sz="900" dirty="0">
+                        <a:latin typeface="맑은 고딕" charset="0"/>
+                        <a:ea typeface="맑은 고딕" charset="0"/>
+                        <a:cs typeface="맑은 고딕" charset="0"/>
+                      </a:endParaRPr>
+                    </a:p>
+                  </a:txBody>
+                  <a:tcPr marL="36576" marR="36576" marT="36576" marB="36576" anchor="ctr">
+                    <a:lnL w="9525" cap="flat" cmpd="sng" algn="ctr">
+                      <a:solidFill>
+                        <a:srgbClr val="D9D9D9"/>
+                      </a:solidFill>
+                      <a:prstDash val="solid"/>
+                      <a:round/>
+                      <a:headEnd type="none" w="med" len="med"/>
+                      <a:tailEnd type="none" w="med" len="med"/>
+                    </a:lnL>
+                    <a:lnR w="9525" cap="flat" cmpd="sng" algn="ctr">
+                      <a:solidFill>
+                        <a:srgbClr val="D9D9D9"/>
+                      </a:solidFill>
+                      <a:prstDash val="solid"/>
+                      <a:round/>
+                      <a:headEnd type="none" w="med" len="med"/>
+                      <a:tailEnd type="none" w="med" len="med"/>
+                    </a:lnR>
+                    <a:lnT w="9525" cap="flat" cmpd="sng" algn="ctr">
+                      <a:solidFill>
+                        <a:srgbClr val="D9D9D9"/>
+                      </a:solidFill>
+                      <a:prstDash val="solid"/>
+                      <a:round/>
+                      <a:headEnd type="none" w="med" len="med"/>
+                      <a:tailEnd type="none" w="med" len="med"/>
+                    </a:lnT>
+                    <a:lnB w="9525" cap="flat" cmpd="sng" algn="ctr">
+                      <a:solidFill>
+                        <a:srgbClr val="D9D9D9"/>
+                      </a:solidFill>
+                      <a:prstDash val="solid"/>
+                      <a:round/>
+                      <a:headEnd type="none" w="med" len="med"/>
+                      <a:tailEnd type="none" w="med" len="med"/>
+                    </a:lnB>
+                  </a:tcPr>
+                </a:tc>
+                <a:tc>
+                  <a:txBody>
+                    <a:bodyPr/>
+                    <a:lstStyle/>
+                    <a:p>
+                      <a:pPr algn="l" indent="0" marL="0">
+                        <a:buNone/>
+                      </a:pPr>
+                      <a:r>
+                        <a:rPr lang="en-US" sz="900" dirty="0">
+                          <a:solidFill>
+                            <a:schemeClr val="tx1"/>
+                          </a:solidFill>
+                          <a:latin typeface="맑은 고딕" pitchFamily="34" charset="0"/>
+                          <a:ea typeface="맑은 고딕" pitchFamily="34" charset="-122"/>
+                          <a:cs typeface="맑은 고딕" pitchFamily="34" charset="-120"/>
+                        </a:rPr>
+                        <a:t>CC BY 2.0</a:t>
+                      </a:r>
+                      <a:endParaRPr lang="en-US" sz="900" dirty="0">
+                        <a:latin typeface="맑은 고딕" charset="0"/>
+                        <a:ea typeface="맑은 고딕" charset="0"/>
+                        <a:cs typeface="맑은 고딕" charset="0"/>
+                      </a:endParaRPr>
+                    </a:p>
+                  </a:txBody>
+                  <a:tcPr marL="36576" marR="36576" marT="36576" marB="36576" anchor="ctr">
+                    <a:lnL w="9525" cap="flat" cmpd="sng" algn="ctr">
+                      <a:solidFill>
+                        <a:srgbClr val="D9D9D9"/>
+                      </a:solidFill>
+                      <a:prstDash val="solid"/>
+                      <a:round/>
+                      <a:headEnd type="none" w="med" len="med"/>
+                      <a:tailEnd type="none" w="med" len="med"/>
+                    </a:lnL>
+                    <a:lnR w="9525" cap="flat" cmpd="sng" algn="ctr">
+                      <a:solidFill>
+                        <a:srgbClr val="D9D9D9"/>
+                      </a:solidFill>
+                      <a:prstDash val="solid"/>
+                      <a:round/>
+                      <a:headEnd type="none" w="med" len="med"/>
+                      <a:tailEnd type="none" w="med" len="med"/>
+                    </a:lnR>
+                    <a:lnT w="9525" cap="flat" cmpd="sng" algn="ctr">
+                      <a:solidFill>
+                        <a:srgbClr val="D9D9D9"/>
+                      </a:solidFill>
+                      <a:prstDash val="solid"/>
+                      <a:round/>
+                      <a:headEnd type="none" w="med" len="med"/>
+                      <a:tailEnd type="none" w="med" len="med"/>
+                    </a:lnT>
+                    <a:lnB w="9525" cap="flat" cmpd="sng" algn="ctr">
+                      <a:solidFill>
+                        <a:srgbClr val="D9D9D9"/>
+                      </a:solidFill>
+                      <a:prstDash val="solid"/>
+                      <a:round/>
+                      <a:headEnd type="none" w="med" len="med"/>
+                      <a:tailEnd type="none" w="med" len="med"/>
+                    </a:lnB>
+                  </a:tcPr>
+                </a:tc>
+              </a:tr>
+            </a:tbl>
+          </a:graphicData>
+        </a:graphic>
+      </p:graphicFrame>
+      <p:graphicFrame>
+        <p:nvGraphicFramePr>
+          <p:cNvPr id="43" name="Table 1"/>
+          <p:cNvGraphicFramePr>
+            <a:graphicFrameLocks noGrp="1"/>
+          </p:cNvGraphicFramePr>
+          <p:nvPr>
+            <p:extLst>
+              <p:ext uri="{D42A27DB-BD31-4B8C-83A1-F6EECF244321}">
+                <p14:modId xmlns:p14="http://schemas.microsoft.com/office/powerpoint/2010/main" val="1579011935"/>
+              </p:ext>
+            </p:extLst>
+          </p:nvPr>
+        </p:nvGraphicFramePr>
+        <p:xfrm>
+          <a:off x="4663440" y="1234440"/>
+          <a:ext cx="4114800" cy="914400"/>
+        </p:xfrm>
+        <a:graphic>
+          <a:graphicData uri="http://schemas.openxmlformats.org/drawingml/2006/table">
+            <a:tbl>
+              <a:tblPr/>
+              <a:tblGrid>
+                <a:gridCol w="411480"/>
+                <a:gridCol w="1463040"/>
+                <a:gridCol w="1234440"/>
+                <a:gridCol w="1005840"/>
+              </a:tblGrid>
+              <a:tr h="310896">
+                <a:tc>
+                  <a:txBody>
+                    <a:bodyPr/>
+                    <a:lstStyle/>
+                    <a:p>
+                      <a:pPr algn="ctr" indent="0" marL="0">
+                        <a:buNone/>
+                      </a:pPr>
+                      <a:r>
+                        <a:rPr lang="en-US" sz="1000" b="1" dirty="0">
+                          <a:solidFill>
+                            <a:schemeClr val="bg1"/>
+                          </a:solidFill>
+                          <a:latin typeface="맑은 고딕" pitchFamily="34" charset="0"/>
+                          <a:ea typeface="맑은 고딕" pitchFamily="34" charset="-122"/>
+                          <a:cs typeface="맑은 고딕" pitchFamily="34" charset="-120"/>
+                        </a:rPr>
+                        <a:t>쪽</a:t>
+                      </a:r>
+                      <a:endParaRPr lang="en-US" sz="1000" dirty="0">
+                        <a:latin typeface="맑은 고딕" charset="0"/>
+                        <a:ea typeface="맑은 고딕" charset="0"/>
+                        <a:cs typeface="맑은 고딕" charset="0"/>
+                      </a:endParaRPr>
+                    </a:p>
+                  </a:txBody>
+                  <a:tcPr marL="91440" marR="91440" marT="45720" marB="45720" anchor="ctr">
+                    <a:lnL w="9525" cap="flat" cmpd="sng" algn="ctr">
+                      <a:solidFill>
+                        <a:srgbClr val="D9D9D9"/>
+                      </a:solidFill>
+                      <a:prstDash val="solid"/>
+                      <a:round/>
+                      <a:headEnd type="none" w="med" len="med"/>
+                      <a:tailEnd type="none" w="med" len="med"/>
+                    </a:lnL>
+                    <a:lnR w="9525" cap="flat" cmpd="sng" algn="ctr">
+                      <a:solidFill>
+                        <a:srgbClr val="D9D9D9"/>
+                      </a:solidFill>
+                      <a:prstDash val="solid"/>
+                      <a:round/>
+                      <a:headEnd type="none" w="med" len="med"/>
+                      <a:tailEnd type="none" w="med" len="med"/>
+                    </a:lnR>
+                    <a:lnT w="9525" cap="flat" cmpd="sng" algn="ctr">
+                      <a:solidFill>
+                        <a:srgbClr val="D9D9D9"/>
+                      </a:solidFill>
+                      <a:prstDash val="solid"/>
+                      <a:round/>
+                      <a:headEnd type="none" w="med" len="med"/>
+                      <a:tailEnd type="none" w="med" len="med"/>
+                    </a:lnT>
+                    <a:lnB w="9525" cap="flat" cmpd="sng" algn="ctr">
+                      <a:solidFill>
+                        <a:srgbClr val="D9D9D9"/>
+                      </a:solidFill>
+                      <a:prstDash val="solid"/>
+                      <a:round/>
+                      <a:headEnd type="none" w="med" len="med"/>
+                      <a:tailEnd type="none" w="med" len="med"/>
+                    </a:lnB>
+                    <a:solidFill>
+                      <a:schemeClr val="tx2"/>
+                    </a:solidFill>
+                  </a:tcPr>
+                </a:tc>
+                <a:tc>
+                  <a:txBody>
+                    <a:bodyPr/>
+                    <a:lstStyle/>
+                    <a:p>
+                      <a:pPr algn="ctr" indent="0" marL="0">
+                        <a:buNone/>
+                      </a:pPr>
+                      <a:r>
+                        <a:rPr lang="en-US" sz="1000" b="1" dirty="0">
+                          <a:solidFill>
+                            <a:schemeClr val="bg1"/>
+                          </a:solidFill>
+                          <a:latin typeface="맑은 고딕" pitchFamily="34" charset="0"/>
+                          <a:ea typeface="맑은 고딕" pitchFamily="34" charset="-122"/>
+                          <a:cs typeface="맑은 고딕" pitchFamily="34" charset="-120"/>
+                        </a:rPr>
+                        <a:t>사진</a:t>
+                      </a:r>
+                      <a:endParaRPr lang="en-US" sz="1000" dirty="0">
+                        <a:latin typeface="맑은 고딕" charset="0"/>
+                        <a:ea typeface="맑은 고딕" charset="0"/>
+                        <a:cs typeface="맑은 고딕" charset="0"/>
+                      </a:endParaRPr>
+                    </a:p>
+                  </a:txBody>
+                  <a:tcPr marL="91440" marR="91440" marT="45720" marB="45720" anchor="ctr">
+                    <a:lnL w="9525" cap="flat" cmpd="sng" algn="ctr">
+                      <a:solidFill>
+                        <a:srgbClr val="D9D9D9"/>
+                      </a:solidFill>
+                      <a:prstDash val="solid"/>
+                      <a:round/>
+                      <a:headEnd type="none" w="med" len="med"/>
+                      <a:tailEnd type="none" w="med" len="med"/>
+                    </a:lnL>
+                    <a:lnR w="9525" cap="flat" cmpd="sng" algn="ctr">
+                      <a:solidFill>
+                        <a:srgbClr val="D9D9D9"/>
+                      </a:solidFill>
+                      <a:prstDash val="solid"/>
+                      <a:round/>
+                      <a:headEnd type="none" w="med" len="med"/>
+                      <a:tailEnd type="none" w="med" len="med"/>
+                    </a:lnR>
+                    <a:lnT w="9525" cap="flat" cmpd="sng" algn="ctr">
+                      <a:solidFill>
+                        <a:srgbClr val="D9D9D9"/>
+                      </a:solidFill>
+                      <a:prstDash val="solid"/>
+                      <a:round/>
+                      <a:headEnd type="none" w="med" len="med"/>
+                      <a:tailEnd type="none" w="med" len="med"/>
+                    </a:lnT>
+                    <a:lnB w="9525" cap="flat" cmpd="sng" algn="ctr">
+                      <a:solidFill>
+                        <a:srgbClr val="D9D9D9"/>
+                      </a:solidFill>
+                      <a:prstDash val="solid"/>
+                      <a:round/>
+                      <a:headEnd type="none" w="med" len="med"/>
+                      <a:tailEnd type="none" w="med" len="med"/>
+                    </a:lnB>
+                    <a:solidFill>
+                      <a:schemeClr val="tx2"/>
+                    </a:solidFill>
+                  </a:tcPr>
+                </a:tc>
+                <a:tc>
+                  <a:txBody>
+                    <a:bodyPr/>
+                    <a:lstStyle/>
+                    <a:p>
+                      <a:pPr algn="ctr" indent="0" marL="0">
+                        <a:buNone/>
+                      </a:pPr>
+                      <a:r>
+                        <a:rPr lang="en-US" sz="1000" b="1" dirty="0">
+                          <a:solidFill>
+                            <a:schemeClr val="bg1"/>
+                          </a:solidFill>
+                          <a:latin typeface="맑은 고딕" pitchFamily="34" charset="0"/>
+                          <a:ea typeface="맑은 고딕" pitchFamily="34" charset="-122"/>
+                          <a:cs typeface="맑은 고딕" pitchFamily="34" charset="-120"/>
+                        </a:rPr>
+                        <a:t>저작자</a:t>
+                      </a:r>
+                      <a:endParaRPr lang="en-US" sz="1000" dirty="0">
+                        <a:latin typeface="맑은 고딕" charset="0"/>
+                        <a:ea typeface="맑은 고딕" charset="0"/>
+                        <a:cs typeface="맑은 고딕" charset="0"/>
+                      </a:endParaRPr>
+                    </a:p>
+                  </a:txBody>
+                  <a:tcPr marL="91440" marR="91440" marT="45720" marB="45720" anchor="ctr">
+                    <a:lnL w="9525" cap="flat" cmpd="sng" algn="ctr">
+                      <a:solidFill>
+                        <a:srgbClr val="D9D9D9"/>
+                      </a:solidFill>
+                      <a:prstDash val="solid"/>
+                      <a:round/>
+                      <a:headEnd type="none" w="med" len="med"/>
+                      <a:tailEnd type="none" w="med" len="med"/>
+                    </a:lnL>
+                    <a:lnR w="9525" cap="flat" cmpd="sng" algn="ctr">
+                      <a:solidFill>
+                        <a:srgbClr val="D9D9D9"/>
+                      </a:solidFill>
+                      <a:prstDash val="solid"/>
+                      <a:round/>
+                      <a:headEnd type="none" w="med" len="med"/>
+                      <a:tailEnd type="none" w="med" len="med"/>
+                    </a:lnR>
+                    <a:lnT w="9525" cap="flat" cmpd="sng" algn="ctr">
+                      <a:solidFill>
+                        <a:srgbClr val="D9D9D9"/>
+                      </a:solidFill>
+                      <a:prstDash val="solid"/>
+                      <a:round/>
+                      <a:headEnd type="none" w="med" len="med"/>
+                      <a:tailEnd type="none" w="med" len="med"/>
+                    </a:lnT>
+                    <a:lnB w="9525" cap="flat" cmpd="sng" algn="ctr">
+                      <a:solidFill>
+                        <a:srgbClr val="D9D9D9"/>
+                      </a:solidFill>
+                      <a:prstDash val="solid"/>
+                      <a:round/>
+                      <a:headEnd type="none" w="med" len="med"/>
+                      <a:tailEnd type="none" w="med" len="med"/>
+                    </a:lnB>
+                    <a:solidFill>
+                      <a:schemeClr val="tx2"/>
+                    </a:solidFill>
+                  </a:tcPr>
+                </a:tc>
+                <a:tc>
+                  <a:txBody>
+                    <a:bodyPr/>
+                    <a:lstStyle/>
+                    <a:p>
+                      <a:pPr algn="ctr" indent="0" marL="0">
+                        <a:buNone/>
+                      </a:pPr>
+                      <a:r>
+                        <a:rPr lang="en-US" sz="1000" b="1" dirty="0">
+                          <a:solidFill>
+                            <a:schemeClr val="bg1"/>
+                          </a:solidFill>
+                          <a:latin typeface="맑은 고딕" pitchFamily="34" charset="0"/>
+                          <a:ea typeface="맑은 고딕" pitchFamily="34" charset="-122"/>
+                          <a:cs typeface="맑은 고딕" pitchFamily="34" charset="-120"/>
+                        </a:rPr>
+                        <a:t>라이선스</a:t>
+                      </a:r>
+                      <a:endParaRPr lang="en-US" sz="1000" dirty="0">
+                        <a:latin typeface="맑은 고딕" charset="0"/>
+                        <a:ea typeface="맑은 고딕" charset="0"/>
+                        <a:cs typeface="맑은 고딕" charset="0"/>
+                      </a:endParaRPr>
+                    </a:p>
+                  </a:txBody>
+                  <a:tcPr marL="91440" marR="91440" marT="45720" marB="45720" anchor="ctr">
+                    <a:lnL w="9525" cap="flat" cmpd="sng" algn="ctr">
+                      <a:solidFill>
+                        <a:srgbClr val="D9D9D9"/>
+                      </a:solidFill>
+                      <a:prstDash val="solid"/>
+                      <a:round/>
+                      <a:headEnd type="none" w="med" len="med"/>
+                      <a:tailEnd type="none" w="med" len="med"/>
+                    </a:lnL>
+                    <a:lnR w="9525" cap="flat" cmpd="sng" algn="ctr">
+                      <a:solidFill>
+                        <a:srgbClr val="D9D9D9"/>
+                      </a:solidFill>
+                      <a:prstDash val="solid"/>
+                      <a:round/>
+                      <a:headEnd type="none" w="med" len="med"/>
+                      <a:tailEnd type="none" w="med" len="med"/>
+                    </a:lnR>
+                    <a:lnT w="9525" cap="flat" cmpd="sng" algn="ctr">
+                      <a:solidFill>
+                        <a:srgbClr val="D9D9D9"/>
+                      </a:solidFill>
+                      <a:prstDash val="solid"/>
+                      <a:round/>
+                      <a:headEnd type="none" w="med" len="med"/>
+                      <a:tailEnd type="none" w="med" len="med"/>
+                    </a:lnT>
+                    <a:lnB w="9525" cap="flat" cmpd="sng" algn="ctr">
+                      <a:solidFill>
+                        <a:srgbClr val="D9D9D9"/>
+                      </a:solidFill>
+                      <a:prstDash val="solid"/>
+                      <a:round/>
+                      <a:headEnd type="none" w="med" len="med"/>
+                      <a:tailEnd type="none" w="med" len="med"/>
+                    </a:lnB>
+                    <a:solidFill>
+                      <a:schemeClr val="tx2"/>
+                    </a:solidFill>
+                  </a:tcPr>
+                </a:tc>
+              </a:tr>
+              <a:tr h="310896">
+                <a:tc>
+                  <a:txBody>
+                    <a:bodyPr/>
+                    <a:lstStyle/>
+                    <a:p>
+                      <a:pPr algn="ctr" indent="0" marL="0">
+                        <a:buNone/>
+                      </a:pPr>
+                      <a:r>
+                        <a:rPr lang="en-US" sz="900" dirty="0">
+                          <a:solidFill>
+                            <a:schemeClr val="tx1"/>
+                          </a:solidFill>
+                          <a:latin typeface="맑은 고딕" pitchFamily="34" charset="0"/>
+                          <a:ea typeface="맑은 고딕" pitchFamily="34" charset="-122"/>
+                          <a:cs typeface="맑은 고딕" pitchFamily="34" charset="-120"/>
+                        </a:rPr>
+                        <a:t>8</a:t>
+                      </a:r>
+                      <a:endParaRPr lang="en-US" sz="900" dirty="0">
+                        <a:latin typeface="맑은 고딕" charset="0"/>
+                        <a:ea typeface="맑은 고딕" charset="0"/>
+                        <a:cs typeface="맑은 고딕" charset="0"/>
+                      </a:endParaRPr>
+                    </a:p>
+                  </a:txBody>
+                  <a:tcPr marL="36576" marR="36576" marT="36576" marB="36576" anchor="ctr">
+                    <a:lnL w="9525" cap="flat" cmpd="sng" algn="ctr">
+                      <a:solidFill>
+                        <a:srgbClr val="D9D9D9"/>
+                      </a:solidFill>
+                      <a:prstDash val="solid"/>
+                      <a:round/>
+                      <a:headEnd type="none" w="med" len="med"/>
+                      <a:tailEnd type="none" w="med" len="med"/>
+                    </a:lnL>
+                    <a:lnR w="9525" cap="flat" cmpd="sng" algn="ctr">
+                      <a:solidFill>
+                        <a:srgbClr val="D9D9D9"/>
+                      </a:solidFill>
+                      <a:prstDash val="solid"/>
+                      <a:round/>
+                      <a:headEnd type="none" w="med" len="med"/>
+                      <a:tailEnd type="none" w="med" len="med"/>
+                    </a:lnR>
+                    <a:lnT w="9525" cap="flat" cmpd="sng" algn="ctr">
+                      <a:solidFill>
+                        <a:srgbClr val="D9D9D9"/>
+                      </a:solidFill>
+                      <a:prstDash val="solid"/>
+                      <a:round/>
+                      <a:headEnd type="none" w="med" len="med"/>
+                      <a:tailEnd type="none" w="med" len="med"/>
+                    </a:lnT>
+                    <a:lnB w="9525" cap="flat" cmpd="sng" algn="ctr">
+                      <a:solidFill>
+                        <a:srgbClr val="D9D9D9"/>
+                      </a:solidFill>
+                      <a:prstDash val="solid"/>
+                      <a:round/>
+                      <a:headEnd type="none" w="med" len="med"/>
+                      <a:tailEnd type="none" w="med" len="med"/>
+                    </a:lnB>
+                  </a:tcPr>
+                </a:tc>
+                <a:tc>
+                  <a:txBody>
+                    <a:bodyPr/>
+                    <a:lstStyle/>
+                    <a:p>
+                      <a:pPr algn="l" indent="0" marL="0">
+                        <a:buNone/>
+                      </a:pPr>
+                      <a:r>
+                        <a:rPr lang="en-US" sz="900" dirty="0">
+                          <a:solidFill>
+                            <a:schemeClr val="tx1"/>
+                          </a:solidFill>
+                          <a:latin typeface="맑은 고딕" pitchFamily="34" charset="0"/>
+                          <a:ea typeface="맑은 고딕" pitchFamily="34" charset="-122"/>
+                          <a:cs typeface="맑은 고딕" pitchFamily="34" charset="-120"/>
+                        </a:rPr>
+                        <a:t>태양의 서커스 공연장</a:t>
+                      </a:r>
+                      <a:endParaRPr lang="en-US" sz="900" dirty="0">
+                        <a:latin typeface="맑은 고딕" charset="0"/>
+                        <a:ea typeface="맑은 고딕" charset="0"/>
+                        <a:cs typeface="맑은 고딕" charset="0"/>
+                      </a:endParaRPr>
+                    </a:p>
+                  </a:txBody>
+                  <a:tcPr marL="36576" marR="36576" marT="36576" marB="36576" anchor="ctr">
+                    <a:lnL w="9525" cap="flat" cmpd="sng" algn="ctr">
+                      <a:solidFill>
+                        <a:srgbClr val="D9D9D9"/>
+                      </a:solidFill>
+                      <a:prstDash val="solid"/>
+                      <a:round/>
+                      <a:headEnd type="none" w="med" len="med"/>
+                      <a:tailEnd type="none" w="med" len="med"/>
+                    </a:lnL>
+                    <a:lnR w="9525" cap="flat" cmpd="sng" algn="ctr">
+                      <a:solidFill>
+                        <a:srgbClr val="D9D9D9"/>
+                      </a:solidFill>
+                      <a:prstDash val="solid"/>
+                      <a:round/>
+                      <a:headEnd type="none" w="med" len="med"/>
+                      <a:tailEnd type="none" w="med" len="med"/>
+                    </a:lnR>
+                    <a:lnT w="9525" cap="flat" cmpd="sng" algn="ctr">
+                      <a:solidFill>
+                        <a:srgbClr val="D9D9D9"/>
+                      </a:solidFill>
+                      <a:prstDash val="solid"/>
+                      <a:round/>
+                      <a:headEnd type="none" w="med" len="med"/>
+                      <a:tailEnd type="none" w="med" len="med"/>
+                    </a:lnT>
+                    <a:lnB w="9525" cap="flat" cmpd="sng" algn="ctr">
+                      <a:solidFill>
+                        <a:srgbClr val="D9D9D9"/>
+                      </a:solidFill>
+                      <a:prstDash val="solid"/>
+                      <a:round/>
+                      <a:headEnd type="none" w="med" len="med"/>
+                      <a:tailEnd type="none" w="med" len="med"/>
+                    </a:lnB>
+                  </a:tcPr>
+                </a:tc>
+                <a:tc>
+                  <a:txBody>
+                    <a:bodyPr/>
+                    <a:lstStyle/>
+                    <a:p>
+                      <a:pPr algn="l" indent="0" marL="0">
+                        <a:buNone/>
+                      </a:pPr>
+                      <a:r>
+                        <a:rPr lang="en-US" sz="900" dirty="0">
+                          <a:solidFill>
+                            <a:schemeClr val="tx1"/>
+                          </a:solidFill>
+                          <a:latin typeface="맑은 고딕" pitchFamily="34" charset="0"/>
+                          <a:ea typeface="맑은 고딕" pitchFamily="34" charset="-122"/>
+                          <a:cs typeface="맑은 고딕" pitchFamily="34" charset="-120"/>
+                        </a:rPr>
+                        <a:t>Jean Gagnon</a:t>
+                      </a:r>
+                      <a:endParaRPr lang="en-US" sz="900" dirty="0">
+                        <a:latin typeface="맑은 고딕" charset="0"/>
+                        <a:ea typeface="맑은 고딕" charset="0"/>
+                        <a:cs typeface="맑은 고딕" charset="0"/>
+                      </a:endParaRPr>
+                    </a:p>
+                  </a:txBody>
+                  <a:tcPr marL="36576" marR="36576" marT="36576" marB="36576" anchor="ctr">
+                    <a:lnL w="9525" cap="flat" cmpd="sng" algn="ctr">
+                      <a:solidFill>
+                        <a:srgbClr val="D9D9D9"/>
+                      </a:solidFill>
+                      <a:prstDash val="solid"/>
+                      <a:round/>
+                      <a:headEnd type="none" w="med" len="med"/>
+                      <a:tailEnd type="none" w="med" len="med"/>
+                    </a:lnL>
+                    <a:lnR w="9525" cap="flat" cmpd="sng" algn="ctr">
+                      <a:solidFill>
+                        <a:srgbClr val="D9D9D9"/>
+                      </a:solidFill>
+                      <a:prstDash val="solid"/>
+                      <a:round/>
+                      <a:headEnd type="none" w="med" len="med"/>
+                      <a:tailEnd type="none" w="med" len="med"/>
+                    </a:lnR>
+                    <a:lnT w="9525" cap="flat" cmpd="sng" algn="ctr">
+                      <a:solidFill>
+                        <a:srgbClr val="D9D9D9"/>
+                      </a:solidFill>
+                      <a:prstDash val="solid"/>
+                      <a:round/>
+                      <a:headEnd type="none" w="med" len="med"/>
+                      <a:tailEnd type="none" w="med" len="med"/>
+                    </a:lnT>
+                    <a:lnB w="9525" cap="flat" cmpd="sng" algn="ctr">
+                      <a:solidFill>
+                        <a:srgbClr val="D9D9D9"/>
+                      </a:solidFill>
+                      <a:prstDash val="solid"/>
+                      <a:round/>
+                      <a:headEnd type="none" w="med" len="med"/>
+                      <a:tailEnd type="none" w="med" len="med"/>
+                    </a:lnB>
+                  </a:tcPr>
+                </a:tc>
+                <a:tc>
+                  <a:txBody>
+                    <a:bodyPr/>
+                    <a:lstStyle/>
+                    <a:p>
+                      <a:pPr algn="l" indent="0" marL="0">
+                        <a:buNone/>
+                      </a:pPr>
+                      <a:r>
+                        <a:rPr lang="en-US" sz="900" dirty="0">
+                          <a:solidFill>
+                            <a:schemeClr val="tx1"/>
+                          </a:solidFill>
+                          <a:latin typeface="맑은 고딕" pitchFamily="34" charset="0"/>
+                          <a:ea typeface="맑은 고딕" pitchFamily="34" charset="-122"/>
+                          <a:cs typeface="맑은 고딕" pitchFamily="34" charset="-120"/>
+                        </a:rPr>
+                        <a:t>CC BY-SA 3.0</a:t>
+                      </a:r>
+                      <a:endParaRPr lang="en-US" sz="900" dirty="0">
+                        <a:latin typeface="맑은 고딕" charset="0"/>
+                        <a:ea typeface="맑은 고딕" charset="0"/>
+                        <a:cs typeface="맑은 고딕" charset="0"/>
+                      </a:endParaRPr>
+                    </a:p>
+                  </a:txBody>
+                  <a:tcPr marL="36576" marR="36576" marT="36576" marB="36576" anchor="ctr">
+                    <a:lnL w="9525" cap="flat" cmpd="sng" algn="ctr">
+                      <a:solidFill>
+                        <a:srgbClr val="D9D9D9"/>
+                      </a:solidFill>
+                      <a:prstDash val="solid"/>
+                      <a:round/>
+                      <a:headEnd type="none" w="med" len="med"/>
+                      <a:tailEnd type="none" w="med" len="med"/>
+                    </a:lnL>
+                    <a:lnR w="9525" cap="flat" cmpd="sng" algn="ctr">
+                      <a:solidFill>
+                        <a:srgbClr val="D9D9D9"/>
+                      </a:solidFill>
+                      <a:prstDash val="solid"/>
+                      <a:round/>
+                      <a:headEnd type="none" w="med" len="med"/>
+                      <a:tailEnd type="none" w="med" len="med"/>
+                    </a:lnR>
+                    <a:lnT w="9525" cap="flat" cmpd="sng" algn="ctr">
+                      <a:solidFill>
+                        <a:srgbClr val="D9D9D9"/>
+                      </a:solidFill>
+                      <a:prstDash val="solid"/>
+                      <a:round/>
+                      <a:headEnd type="none" w="med" len="med"/>
+                      <a:tailEnd type="none" w="med" len="med"/>
+                    </a:lnT>
+                    <a:lnB w="9525" cap="flat" cmpd="sng" algn="ctr">
+                      <a:solidFill>
+                        <a:srgbClr val="D9D9D9"/>
+                      </a:solidFill>
+                      <a:prstDash val="solid"/>
+                      <a:round/>
+                      <a:headEnd type="none" w="med" len="med"/>
+                      <a:tailEnd type="none" w="med" len="med"/>
+                    </a:lnB>
+                  </a:tcPr>
+                </a:tc>
+              </a:tr>
+              <a:tr h="310896">
+                <a:tc>
+                  <a:txBody>
+                    <a:bodyPr/>
+                    <a:lstStyle/>
+                    <a:p>
+                      <a:pPr algn="ctr" indent="0" marL="0">
+                        <a:buNone/>
+                      </a:pPr>
+                      <a:r>
+                        <a:rPr lang="en-US" sz="900" dirty="0">
+                          <a:solidFill>
+                            <a:schemeClr val="tx1"/>
+                          </a:solidFill>
+                          <a:latin typeface="맑은 고딕" pitchFamily="34" charset="0"/>
+                          <a:ea typeface="맑은 고딕" pitchFamily="34" charset="-122"/>
+                          <a:cs typeface="맑은 고딕" pitchFamily="34" charset="-120"/>
+                        </a:rPr>
+                        <a:t>8·13</a:t>
+                      </a:r>
+                      <a:endParaRPr lang="en-US" sz="900" dirty="0">
+                        <a:latin typeface="맑은 고딕" charset="0"/>
+                        <a:ea typeface="맑은 고딕" charset="0"/>
+                        <a:cs typeface="맑은 고딕" charset="0"/>
+                      </a:endParaRPr>
+                    </a:p>
+                  </a:txBody>
+                  <a:tcPr marL="36576" marR="36576" marT="36576" marB="36576" anchor="ctr">
+                    <a:lnL w="9525" cap="flat" cmpd="sng" algn="ctr">
+                      <a:solidFill>
+                        <a:srgbClr val="D9D9D9"/>
+                      </a:solidFill>
+                      <a:prstDash val="solid"/>
+                      <a:round/>
+                      <a:headEnd type="none" w="med" len="med"/>
+                      <a:tailEnd type="none" w="med" len="med"/>
+                    </a:lnL>
+                    <a:lnR w="9525" cap="flat" cmpd="sng" algn="ctr">
+                      <a:solidFill>
+                        <a:srgbClr val="D9D9D9"/>
+                      </a:solidFill>
+                      <a:prstDash val="solid"/>
+                      <a:round/>
+                      <a:headEnd type="none" w="med" len="med"/>
+                      <a:tailEnd type="none" w="med" len="med"/>
+                    </a:lnR>
+                    <a:lnT w="9525" cap="flat" cmpd="sng" algn="ctr">
+                      <a:solidFill>
+                        <a:srgbClr val="D9D9D9"/>
+                      </a:solidFill>
+                      <a:prstDash val="solid"/>
+                      <a:round/>
+                      <a:headEnd type="none" w="med" len="med"/>
+                      <a:tailEnd type="none" w="med" len="med"/>
+                    </a:lnT>
+                    <a:lnB w="9525" cap="flat" cmpd="sng" algn="ctr">
+                      <a:solidFill>
+                        <a:srgbClr val="D9D9D9"/>
+                      </a:solidFill>
+                      <a:prstDash val="solid"/>
+                      <a:round/>
+                      <a:headEnd type="none" w="med" len="med"/>
+                      <a:tailEnd type="none" w="med" len="med"/>
+                    </a:lnB>
+                  </a:tcPr>
+                </a:tc>
+                <a:tc>
+                  <a:txBody>
+                    <a:bodyPr/>
+                    <a:lstStyle/>
+                    <a:p>
+                      <a:pPr algn="l" indent="0" marL="0">
+                        <a:buNone/>
+                      </a:pPr>
+                      <a:r>
+                        <a:rPr lang="en-US" sz="900" dirty="0">
+                          <a:solidFill>
+                            <a:schemeClr val="tx1"/>
+                          </a:solidFill>
+                          <a:latin typeface="맑은 고딕" pitchFamily="34" charset="0"/>
+                          <a:ea typeface="맑은 고딕" pitchFamily="34" charset="-122"/>
+                          <a:cs typeface="맑은 고딕" pitchFamily="34" charset="-120"/>
+                        </a:rPr>
+                        <a:t>GE MRI 검사실</a:t>
+                      </a:r>
+                      <a:endParaRPr lang="en-US" sz="900" dirty="0">
+                        <a:latin typeface="맑은 고딕" charset="0"/>
+                        <a:ea typeface="맑은 고딕" charset="0"/>
+                        <a:cs typeface="맑은 고딕" charset="0"/>
+                      </a:endParaRPr>
+                    </a:p>
+                  </a:txBody>
+                  <a:tcPr marL="36576" marR="36576" marT="36576" marB="36576" anchor="ctr">
+                    <a:lnL w="9525" cap="flat" cmpd="sng" algn="ctr">
+                      <a:solidFill>
+                        <a:srgbClr val="D9D9D9"/>
+                      </a:solidFill>
+                      <a:prstDash val="solid"/>
+                      <a:round/>
+                      <a:headEnd type="none" w="med" len="med"/>
+                      <a:tailEnd type="none" w="med" len="med"/>
+                    </a:lnL>
+                    <a:lnR w="9525" cap="flat" cmpd="sng" algn="ctr">
+                      <a:solidFill>
+                        <a:srgbClr val="D9D9D9"/>
+                      </a:solidFill>
+                      <a:prstDash val="solid"/>
+                      <a:round/>
+                      <a:headEnd type="none" w="med" len="med"/>
+                      <a:tailEnd type="none" w="med" len="med"/>
+                    </a:lnR>
+                    <a:lnT w="9525" cap="flat" cmpd="sng" algn="ctr">
+                      <a:solidFill>
+                        <a:srgbClr val="D9D9D9"/>
+                      </a:solidFill>
+                      <a:prstDash val="solid"/>
+                      <a:round/>
+                      <a:headEnd type="none" w="med" len="med"/>
+                      <a:tailEnd type="none" w="med" len="med"/>
+                    </a:lnT>
+                    <a:lnB w="9525" cap="flat" cmpd="sng" algn="ctr">
+                      <a:solidFill>
+                        <a:srgbClr val="D9D9D9"/>
+                      </a:solidFill>
+                      <a:prstDash val="solid"/>
+                      <a:round/>
+                      <a:headEnd type="none" w="med" len="med"/>
+                      <a:tailEnd type="none" w="med" len="med"/>
+                    </a:lnB>
+                  </a:tcPr>
+                </a:tc>
+                <a:tc>
+                  <a:txBody>
+                    <a:bodyPr/>
+                    <a:lstStyle/>
+                    <a:p>
+                      <a:pPr algn="l" indent="0" marL="0">
+                        <a:buNone/>
+                      </a:pPr>
+                      <a:r>
+                        <a:rPr lang="en-US" sz="900" dirty="0">
+                          <a:solidFill>
+                            <a:schemeClr val="tx1"/>
+                          </a:solidFill>
+                          <a:latin typeface="맑은 고딕" pitchFamily="34" charset="0"/>
+                          <a:ea typeface="맑은 고딕" pitchFamily="34" charset="-122"/>
+                          <a:cs typeface="맑은 고딕" pitchFamily="34" charset="-120"/>
+                        </a:rPr>
+                        <a:t>Glitzy queen00</a:t>
+                      </a:r>
+                      <a:endParaRPr lang="en-US" sz="900" dirty="0">
+                        <a:latin typeface="맑은 고딕" charset="0"/>
+                        <a:ea typeface="맑은 고딕" charset="0"/>
+                        <a:cs typeface="맑은 고딕" charset="0"/>
+                      </a:endParaRPr>
+                    </a:p>
+                  </a:txBody>
+                  <a:tcPr marL="36576" marR="36576" marT="36576" marB="36576" anchor="ctr">
+                    <a:lnL w="9525" cap="flat" cmpd="sng" algn="ctr">
+                      <a:solidFill>
+                        <a:srgbClr val="D9D9D9"/>
+                      </a:solidFill>
+                      <a:prstDash val="solid"/>
+                      <a:round/>
+                      <a:headEnd type="none" w="med" len="med"/>
+                      <a:tailEnd type="none" w="med" len="med"/>
+                    </a:lnL>
+                    <a:lnR w="9525" cap="flat" cmpd="sng" algn="ctr">
+                      <a:solidFill>
+                        <a:srgbClr val="D9D9D9"/>
+                      </a:solidFill>
+                      <a:prstDash val="solid"/>
+                      <a:round/>
+                      <a:headEnd type="none" w="med" len="med"/>
+                      <a:tailEnd type="none" w="med" len="med"/>
+                    </a:lnR>
+                    <a:lnT w="9525" cap="flat" cmpd="sng" algn="ctr">
+                      <a:solidFill>
+                        <a:srgbClr val="D9D9D9"/>
+                      </a:solidFill>
+                      <a:prstDash val="solid"/>
+                      <a:round/>
+                      <a:headEnd type="none" w="med" len="med"/>
+                      <a:tailEnd type="none" w="med" len="med"/>
+                    </a:lnT>
+                    <a:lnB w="9525" cap="flat" cmpd="sng" algn="ctr">
+                      <a:solidFill>
+                        <a:srgbClr val="D9D9D9"/>
+                      </a:solidFill>
+                      <a:prstDash val="solid"/>
+                      <a:round/>
+                      <a:headEnd type="none" w="med" len="med"/>
+                      <a:tailEnd type="none" w="med" len="med"/>
+                    </a:lnB>
+                  </a:tcPr>
+                </a:tc>
+                <a:tc>
+                  <a:txBody>
+                    <a:bodyPr/>
+                    <a:lstStyle/>
+                    <a:p>
+                      <a:pPr algn="l" indent="0" marL="0">
+                        <a:buNone/>
+                      </a:pPr>
+                      <a:r>
+                        <a:rPr lang="en-US" sz="900" dirty="0">
+                          <a:solidFill>
+                            <a:schemeClr val="tx1"/>
+                          </a:solidFill>
+                          <a:latin typeface="맑은 고딕" pitchFamily="34" charset="0"/>
+                          <a:ea typeface="맑은 고딕" pitchFamily="34" charset="-122"/>
+                          <a:cs typeface="맑은 고딕" pitchFamily="34" charset="-120"/>
+                        </a:rPr>
+                        <a:t>Public domain</a:t>
+                      </a:r>
+                      <a:endParaRPr lang="en-US" sz="900" dirty="0">
+                        <a:latin typeface="맑은 고딕" charset="0"/>
+                        <a:ea typeface="맑은 고딕" charset="0"/>
+                        <a:cs typeface="맑은 고딕" charset="0"/>
+                      </a:endParaRPr>
+                    </a:p>
+                  </a:txBody>
+                  <a:tcPr marL="36576" marR="36576" marT="36576" marB="36576" anchor="ctr">
+                    <a:lnL w="9525" cap="flat" cmpd="sng" algn="ctr">
+                      <a:solidFill>
+                        <a:srgbClr val="D9D9D9"/>
+                      </a:solidFill>
+                      <a:prstDash val="solid"/>
+                      <a:round/>
+                      <a:headEnd type="none" w="med" len="med"/>
+                      <a:tailEnd type="none" w="med" len="med"/>
+                    </a:lnL>
+                    <a:lnR w="9525" cap="flat" cmpd="sng" algn="ctr">
+                      <a:solidFill>
+                        <a:srgbClr val="D9D9D9"/>
+                      </a:solidFill>
+                      <a:prstDash val="solid"/>
+                      <a:round/>
+                      <a:headEnd type="none" w="med" len="med"/>
+                      <a:tailEnd type="none" w="med" len="med"/>
+                    </a:lnR>
+                    <a:lnT w="9525" cap="flat" cmpd="sng" algn="ctr">
+                      <a:solidFill>
+                        <a:srgbClr val="D9D9D9"/>
+                      </a:solidFill>
+                      <a:prstDash val="solid"/>
+                      <a:round/>
+                      <a:headEnd type="none" w="med" len="med"/>
+                      <a:tailEnd type="none" w="med" len="med"/>
+                    </a:lnT>
+                    <a:lnB w="9525" cap="flat" cmpd="sng" algn="ctr">
+                      <a:solidFill>
+                        <a:srgbClr val="D9D9D9"/>
+                      </a:solidFill>
+                      <a:prstDash val="solid"/>
+                      <a:round/>
+                      <a:headEnd type="none" w="med" len="med"/>
+                      <a:tailEnd type="none" w="med" len="med"/>
+                    </a:lnB>
+                  </a:tcPr>
+                </a:tc>
+              </a:tr>
+              <a:tr h="310896">
+                <a:tc>
+                  <a:txBody>
+                    <a:bodyPr/>
+                    <a:lstStyle/>
+                    <a:p>
+                      <a:pPr algn="ctr" indent="0" marL="0">
+                        <a:buNone/>
+                      </a:pPr>
+                      <a:r>
+                        <a:rPr lang="en-US" sz="900" dirty="0">
+                          <a:solidFill>
+                            <a:schemeClr val="tx1"/>
+                          </a:solidFill>
+                          <a:latin typeface="맑은 고딕" pitchFamily="34" charset="0"/>
+                          <a:ea typeface="맑은 고딕" pitchFamily="34" charset="-122"/>
+                          <a:cs typeface="맑은 고딕" pitchFamily="34" charset="-120"/>
+                        </a:rPr>
+                        <a:t>11</a:t>
+                      </a:r>
+                      <a:endParaRPr lang="en-US" sz="900" dirty="0">
+                        <a:latin typeface="맑은 고딕" charset="0"/>
+                        <a:ea typeface="맑은 고딕" charset="0"/>
+                        <a:cs typeface="맑은 고딕" charset="0"/>
+                      </a:endParaRPr>
+                    </a:p>
+                  </a:txBody>
+                  <a:tcPr marL="36576" marR="36576" marT="36576" marB="36576" anchor="ctr">
+                    <a:lnL w="9525" cap="flat" cmpd="sng" algn="ctr">
+                      <a:solidFill>
+                        <a:srgbClr val="D9D9D9"/>
+                      </a:solidFill>
+                      <a:prstDash val="solid"/>
+                      <a:round/>
+                      <a:headEnd type="none" w="med" len="med"/>
+                      <a:tailEnd type="none" w="med" len="med"/>
+                    </a:lnL>
+                    <a:lnR w="9525" cap="flat" cmpd="sng" algn="ctr">
+                      <a:solidFill>
+                        <a:srgbClr val="D9D9D9"/>
+                      </a:solidFill>
+                      <a:prstDash val="solid"/>
+                      <a:round/>
+                      <a:headEnd type="none" w="med" len="med"/>
+                      <a:tailEnd type="none" w="med" len="med"/>
+                    </a:lnR>
+                    <a:lnT w="9525" cap="flat" cmpd="sng" algn="ctr">
+                      <a:solidFill>
+                        <a:srgbClr val="D9D9D9"/>
+                      </a:solidFill>
+                      <a:prstDash val="solid"/>
+                      <a:round/>
+                      <a:headEnd type="none" w="med" len="med"/>
+                      <a:tailEnd type="none" w="med" len="med"/>
+                    </a:lnT>
+                    <a:lnB w="9525" cap="flat" cmpd="sng" algn="ctr">
+                      <a:solidFill>
+                        <a:srgbClr val="D9D9D9"/>
+                      </a:solidFill>
+                      <a:prstDash val="solid"/>
+                      <a:round/>
+                      <a:headEnd type="none" w="med" len="med"/>
+                      <a:tailEnd type="none" w="med" len="med"/>
+                    </a:lnB>
+                  </a:tcPr>
+                </a:tc>
+                <a:tc>
+                  <a:txBody>
+                    <a:bodyPr/>
+                    <a:lstStyle/>
+                    <a:p>
+                      <a:pPr algn="l" indent="0" marL="0">
+                        <a:buNone/>
+                      </a:pPr>
+                      <a:r>
+                        <a:rPr lang="en-US" sz="900" dirty="0">
+                          <a:solidFill>
+                            <a:schemeClr val="tx1"/>
+                          </a:solidFill>
+                          <a:latin typeface="맑은 고딕" pitchFamily="34" charset="0"/>
+                          <a:ea typeface="맑은 고딕" pitchFamily="34" charset="-122"/>
+                          <a:cs typeface="맑은 고딕" pitchFamily="34" charset="-120"/>
+                        </a:rPr>
+                        <a:t>한국전자통신연구원(ETRI)</a:t>
+                      </a:r>
+                      <a:endParaRPr lang="en-US" sz="900" dirty="0">
+                        <a:latin typeface="맑은 고딕" charset="0"/>
+                        <a:ea typeface="맑은 고딕" charset="0"/>
+                        <a:cs typeface="맑은 고딕" charset="0"/>
+                      </a:endParaRPr>
+                    </a:p>
+                  </a:txBody>
+                  <a:tcPr marL="36576" marR="36576" marT="36576" marB="36576" anchor="ctr">
+                    <a:lnL w="9525" cap="flat" cmpd="sng" algn="ctr">
+                      <a:solidFill>
+                        <a:srgbClr val="D9D9D9"/>
+                      </a:solidFill>
+                      <a:prstDash val="solid"/>
+                      <a:round/>
+                      <a:headEnd type="none" w="med" len="med"/>
+                      <a:tailEnd type="none" w="med" len="med"/>
+                    </a:lnL>
+                    <a:lnR w="9525" cap="flat" cmpd="sng" algn="ctr">
+                      <a:solidFill>
+                        <a:srgbClr val="D9D9D9"/>
+                      </a:solidFill>
+                      <a:prstDash val="solid"/>
+                      <a:round/>
+                      <a:headEnd type="none" w="med" len="med"/>
+                      <a:tailEnd type="none" w="med" len="med"/>
+                    </a:lnR>
+                    <a:lnT w="9525" cap="flat" cmpd="sng" algn="ctr">
+                      <a:solidFill>
+                        <a:srgbClr val="D9D9D9"/>
+                      </a:solidFill>
+                      <a:prstDash val="solid"/>
+                      <a:round/>
+                      <a:headEnd type="none" w="med" len="med"/>
+                      <a:tailEnd type="none" w="med" len="med"/>
+                    </a:lnT>
+                    <a:lnB w="9525" cap="flat" cmpd="sng" algn="ctr">
+                      <a:solidFill>
+                        <a:srgbClr val="D9D9D9"/>
+                      </a:solidFill>
+                      <a:prstDash val="solid"/>
+                      <a:round/>
+                      <a:headEnd type="none" w="med" len="med"/>
+                      <a:tailEnd type="none" w="med" len="med"/>
+                    </a:lnB>
+                  </a:tcPr>
+                </a:tc>
+                <a:tc>
+                  <a:txBody>
+                    <a:bodyPr/>
+                    <a:lstStyle/>
+                    <a:p>
+                      <a:pPr algn="l" indent="0" marL="0">
+                        <a:buNone/>
+                      </a:pPr>
+                      <a:r>
+                        <a:rPr lang="en-US" sz="900" dirty="0">
+                          <a:solidFill>
+                            <a:schemeClr val="tx1"/>
+                          </a:solidFill>
+                          <a:latin typeface="맑은 고딕" pitchFamily="34" charset="0"/>
+                          <a:ea typeface="맑은 고딕" pitchFamily="34" charset="-122"/>
+                          <a:cs typeface="맑은 고딕" pitchFamily="34" charset="-120"/>
+                        </a:rPr>
+                        <a:t>Yoshi Canopus</a:t>
+                      </a:r>
+                      <a:endParaRPr lang="en-US" sz="900" dirty="0">
+                        <a:latin typeface="맑은 고딕" charset="0"/>
+                        <a:ea typeface="맑은 고딕" charset="0"/>
+                        <a:cs typeface="맑은 고딕" charset="0"/>
+                      </a:endParaRPr>
+                    </a:p>
+                  </a:txBody>
+                  <a:tcPr marL="36576" marR="36576" marT="36576" marB="36576" anchor="ctr">
+                    <a:lnL w="9525" cap="flat" cmpd="sng" algn="ctr">
+                      <a:solidFill>
+                        <a:srgbClr val="D9D9D9"/>
+                      </a:solidFill>
+                      <a:prstDash val="solid"/>
+                      <a:round/>
+                      <a:headEnd type="none" w="med" len="med"/>
+                      <a:tailEnd type="none" w="med" len="med"/>
+                    </a:lnL>
+                    <a:lnR w="9525" cap="flat" cmpd="sng" algn="ctr">
+                      <a:solidFill>
+                        <a:srgbClr val="D9D9D9"/>
+                      </a:solidFill>
+                      <a:prstDash val="solid"/>
+                      <a:round/>
+                      <a:headEnd type="none" w="med" len="med"/>
+                      <a:tailEnd type="none" w="med" len="med"/>
+                    </a:lnR>
+                    <a:lnT w="9525" cap="flat" cmpd="sng" algn="ctr">
+                      <a:solidFill>
+                        <a:srgbClr val="D9D9D9"/>
+                      </a:solidFill>
+                      <a:prstDash val="solid"/>
+                      <a:round/>
+                      <a:headEnd type="none" w="med" len="med"/>
+                      <a:tailEnd type="none" w="med" len="med"/>
+                    </a:lnT>
+                    <a:lnB w="9525" cap="flat" cmpd="sng" algn="ctr">
+                      <a:solidFill>
+                        <a:srgbClr val="D9D9D9"/>
+                      </a:solidFill>
+                      <a:prstDash val="solid"/>
+                      <a:round/>
+                      <a:headEnd type="none" w="med" len="med"/>
+                      <a:tailEnd type="none" w="med" len="med"/>
+                    </a:lnB>
+                  </a:tcPr>
+                </a:tc>
+                <a:tc>
+                  <a:txBody>
+                    <a:bodyPr/>
+                    <a:lstStyle/>
+                    <a:p>
+                      <a:pPr algn="l" indent="0" marL="0">
+                        <a:buNone/>
+                      </a:pPr>
+                      <a:r>
+                        <a:rPr lang="en-US" sz="900" dirty="0">
+                          <a:solidFill>
+                            <a:schemeClr val="tx1"/>
+                          </a:solidFill>
+                          <a:latin typeface="맑은 고딕" pitchFamily="34" charset="0"/>
+                          <a:ea typeface="맑은 고딕" pitchFamily="34" charset="-122"/>
+                          <a:cs typeface="맑은 고딕" pitchFamily="34" charset="-120"/>
+                        </a:rPr>
+                        <a:t>GFDL</a:t>
+                      </a:r>
+                      <a:endParaRPr lang="en-US" sz="900" dirty="0">
+                        <a:latin typeface="맑은 고딕" charset="0"/>
+                        <a:ea typeface="맑은 고딕" charset="0"/>
+                        <a:cs typeface="맑은 고딕" charset="0"/>
+                      </a:endParaRPr>
+                    </a:p>
+                  </a:txBody>
+                  <a:tcPr marL="36576" marR="36576" marT="36576" marB="36576" anchor="ctr">
+                    <a:lnL w="9525" cap="flat" cmpd="sng" algn="ctr">
+                      <a:solidFill>
+                        <a:srgbClr val="D9D9D9"/>
+                      </a:solidFill>
+                      <a:prstDash val="solid"/>
+                      <a:round/>
+                      <a:headEnd type="none" w="med" len="med"/>
+                      <a:tailEnd type="none" w="med" len="med"/>
+                    </a:lnL>
+                    <a:lnR w="9525" cap="flat" cmpd="sng" algn="ctr">
+                      <a:solidFill>
+                        <a:srgbClr val="D9D9D9"/>
+                      </a:solidFill>
+                      <a:prstDash val="solid"/>
+                      <a:round/>
+                      <a:headEnd type="none" w="med" len="med"/>
+                      <a:tailEnd type="none" w="med" len="med"/>
+                    </a:lnR>
+                    <a:lnT w="9525" cap="flat" cmpd="sng" algn="ctr">
+                      <a:solidFill>
+                        <a:srgbClr val="D9D9D9"/>
+                      </a:solidFill>
+                      <a:prstDash val="solid"/>
+                      <a:round/>
+                      <a:headEnd type="none" w="med" len="med"/>
+                      <a:tailEnd type="none" w="med" len="med"/>
+                    </a:lnT>
+                    <a:lnB w="9525" cap="flat" cmpd="sng" algn="ctr">
+                      <a:solidFill>
+                        <a:srgbClr val="D9D9D9"/>
+                      </a:solidFill>
+                      <a:prstDash val="solid"/>
+                      <a:round/>
+                      <a:headEnd type="none" w="med" len="med"/>
+                      <a:tailEnd type="none" w="med" len="med"/>
+                    </a:lnB>
+                  </a:tcPr>
+                </a:tc>
+              </a:tr>
+              <a:tr h="310896">
+                <a:tc>
+                  <a:txBody>
+                    <a:bodyPr/>
+                    <a:lstStyle/>
+                    <a:p>
+                      <a:pPr algn="ctr" indent="0" marL="0">
+                        <a:buNone/>
+                      </a:pPr>
+                      <a:r>
+                        <a:rPr lang="en-US" sz="900" dirty="0">
+                          <a:solidFill>
+                            <a:schemeClr val="tx1"/>
+                          </a:solidFill>
+                          <a:latin typeface="맑은 고딕" pitchFamily="34" charset="0"/>
+                          <a:ea typeface="맑은 고딕" pitchFamily="34" charset="-122"/>
+                          <a:cs typeface="맑은 고딕" pitchFamily="34" charset="-120"/>
+                        </a:rPr>
+                        <a:t>14</a:t>
+                      </a:r>
+                      <a:endParaRPr lang="en-US" sz="900" dirty="0">
+                        <a:latin typeface="맑은 고딕" charset="0"/>
+                        <a:ea typeface="맑은 고딕" charset="0"/>
+                        <a:cs typeface="맑은 고딕" charset="0"/>
+                      </a:endParaRPr>
+                    </a:p>
+                  </a:txBody>
+                  <a:tcPr marL="36576" marR="36576" marT="36576" marB="36576" anchor="ctr">
+                    <a:lnL w="9525" cap="flat" cmpd="sng" algn="ctr">
+                      <a:solidFill>
+                        <a:srgbClr val="D9D9D9"/>
+                      </a:solidFill>
+                      <a:prstDash val="solid"/>
+                      <a:round/>
+                      <a:headEnd type="none" w="med" len="med"/>
+                      <a:tailEnd type="none" w="med" len="med"/>
+                    </a:lnL>
+                    <a:lnR w="9525" cap="flat" cmpd="sng" algn="ctr">
+                      <a:solidFill>
+                        <a:srgbClr val="D9D9D9"/>
+                      </a:solidFill>
+                      <a:prstDash val="solid"/>
+                      <a:round/>
+                      <a:headEnd type="none" w="med" len="med"/>
+                      <a:tailEnd type="none" w="med" len="med"/>
+                    </a:lnR>
+                    <a:lnT w="9525" cap="flat" cmpd="sng" algn="ctr">
+                      <a:solidFill>
+                        <a:srgbClr val="D9D9D9"/>
+                      </a:solidFill>
+                      <a:prstDash val="solid"/>
+                      <a:round/>
+                      <a:headEnd type="none" w="med" len="med"/>
+                      <a:tailEnd type="none" w="med" len="med"/>
+                    </a:lnT>
+                    <a:lnB w="9525" cap="flat" cmpd="sng" algn="ctr">
+                      <a:solidFill>
+                        <a:srgbClr val="D9D9D9"/>
+                      </a:solidFill>
+                      <a:prstDash val="solid"/>
+                      <a:round/>
+                      <a:headEnd type="none" w="med" len="med"/>
+                      <a:tailEnd type="none" w="med" len="med"/>
+                    </a:lnB>
+                  </a:tcPr>
+                </a:tc>
+                <a:tc>
+                  <a:txBody>
+                    <a:bodyPr/>
+                    <a:lstStyle/>
+                    <a:p>
+                      <a:pPr algn="l" indent="0" marL="0">
+                        <a:buNone/>
+                      </a:pPr>
+                      <a:r>
+                        <a:rPr lang="en-US" sz="900" dirty="0">
+                          <a:solidFill>
+                            <a:schemeClr val="tx1"/>
+                          </a:solidFill>
+                          <a:latin typeface="맑은 고딕" pitchFamily="34" charset="0"/>
+                          <a:ea typeface="맑은 고딕" pitchFamily="34" charset="-122"/>
+                          <a:cs typeface="맑은 고딕" pitchFamily="34" charset="-120"/>
+                        </a:rPr>
+                        <a:t>에어비앤비 본사</a:t>
+                      </a:r>
+                      <a:endParaRPr lang="en-US" sz="900" dirty="0">
+                        <a:latin typeface="맑은 고딕" charset="0"/>
+                        <a:ea typeface="맑은 고딕" charset="0"/>
+                        <a:cs typeface="맑은 고딕" charset="0"/>
+                      </a:endParaRPr>
+                    </a:p>
+                  </a:txBody>
+                  <a:tcPr marL="36576" marR="36576" marT="36576" marB="36576" anchor="ctr">
+                    <a:lnL w="9525" cap="flat" cmpd="sng" algn="ctr">
+                      <a:solidFill>
+                        <a:srgbClr val="D9D9D9"/>
+                      </a:solidFill>
+                      <a:prstDash val="solid"/>
+                      <a:round/>
+                      <a:headEnd type="none" w="med" len="med"/>
+                      <a:tailEnd type="none" w="med" len="med"/>
+                    </a:lnL>
+                    <a:lnR w="9525" cap="flat" cmpd="sng" algn="ctr">
+                      <a:solidFill>
+                        <a:srgbClr val="D9D9D9"/>
+                      </a:solidFill>
+                      <a:prstDash val="solid"/>
+                      <a:round/>
+                      <a:headEnd type="none" w="med" len="med"/>
+                      <a:tailEnd type="none" w="med" len="med"/>
+                    </a:lnR>
+                    <a:lnT w="9525" cap="flat" cmpd="sng" algn="ctr">
+                      <a:solidFill>
+                        <a:srgbClr val="D9D9D9"/>
+                      </a:solidFill>
+                      <a:prstDash val="solid"/>
+                      <a:round/>
+                      <a:headEnd type="none" w="med" len="med"/>
+                      <a:tailEnd type="none" w="med" len="med"/>
+                    </a:lnT>
+                    <a:lnB w="9525" cap="flat" cmpd="sng" algn="ctr">
+                      <a:solidFill>
+                        <a:srgbClr val="D9D9D9"/>
+                      </a:solidFill>
+                      <a:prstDash val="solid"/>
+                      <a:round/>
+                      <a:headEnd type="none" w="med" len="med"/>
+                      <a:tailEnd type="none" w="med" len="med"/>
+                    </a:lnB>
+                  </a:tcPr>
+                </a:tc>
+                <a:tc>
+                  <a:txBody>
+                    <a:bodyPr/>
+                    <a:lstStyle/>
+                    <a:p>
+                      <a:pPr algn="l" indent="0" marL="0">
+                        <a:buNone/>
+                      </a:pPr>
+                      <a:r>
+                        <a:rPr lang="en-US" sz="900" dirty="0">
+                          <a:solidFill>
+                            <a:schemeClr val="tx1"/>
+                          </a:solidFill>
+                          <a:latin typeface="맑은 고딕" pitchFamily="34" charset="0"/>
+                          <a:ea typeface="맑은 고딕" pitchFamily="34" charset="-122"/>
+                          <a:cs typeface="맑은 고딕" pitchFamily="34" charset="-120"/>
+                        </a:rPr>
+                        <a:t>Steve Jurvetson</a:t>
+                      </a:r>
+                      <a:endParaRPr lang="en-US" sz="900" dirty="0">
+                        <a:latin typeface="맑은 고딕" charset="0"/>
+                        <a:ea typeface="맑은 고딕" charset="0"/>
+                        <a:cs typeface="맑은 고딕" charset="0"/>
+                      </a:endParaRPr>
+                    </a:p>
+                  </a:txBody>
+                  <a:tcPr marL="36576" marR="36576" marT="36576" marB="36576" anchor="ctr">
+                    <a:lnL w="9525" cap="flat" cmpd="sng" algn="ctr">
+                      <a:solidFill>
+                        <a:srgbClr val="D9D9D9"/>
+                      </a:solidFill>
+                      <a:prstDash val="solid"/>
+                      <a:round/>
+                      <a:headEnd type="none" w="med" len="med"/>
+                      <a:tailEnd type="none" w="med" len="med"/>
+                    </a:lnL>
+                    <a:lnR w="9525" cap="flat" cmpd="sng" algn="ctr">
+                      <a:solidFill>
+                        <a:srgbClr val="D9D9D9"/>
+                      </a:solidFill>
+                      <a:prstDash val="solid"/>
+                      <a:round/>
+                      <a:headEnd type="none" w="med" len="med"/>
+                      <a:tailEnd type="none" w="med" len="med"/>
+                    </a:lnR>
+                    <a:lnT w="9525" cap="flat" cmpd="sng" algn="ctr">
+                      <a:solidFill>
+                        <a:srgbClr val="D9D9D9"/>
+                      </a:solidFill>
+                      <a:prstDash val="solid"/>
+                      <a:round/>
+                      <a:headEnd type="none" w="med" len="med"/>
+                      <a:tailEnd type="none" w="med" len="med"/>
+                    </a:lnT>
+                    <a:lnB w="9525" cap="flat" cmpd="sng" algn="ctr">
+                      <a:solidFill>
+                        <a:srgbClr val="D9D9D9"/>
+                      </a:solidFill>
+                      <a:prstDash val="solid"/>
+                      <a:round/>
+                      <a:headEnd type="none" w="med" len="med"/>
+                      <a:tailEnd type="none" w="med" len="med"/>
+                    </a:lnB>
+                  </a:tcPr>
+                </a:tc>
+                <a:tc>
+                  <a:txBody>
+                    <a:bodyPr/>
+                    <a:lstStyle/>
+                    <a:p>
+                      <a:pPr algn="l" indent="0" marL="0">
+                        <a:buNone/>
+                      </a:pPr>
+                      <a:r>
+                        <a:rPr lang="en-US" sz="900" dirty="0">
+                          <a:solidFill>
+                            <a:schemeClr val="tx1"/>
+                          </a:solidFill>
+                          <a:latin typeface="맑은 고딕" pitchFamily="34" charset="0"/>
+                          <a:ea typeface="맑은 고딕" pitchFamily="34" charset="-122"/>
+                          <a:cs typeface="맑은 고딕" pitchFamily="34" charset="-120"/>
+                        </a:rPr>
+                        <a:t>CC BY 2.0</a:t>
+                      </a:r>
+                      <a:endParaRPr lang="en-US" sz="900" dirty="0">
+                        <a:latin typeface="맑은 고딕" charset="0"/>
+                        <a:ea typeface="맑은 고딕" charset="0"/>
+                        <a:cs typeface="맑은 고딕" charset="0"/>
+                      </a:endParaRPr>
+                    </a:p>
+                  </a:txBody>
+                  <a:tcPr marL="36576" marR="36576" marT="36576" marB="36576" anchor="ctr">
+                    <a:lnL w="9525" cap="flat" cmpd="sng" algn="ctr">
+                      <a:solidFill>
+                        <a:srgbClr val="D9D9D9"/>
+                      </a:solidFill>
+                      <a:prstDash val="solid"/>
+                      <a:round/>
+                      <a:headEnd type="none" w="med" len="med"/>
+                      <a:tailEnd type="none" w="med" len="med"/>
+                    </a:lnL>
+                    <a:lnR w="9525" cap="flat" cmpd="sng" algn="ctr">
+                      <a:solidFill>
+                        <a:srgbClr val="D9D9D9"/>
+                      </a:solidFill>
+                      <a:prstDash val="solid"/>
+                      <a:round/>
+                      <a:headEnd type="none" w="med" len="med"/>
+                      <a:tailEnd type="none" w="med" len="med"/>
+                    </a:lnR>
+                    <a:lnT w="9525" cap="flat" cmpd="sng" algn="ctr">
+                      <a:solidFill>
+                        <a:srgbClr val="D9D9D9"/>
+                      </a:solidFill>
+                      <a:prstDash val="solid"/>
+                      <a:round/>
+                      <a:headEnd type="none" w="med" len="med"/>
+                      <a:tailEnd type="none" w="med" len="med"/>
+                    </a:lnT>
+                    <a:lnB w="9525" cap="flat" cmpd="sng" algn="ctr">
+                      <a:solidFill>
+                        <a:srgbClr val="D9D9D9"/>
+                      </a:solidFill>
+                      <a:prstDash val="solid"/>
+                      <a:round/>
+                      <a:headEnd type="none" w="med" len="med"/>
+                      <a:tailEnd type="none" w="med" len="med"/>
+                    </a:lnB>
+                  </a:tcPr>
+                </a:tc>
+              </a:tr>
+              <a:tr h="310896">
+                <a:tc>
+                  <a:txBody>
+                    <a:bodyPr/>
+                    <a:lstStyle/>
+                    <a:p>
+                      <a:pPr algn="ctr" indent="0" marL="0">
+                        <a:buNone/>
+                      </a:pPr>
+                      <a:r>
+                        <a:rPr lang="en-US" sz="900" dirty="0">
+                          <a:solidFill>
+                            <a:schemeClr val="tx1"/>
+                          </a:solidFill>
+                          <a:latin typeface="맑은 고딕" pitchFamily="34" charset="0"/>
+                          <a:ea typeface="맑은 고딕" pitchFamily="34" charset="-122"/>
+                          <a:cs typeface="맑은 고딕" pitchFamily="34" charset="-120"/>
+                        </a:rPr>
+                        <a:t>15</a:t>
+                      </a:r>
+                      <a:endParaRPr lang="en-US" sz="900" dirty="0">
+                        <a:latin typeface="맑은 고딕" charset="0"/>
+                        <a:ea typeface="맑은 고딕" charset="0"/>
+                        <a:cs typeface="맑은 고딕" charset="0"/>
+                      </a:endParaRPr>
+                    </a:p>
+                  </a:txBody>
+                  <a:tcPr marL="36576" marR="36576" marT="36576" marB="36576" anchor="ctr">
+                    <a:lnL w="9525" cap="flat" cmpd="sng" algn="ctr">
+                      <a:solidFill>
+                        <a:srgbClr val="D9D9D9"/>
+                      </a:solidFill>
+                      <a:prstDash val="solid"/>
+                      <a:round/>
+                      <a:headEnd type="none" w="med" len="med"/>
+                      <a:tailEnd type="none" w="med" len="med"/>
+                    </a:lnL>
+                    <a:lnR w="9525" cap="flat" cmpd="sng" algn="ctr">
+                      <a:solidFill>
+                        <a:srgbClr val="D9D9D9"/>
+                      </a:solidFill>
+                      <a:prstDash val="solid"/>
+                      <a:round/>
+                      <a:headEnd type="none" w="med" len="med"/>
+                      <a:tailEnd type="none" w="med" len="med"/>
+                    </a:lnR>
+                    <a:lnT w="9525" cap="flat" cmpd="sng" algn="ctr">
+                      <a:solidFill>
+                        <a:srgbClr val="D9D9D9"/>
+                      </a:solidFill>
+                      <a:prstDash val="solid"/>
+                      <a:round/>
+                      <a:headEnd type="none" w="med" len="med"/>
+                      <a:tailEnd type="none" w="med" len="med"/>
+                    </a:lnT>
+                    <a:lnB w="9525" cap="flat" cmpd="sng" algn="ctr">
+                      <a:solidFill>
+                        <a:srgbClr val="D9D9D9"/>
+                      </a:solidFill>
+                      <a:prstDash val="solid"/>
+                      <a:round/>
+                      <a:headEnd type="none" w="med" len="med"/>
+                      <a:tailEnd type="none" w="med" len="med"/>
+                    </a:lnB>
+                  </a:tcPr>
+                </a:tc>
+                <a:tc>
+                  <a:txBody>
+                    <a:bodyPr/>
+                    <a:lstStyle/>
+                    <a:p>
+                      <a:pPr algn="l" indent="0" marL="0">
+                        <a:buNone/>
+                      </a:pPr>
+                      <a:r>
+                        <a:rPr lang="en-US" sz="900" dirty="0">
+                          <a:solidFill>
+                            <a:schemeClr val="tx1"/>
+                          </a:solidFill>
+                          <a:latin typeface="맑은 고딕" pitchFamily="34" charset="0"/>
+                          <a:ea typeface="맑은 고딕" pitchFamily="34" charset="-122"/>
+                          <a:cs typeface="맑은 고딕" pitchFamily="34" charset="-120"/>
+                        </a:rPr>
+                        <a:t>네스프레소 버츄오 머신</a:t>
+                      </a:r>
+                      <a:endParaRPr lang="en-US" sz="900" dirty="0">
+                        <a:latin typeface="맑은 고딕" charset="0"/>
+                        <a:ea typeface="맑은 고딕" charset="0"/>
+                        <a:cs typeface="맑은 고딕" charset="0"/>
+                      </a:endParaRPr>
+                    </a:p>
+                  </a:txBody>
+                  <a:tcPr marL="36576" marR="36576" marT="36576" marB="36576" anchor="ctr">
+                    <a:lnL w="9525" cap="flat" cmpd="sng" algn="ctr">
+                      <a:solidFill>
+                        <a:srgbClr val="D9D9D9"/>
+                      </a:solidFill>
+                      <a:prstDash val="solid"/>
+                      <a:round/>
+                      <a:headEnd type="none" w="med" len="med"/>
+                      <a:tailEnd type="none" w="med" len="med"/>
+                    </a:lnL>
+                    <a:lnR w="9525" cap="flat" cmpd="sng" algn="ctr">
+                      <a:solidFill>
+                        <a:srgbClr val="D9D9D9"/>
+                      </a:solidFill>
+                      <a:prstDash val="solid"/>
+                      <a:round/>
+                      <a:headEnd type="none" w="med" len="med"/>
+                      <a:tailEnd type="none" w="med" len="med"/>
+                    </a:lnR>
+                    <a:lnT w="9525" cap="flat" cmpd="sng" algn="ctr">
+                      <a:solidFill>
+                        <a:srgbClr val="D9D9D9"/>
+                      </a:solidFill>
+                      <a:prstDash val="solid"/>
+                      <a:round/>
+                      <a:headEnd type="none" w="med" len="med"/>
+                      <a:tailEnd type="none" w="med" len="med"/>
+                    </a:lnT>
+                    <a:lnB w="9525" cap="flat" cmpd="sng" algn="ctr">
+                      <a:solidFill>
+                        <a:srgbClr val="D9D9D9"/>
+                      </a:solidFill>
+                      <a:prstDash val="solid"/>
+                      <a:round/>
+                      <a:headEnd type="none" w="med" len="med"/>
+                      <a:tailEnd type="none" w="med" len="med"/>
+                    </a:lnB>
+                  </a:tcPr>
+                </a:tc>
+                <a:tc>
+                  <a:txBody>
+                    <a:bodyPr/>
+                    <a:lstStyle/>
+                    <a:p>
+                      <a:pPr algn="l" indent="0" marL="0">
+                        <a:buNone/>
+                      </a:pPr>
+                      <a:r>
+                        <a:rPr lang="en-US" sz="900" dirty="0">
+                          <a:solidFill>
+                            <a:schemeClr val="tx1"/>
+                          </a:solidFill>
+                          <a:latin typeface="맑은 고딕" pitchFamily="34" charset="0"/>
+                          <a:ea typeface="맑은 고딕" pitchFamily="34" charset="-122"/>
+                          <a:cs typeface="맑은 고딕" pitchFamily="34" charset="-120"/>
+                        </a:rPr>
+                        <a:t>bjoern (Hamburg)</a:t>
+                      </a:r>
+                      <a:endParaRPr lang="en-US" sz="900" dirty="0">
+                        <a:latin typeface="맑은 고딕" charset="0"/>
+                        <a:ea typeface="맑은 고딕" charset="0"/>
+                        <a:cs typeface="맑은 고딕" charset="0"/>
+                      </a:endParaRPr>
+                    </a:p>
+                  </a:txBody>
+                  <a:tcPr marL="36576" marR="36576" marT="36576" marB="36576" anchor="ctr">
+                    <a:lnL w="9525" cap="flat" cmpd="sng" algn="ctr">
+                      <a:solidFill>
+                        <a:srgbClr val="D9D9D9"/>
+                      </a:solidFill>
+                      <a:prstDash val="solid"/>
+                      <a:round/>
+                      <a:headEnd type="none" w="med" len="med"/>
+                      <a:tailEnd type="none" w="med" len="med"/>
+                    </a:lnL>
+                    <a:lnR w="9525" cap="flat" cmpd="sng" algn="ctr">
+                      <a:solidFill>
+                        <a:srgbClr val="D9D9D9"/>
+                      </a:solidFill>
+                      <a:prstDash val="solid"/>
+                      <a:round/>
+                      <a:headEnd type="none" w="med" len="med"/>
+                      <a:tailEnd type="none" w="med" len="med"/>
+                    </a:lnR>
+                    <a:lnT w="9525" cap="flat" cmpd="sng" algn="ctr">
+                      <a:solidFill>
+                        <a:srgbClr val="D9D9D9"/>
+                      </a:solidFill>
+                      <a:prstDash val="solid"/>
+                      <a:round/>
+                      <a:headEnd type="none" w="med" len="med"/>
+                      <a:tailEnd type="none" w="med" len="med"/>
+                    </a:lnT>
+                    <a:lnB w="9525" cap="flat" cmpd="sng" algn="ctr">
+                      <a:solidFill>
+                        <a:srgbClr val="D9D9D9"/>
+                      </a:solidFill>
+                      <a:prstDash val="solid"/>
+                      <a:round/>
+                      <a:headEnd type="none" w="med" len="med"/>
+                      <a:tailEnd type="none" w="med" len="med"/>
+                    </a:lnB>
+                  </a:tcPr>
+                </a:tc>
+                <a:tc>
+                  <a:txBody>
+                    <a:bodyPr/>
+                    <a:lstStyle/>
+                    <a:p>
+                      <a:pPr algn="l" indent="0" marL="0">
+                        <a:buNone/>
+                      </a:pPr>
+                      <a:r>
+                        <a:rPr lang="en-US" sz="900" dirty="0">
+                          <a:solidFill>
+                            <a:schemeClr val="tx1"/>
+                          </a:solidFill>
+                          <a:latin typeface="맑은 고딕" pitchFamily="34" charset="0"/>
+                          <a:ea typeface="맑은 고딕" pitchFamily="34" charset="-122"/>
+                          <a:cs typeface="맑은 고딕" pitchFamily="34" charset="-120"/>
+                        </a:rPr>
+                        <a:t>CC BY 2.0</a:t>
+                      </a:r>
+                      <a:endParaRPr lang="en-US" sz="900" dirty="0">
+                        <a:latin typeface="맑은 고딕" charset="0"/>
+                        <a:ea typeface="맑은 고딕" charset="0"/>
+                        <a:cs typeface="맑은 고딕" charset="0"/>
+                      </a:endParaRPr>
+                    </a:p>
+                  </a:txBody>
+                  <a:tcPr marL="36576" marR="36576" marT="36576" marB="36576" anchor="ctr">
+                    <a:lnL w="9525" cap="flat" cmpd="sng" algn="ctr">
+                      <a:solidFill>
+                        <a:srgbClr val="D9D9D9"/>
+                      </a:solidFill>
+                      <a:prstDash val="solid"/>
+                      <a:round/>
+                      <a:headEnd type="none" w="med" len="med"/>
+                      <a:tailEnd type="none" w="med" len="med"/>
+                    </a:lnL>
+                    <a:lnR w="9525" cap="flat" cmpd="sng" algn="ctr">
+                      <a:solidFill>
+                        <a:srgbClr val="D9D9D9"/>
+                      </a:solidFill>
+                      <a:prstDash val="solid"/>
+                      <a:round/>
+                      <a:headEnd type="none" w="med" len="med"/>
+                      <a:tailEnd type="none" w="med" len="med"/>
+                    </a:lnR>
+                    <a:lnT w="9525" cap="flat" cmpd="sng" algn="ctr">
+                      <a:solidFill>
+                        <a:srgbClr val="D9D9D9"/>
+                      </a:solidFill>
+                      <a:prstDash val="solid"/>
+                      <a:round/>
+                      <a:headEnd type="none" w="med" len="med"/>
+                      <a:tailEnd type="none" w="med" len="med"/>
+                    </a:lnT>
+                    <a:lnB w="9525" cap="flat" cmpd="sng" algn="ctr">
+                      <a:solidFill>
+                        <a:srgbClr val="D9D9D9"/>
+                      </a:solidFill>
+                      <a:prstDash val="solid"/>
+                      <a:round/>
+                      <a:headEnd type="none" w="med" len="med"/>
+                      <a:tailEnd type="none" w="med" len="med"/>
+                    </a:lnB>
+                  </a:tcPr>
+                </a:tc>
+              </a:tr>
+              <a:tr h="310896">
+                <a:tc>
+                  <a:txBody>
+                    <a:bodyPr/>
+                    <a:lstStyle/>
+                    <a:p>
+                      <a:pPr algn="ctr" indent="0" marL="0">
+                        <a:buNone/>
+                      </a:pPr>
+                      <a:r>
+                        <a:rPr lang="en-US" sz="900" dirty="0">
+                          <a:solidFill>
+                            <a:schemeClr val="tx1"/>
+                          </a:solidFill>
+                          <a:latin typeface="맑은 고딕" pitchFamily="34" charset="0"/>
+                          <a:ea typeface="맑은 고딕" pitchFamily="34" charset="-122"/>
+                          <a:cs typeface="맑은 고딕" pitchFamily="34" charset="-120"/>
+                        </a:rPr>
+                        <a:t>17</a:t>
+                      </a:r>
+                      <a:endParaRPr lang="en-US" sz="900" dirty="0">
+                        <a:latin typeface="맑은 고딕" charset="0"/>
+                        <a:ea typeface="맑은 고딕" charset="0"/>
+                        <a:cs typeface="맑은 고딕" charset="0"/>
+                      </a:endParaRPr>
+                    </a:p>
+                  </a:txBody>
+                  <a:tcPr marL="36576" marR="36576" marT="36576" marB="36576" anchor="ctr">
+                    <a:lnL w="9525" cap="flat" cmpd="sng" algn="ctr">
+                      <a:solidFill>
+                        <a:srgbClr val="D9D9D9"/>
+                      </a:solidFill>
+                      <a:prstDash val="solid"/>
+                      <a:round/>
+                      <a:headEnd type="none" w="med" len="med"/>
+                      <a:tailEnd type="none" w="med" len="med"/>
+                    </a:lnL>
+                    <a:lnR w="9525" cap="flat" cmpd="sng" algn="ctr">
+                      <a:solidFill>
+                        <a:srgbClr val="D9D9D9"/>
+                      </a:solidFill>
+                      <a:prstDash val="solid"/>
+                      <a:round/>
+                      <a:headEnd type="none" w="med" len="med"/>
+                      <a:tailEnd type="none" w="med" len="med"/>
+                    </a:lnR>
+                    <a:lnT w="9525" cap="flat" cmpd="sng" algn="ctr">
+                      <a:solidFill>
+                        <a:srgbClr val="D9D9D9"/>
+                      </a:solidFill>
+                      <a:prstDash val="solid"/>
+                      <a:round/>
+                      <a:headEnd type="none" w="med" len="med"/>
+                      <a:tailEnd type="none" w="med" len="med"/>
+                    </a:lnT>
+                    <a:lnB w="9525" cap="flat" cmpd="sng" algn="ctr">
+                      <a:solidFill>
+                        <a:srgbClr val="D9D9D9"/>
+                      </a:solidFill>
+                      <a:prstDash val="solid"/>
+                      <a:round/>
+                      <a:headEnd type="none" w="med" len="med"/>
+                      <a:tailEnd type="none" w="med" len="med"/>
+                    </a:lnB>
+                  </a:tcPr>
+                </a:tc>
+                <a:tc>
+                  <a:txBody>
+                    <a:bodyPr/>
+                    <a:lstStyle/>
+                    <a:p>
+                      <a:pPr algn="l" indent="0" marL="0">
+                        <a:buNone/>
+                      </a:pPr>
+                      <a:r>
+                        <a:rPr lang="en-US" sz="900" dirty="0">
+                          <a:solidFill>
+                            <a:schemeClr val="tx1"/>
+                          </a:solidFill>
+                          <a:latin typeface="맑은 고딕" pitchFamily="34" charset="0"/>
+                          <a:ea typeface="맑은 고딕" pitchFamily="34" charset="-122"/>
+                          <a:cs typeface="맑은 고딕" pitchFamily="34" charset="-120"/>
+                        </a:rPr>
+                        <a:t>네스프레소 캡슐</a:t>
+                      </a:r>
+                      <a:endParaRPr lang="en-US" sz="900" dirty="0">
+                        <a:latin typeface="맑은 고딕" charset="0"/>
+                        <a:ea typeface="맑은 고딕" charset="0"/>
+                        <a:cs typeface="맑은 고딕" charset="0"/>
+                      </a:endParaRPr>
+                    </a:p>
+                  </a:txBody>
+                  <a:tcPr marL="36576" marR="36576" marT="36576" marB="36576" anchor="ctr">
+                    <a:lnL w="9525" cap="flat" cmpd="sng" algn="ctr">
+                      <a:solidFill>
+                        <a:srgbClr val="D9D9D9"/>
+                      </a:solidFill>
+                      <a:prstDash val="solid"/>
+                      <a:round/>
+                      <a:headEnd type="none" w="med" len="med"/>
+                      <a:tailEnd type="none" w="med" len="med"/>
+                    </a:lnL>
+                    <a:lnR w="9525" cap="flat" cmpd="sng" algn="ctr">
+                      <a:solidFill>
+                        <a:srgbClr val="D9D9D9"/>
+                      </a:solidFill>
+                      <a:prstDash val="solid"/>
+                      <a:round/>
+                      <a:headEnd type="none" w="med" len="med"/>
+                      <a:tailEnd type="none" w="med" len="med"/>
+                    </a:lnR>
+                    <a:lnT w="9525" cap="flat" cmpd="sng" algn="ctr">
+                      <a:solidFill>
+                        <a:srgbClr val="D9D9D9"/>
+                      </a:solidFill>
+                      <a:prstDash val="solid"/>
+                      <a:round/>
+                      <a:headEnd type="none" w="med" len="med"/>
+                      <a:tailEnd type="none" w="med" len="med"/>
+                    </a:lnT>
+                    <a:lnB w="9525" cap="flat" cmpd="sng" algn="ctr">
+                      <a:solidFill>
+                        <a:srgbClr val="D9D9D9"/>
+                      </a:solidFill>
+                      <a:prstDash val="solid"/>
+                      <a:round/>
+                      <a:headEnd type="none" w="med" len="med"/>
+                      <a:tailEnd type="none" w="med" len="med"/>
+                    </a:lnB>
+                  </a:tcPr>
+                </a:tc>
+                <a:tc>
+                  <a:txBody>
+                    <a:bodyPr/>
+                    <a:lstStyle/>
+                    <a:p>
+                      <a:pPr algn="l" indent="0" marL="0">
+                        <a:buNone/>
+                      </a:pPr>
+                      <a:r>
+                        <a:rPr lang="en-US" sz="900" dirty="0">
+                          <a:solidFill>
+                            <a:schemeClr val="tx1"/>
+                          </a:solidFill>
+                          <a:latin typeface="맑은 고딕" pitchFamily="34" charset="0"/>
+                          <a:ea typeface="맑은 고딕" pitchFamily="34" charset="-122"/>
+                          <a:cs typeface="맑은 고딕" pitchFamily="34" charset="-120"/>
+                        </a:rPr>
+                        <a:t>Nicolas Richoffer</a:t>
+                      </a:r>
+                      <a:endParaRPr lang="en-US" sz="900" dirty="0">
+                        <a:latin typeface="맑은 고딕" charset="0"/>
+                        <a:ea typeface="맑은 고딕" charset="0"/>
+                        <a:cs typeface="맑은 고딕" charset="0"/>
+                      </a:endParaRPr>
+                    </a:p>
+                  </a:txBody>
+                  <a:tcPr marL="36576" marR="36576" marT="36576" marB="36576" anchor="ctr">
+                    <a:lnL w="9525" cap="flat" cmpd="sng" algn="ctr">
+                      <a:solidFill>
+                        <a:srgbClr val="D9D9D9"/>
+                      </a:solidFill>
+                      <a:prstDash val="solid"/>
+                      <a:round/>
+                      <a:headEnd type="none" w="med" len="med"/>
+                      <a:tailEnd type="none" w="med" len="med"/>
+                    </a:lnL>
+                    <a:lnR w="9525" cap="flat" cmpd="sng" algn="ctr">
+                      <a:solidFill>
+                        <a:srgbClr val="D9D9D9"/>
+                      </a:solidFill>
+                      <a:prstDash val="solid"/>
+                      <a:round/>
+                      <a:headEnd type="none" w="med" len="med"/>
+                      <a:tailEnd type="none" w="med" len="med"/>
+                    </a:lnR>
+                    <a:lnT w="9525" cap="flat" cmpd="sng" algn="ctr">
+                      <a:solidFill>
+                        <a:srgbClr val="D9D9D9"/>
+                      </a:solidFill>
+                      <a:prstDash val="solid"/>
+                      <a:round/>
+                      <a:headEnd type="none" w="med" len="med"/>
+                      <a:tailEnd type="none" w="med" len="med"/>
+                    </a:lnT>
+                    <a:lnB w="9525" cap="flat" cmpd="sng" algn="ctr">
+                      <a:solidFill>
+                        <a:srgbClr val="D9D9D9"/>
+                      </a:solidFill>
+                      <a:prstDash val="solid"/>
+                      <a:round/>
+                      <a:headEnd type="none" w="med" len="med"/>
+                      <a:tailEnd type="none" w="med" len="med"/>
+                    </a:lnB>
+                  </a:tcPr>
+                </a:tc>
+                <a:tc>
+                  <a:txBody>
+                    <a:bodyPr/>
+                    <a:lstStyle/>
+                    <a:p>
+                      <a:pPr algn="l" indent="0" marL="0">
+                        <a:buNone/>
+                      </a:pPr>
+                      <a:r>
+                        <a:rPr lang="en-US" sz="900" dirty="0">
+                          <a:solidFill>
+                            <a:schemeClr val="tx1"/>
+                          </a:solidFill>
+                          <a:latin typeface="맑은 고딕" pitchFamily="34" charset="0"/>
+                          <a:ea typeface="맑은 고딕" pitchFamily="34" charset="-122"/>
+                          <a:cs typeface="맑은 고딕" pitchFamily="34" charset="-120"/>
+                        </a:rPr>
+                        <a:t>CC BY-SA 4.0</a:t>
+                      </a:r>
+                      <a:endParaRPr lang="en-US" sz="900" dirty="0">
+                        <a:latin typeface="맑은 고딕" charset="0"/>
+                        <a:ea typeface="맑은 고딕" charset="0"/>
+                        <a:cs typeface="맑은 고딕" charset="0"/>
+                      </a:endParaRPr>
+                    </a:p>
+                  </a:txBody>
+                  <a:tcPr marL="36576" marR="36576" marT="36576" marB="36576" anchor="ctr">
+                    <a:lnL w="9525" cap="flat" cmpd="sng" algn="ctr">
+                      <a:solidFill>
+                        <a:srgbClr val="D9D9D9"/>
+                      </a:solidFill>
+                      <a:prstDash val="solid"/>
+                      <a:round/>
+                      <a:headEnd type="none" w="med" len="med"/>
+                      <a:tailEnd type="none" w="med" len="med"/>
+                    </a:lnL>
+                    <a:lnR w="9525" cap="flat" cmpd="sng" algn="ctr">
+                      <a:solidFill>
+                        <a:srgbClr val="D9D9D9"/>
+                      </a:solidFill>
+                      <a:prstDash val="solid"/>
+                      <a:round/>
+                      <a:headEnd type="none" w="med" len="med"/>
+                      <a:tailEnd type="none" w="med" len="med"/>
+                    </a:lnR>
+                    <a:lnT w="9525" cap="flat" cmpd="sng" algn="ctr">
+                      <a:solidFill>
+                        <a:srgbClr val="D9D9D9"/>
+                      </a:solidFill>
+                      <a:prstDash val="solid"/>
+                      <a:round/>
+                      <a:headEnd type="none" w="med" len="med"/>
+                      <a:tailEnd type="none" w="med" len="med"/>
+                    </a:lnT>
+                    <a:lnB w="9525" cap="flat" cmpd="sng" algn="ctr">
+                      <a:solidFill>
+                        <a:srgbClr val="D9D9D9"/>
+                      </a:solidFill>
+                      <a:prstDash val="solid"/>
+                      <a:round/>
+                      <a:headEnd type="none" w="med" len="med"/>
+                      <a:tailEnd type="none" w="med" len="med"/>
+                    </a:lnB>
+                  </a:tcPr>
+                </a:tc>
+              </a:tr>
+              <a:tr h="310896">
+                <a:tc>
+                  <a:txBody>
+                    <a:bodyPr/>
+                    <a:lstStyle/>
+                    <a:p>
+                      <a:pPr algn="ctr" indent="0" marL="0">
+                        <a:buNone/>
+                      </a:pPr>
+                      <a:r>
+                        <a:rPr lang="en-US" sz="900" dirty="0">
+                          <a:solidFill>
+                            <a:schemeClr val="tx1"/>
+                          </a:solidFill>
+                          <a:latin typeface="맑은 고딕" pitchFamily="34" charset="0"/>
+                          <a:ea typeface="맑은 고딕" pitchFamily="34" charset="-122"/>
+                          <a:cs typeface="맑은 고딕" pitchFamily="34" charset="-120"/>
+                        </a:rPr>
+                        <a:t>18</a:t>
+                      </a:r>
+                      <a:endParaRPr lang="en-US" sz="900" dirty="0">
+                        <a:latin typeface="맑은 고딕" charset="0"/>
+                        <a:ea typeface="맑은 고딕" charset="0"/>
+                        <a:cs typeface="맑은 고딕" charset="0"/>
+                      </a:endParaRPr>
+                    </a:p>
+                  </a:txBody>
+                  <a:tcPr marL="36576" marR="36576" marT="36576" marB="36576" anchor="ctr">
+                    <a:lnL w="9525" cap="flat" cmpd="sng" algn="ctr">
+                      <a:solidFill>
+                        <a:srgbClr val="D9D9D9"/>
+                      </a:solidFill>
+                      <a:prstDash val="solid"/>
+                      <a:round/>
+                      <a:headEnd type="none" w="med" len="med"/>
+                      <a:tailEnd type="none" w="med" len="med"/>
+                    </a:lnL>
+                    <a:lnR w="9525" cap="flat" cmpd="sng" algn="ctr">
+                      <a:solidFill>
+                        <a:srgbClr val="D9D9D9"/>
+                      </a:solidFill>
+                      <a:prstDash val="solid"/>
+                      <a:round/>
+                      <a:headEnd type="none" w="med" len="med"/>
+                      <a:tailEnd type="none" w="med" len="med"/>
+                    </a:lnR>
+                    <a:lnT w="9525" cap="flat" cmpd="sng" algn="ctr">
+                      <a:solidFill>
+                        <a:srgbClr val="D9D9D9"/>
+                      </a:solidFill>
+                      <a:prstDash val="solid"/>
+                      <a:round/>
+                      <a:headEnd type="none" w="med" len="med"/>
+                      <a:tailEnd type="none" w="med" len="med"/>
+                    </a:lnT>
+                    <a:lnB w="9525" cap="flat" cmpd="sng" algn="ctr">
+                      <a:solidFill>
+                        <a:srgbClr val="D9D9D9"/>
+                      </a:solidFill>
+                      <a:prstDash val="solid"/>
+                      <a:round/>
+                      <a:headEnd type="none" w="med" len="med"/>
+                      <a:tailEnd type="none" w="med" len="med"/>
+                    </a:lnB>
+                  </a:tcPr>
+                </a:tc>
+                <a:tc>
+                  <a:txBody>
+                    <a:bodyPr/>
+                    <a:lstStyle/>
+                    <a:p>
+                      <a:pPr algn="l" indent="0" marL="0">
+                        <a:buNone/>
+                      </a:pPr>
+                      <a:r>
+                        <a:rPr lang="en-US" sz="900" dirty="0">
+                          <a:solidFill>
+                            <a:schemeClr val="tx1"/>
+                          </a:solidFill>
+                          <a:latin typeface="맑은 고딕" pitchFamily="34" charset="0"/>
+                          <a:ea typeface="맑은 고딕" pitchFamily="34" charset="-122"/>
+                          <a:cs typeface="맑은 고딕" pitchFamily="34" charset="-120"/>
+                        </a:rPr>
+                        <a:t>웹밴 본사(2001.9)</a:t>
+                      </a:r>
+                      <a:endParaRPr lang="en-US" sz="900" dirty="0">
+                        <a:latin typeface="맑은 고딕" charset="0"/>
+                        <a:ea typeface="맑은 고딕" charset="0"/>
+                        <a:cs typeface="맑은 고딕" charset="0"/>
+                      </a:endParaRPr>
+                    </a:p>
+                  </a:txBody>
+                  <a:tcPr marL="36576" marR="36576" marT="36576" marB="36576" anchor="ctr">
+                    <a:lnL w="9525" cap="flat" cmpd="sng" algn="ctr">
+                      <a:solidFill>
+                        <a:srgbClr val="D9D9D9"/>
+                      </a:solidFill>
+                      <a:prstDash val="solid"/>
+                      <a:round/>
+                      <a:headEnd type="none" w="med" len="med"/>
+                      <a:tailEnd type="none" w="med" len="med"/>
+                    </a:lnL>
+                    <a:lnR w="9525" cap="flat" cmpd="sng" algn="ctr">
+                      <a:solidFill>
+                        <a:srgbClr val="D9D9D9"/>
+                      </a:solidFill>
+                      <a:prstDash val="solid"/>
+                      <a:round/>
+                      <a:headEnd type="none" w="med" len="med"/>
+                      <a:tailEnd type="none" w="med" len="med"/>
+                    </a:lnR>
+                    <a:lnT w="9525" cap="flat" cmpd="sng" algn="ctr">
+                      <a:solidFill>
+                        <a:srgbClr val="D9D9D9"/>
+                      </a:solidFill>
+                      <a:prstDash val="solid"/>
+                      <a:round/>
+                      <a:headEnd type="none" w="med" len="med"/>
+                      <a:tailEnd type="none" w="med" len="med"/>
+                    </a:lnT>
+                    <a:lnB w="9525" cap="flat" cmpd="sng" algn="ctr">
+                      <a:solidFill>
+                        <a:srgbClr val="D9D9D9"/>
+                      </a:solidFill>
+                      <a:prstDash val="solid"/>
+                      <a:round/>
+                      <a:headEnd type="none" w="med" len="med"/>
+                      <a:tailEnd type="none" w="med" len="med"/>
+                    </a:lnB>
+                  </a:tcPr>
+                </a:tc>
+                <a:tc>
+                  <a:txBody>
+                    <a:bodyPr/>
+                    <a:lstStyle/>
+                    <a:p>
+                      <a:pPr algn="l" indent="0" marL="0">
+                        <a:buNone/>
+                      </a:pPr>
+                      <a:r>
+                        <a:rPr lang="en-US" sz="900" dirty="0">
+                          <a:solidFill>
+                            <a:schemeClr val="tx1"/>
+                          </a:solidFill>
+                          <a:latin typeface="맑은 고딕" pitchFamily="34" charset="0"/>
+                          <a:ea typeface="맑은 고딕" pitchFamily="34" charset="-122"/>
+                          <a:cs typeface="맑은 고딕" pitchFamily="34" charset="-120"/>
+                        </a:rPr>
+                        <a:t>Pal Danyi</a:t>
+                      </a:r>
+                      <a:endParaRPr lang="en-US" sz="900" dirty="0">
+                        <a:latin typeface="맑은 고딕" charset="0"/>
+                        <a:ea typeface="맑은 고딕" charset="0"/>
+                        <a:cs typeface="맑은 고딕" charset="0"/>
+                      </a:endParaRPr>
+                    </a:p>
+                  </a:txBody>
+                  <a:tcPr marL="36576" marR="36576" marT="36576" marB="36576" anchor="ctr">
+                    <a:lnL w="9525" cap="flat" cmpd="sng" algn="ctr">
+                      <a:solidFill>
+                        <a:srgbClr val="D9D9D9"/>
+                      </a:solidFill>
+                      <a:prstDash val="solid"/>
+                      <a:round/>
+                      <a:headEnd type="none" w="med" len="med"/>
+                      <a:tailEnd type="none" w="med" len="med"/>
+                    </a:lnL>
+                    <a:lnR w="9525" cap="flat" cmpd="sng" algn="ctr">
+                      <a:solidFill>
+                        <a:srgbClr val="D9D9D9"/>
+                      </a:solidFill>
+                      <a:prstDash val="solid"/>
+                      <a:round/>
+                      <a:headEnd type="none" w="med" len="med"/>
+                      <a:tailEnd type="none" w="med" len="med"/>
+                    </a:lnR>
+                    <a:lnT w="9525" cap="flat" cmpd="sng" algn="ctr">
+                      <a:solidFill>
+                        <a:srgbClr val="D9D9D9"/>
+                      </a:solidFill>
+                      <a:prstDash val="solid"/>
+                      <a:round/>
+                      <a:headEnd type="none" w="med" len="med"/>
+                      <a:tailEnd type="none" w="med" len="med"/>
+                    </a:lnT>
+                    <a:lnB w="9525" cap="flat" cmpd="sng" algn="ctr">
+                      <a:solidFill>
+                        <a:srgbClr val="D9D9D9"/>
+                      </a:solidFill>
+                      <a:prstDash val="solid"/>
+                      <a:round/>
+                      <a:headEnd type="none" w="med" len="med"/>
+                      <a:tailEnd type="none" w="med" len="med"/>
+                    </a:lnB>
+                  </a:tcPr>
+                </a:tc>
+                <a:tc>
+                  <a:txBody>
+                    <a:bodyPr/>
+                    <a:lstStyle/>
+                    <a:p>
+                      <a:pPr algn="l" indent="0" marL="0">
+                        <a:buNone/>
+                      </a:pPr>
+                      <a:r>
+                        <a:rPr lang="en-US" sz="900" dirty="0">
+                          <a:solidFill>
+                            <a:schemeClr val="tx1"/>
+                          </a:solidFill>
+                          <a:latin typeface="맑은 고딕" pitchFamily="34" charset="0"/>
+                          <a:ea typeface="맑은 고딕" pitchFamily="34" charset="-122"/>
+                          <a:cs typeface="맑은 고딕" pitchFamily="34" charset="-120"/>
+                        </a:rPr>
+                        <a:t>CC BY-SA 4.0</a:t>
+                      </a:r>
+                      <a:endParaRPr lang="en-US" sz="900" dirty="0">
+                        <a:latin typeface="맑은 고딕" charset="0"/>
+                        <a:ea typeface="맑은 고딕" charset="0"/>
+                        <a:cs typeface="맑은 고딕" charset="0"/>
+                      </a:endParaRPr>
+                    </a:p>
+                  </a:txBody>
+                  <a:tcPr marL="36576" marR="36576" marT="36576" marB="36576" anchor="ctr">
+                    <a:lnL w="9525" cap="flat" cmpd="sng" algn="ctr">
+                      <a:solidFill>
+                        <a:srgbClr val="D9D9D9"/>
+                      </a:solidFill>
+                      <a:prstDash val="solid"/>
+                      <a:round/>
+                      <a:headEnd type="none" w="med" len="med"/>
+                      <a:tailEnd type="none" w="med" len="med"/>
+                    </a:lnL>
+                    <a:lnR w="9525" cap="flat" cmpd="sng" algn="ctr">
+                      <a:solidFill>
+                        <a:srgbClr val="D9D9D9"/>
+                      </a:solidFill>
+                      <a:prstDash val="solid"/>
+                      <a:round/>
+                      <a:headEnd type="none" w="med" len="med"/>
+                      <a:tailEnd type="none" w="med" len="med"/>
+                    </a:lnR>
+                    <a:lnT w="9525" cap="flat" cmpd="sng" algn="ctr">
+                      <a:solidFill>
+                        <a:srgbClr val="D9D9D9"/>
+                      </a:solidFill>
+                      <a:prstDash val="solid"/>
+                      <a:round/>
+                      <a:headEnd type="none" w="med" len="med"/>
+                      <a:tailEnd type="none" w="med" len="med"/>
+                    </a:lnT>
+                    <a:lnB w="9525" cap="flat" cmpd="sng" algn="ctr">
+                      <a:solidFill>
+                        <a:srgbClr val="D9D9D9"/>
+                      </a:solidFill>
+                      <a:prstDash val="solid"/>
+                      <a:round/>
+                      <a:headEnd type="none" w="med" len="med"/>
+                      <a:tailEnd type="none" w="med" len="med"/>
+                    </a:lnB>
+                  </a:tcPr>
+                </a:tc>
+              </a:tr>
+              <a:tr h="310896">
+                <a:tc>
+                  <a:txBody>
+                    <a:bodyPr/>
+                    <a:lstStyle/>
+                    <a:p>
+                      <a:pPr algn="ctr" indent="0" marL="0">
+                        <a:buNone/>
+                      </a:pPr>
+                      <a:r>
+                        <a:rPr lang="en-US" sz="900" dirty="0">
+                          <a:solidFill>
+                            <a:schemeClr val="tx1"/>
+                          </a:solidFill>
+                          <a:latin typeface="맑은 고딕" pitchFamily="34" charset="0"/>
+                          <a:ea typeface="맑은 고딕" pitchFamily="34" charset="-122"/>
+                          <a:cs typeface="맑은 고딕" pitchFamily="34" charset="-120"/>
+                        </a:rPr>
+                        <a:t>19</a:t>
+                      </a:r>
+                      <a:endParaRPr lang="en-US" sz="900" dirty="0">
+                        <a:latin typeface="맑은 고딕" charset="0"/>
+                        <a:ea typeface="맑은 고딕" charset="0"/>
+                        <a:cs typeface="맑은 고딕" charset="0"/>
+                      </a:endParaRPr>
+                    </a:p>
+                  </a:txBody>
+                  <a:tcPr marL="36576" marR="36576" marT="36576" marB="36576" anchor="ctr">
+                    <a:lnL w="9525" cap="flat" cmpd="sng" algn="ctr">
+                      <a:solidFill>
+                        <a:srgbClr val="D9D9D9"/>
+                      </a:solidFill>
+                      <a:prstDash val="solid"/>
+                      <a:round/>
+                      <a:headEnd type="none" w="med" len="med"/>
+                      <a:tailEnd type="none" w="med" len="med"/>
+                    </a:lnL>
+                    <a:lnR w="9525" cap="flat" cmpd="sng" algn="ctr">
+                      <a:solidFill>
+                        <a:srgbClr val="D9D9D9"/>
+                      </a:solidFill>
+                      <a:prstDash val="solid"/>
+                      <a:round/>
+                      <a:headEnd type="none" w="med" len="med"/>
+                      <a:tailEnd type="none" w="med" len="med"/>
+                    </a:lnR>
+                    <a:lnT w="9525" cap="flat" cmpd="sng" algn="ctr">
+                      <a:solidFill>
+                        <a:srgbClr val="D9D9D9"/>
+                      </a:solidFill>
+                      <a:prstDash val="solid"/>
+                      <a:round/>
+                      <a:headEnd type="none" w="med" len="med"/>
+                      <a:tailEnd type="none" w="med" len="med"/>
+                    </a:lnT>
+                    <a:lnB w="9525" cap="flat" cmpd="sng" algn="ctr">
+                      <a:solidFill>
+                        <a:srgbClr val="D9D9D9"/>
+                      </a:solidFill>
+                      <a:prstDash val="solid"/>
+                      <a:round/>
+                      <a:headEnd type="none" w="med" len="med"/>
+                      <a:tailEnd type="none" w="med" len="med"/>
+                    </a:lnB>
+                  </a:tcPr>
+                </a:tc>
+                <a:tc>
+                  <a:txBody>
+                    <a:bodyPr/>
+                    <a:lstStyle/>
+                    <a:p>
+                      <a:pPr algn="l" indent="0" marL="0">
+                        <a:buNone/>
+                      </a:pPr>
+                      <a:r>
+                        <a:rPr lang="en-US" sz="900" dirty="0">
+                          <a:solidFill>
+                            <a:schemeClr val="tx1"/>
+                          </a:solidFill>
+                          <a:latin typeface="맑은 고딕" pitchFamily="34" charset="0"/>
+                          <a:ea typeface="맑은 고딕" pitchFamily="34" charset="-122"/>
+                          <a:cs typeface="맑은 고딕" pitchFamily="34" charset="-120"/>
+                        </a:rPr>
+                        <a:t>배민 배달 오토바이</a:t>
+                      </a:r>
+                      <a:endParaRPr lang="en-US" sz="900" dirty="0">
+                        <a:latin typeface="맑은 고딕" charset="0"/>
+                        <a:ea typeface="맑은 고딕" charset="0"/>
+                        <a:cs typeface="맑은 고딕" charset="0"/>
+                      </a:endParaRPr>
+                    </a:p>
+                  </a:txBody>
+                  <a:tcPr marL="36576" marR="36576" marT="36576" marB="36576" anchor="ctr">
+                    <a:lnL w="9525" cap="flat" cmpd="sng" algn="ctr">
+                      <a:solidFill>
+                        <a:srgbClr val="D9D9D9"/>
+                      </a:solidFill>
+                      <a:prstDash val="solid"/>
+                      <a:round/>
+                      <a:headEnd type="none" w="med" len="med"/>
+                      <a:tailEnd type="none" w="med" len="med"/>
+                    </a:lnL>
+                    <a:lnR w="9525" cap="flat" cmpd="sng" algn="ctr">
+                      <a:solidFill>
+                        <a:srgbClr val="D9D9D9"/>
+                      </a:solidFill>
+                      <a:prstDash val="solid"/>
+                      <a:round/>
+                      <a:headEnd type="none" w="med" len="med"/>
+                      <a:tailEnd type="none" w="med" len="med"/>
+                    </a:lnR>
+                    <a:lnT w="9525" cap="flat" cmpd="sng" algn="ctr">
+                      <a:solidFill>
+                        <a:srgbClr val="D9D9D9"/>
+                      </a:solidFill>
+                      <a:prstDash val="solid"/>
+                      <a:round/>
+                      <a:headEnd type="none" w="med" len="med"/>
+                      <a:tailEnd type="none" w="med" len="med"/>
+                    </a:lnT>
+                    <a:lnB w="9525" cap="flat" cmpd="sng" algn="ctr">
+                      <a:solidFill>
+                        <a:srgbClr val="D9D9D9"/>
+                      </a:solidFill>
+                      <a:prstDash val="solid"/>
+                      <a:round/>
+                      <a:headEnd type="none" w="med" len="med"/>
+                      <a:tailEnd type="none" w="med" len="med"/>
+                    </a:lnB>
+                  </a:tcPr>
+                </a:tc>
+                <a:tc>
+                  <a:txBody>
+                    <a:bodyPr/>
+                    <a:lstStyle/>
+                    <a:p>
+                      <a:pPr algn="l" indent="0" marL="0">
+                        <a:buNone/>
+                      </a:pPr>
+                      <a:r>
+                        <a:rPr lang="en-US" sz="900" dirty="0">
+                          <a:solidFill>
+                            <a:schemeClr val="tx1"/>
+                          </a:solidFill>
+                          <a:latin typeface="맑은 고딕" pitchFamily="34" charset="0"/>
+                          <a:ea typeface="맑은 고딕" pitchFamily="34" charset="-122"/>
+                          <a:cs typeface="맑은 고딕" pitchFamily="34" charset="-120"/>
+                        </a:rPr>
+                        <a:t>마라아탕</a:t>
+                      </a:r>
+                      <a:endParaRPr lang="en-US" sz="900" dirty="0">
+                        <a:latin typeface="맑은 고딕" charset="0"/>
+                        <a:ea typeface="맑은 고딕" charset="0"/>
+                        <a:cs typeface="맑은 고딕" charset="0"/>
+                      </a:endParaRPr>
+                    </a:p>
+                  </a:txBody>
+                  <a:tcPr marL="36576" marR="36576" marT="36576" marB="36576" anchor="ctr">
+                    <a:lnL w="9525" cap="flat" cmpd="sng" algn="ctr">
+                      <a:solidFill>
+                        <a:srgbClr val="D9D9D9"/>
+                      </a:solidFill>
+                      <a:prstDash val="solid"/>
+                      <a:round/>
+                      <a:headEnd type="none" w="med" len="med"/>
+                      <a:tailEnd type="none" w="med" len="med"/>
+                    </a:lnL>
+                    <a:lnR w="9525" cap="flat" cmpd="sng" algn="ctr">
+                      <a:solidFill>
+                        <a:srgbClr val="D9D9D9"/>
+                      </a:solidFill>
+                      <a:prstDash val="solid"/>
+                      <a:round/>
+                      <a:headEnd type="none" w="med" len="med"/>
+                      <a:tailEnd type="none" w="med" len="med"/>
+                    </a:lnR>
+                    <a:lnT w="9525" cap="flat" cmpd="sng" algn="ctr">
+                      <a:solidFill>
+                        <a:srgbClr val="D9D9D9"/>
+                      </a:solidFill>
+                      <a:prstDash val="solid"/>
+                      <a:round/>
+                      <a:headEnd type="none" w="med" len="med"/>
+                      <a:tailEnd type="none" w="med" len="med"/>
+                    </a:lnT>
+                    <a:lnB w="9525" cap="flat" cmpd="sng" algn="ctr">
+                      <a:solidFill>
+                        <a:srgbClr val="D9D9D9"/>
+                      </a:solidFill>
+                      <a:prstDash val="solid"/>
+                      <a:round/>
+                      <a:headEnd type="none" w="med" len="med"/>
+                      <a:tailEnd type="none" w="med" len="med"/>
+                    </a:lnB>
+                  </a:tcPr>
+                </a:tc>
+                <a:tc>
+                  <a:txBody>
+                    <a:bodyPr/>
+                    <a:lstStyle/>
+                    <a:p>
+                      <a:pPr algn="l" indent="0" marL="0">
+                        <a:buNone/>
+                      </a:pPr>
+                      <a:r>
+                        <a:rPr lang="en-US" sz="900" dirty="0">
+                          <a:solidFill>
+                            <a:schemeClr val="tx1"/>
+                          </a:solidFill>
+                          <a:latin typeface="맑은 고딕" pitchFamily="34" charset="0"/>
+                          <a:ea typeface="맑은 고딕" pitchFamily="34" charset="-122"/>
+                          <a:cs typeface="맑은 고딕" pitchFamily="34" charset="-120"/>
+                        </a:rPr>
+                        <a:t>CC0</a:t>
+                      </a:r>
+                      <a:endParaRPr lang="en-US" sz="900" dirty="0">
+                        <a:latin typeface="맑은 고딕" charset="0"/>
+                        <a:ea typeface="맑은 고딕" charset="0"/>
+                        <a:cs typeface="맑은 고딕" charset="0"/>
+                      </a:endParaRPr>
+                    </a:p>
+                  </a:txBody>
+                  <a:tcPr marL="36576" marR="36576" marT="36576" marB="36576" anchor="ctr">
+                    <a:lnL w="9525" cap="flat" cmpd="sng" algn="ctr">
+                      <a:solidFill>
+                        <a:srgbClr val="D9D9D9"/>
+                      </a:solidFill>
+                      <a:prstDash val="solid"/>
+                      <a:round/>
+                      <a:headEnd type="none" w="med" len="med"/>
+                      <a:tailEnd type="none" w="med" len="med"/>
+                    </a:lnL>
+                    <a:lnR w="9525" cap="flat" cmpd="sng" algn="ctr">
+                      <a:solidFill>
+                        <a:srgbClr val="D9D9D9"/>
+                      </a:solidFill>
+                      <a:prstDash val="solid"/>
+                      <a:round/>
+                      <a:headEnd type="none" w="med" len="med"/>
+                      <a:tailEnd type="none" w="med" len="med"/>
+                    </a:lnR>
+                    <a:lnT w="9525" cap="flat" cmpd="sng" algn="ctr">
+                      <a:solidFill>
+                        <a:srgbClr val="D9D9D9"/>
+                      </a:solidFill>
+                      <a:prstDash val="solid"/>
+                      <a:round/>
+                      <a:headEnd type="none" w="med" len="med"/>
+                      <a:tailEnd type="none" w="med" len="med"/>
+                    </a:lnT>
+                    <a:lnB w="9525" cap="flat" cmpd="sng" algn="ctr">
+                      <a:solidFill>
+                        <a:srgbClr val="D9D9D9"/>
+                      </a:solidFill>
+                      <a:prstDash val="solid"/>
+                      <a:round/>
+                      <a:headEnd type="none" w="med" len="med"/>
+                      <a:tailEnd type="none" w="med" len="med"/>
+                    </a:lnB>
+                  </a:tcPr>
+                </a:tc>
+              </a:tr>
+            </a:tbl>
+          </a:graphicData>
+        </a:graphic>
+      </p:graphicFrame>
+      <p:sp>
+        <p:nvSpPr>
+          <p:cNvPr id="6" name="Text 2"/>
+          <p:cNvSpPr txBox="1"/>
+          <p:nvPr/>
+        </p:nvSpPr>
+        <p:spPr>
+          <a:xfrm>
+            <a:off x="365760" y="4343400"/>
+            <a:ext cx="8412480" cy="438912"/>
+          </a:xfrm>
+          <a:prstGeom prst="rect">
+            <a:avLst/>
+          </a:prstGeom>
+          <a:noFill/>
+          <a:ln/>
+        </p:spPr>
+        <p:txBody>
+          <a:bodyPr wrap="square" lIns="762" tIns="762" rIns="762" bIns="762" rtlCol="0" anchor="t"/>
+          <a:lstStyle/>
+          <a:p>
+            <a:pPr indent="0" marL="0">
+              <a:buNone/>
+            </a:pPr>
+            <a:r>
+              <a:rPr lang="en-US" sz="1000" i="1" dirty="0">
+                <a:solidFill>
+                  <a:schemeClr val="tx1"/>
+                </a:solidFill>
+              </a:rPr>
+              <a:t>모든 사진은 Wikimedia Commons(commons.wikimedia.org)의 자유 라이선스 이미지입니다. 기업 로고는 simple-icons(CC0), 픽토그램은 react-icons 패키지에서 가져왔으며 각 상표권은 해당 기업에 있습니다.</a:t>
+            </a:r>
+            <a:endParaRPr lang="en-US" sz="1000" dirty="0"/>
+          </a:p>
+        </p:txBody>
+      </p:sp>
+      <p:sp>
+        <p:nvSpPr>
+          <p:cNvPr id="7" name="Text 3"/>
+          <p:cNvSpPr txBox="1"/>
+          <p:nvPr/>
+        </p:nvSpPr>
+        <p:spPr>
+          <a:xfrm>
+            <a:off x="365760" y="4846320"/>
+            <a:ext cx="7863840" cy="228600"/>
+          </a:xfrm>
+          <a:prstGeom prst="rect">
+            <a:avLst/>
+          </a:prstGeom>
+          <a:noFill/>
+          <a:ln/>
+        </p:spPr>
+        <p:txBody>
+          <a:bodyPr wrap="square" lIns="0" tIns="0" rIns="0" bIns="0" rtlCol="0" anchor="ctr"/>
+          <a:lstStyle/>
+          <a:p>
+            <a:pPr indent="0" marL="0">
+              <a:buNone/>
+            </a:pPr>
+            <a:r>
+              <a:rPr lang="en-US" sz="800" i="1" dirty="0">
+                <a:solidFill>
+                  <a:schemeClr val="tx1"/>
+                </a:solidFill>
+              </a:rPr>
+              <a:t>출처: Wikimedia Commons 각 파일 페이지</a:t>
+            </a:r>
+            <a:endParaRPr lang="en-US" sz="800" dirty="0"/>
+          </a:p>
+        </p:txBody>
+      </p:sp>
+      <p:sp>
+        <p:nvSpPr>
+          <p:cNvPr id="25" name="Slide Number Placeholder 0"/>
+          <p:cNvSpPr>
+            <a:spLocks noGrp="1"/>
+          </p:cNvSpPr>
+          <p:nvPr>
+            <p:ph type="sldNum" sz="quarter" idx="4294967295"/>
+          </p:nvPr>
+        </p:nvSpPr>
+        <p:spPr>
+          <a:xfrm>
+            <a:off x="8321040" y="4846320"/>
+            <a:ext cx="457200" cy="228600"/>
+          </a:xfrm>
+          <a:prstGeom prst="rect">
+            <a:avLst/>
+          </a:prstGeom>
+          <a:extLst>
+            <a:ext uri="{C572A759-6A51-4108-AA02-DFA0A04FC94B}">
+              <ma14:wrappingTextBoxFlag xmlns:ma14="http://schemas.microsoft.com/office/mac/drawingml/2011/main" val="0"/>
+            </a:ext>
+          </a:extLst>
+        </p:spPr>
+        <p:txBody>
+          <a:bodyPr/>
+          <a:lstStyle>
+            <a:lvl1pPr>
+              <a:defRPr sz="900">
+                <a:solidFill>
+                  <a:schemeClr val="tx2"/>
+                </a:solidFill>
+              </a:defRPr>
+            </a:lvl1pPr>
+          </a:lstStyle>
+          <a:p>
+            <a:pPr algn="r"/>
+            <a:fld id="{F7021451-1387-4CA6-816F-3879F97B5CBC}" type="slidenum">
+              <a:rPr b="0" lang="en-US"/>
+              <a:t>21</a:t>
+            </a:fld>
+            <a:endParaRPr lang="en-US"/>
+          </a:p>
+        </p:txBody>
+      </p:sp>
+    </p:spTree>
+  </p:cSld>
+  <p:clrMapOvr>
+    <a:masterClrMapping/>
+  </p:clrMapOvr>
+</p:sld>
+</file>
+
 <file path=ppt/slides/slide3.xml><?xml version="1.0" encoding="utf-8"?>
 <p:sld xmlns:a="http://schemas.openxmlformats.org/drawingml/2006/main" xmlns:r="http://schemas.openxmlformats.org/officeDocument/2006/relationships" xmlns:p="http://schemas.openxmlformats.org/presentationml/2006/main">
   <p:cSld name="Slide 3">
@@ -19311,36 +24331,9 @@
           </a:p>
         </p:txBody>
       </p:sp>
-      <p:sp>
-        <p:nvSpPr>
-          <p:cNvPr id="31" name="img-frame-quibi"/>
-          <p:cNvSpPr/>
-          <p:nvPr/>
-        </p:nvSpPr>
-        <p:spPr>
-          <a:xfrm>
-            <a:off x="8119872" y="3858768"/>
-            <a:ext cx="566928" cy="566928"/>
-          </a:xfrm>
-          <a:prstGeom prst="roundRect">
-            <a:avLst>
-              <a:gd name="adj" fmla="val 9677"/>
-            </a:avLst>
-          </a:prstGeom>
-          <a:solidFill>
-            <a:schemeClr val="bg1"/>
-          </a:solidFill>
-          <a:ln w="9525">
-            <a:solidFill>
-              <a:schemeClr val="bg2"/>
-            </a:solidFill>
-            <a:prstDash val="solid"/>
-          </a:ln>
-        </p:spPr>
-      </p:sp>
       <p:pic>
         <p:nvPicPr>
-          <p:cNvPr id="32" name="img-quibi" descr="quibi">    </p:cNvPr>
+          <p:cNvPr id="31" name="photo-quibi" descr="quibi photo">    </p:cNvPr>
           <p:cNvPicPr>
             <a:picLocks noChangeAspect="1"/>
           </p:cNvPicPr>
@@ -19354,14 +24347,36 @@
         </p:blipFill>
         <p:spPr>
           <a:xfrm>
-            <a:off x="8193573" y="3932469"/>
-            <a:ext cx="419527" cy="419527"/>
+            <a:off x="7452360" y="3858768"/>
+            <a:ext cx="1234440" cy="822960"/>
           </a:xfrm>
           <a:prstGeom prst="rect">
             <a:avLst/>
           </a:prstGeom>
         </p:spPr>
       </p:pic>
+      <p:sp>
+        <p:nvSpPr>
+          <p:cNvPr id="32" name="photo-frame-quibi"/>
+          <p:cNvSpPr/>
+          <p:nvPr/>
+        </p:nvSpPr>
+        <p:spPr>
+          <a:xfrm>
+            <a:off x="7452360" y="3858768"/>
+            <a:ext cx="1234440" cy="822960"/>
+          </a:xfrm>
+          <a:prstGeom prst="rect">
+            <a:avLst/>
+          </a:prstGeom>
+          <a:ln w="19050">
+            <a:solidFill>
+              <a:schemeClr val="bg1"/>
+            </a:solidFill>
+            <a:prstDash val="solid"/>
+          </a:ln>
+        </p:spPr>
+      </p:sp>
       <p:sp>
         <p:nvSpPr>
           <p:cNvPr id="33" name="Text 30"/>
@@ -19371,7 +24386,7 @@
         <p:spPr>
           <a:xfrm>
             <a:off x="5413248" y="3831336"/>
-            <a:ext cx="2596896" cy="292608"/>
+            <a:ext cx="1929384" cy="292608"/>
           </a:xfrm>
           <a:prstGeom prst="rect">
             <a:avLst/>
@@ -19407,7 +24422,7 @@
         <p:spPr>
           <a:xfrm>
             <a:off x="4773168" y="4151376"/>
-            <a:ext cx="3218688" cy="566928"/>
+            <a:ext cx="2551176" cy="566928"/>
           </a:xfrm>
           <a:prstGeom prst="rect">
             <a:avLst/>
@@ -19467,7 +24482,7 @@
                   <a:schemeClr val="tx1"/>
                 </a:solidFill>
               </a:rPr>
-              <a:t>출처: Startup Genome, “Report Extra on Premature Scaling”(2011); CB Insights 애널리스트 A. Sanwal 인터뷰; WSJ(2020.10)</a:t>
+              <a:t>출처: Startup Genome, “Report Extra on Premature Scaling”(2011); CB Insights 애널리스트 A. Sanwal 인터뷰; WSJ(2020.10) | 사진: Wikimedia Commons(21쪽)</a:t>
             </a:r>
             <a:endParaRPr lang="en-US" sz="800" dirty="0"/>
           </a:p>
@@ -19641,36 +24656,9 @@
           <a:ln/>
         </p:spPr>
       </p:sp>
-      <p:sp>
-        <p:nvSpPr>
-          <p:cNvPr id="5" name="img-frame-webvan"/>
-          <p:cNvSpPr/>
-          <p:nvPr/>
-        </p:nvSpPr>
-        <p:spPr>
-          <a:xfrm>
-            <a:off x="3886200" y="1325880"/>
-            <a:ext cx="475488" cy="475488"/>
-          </a:xfrm>
-          <a:prstGeom prst="roundRect">
-            <a:avLst>
-              <a:gd name="adj" fmla="val 11538"/>
-            </a:avLst>
-          </a:prstGeom>
-          <a:solidFill>
-            <a:schemeClr val="bg1"/>
-          </a:solidFill>
-          <a:ln w="9525">
-            <a:solidFill>
-              <a:schemeClr val="bg2"/>
-            </a:solidFill>
-            <a:prstDash val="solid"/>
-          </a:ln>
-        </p:spPr>
-      </p:sp>
       <p:pic>
         <p:nvPicPr>
-          <p:cNvPr id="6" name="img-webvan" descr="webvan">    </p:cNvPr>
+          <p:cNvPr id="5" name="photo-webvan" descr="webvan photo">    </p:cNvPr>
           <p:cNvPicPr>
             <a:picLocks noChangeAspect="1"/>
           </p:cNvPicPr>
@@ -19684,14 +24672,36 @@
         </p:blipFill>
         <p:spPr>
           <a:xfrm>
-            <a:off x="3948013" y="1387693"/>
-            <a:ext cx="351861" cy="351861"/>
+            <a:off x="502920" y="1645920"/>
+            <a:ext cx="3840480" cy="896112"/>
           </a:xfrm>
           <a:prstGeom prst="rect">
             <a:avLst/>
           </a:prstGeom>
         </p:spPr>
       </p:pic>
+      <p:sp>
+        <p:nvSpPr>
+          <p:cNvPr id="6" name="photo-frame-webvan"/>
+          <p:cNvSpPr/>
+          <p:nvPr/>
+        </p:nvSpPr>
+        <p:spPr>
+          <a:xfrm>
+            <a:off x="502920" y="1645920"/>
+            <a:ext cx="3840480" cy="896112"/>
+          </a:xfrm>
+          <a:prstGeom prst="rect">
+            <a:avLst/>
+          </a:prstGeom>
+          <a:ln w="19050">
+            <a:solidFill>
+              <a:schemeClr val="bg1"/>
+            </a:solidFill>
+            <a:prstDash val="solid"/>
+          </a:ln>
+        </p:spPr>
+      </p:sp>
       <p:sp>
         <p:nvSpPr>
           <p:cNvPr id="7" name="Text 4"/>
@@ -19701,7 +24711,7 @@
         <p:spPr>
           <a:xfrm>
             <a:off x="502920" y="1298448"/>
-            <a:ext cx="3291840" cy="320040"/>
+            <a:ext cx="3840480" cy="320040"/>
           </a:xfrm>
           <a:prstGeom prst="rect">
             <a:avLst/>
@@ -19736,8 +24746,8 @@
         </p:nvSpPr>
         <p:spPr>
           <a:xfrm>
-            <a:off x="502920" y="1847088"/>
-            <a:ext cx="3840480" cy="2039112"/>
+            <a:off x="502920" y="2596896"/>
+            <a:ext cx="3840480" cy="1298448"/>
           </a:xfrm>
           <a:prstGeom prst="rect">
             <a:avLst/>
@@ -19751,74 +24761,74 @@
           <a:p>
             <a:pPr marL="152400" indent="-152400">
               <a:spcAft>
-                <a:spcPts val="600"/>
+                <a:spcPts val="200"/>
               </a:spcAft>
               <a:buSzPct val="100000"/>
               <a:buChar char="•"/>
             </a:pPr>
             <a:r>
-              <a:rPr lang="en-US" sz="1150" dirty="0">
+              <a:rPr lang="en-US" sz="1050" dirty="0">
                 <a:solidFill>
                   <a:schemeClr val="tx1"/>
                 </a:solidFill>
               </a:rPr>
               <a:t>1999년 온라인 식료품 배송 / IPO 포함 약 8억 달러 조달</a:t>
             </a:r>
-            <a:endParaRPr lang="en-US" sz="1150" dirty="0"/>
+            <a:endParaRPr lang="en-US" sz="1050" dirty="0"/>
           </a:p>
           <a:p>
             <a:pPr marL="152400" indent="-152400">
               <a:spcAft>
-                <a:spcPts val="600"/>
+                <a:spcPts val="200"/>
               </a:spcAft>
               <a:buSzPct val="100000"/>
               <a:buChar char="•"/>
             </a:pPr>
             <a:r>
-              <a:rPr lang="en-US" sz="1150" dirty="0">
+              <a:rPr lang="en-US" sz="1050" dirty="0">
                 <a:solidFill>
                   <a:schemeClr val="tx1"/>
                 </a:solidFill>
               </a:rPr>
               <a:t>고객 검증 전, 10억 달러 규모 자동화 물류창고 계약</a:t>
             </a:r>
-            <a:endParaRPr lang="en-US" sz="1150" dirty="0"/>
+            <a:endParaRPr lang="en-US" sz="1050" dirty="0"/>
           </a:p>
           <a:p>
             <a:pPr marL="152400" indent="-152400">
               <a:spcAft>
-                <a:spcPts val="600"/>
+                <a:spcPts val="200"/>
               </a:spcAft>
               <a:buSzPct val="100000"/>
               <a:buChar char="•"/>
             </a:pPr>
             <a:r>
-              <a:rPr lang="en-US" sz="1150" dirty="0">
+              <a:rPr lang="en-US" sz="1050" dirty="0">
                 <a:solidFill>
                   <a:schemeClr val="tx1"/>
                 </a:solidFill>
               </a:rPr>
               <a:t>수요가 계획에 못 미쳐 2001년 파산</a:t>
             </a:r>
-            <a:endParaRPr lang="en-US" sz="1150" dirty="0"/>
+            <a:endParaRPr lang="en-US" sz="1050" dirty="0"/>
           </a:p>
           <a:p>
             <a:pPr marL="152400" indent="-152400">
               <a:spcAft>
-                <a:spcPts val="600"/>
+                <a:spcPts val="200"/>
               </a:spcAft>
               <a:buSzPct val="100000"/>
               <a:buChar char="•"/>
             </a:pPr>
             <a:r>
-              <a:rPr lang="en-US" sz="1150" dirty="0">
+              <a:rPr lang="en-US" sz="1050" dirty="0">
                 <a:solidFill>
                   <a:schemeClr val="tx1"/>
                 </a:solidFill>
               </a:rPr>
               <a:t>실패 원인: 사업계획서대로 ‘실행’만 하고 ‘검증’ 단계가 없었음</a:t>
             </a:r>
-            <a:endParaRPr lang="en-US" sz="1150" dirty="0"/>
+            <a:endParaRPr lang="en-US" sz="1050" dirty="0"/>
           </a:p>
         </p:txBody>
       </p:sp>
@@ -19844,36 +24854,9 @@
           <a:ln/>
         </p:spPr>
       </p:sp>
-      <p:sp>
-        <p:nvSpPr>
-          <p:cNvPr id="10" name="img-frame-zappos"/>
-          <p:cNvSpPr/>
-          <p:nvPr/>
-        </p:nvSpPr>
-        <p:spPr>
-          <a:xfrm>
-            <a:off x="8183880" y="1325880"/>
-            <a:ext cx="475488" cy="475488"/>
-          </a:xfrm>
-          <a:prstGeom prst="roundRect">
-            <a:avLst>
-              <a:gd name="adj" fmla="val 11538"/>
-            </a:avLst>
-          </a:prstGeom>
-          <a:solidFill>
-            <a:schemeClr val="bg1"/>
-          </a:solidFill>
-          <a:ln w="9525">
-            <a:solidFill>
-              <a:schemeClr val="bg2"/>
-            </a:solidFill>
-            <a:prstDash val="solid"/>
-          </a:ln>
-        </p:spPr>
-      </p:sp>
       <p:pic>
         <p:nvPicPr>
-          <p:cNvPr id="11" name="img-zappos" descr="zappos">    </p:cNvPr>
+          <p:cNvPr id="10" name="photo-zappos" descr="zappos photo">    </p:cNvPr>
           <p:cNvPicPr>
             <a:picLocks noChangeAspect="1"/>
           </p:cNvPicPr>
@@ -19887,14 +24870,36 @@
         </p:blipFill>
         <p:spPr>
           <a:xfrm>
-            <a:off x="8245693" y="1387693"/>
-            <a:ext cx="351861" cy="351861"/>
+            <a:off x="4800600" y="1645920"/>
+            <a:ext cx="3840480" cy="896112"/>
           </a:xfrm>
           <a:prstGeom prst="rect">
             <a:avLst/>
           </a:prstGeom>
         </p:spPr>
       </p:pic>
+      <p:sp>
+        <p:nvSpPr>
+          <p:cNvPr id="11" name="photo-frame-zappos"/>
+          <p:cNvSpPr/>
+          <p:nvPr/>
+        </p:nvSpPr>
+        <p:spPr>
+          <a:xfrm>
+            <a:off x="4800600" y="1645920"/>
+            <a:ext cx="3840480" cy="896112"/>
+          </a:xfrm>
+          <a:prstGeom prst="rect">
+            <a:avLst/>
+          </a:prstGeom>
+          <a:ln w="19050">
+            <a:solidFill>
+              <a:schemeClr val="bg1"/>
+            </a:solidFill>
+            <a:prstDash val="solid"/>
+          </a:ln>
+        </p:spPr>
+      </p:sp>
       <p:sp>
         <p:nvSpPr>
           <p:cNvPr id="12" name="Text 8"/>
@@ -19904,7 +24909,7 @@
         <p:spPr>
           <a:xfrm>
             <a:off x="4800600" y="1298448"/>
-            <a:ext cx="3291840" cy="320040"/>
+            <a:ext cx="3840480" cy="320040"/>
           </a:xfrm>
           <a:prstGeom prst="rect">
             <a:avLst/>
@@ -19939,8 +24944,8 @@
         </p:nvSpPr>
         <p:spPr>
           <a:xfrm>
-            <a:off x="4800600" y="1847088"/>
-            <a:ext cx="3840480" cy="2039112"/>
+            <a:off x="4800600" y="2596896"/>
+            <a:ext cx="3840480" cy="1298448"/>
           </a:xfrm>
           <a:prstGeom prst="rect">
             <a:avLst/>
@@ -19954,74 +24959,74 @@
           <a:p>
             <a:pPr marL="152400" indent="-152400">
               <a:spcAft>
-                <a:spcPts val="600"/>
+                <a:spcPts val="200"/>
               </a:spcAft>
               <a:buSzPct val="100000"/>
               <a:buChar char="•"/>
             </a:pPr>
             <a:r>
-              <a:rPr lang="en-US" sz="1150" dirty="0">
+              <a:rPr lang="en-US" sz="1050" dirty="0">
                 <a:solidFill>
                   <a:schemeClr val="tx1"/>
                 </a:solidFill>
               </a:rPr>
               <a:t>1999년 창업자가 동네 신발가게 사진을 찍어 웹에 게시</a:t>
             </a:r>
-            <a:endParaRPr lang="en-US" sz="1150" dirty="0"/>
+            <a:endParaRPr lang="en-US" sz="1050" dirty="0"/>
           </a:p>
           <a:p>
             <a:pPr marL="152400" indent="-152400">
               <a:spcAft>
-                <a:spcPts val="600"/>
+                <a:spcPts val="200"/>
               </a:spcAft>
               <a:buSzPct val="100000"/>
               <a:buChar char="•"/>
             </a:pPr>
             <a:r>
-              <a:rPr lang="en-US" sz="1150" dirty="0">
+              <a:rPr lang="en-US" sz="1050" dirty="0">
                 <a:solidFill>
                   <a:schemeClr val="tx1"/>
                 </a:solidFill>
               </a:rPr>
               <a:t>주문이 들어오면 매장에서 사서 직접 배송 → 재고 없이 수요 검증</a:t>
             </a:r>
-            <a:endParaRPr lang="en-US" sz="1150" dirty="0"/>
+            <a:endParaRPr lang="en-US" sz="1050" dirty="0"/>
           </a:p>
           <a:p>
             <a:pPr marL="152400" indent="-152400">
               <a:spcAft>
-                <a:spcPts val="600"/>
+                <a:spcPts val="200"/>
               </a:spcAft>
               <a:buSzPct val="100000"/>
               <a:buChar char="•"/>
             </a:pPr>
             <a:r>
-              <a:rPr lang="en-US" sz="1150" dirty="0">
+              <a:rPr lang="en-US" sz="1050" dirty="0">
                 <a:solidFill>
                   <a:schemeClr val="tx1"/>
                 </a:solidFill>
               </a:rPr>
               <a:t>검증 후 단계적 확장, 2009년 아마존이 약 12억 달러에 인수</a:t>
             </a:r>
-            <a:endParaRPr lang="en-US" sz="1150" dirty="0"/>
+            <a:endParaRPr lang="en-US" sz="1050" dirty="0"/>
           </a:p>
           <a:p>
             <a:pPr marL="152400" indent="-152400">
               <a:spcAft>
-                <a:spcPts val="600"/>
+                <a:spcPts val="200"/>
               </a:spcAft>
               <a:buSzPct val="100000"/>
               <a:buChar char="•"/>
             </a:pPr>
             <a:r>
-              <a:rPr lang="en-US" sz="1150" dirty="0">
+              <a:rPr lang="en-US" sz="1050" dirty="0">
                 <a:solidFill>
                   <a:schemeClr val="tx1"/>
                 </a:solidFill>
               </a:rPr>
               <a:t>성공 요인: 최소 비용으로 ‘고객이 온라인으로 신발을 살까?’를 먼저 확인</a:t>
             </a:r>
-            <a:endParaRPr lang="en-US" sz="1150" dirty="0"/>
+            <a:endParaRPr lang="en-US" sz="1050" dirty="0"/>
           </a:p>
         </p:txBody>
       </p:sp>
@@ -20105,36 +25110,9 @@
           </a:p>
         </p:txBody>
       </p:sp>
-      <p:sp>
-        <p:nvSpPr>
-          <p:cNvPr id="17" name="img-frame-dropbox"/>
-          <p:cNvSpPr/>
-          <p:nvPr/>
-        </p:nvSpPr>
-        <p:spPr>
-          <a:xfrm>
-            <a:off x="8156448" y="4160520"/>
-            <a:ext cx="530352" cy="530352"/>
-          </a:xfrm>
-          <a:prstGeom prst="roundRect">
-            <a:avLst>
-              <a:gd name="adj" fmla="val 10345"/>
-            </a:avLst>
-          </a:prstGeom>
-          <a:solidFill>
-            <a:schemeClr val="bg1"/>
-          </a:solidFill>
-          <a:ln w="9525">
-            <a:solidFill>
-              <a:schemeClr val="bg2"/>
-            </a:solidFill>
-            <a:prstDash val="solid"/>
-          </a:ln>
-        </p:spPr>
-      </p:sp>
       <p:pic>
         <p:nvPicPr>
-          <p:cNvPr id="18" name="img-dropbox" descr="dropbox">    </p:cNvPr>
+          <p:cNvPr id="17" name="photo-dropbox" descr="dropbox photo">    </p:cNvPr>
           <p:cNvPicPr>
             <a:picLocks noChangeAspect="1"/>
           </p:cNvPicPr>
@@ -20148,14 +25126,36 @@
         </p:blipFill>
         <p:spPr>
           <a:xfrm>
-            <a:off x="8225394" y="4229466"/>
-            <a:ext cx="392460" cy="392460"/>
+            <a:off x="7891272" y="4160520"/>
+            <a:ext cx="795528" cy="530352"/>
           </a:xfrm>
           <a:prstGeom prst="rect">
             <a:avLst/>
           </a:prstGeom>
         </p:spPr>
       </p:pic>
+      <p:sp>
+        <p:nvSpPr>
+          <p:cNvPr id="18" name="photo-frame-dropbox"/>
+          <p:cNvSpPr/>
+          <p:nvPr/>
+        </p:nvSpPr>
+        <p:spPr>
+          <a:xfrm>
+            <a:off x="7891272" y="4160520"/>
+            <a:ext cx="795528" cy="530352"/>
+          </a:xfrm>
+          <a:prstGeom prst="rect">
+            <a:avLst/>
+          </a:prstGeom>
+          <a:ln w="19050">
+            <a:solidFill>
+              <a:schemeClr val="bg1"/>
+            </a:solidFill>
+            <a:prstDash val="solid"/>
+          </a:ln>
+        </p:spPr>
+      </p:sp>
       <p:sp>
         <p:nvSpPr>
           <p:cNvPr id="19" name="Text 14"/>
@@ -20165,7 +25165,7 @@
         <p:spPr>
           <a:xfrm>
             <a:off x="1115568" y="4133088"/>
-            <a:ext cx="6931152" cy="292608"/>
+            <a:ext cx="6665976" cy="292608"/>
           </a:xfrm>
           <a:prstGeom prst="rect">
             <a:avLst/>
@@ -20201,7 +25201,7 @@
         <p:spPr>
           <a:xfrm>
             <a:off x="475488" y="4453128"/>
-            <a:ext cx="7552944" cy="274320"/>
+            <a:ext cx="7287768" cy="274320"/>
           </a:xfrm>
           <a:prstGeom prst="rect">
             <a:avLst/>
@@ -20261,7 +25261,7 @@
                   <a:schemeClr val="tx1"/>
                 </a:solidFill>
               </a:rPr>
-              <a:t>출처: S. Blank, 「The Startup Owner’s Manual」(2012); E. Ries, 「The Lean Startup」(2011)</a:t>
+              <a:t>출처: S. Blank, 「The Startup Owner’s Manual」(2012); E. Ries, 「The Lean Startup」(2011) | 사진: Wikimedia Commons(21쪽)</a:t>
             </a:r>
             <a:endParaRPr lang="en-US" sz="800" dirty="0"/>
           </a:p>
@@ -22932,7 +27932,7 @@
         <p:spPr>
           <a:xfrm>
             <a:off x="438912" y="1783080"/>
-            <a:ext cx="3968496" cy="502920"/>
+            <a:ext cx="3968496" cy="621792"/>
           </a:xfrm>
           <a:prstGeom prst="rect">
             <a:avLst/>
@@ -22948,14 +27948,14 @@
               <a:buNone/>
             </a:pPr>
             <a:r>
-              <a:rPr lang="en-US" sz="1050" dirty="0">
+              <a:rPr lang="en-US" sz="1000" dirty="0">
                 <a:solidFill>
                   <a:schemeClr val="tx1"/>
                 </a:solidFill>
               </a:rPr>
               <a:t>기초원리 발견(1)부터 실제 운용(9)까지 기술의 성숙 단계를 객관적으로 측정하는 척도</a:t>
             </a:r>
-            <a:endParaRPr lang="en-US" sz="1050" dirty="0"/>
+            <a:endParaRPr lang="en-US" sz="1000" dirty="0"/>
           </a:p>
         </p:txBody>
       </p:sp>
@@ -23193,7 +28193,7 @@
         <p:spPr>
           <a:xfrm>
             <a:off x="4736592" y="1783080"/>
-            <a:ext cx="3968496" cy="502920"/>
+            <a:ext cx="3968496" cy="621792"/>
           </a:xfrm>
           <a:prstGeom prst="rect">
             <a:avLst/>
@@ -23209,14 +28209,14 @@
               <a:buNone/>
             </a:pPr>
             <a:r>
-              <a:rPr lang="en-US" sz="1050" dirty="0">
+              <a:rPr lang="en-US" sz="1000" dirty="0">
                 <a:solidFill>
                   <a:schemeClr val="tx1"/>
                 </a:solidFill>
               </a:rPr>
               <a:t>신제품 개발을 단계(Stage)로 나누고 각 관문(Gate)에서 진행/중단을 결정해 위험을 관리</a:t>
             </a:r>
-            <a:endParaRPr lang="en-US" sz="1050" dirty="0"/>
+            <a:endParaRPr lang="en-US" sz="1000" dirty="0"/>
           </a:p>
         </p:txBody>
       </p:sp>
@@ -23311,36 +28311,9 @@
           <a:ln/>
         </p:spPr>
       </p:sp>
-      <p:sp>
-        <p:nvSpPr>
-          <p:cNvPr id="21" name="img-frame-tesla"/>
-          <p:cNvSpPr/>
-          <p:nvPr/>
-        </p:nvSpPr>
-        <p:spPr>
-          <a:xfrm>
-            <a:off x="4005072" y="3154680"/>
-            <a:ext cx="402336" cy="402336"/>
-          </a:xfrm>
-          <a:prstGeom prst="roundRect">
-            <a:avLst>
-              <a:gd name="adj" fmla="val 13636"/>
-            </a:avLst>
-          </a:prstGeom>
-          <a:solidFill>
-            <a:schemeClr val="bg1"/>
-          </a:solidFill>
-          <a:ln w="9525">
-            <a:solidFill>
-              <a:schemeClr val="bg2"/>
-            </a:solidFill>
-            <a:prstDash val="solid"/>
-          </a:ln>
-        </p:spPr>
-      </p:sp>
       <p:pic>
         <p:nvPicPr>
-          <p:cNvPr id="22" name="img-tesla" descr="tesla">    </p:cNvPr>
+          <p:cNvPr id="21" name="photo-tesla" descr="tesla photo">    </p:cNvPr>
           <p:cNvPicPr>
             <a:picLocks noChangeAspect="1"/>
           </p:cNvPicPr>
@@ -23354,14 +28327,36 @@
         </p:blipFill>
         <p:spPr>
           <a:xfrm>
-            <a:off x="4057376" y="3206984"/>
-            <a:ext cx="297729" cy="297729"/>
+            <a:off x="3081528" y="3172968"/>
+            <a:ext cx="1325880" cy="987552"/>
           </a:xfrm>
           <a:prstGeom prst="rect">
             <a:avLst/>
           </a:prstGeom>
         </p:spPr>
       </p:pic>
+      <p:sp>
+        <p:nvSpPr>
+          <p:cNvPr id="22" name="photo-frame-tesla"/>
+          <p:cNvSpPr/>
+          <p:nvPr/>
+        </p:nvSpPr>
+        <p:spPr>
+          <a:xfrm>
+            <a:off x="3081528" y="3172968"/>
+            <a:ext cx="1325880" cy="987552"/>
+          </a:xfrm>
+          <a:prstGeom prst="rect">
+            <a:avLst/>
+          </a:prstGeom>
+          <a:ln w="19050">
+            <a:solidFill>
+              <a:schemeClr val="bg1"/>
+            </a:solidFill>
+            <a:prstDash val="solid"/>
+          </a:ln>
+        </p:spPr>
+      </p:sp>
       <p:sp>
         <p:nvSpPr>
           <p:cNvPr id="23" name="Text 18"/>
@@ -23371,7 +28366,7 @@
         <p:spPr>
           <a:xfrm>
             <a:off x="438912" y="3127248"/>
-            <a:ext cx="3566160" cy="292608"/>
+            <a:ext cx="2642616" cy="292608"/>
           </a:xfrm>
           <a:prstGeom prst="rect">
             <a:avLst/>
@@ -23418,7 +28413,7 @@
         <p:spPr>
           <a:xfrm>
             <a:off x="438912" y="3410712"/>
-            <a:ext cx="3566160" cy="219456"/>
+            <a:ext cx="2642616" cy="219456"/>
           </a:xfrm>
           <a:prstGeom prst="rect">
             <a:avLst/>
@@ -23454,7 +28449,7 @@
         <p:spPr>
           <a:xfrm>
             <a:off x="438912" y="3630168"/>
-            <a:ext cx="3968496" cy="502920"/>
+            <a:ext cx="2642616" cy="621792"/>
           </a:xfrm>
           <a:prstGeom prst="rect">
             <a:avLst/>
@@ -23470,14 +28465,14 @@
               <a:buNone/>
             </a:pPr>
             <a:r>
-              <a:rPr lang="en-US" sz="1050" dirty="0">
+              <a:rPr lang="en-US" sz="1000" dirty="0">
                 <a:solidFill>
                   <a:schemeClr val="tx1"/>
                 </a:solidFill>
               </a:rPr>
               <a:t>혁신 수용자와 초기 다수 사이의 ‘캐즘(단절)’을 넘으려면 틈새시장 집중이 필요</a:t>
             </a:r>
-            <a:endParaRPr lang="en-US" sz="1050" dirty="0"/>
+            <a:endParaRPr lang="en-US" sz="1000" dirty="0"/>
           </a:p>
         </p:txBody>
       </p:sp>
@@ -23572,36 +28567,9 @@
           <a:ln/>
         </p:spPr>
       </p:sp>
-      <p:sp>
-        <p:nvSpPr>
-          <p:cNvPr id="29" name="img-frame-m3"/>
-          <p:cNvSpPr/>
-          <p:nvPr/>
-        </p:nvSpPr>
-        <p:spPr>
-          <a:xfrm>
-            <a:off x="8302752" y="3154680"/>
-            <a:ext cx="402336" cy="402336"/>
-          </a:xfrm>
-          <a:prstGeom prst="roundRect">
-            <a:avLst>
-              <a:gd name="adj" fmla="val 13636"/>
-            </a:avLst>
-          </a:prstGeom>
-          <a:solidFill>
-            <a:schemeClr val="bg1"/>
-          </a:solidFill>
-          <a:ln w="9525">
-            <a:solidFill>
-              <a:schemeClr val="bg2"/>
-            </a:solidFill>
-            <a:prstDash val="solid"/>
-          </a:ln>
-        </p:spPr>
-      </p:sp>
       <p:pic>
         <p:nvPicPr>
-          <p:cNvPr id="30" name="img-m3" descr="m3">    </p:cNvPr>
+          <p:cNvPr id="29" name="photo-postit" descr="postit photo">    </p:cNvPr>
           <p:cNvPicPr>
             <a:picLocks noChangeAspect="1"/>
           </p:cNvPicPr>
@@ -23615,14 +28583,36 @@
         </p:blipFill>
         <p:spPr>
           <a:xfrm>
-            <a:off x="8355056" y="3206984"/>
-            <a:ext cx="297729" cy="297729"/>
+            <a:off x="7379208" y="3172968"/>
+            <a:ext cx="1325880" cy="987552"/>
           </a:xfrm>
           <a:prstGeom prst="rect">
             <a:avLst/>
           </a:prstGeom>
         </p:spPr>
       </p:pic>
+      <p:sp>
+        <p:nvSpPr>
+          <p:cNvPr id="30" name="photo-frame-postit"/>
+          <p:cNvSpPr/>
+          <p:nvPr/>
+        </p:nvSpPr>
+        <p:spPr>
+          <a:xfrm>
+            <a:off x="7379208" y="3172968"/>
+            <a:ext cx="1325880" cy="987552"/>
+          </a:xfrm>
+          <a:prstGeom prst="rect">
+            <a:avLst/>
+          </a:prstGeom>
+          <a:ln w="19050">
+            <a:solidFill>
+              <a:schemeClr val="bg1"/>
+            </a:solidFill>
+            <a:prstDash val="solid"/>
+          </a:ln>
+        </p:spPr>
+      </p:sp>
       <p:sp>
         <p:nvSpPr>
           <p:cNvPr id="31" name="Text 25"/>
@@ -23632,7 +28622,7 @@
         <p:spPr>
           <a:xfrm>
             <a:off x="4736592" y="3127248"/>
-            <a:ext cx="3566160" cy="292608"/>
+            <a:ext cx="2642616" cy="292608"/>
           </a:xfrm>
           <a:prstGeom prst="rect">
             <a:avLst/>
@@ -23664,7 +28654,7 @@
                   <a:schemeClr val="tx2"/>
                 </a:solidFill>
               </a:rPr>
-              <a:t>Commercializing New Technologies</a:t>
+              <a:t>Commercializing New Tech.</a:t>
             </a:r>
             <a:endParaRPr lang="en-US" sz="1200" dirty="0"/>
           </a:p>
@@ -23679,7 +28669,7 @@
         <p:spPr>
           <a:xfrm>
             <a:off x="4736592" y="3410712"/>
-            <a:ext cx="3566160" cy="219456"/>
+            <a:ext cx="2642616" cy="219456"/>
           </a:xfrm>
           <a:prstGeom prst="rect">
             <a:avLst/>
@@ -23715,7 +28705,7 @@
         <p:spPr>
           <a:xfrm>
             <a:off x="4736592" y="3630168"/>
-            <a:ext cx="3968496" cy="502920"/>
+            <a:ext cx="2642616" cy="621792"/>
           </a:xfrm>
           <a:prstGeom prst="rect">
             <a:avLst/>
@@ -23731,14 +28721,14 @@
               <a:buNone/>
             </a:pPr>
             <a:r>
-              <a:rPr lang="en-US" sz="1050" dirty="0">
+              <a:rPr lang="en-US" sz="1000" dirty="0">
                 <a:solidFill>
                   <a:schemeClr val="tx1"/>
                 </a:solidFill>
               </a:rPr>
               <a:t>기술사업화를 5단계 하위 프로세스와 4개 연결다리(이해관계자 동원)로 체계화</a:t>
             </a:r>
-            <a:endParaRPr lang="en-US" sz="1050" dirty="0"/>
+            <a:endParaRPr lang="en-US" sz="1000" dirty="0"/>
           </a:p>
         </p:txBody>
       </p:sp>
@@ -23841,7 +28831,7 @@
                   <a:schemeClr val="tx1"/>
                 </a:solidFill>
               </a:rPr>
-              <a:t>출처: Mankins(1995) Technology Readiness Levels; Cooper(1990) Stage-Gate Systems; Moore(1991); Jolly(1997)</a:t>
+              <a:t>출처: Mankins(1995) Technology Readiness Levels; Cooper(1990) Stage-Gate Systems; Moore(1991); Jolly(1997) | 사진: Wikimedia Commons(21쪽)</a:t>
             </a:r>
             <a:endParaRPr lang="en-US" sz="800" dirty="0"/>
           </a:p>
@@ -24015,36 +29005,9 @@
           <a:ln/>
         </p:spPr>
       </p:sp>
-      <p:sp>
-        <p:nvSpPr>
-          <p:cNvPr id="5" name="img-frame-spanx"/>
-          <p:cNvSpPr/>
-          <p:nvPr/>
-        </p:nvSpPr>
-        <p:spPr>
-          <a:xfrm>
-            <a:off x="2572512" y="1307592"/>
-            <a:ext cx="402336" cy="402336"/>
-          </a:xfrm>
-          <a:prstGeom prst="roundRect">
-            <a:avLst>
-              <a:gd name="adj" fmla="val 13636"/>
-            </a:avLst>
-          </a:prstGeom>
-          <a:solidFill>
-            <a:schemeClr val="bg1"/>
-          </a:solidFill>
-          <a:ln w="9525">
-            <a:solidFill>
-              <a:schemeClr val="bg2"/>
-            </a:solidFill>
-            <a:prstDash val="solid"/>
-          </a:ln>
-        </p:spPr>
-      </p:sp>
       <p:pic>
         <p:nvPicPr>
-          <p:cNvPr id="6" name="img-spanx" descr="spanx">    </p:cNvPr>
+          <p:cNvPr id="5" name="photo-spanx" descr="spanx photo">    </p:cNvPr>
           <p:cNvPicPr>
             <a:picLocks noChangeAspect="1"/>
           </p:cNvPicPr>
@@ -24058,14 +29021,36 @@
         </p:blipFill>
         <p:spPr>
           <a:xfrm>
-            <a:off x="2624816" y="1359896"/>
-            <a:ext cx="297729" cy="297729"/>
+            <a:off x="438912" y="2807208"/>
+            <a:ext cx="2535936" cy="950976"/>
           </a:xfrm>
           <a:prstGeom prst="rect">
             <a:avLst/>
           </a:prstGeom>
         </p:spPr>
       </p:pic>
+      <p:sp>
+        <p:nvSpPr>
+          <p:cNvPr id="6" name="photo-frame-spanx"/>
+          <p:cNvSpPr/>
+          <p:nvPr/>
+        </p:nvSpPr>
+        <p:spPr>
+          <a:xfrm>
+            <a:off x="438912" y="2807208"/>
+            <a:ext cx="2535936" cy="950976"/>
+          </a:xfrm>
+          <a:prstGeom prst="rect">
+            <a:avLst/>
+          </a:prstGeom>
+          <a:ln w="19050">
+            <a:solidFill>
+              <a:schemeClr val="bg1"/>
+            </a:solidFill>
+            <a:prstDash val="solid"/>
+          </a:ln>
+        </p:spPr>
+      </p:sp>
       <p:sp>
         <p:nvSpPr>
           <p:cNvPr id="7" name="Text 4"/>
@@ -24075,7 +29060,7 @@
         <p:spPr>
           <a:xfrm>
             <a:off x="438912" y="1280160"/>
-            <a:ext cx="2133600" cy="457200"/>
+            <a:ext cx="2535936" cy="457200"/>
           </a:xfrm>
           <a:prstGeom prst="rect">
             <a:avLst/>
@@ -24122,7 +29107,7 @@
         <p:spPr>
           <a:xfrm>
             <a:off x="438912" y="1728216"/>
-            <a:ext cx="2133600" cy="219456"/>
+            <a:ext cx="2535936" cy="219456"/>
           </a:xfrm>
           <a:prstGeom prst="rect">
             <a:avLst/>
@@ -24158,7 +29143,7 @@
         <p:spPr>
           <a:xfrm>
             <a:off x="438912" y="1947672"/>
-            <a:ext cx="2535936" cy="1463040"/>
+            <a:ext cx="2535936" cy="822960"/>
           </a:xfrm>
           <a:prstGeom prst="rect">
             <a:avLst/>
@@ -24174,14 +29159,14 @@
               <a:buNone/>
             </a:pPr>
             <a:r>
-              <a:rPr lang="en-US" sz="1200" dirty="0">
+              <a:rPr lang="en-US" sz="1100" dirty="0">
                 <a:solidFill>
                   <a:schemeClr val="tx1"/>
                 </a:solidFill>
               </a:rPr>
               <a:t>목표에서 출발하는 인과적 사고가 아니라, ‘지금 가진 자원’에서 출발해 감당 가능한 손실 범위 안에서 기회를 만들어가는 전문 창업가의 사고방식</a:t>
             </a:r>
-            <a:endParaRPr lang="en-US" sz="1200" dirty="0"/>
+            <a:endParaRPr lang="en-US" sz="1100" dirty="0"/>
           </a:p>
         </p:txBody>
       </p:sp>
@@ -24276,36 +29261,9 @@
           <a:ln/>
         </p:spPr>
       </p:sp>
-      <p:sp>
-        <p:nvSpPr>
-          <p:cNvPr id="13" name="img-frame-cirque"/>
-          <p:cNvSpPr/>
-          <p:nvPr/>
-        </p:nvSpPr>
-        <p:spPr>
-          <a:xfrm>
-            <a:off x="5437632" y="1307592"/>
-            <a:ext cx="402336" cy="402336"/>
-          </a:xfrm>
-          <a:prstGeom prst="roundRect">
-            <a:avLst>
-              <a:gd name="adj" fmla="val 13636"/>
-            </a:avLst>
-          </a:prstGeom>
-          <a:solidFill>
-            <a:schemeClr val="bg1"/>
-          </a:solidFill>
-          <a:ln w="9525">
-            <a:solidFill>
-              <a:schemeClr val="bg2"/>
-            </a:solidFill>
-            <a:prstDash val="solid"/>
-          </a:ln>
-        </p:spPr>
-      </p:sp>
       <p:pic>
         <p:nvPicPr>
-          <p:cNvPr id="14" name="img-cirque" descr="cirque">    </p:cNvPr>
+          <p:cNvPr id="13" name="photo-cirque" descr="cirque photo">    </p:cNvPr>
           <p:cNvPicPr>
             <a:picLocks noChangeAspect="1"/>
           </p:cNvPicPr>
@@ -24319,14 +29277,36 @@
         </p:blipFill>
         <p:spPr>
           <a:xfrm>
-            <a:off x="5489936" y="1359896"/>
-            <a:ext cx="297729" cy="297729"/>
+            <a:off x="3304032" y="2807208"/>
+            <a:ext cx="2535936" cy="950976"/>
           </a:xfrm>
           <a:prstGeom prst="rect">
             <a:avLst/>
           </a:prstGeom>
         </p:spPr>
       </p:pic>
+      <p:sp>
+        <p:nvSpPr>
+          <p:cNvPr id="14" name="photo-frame-cirque"/>
+          <p:cNvSpPr/>
+          <p:nvPr/>
+        </p:nvSpPr>
+        <p:spPr>
+          <a:xfrm>
+            <a:off x="3304032" y="2807208"/>
+            <a:ext cx="2535936" cy="950976"/>
+          </a:xfrm>
+          <a:prstGeom prst="rect">
+            <a:avLst/>
+          </a:prstGeom>
+          <a:ln w="19050">
+            <a:solidFill>
+              <a:schemeClr val="bg1"/>
+            </a:solidFill>
+            <a:prstDash val="solid"/>
+          </a:ln>
+        </p:spPr>
+      </p:sp>
       <p:sp>
         <p:nvSpPr>
           <p:cNvPr id="15" name="Text 11"/>
@@ -24336,7 +29316,7 @@
         <p:spPr>
           <a:xfrm>
             <a:off x="3304032" y="1280160"/>
-            <a:ext cx="2133600" cy="457200"/>
+            <a:ext cx="2535936" cy="457200"/>
           </a:xfrm>
           <a:prstGeom prst="rect">
             <a:avLst/>
@@ -24383,7 +29363,7 @@
         <p:spPr>
           <a:xfrm>
             <a:off x="3304032" y="1728216"/>
-            <a:ext cx="2133600" cy="219456"/>
+            <a:ext cx="2535936" cy="219456"/>
           </a:xfrm>
           <a:prstGeom prst="rect">
             <a:avLst/>
@@ -24419,7 +29399,7 @@
         <p:spPr>
           <a:xfrm>
             <a:off x="3304032" y="1947672"/>
-            <a:ext cx="2535936" cy="1463040"/>
+            <a:ext cx="2535936" cy="822960"/>
           </a:xfrm>
           <a:prstGeom prst="rect">
             <a:avLst/>
@@ -24435,14 +29415,14 @@
               <a:buNone/>
             </a:pPr>
             <a:r>
-              <a:rPr lang="en-US" sz="1200" dirty="0">
+              <a:rPr lang="en-US" sz="1100" dirty="0">
                 <a:solidFill>
                   <a:schemeClr val="tx1"/>
                 </a:solidFill>
               </a:rPr>
               <a:t>경쟁이 치열한 레드오션 대신 가치 혁신(차별화+저비용)으로 경쟁 없는 새 시장을 창출</a:t>
             </a:r>
-            <a:endParaRPr lang="en-US" sz="1200" dirty="0"/>
+            <a:endParaRPr lang="en-US" sz="1100" dirty="0"/>
           </a:p>
         </p:txBody>
       </p:sp>
@@ -24537,36 +29517,9 @@
           <a:ln/>
         </p:spPr>
       </p:sp>
-      <p:sp>
-        <p:nvSpPr>
-          <p:cNvPr id="21" name="img-frame-ge"/>
-          <p:cNvSpPr/>
-          <p:nvPr/>
-        </p:nvSpPr>
-        <p:spPr>
-          <a:xfrm>
-            <a:off x="8302752" y="1307592"/>
-            <a:ext cx="402336" cy="402336"/>
-          </a:xfrm>
-          <a:prstGeom prst="roundRect">
-            <a:avLst>
-              <a:gd name="adj" fmla="val 13636"/>
-            </a:avLst>
-          </a:prstGeom>
-          <a:solidFill>
-            <a:schemeClr val="bg1"/>
-          </a:solidFill>
-          <a:ln w="9525">
-            <a:solidFill>
-              <a:schemeClr val="bg2"/>
-            </a:solidFill>
-            <a:prstDash val="solid"/>
-          </a:ln>
-        </p:spPr>
-      </p:sp>
       <p:pic>
         <p:nvPicPr>
-          <p:cNvPr id="22" name="img-ge" descr="ge">    </p:cNvPr>
+          <p:cNvPr id="21" name="photo-mri" descr="mri photo">    </p:cNvPr>
           <p:cNvPicPr>
             <a:picLocks noChangeAspect="1"/>
           </p:cNvPicPr>
@@ -24580,14 +29533,36 @@
         </p:blipFill>
         <p:spPr>
           <a:xfrm>
-            <a:off x="8355056" y="1359896"/>
-            <a:ext cx="297729" cy="297729"/>
+            <a:off x="6169152" y="2807208"/>
+            <a:ext cx="2535936" cy="950976"/>
           </a:xfrm>
           <a:prstGeom prst="rect">
             <a:avLst/>
           </a:prstGeom>
         </p:spPr>
       </p:pic>
+      <p:sp>
+        <p:nvSpPr>
+          <p:cNvPr id="22" name="photo-frame-mri"/>
+          <p:cNvSpPr/>
+          <p:nvPr/>
+        </p:nvSpPr>
+        <p:spPr>
+          <a:xfrm>
+            <a:off x="6169152" y="2807208"/>
+            <a:ext cx="2535936" cy="950976"/>
+          </a:xfrm>
+          <a:prstGeom prst="rect">
+            <a:avLst/>
+          </a:prstGeom>
+          <a:ln w="19050">
+            <a:solidFill>
+              <a:schemeClr val="bg1"/>
+            </a:solidFill>
+            <a:prstDash val="solid"/>
+          </a:ln>
+        </p:spPr>
+      </p:sp>
       <p:sp>
         <p:nvSpPr>
           <p:cNvPr id="23" name="Text 18"/>
@@ -24597,7 +29572,7 @@
         <p:spPr>
           <a:xfrm>
             <a:off x="6169152" y="1280160"/>
-            <a:ext cx="2133600" cy="457200"/>
+            <a:ext cx="2535936" cy="457200"/>
           </a:xfrm>
           <a:prstGeom prst="rect">
             <a:avLst/>
@@ -24644,7 +29619,7 @@
         <p:spPr>
           <a:xfrm>
             <a:off x="6169152" y="1728216"/>
-            <a:ext cx="2133600" cy="219456"/>
+            <a:ext cx="2535936" cy="219456"/>
           </a:xfrm>
           <a:prstGeom prst="rect">
             <a:avLst/>
@@ -24680,7 +29655,7 @@
         <p:spPr>
           <a:xfrm>
             <a:off x="6169152" y="1947672"/>
-            <a:ext cx="2535936" cy="1463040"/>
+            <a:ext cx="2535936" cy="822960"/>
           </a:xfrm>
           <a:prstGeom prst="rect">
             <a:avLst/>
@@ -24696,14 +29671,14 @@
               <a:buNone/>
             </a:pPr>
             <a:r>
-              <a:rPr lang="en-US" sz="1200" dirty="0">
+              <a:rPr lang="en-US" sz="1100" dirty="0">
                 <a:solidFill>
                   <a:schemeClr val="tx1"/>
                 </a:solidFill>
               </a:rPr>
               <a:t>공감–정의–아이디어–프로토타입–테스트로 고객의 숨은 니즈에서 해결책을 도출하는 인간중심 혁신 방법</a:t>
             </a:r>
-            <a:endParaRPr lang="en-US" sz="1200" dirty="0"/>
+            <a:endParaRPr lang="en-US" sz="1100" dirty="0"/>
           </a:p>
         </p:txBody>
       </p:sp>
@@ -24806,7 +29781,7 @@
                   <a:schemeClr val="tx1"/>
                 </a:solidFill>
               </a:rPr>
-              <a:t>출처: Sarasvathy(2001) AMR; Kim &amp; Mauborgne(2005) Blue Ocean Strategy; Brown(2008) HBR “Design Thinking”</a:t>
+              <a:t>출처: Sarasvathy(2001) AMR; Kim &amp; Mauborgne(2005) Blue Ocean Strategy; Brown(2008) HBR “Design Thinking” | 사진: Wikimedia Commons(21쪽)</a:t>
             </a:r>
             <a:endParaRPr lang="en-US" sz="800" dirty="0"/>
           </a:p>
